--- a/teaching/Day3_Till_Live_Data_Seedless_Style.pptx
+++ b/teaching/Day3_Till_Live_Data_Seedless_Style.pptx
@@ -516,8 +516,7 @@
           <a:p>
             <a:r>
               <a:rPr lang="en-US" dirty="0"/>
-              <a:t>Today we build Till: a live payments screen. Days 1 and 2 dealt with identity and permission. Day 3 makes the resulting activity visible. Start by opening the live app; everyone will get a personal payer and a personal shop. All payments in this class use Sui testnet. No Move deployment is required for Till.
-Today’s route: choose a data layer, subscribe, send a payment, pause and recover, persist receipts, find history and migrate a legacy call. The demo is observation, not an allowance or a recurring-payment scheduler.</a:t>
+              <a:t>This session is about choosing and using the Sui data stack after JSON-RPC. Till is the practical case study that makes subscriptions, recovery, persistence and history visible. The final workshop applies the same migration to a project each student brings. No Move is required. Keep the distinction from Day 2 clear: this is data access and application architecture, not recurring-payment permission.</a:t>
             </a:r>
             <a:endParaRPr lang="en-US" dirty="0"/>
           </a:p>
@@ -605,7 +604,7 @@
           <a:p>
             <a:r>
               <a:rPr lang="en-US" dirty="0"/>
-              <a:t>This default testnet digest is ArCwXsZUTywBuM4GbNX4CVMERmBBgeYY2mgmJJjdHa3a. Rechecked on 15 October 2026: the public full node gRPC lookup returned not found; GraphQL returned SUCCESS at checkpoint 250000000, timestamp 2025-10-07T22:04:44.571Z. The scripts/receipt.ts command demonstrates both responses. Not-found alone does not prove the cause for an arbitrary digest; this known old example has corroborating history.</a:t>
+              <a:t>Use the receipt page or pnpm receipt. Verified on 15 October 2026: the public gRPC full node returned not found for ArCwXsZUTywBuM4GbNX4CVMERmBBgeYY2mgmJJjdHa3a, while GraphQL returned SUCCESS at checkpoint 250000000 on 7 October 2025. Full-node retention is different from archival history. A random not-found response alone does not prove pruning; this known old receipt has corroborating data. The app labels its result source and keeps the full digest available.</a:t>
             </a:r>
             <a:endParaRPr lang="en-US" dirty="0"/>
           </a:p>
@@ -693,7 +692,7 @@
           <a:p>
             <a:r>
               <a:rPr lang="en-US" dirty="0"/>
-              <a:t>These are observed public testnet settings, not protocol constants: Query.transactions default page 20 and maximum 50, query timeout 40000 ms, maximum depth 20 and nodes 300. Page nested connections for complete accounting; Till selects the first 50 balance changes per transaction. Per-subscriber throttling applies, but its threshold was not measured. In both local and production tests, balance::send_funds deposits changed onchain balances but appeared in the affectedAddress feed only after Catch up now. Present this as measured provider behaviour and re-test before class. HTTP 200 may contain a GraphQL or JSON-RPC error. The faucet can be slow or rate-limited; refresh balances before retrying. Browser storage can be blocked or cleared, which affects persistence and demo keys. The app labels these boundaries rather than fabricating receipts. Source: https://docs.sui.io/develop/accessing-data/graphql/graphql-rpc</a:t>
+              <a:t>Read the service configuration, not a guessed universal limit. Today the testnet service reports maxQueryPayloadSize 5000, queryTimeoutMs 40000, Query.transactions defaultPageSize 20, maxPageSize 50, maxQueryDepth 20 and maxQueryNodes 300. Foundation public load balancers are rate-limited development/public-good endpoints; arrange a dedicated provider or your own service before a production launch. Check subscription support and archival retention explicitly. Tested send_funds address-balance deposits changed balances but appeared in the affectedAddress subscription only after catch-up. Other traps: HTTP 200 may contain errors; the faucet may delay or rate-limit; clearing browser storage loses local demo keys; a changed query may need a fresh historical boundary. Sources: live serviceConfig; https://docs.sui.io/develop/accessing-data/json-rpc-migration ; https://docs.sui.io/develop/accessing-data/graphql/graphql-rpc</a:t>
             </a:r>
             <a:endParaRPr lang="en-US" dirty="0"/>
           </a:p>
@@ -781,8 +780,7 @@
           <a:p>
             <a:r>
               <a:rPr lang="en-US" dirty="0"/>
-              <a:t>Run the three scripts in migration/. They show the old call and two replacements. Do not assume only renaming a method will migrate response types, pagination and error handling. In this SDK the unified balance includes address balance, which matters because faucet v3 and balance::send_funds can use that storage. Review every response shape against the installed SDK types. JSON-RPC availability depends on the provider. Source: https://docs.sui.io/develop/accessing-data/json-rpc-migration; installed @mysten/sui 2.36.0.
-Dates for context: GraphQL subscriptions were announced for mainnet and testnet on 21 September 2026. Foundation mainnet JSON-RPC disablement began the week of 27 July; source removal was planned for mid-October. The public testnet endpoint returned -32601 inside HTTP 200 on 15 October. Other providers may differ. Sources: https://www.sui.io/blog/graphql-on-sui-now-supports-real-time-subscriptions and https://docs.sui.io/develop/accessing-data/json-rpc-migration</a:t>
+              <a:t>Till is the case study, not the whole subject. It executes through gRPC, subscribes through GraphQL, saves receipt progress, writes a separate SQLite ledger and looks up archived history. Each student gets a separate browser payer and shop, or connects a testnet wallet. Open till, fund the payer and send a payment. Compare the red debit with the green credit; gas is paid in SUI. Wait for the actual indexed receipt and enable the chime through a user gesture. The advertised event names USDC. Readiness gap: the built-in form currently sends SUI, and no funded USDC payment has been verified. The receipt and local database paths handle coin types generically, but that is not proof of a successful USDC run. Say this before class rather than presenting the SUI screenshot as USDC. Do not use mainnet funds for this testnet lab.</a:t>
             </a:r>
             <a:endParaRPr lang="en-US" dirty="0"/>
           </a:p>
@@ -870,7 +868,7 @@
           <a:p>
             <a:r>
               <a:rPr lang="en-US" dirty="0"/>
-              <a:t>Demo keys are local to this browser profile. Clearing site storage loses access to demo funds; the UI reset only clears receipts and cursor. If changing subscriptions, filters or storage formats, version snapshots and select an intentional historical opening checkpoint. Cursor compatibility is not guaranteed across arbitrary query changes. Rotating a payer or shop means funding and sharing a new address; keep old data for reconciliation. Shared server signing has been retired with HTTP 410.</a:t>
+              <a:t>Pause the feed, send another payment, then Resume. This aborts only the listener, so payments and independent gRPC balance refreshes keep working. The recovered label is a browser-time approximation; verify the actual digest and total. Then reload and reopen the till to check deduplication. Start the local indexer and compare pnpm totals with the tracked receipts. The browser keeps only 500 records and is not a complete ledger. Switch connected payer to show its own shop, return to restore the prior shop, and explain that Reset clears tracking but not keys or onchain funds. Query/version changes need intentionally chosen resume boundaries. Actual production proofs: live H1fQ22Q5V6yt37GaiySNqGhUJR7ki4b35Te9Qcja9Bqn; paused then recovered 66XRjyGEKngFwGZntzULDr6v4hrwFPnR8ZmY9fmPW6Zh. Physical wallet approval and audible playback remain manual checks.</a:t>
             </a:r>
             <a:endParaRPr lang="en-US" dirty="0"/>
           </a:p>
@@ -958,7 +956,7 @@
           <a:p>
             <a:r>
               <a:rPr lang="en-US" dirty="0"/>
-              <a:t>Give students several minutes. Ask them to report their own shop address and one transaction digest, not any private key. Bonus: test an address-balance deposit and compare live versus catch-up. Bonus: run the SQLite writer and restart it. If the faucet is rate-limited, use the linked public testnet faucet and refresh the balances. Do not silently substitute fake values.</a:t>
+              <a:t>Open the three files in migration/. The legacy SuiJsonRpcClient calls getBalance, getTransactionBlock and queryEvents. The gRPC replacement uses SuiGrpcClient and typed results. The GraphQL version shows both a shared client API and one query joining the selected balance, transaction and events data. Migrate the response shape, errors and pagination too. Do not reuse a legacy API cursor in the new API. Include both coin and address balances. Our gRPC event example normalizes the event type because short-form addresses were rejected. Use the installed SDK types, as older examples and individual documentation tables may lag new releases. Source: https://docs.sui.io/develop/accessing-data/json-rpc-migration</a:t>
             </a:r>
             <a:endParaRPr lang="en-US" dirty="0"/>
           </a:p>
@@ -1046,8 +1044,7 @@
           <a:p>
             <a:r>
               <a:rPr lang="en-US" dirty="0"/>
-              <a:t>Close by asking students to explain the separation between sending a payment, receiving a live delivery and storing it durably. Live app: https://day3-till.vercel.app. Repository: https://github.com/Nuel-osas/day3-till. The deck source, screenshots and test evidence are included under teaching/. Primary references: https://www.sui.io/blog/graphql-on-sui-now-supports-real-time-subscriptions ; https://docs.sui.io/develop/accessing-data/graphql/graphql-rpc ; https://docs.sui.io/develop/accessing-data/json-rpc-migration ; https://github.com/MystenLabs/sui/blob/main/crates/sui-indexer-alt-graphql/schema.graphql ; https://docs.sui.io/concepts/custom-indexing-framework. Checked 15 October 2026. The connected-wallet boundary is checked with a Wallet Standard fixture; a physical wallet extension approval remains a manual classroom check.
-Verified production testnet receipts: live coin transfer H1fQ22Q5V6yt37GaiySNqGhUJR7ki4b35Te9Qcja9Bqn; paused then recovered 66XRjyGEKngFwGZntzULDr6v4hrwFPnR8ZmY9fmPW6Zh; address-balance catch-up 5crvrKsvQGU3emZvNCEJgKjpAwENtCHHxfY4UMy11Dcc. See teaching/VERIFICATION.md for explorer links and the exact test scope.</a:t>
+              <a:t>This is the advertised final workshop. Ask students to open a project they brought. If they have none, use Till’s migration folder. Choose one existing read, map it to the right data service, run both available paths against known data, inspect failure behaviour and record what changed. For polling screens, determine whether a subscription fits. For production, name the endpoint provider and quotas. The class deliverable is a working migrated call plus an explanation of the chosen data path. References are in the README, and verified testnet receipts are in teaching/VERIFICATION.md. Live app: https://day3-till.vercel.app. Repository: https://github.com/Nuel-osas/day3-till.</a:t>
             </a:r>
             <a:endParaRPr lang="en-US" dirty="0"/>
           </a:p>
@@ -1135,8 +1132,7 @@
           <a:p>
             <a:r>
               <a:rPr lang="en-US" dirty="0"/>
-              <a:t>Open https://day3-till.vercel.app. Explain the visual hierarchy: personal payer and shop, money flow, stream status, payment feed, test payment controls. The app uses real testnet transactions. A green receipt is created from an indexed successful positive net balance change to the watched shop. The balance cards read gRPC independently of the subscription.
-Class setup: choose Demo payer or My wallet, get test SUI for the payer, and open the till before sending. Browser keys stay local and each payer has a separate receiving shop. The shop needs no gas to receive. A connected wallet signs on sui:testnet. Keep the app open while teaching; the next screenshots refer to these same controls.</a:t>
+              <a:t>The official migration page reports Foundation mainnet JSON-RPC disablement in the week of 27 July 2026 and plans source removal for mid-October. Avoid claiming that every provider has already removed it. The public testnet endpoint returned -32601 inside HTTP 200 in our 15 October checks. The GraphQL subscription announcement is dated 21 September. Today we build the replacement path and migrate one real call. Sources: https://docs.sui.io/develop/accessing-data/json-rpc-migration ; https://www.sui.io/blog/graphql-on-sui-now-supports-real-time-subscriptions</a:t>
             </a:r>
             <a:endParaRPr lang="en-US" dirty="0"/>
           </a:p>
@@ -1224,8 +1220,7 @@
           <a:p>
             <a:r>
               <a:rPr lang="en-US" dirty="0"/>
-              <a:t>gRPC serves the full node interface, including transaction execution. GraphQL is an indexed service with expressive selections and subscriptions. Archival storage keeps history beyond a node retention window; an arbitrary gRPC endpoint does not automatically query it. A custom indexer owns a derived model in your database. Source: https://docs.sui.io/develop/accessing-data/graphql/graphql-rpc
-Choose by workload: wallets use gRPC plus GraphQL activity history; shops use subscriptions plus a small writer; games execute through gRPC and stream domain events; analytics use a checkpoint indexer. SQLite or Postgres can keep a focused feed. Use the Rust indexing framework for checkpoint backfills, parallel transformations, schema ownership and reprocessing at chain scale. Source: https://docs.sui.io/concepts/custom-indexing-framework</a:t>
+              <a:t>The workload determines the combination. A wallet uses gRPC for state and execution, with GraphQL for activity. A shop can use a GraphQL subscription plus a small database writer. A game executes actions through gRPC and streams domain events. An analytics backend often needs a custom checkpoint pipeline. Archival access is a separate data service; full node gRPC does not silently fall back to old history. A GraphQL operator can configure archive-backed point lookups. Sources: https://docs.sui.io/develop/accessing-data/graphql/graphql-rpc ; https://docs.sui.io/concepts/custom-indexing-framework</a:t>
             </a:r>
             <a:endParaRPr lang="en-US" dirty="0"/>
           </a:p>
@@ -1313,7 +1308,7 @@
           <a:p>
             <a:r>
               <a:rPr lang="en-US" dirty="0"/>
-              <a:t>Read the actual subscription in the repository. affectedAddress narrows candidates to this shop. after is a stream cursor; afterCheckpoint establishes an opening boundary when there is no cursor yet. The payload includes only the fields used to derive receipts. Balance changes are bounded to 50 here, sufficient for the small demo transactions but not a universal accounting guarantee. Source: live schema introspection, 15 October 2026; https://github.com/MystenLabs/sui/blob/main/crates/sui-indexer-alt-graphql/schema.graphql</a:t>
+              <a:t>These field names come from the live testnet schema. Transactions support affectedAddress, affectedObject, function, kind and sentAddress. Event filters support sender, module and type. Both support afterCheckpoint, atCheckpoint and beforeCheckpoint. checkpoints is also a subscription root. A subscription returns edges with cursor and node. Use an affectedAddress transaction feed for Till; use typed events when your Move application emits a domain event. No custom indexer deployment is needed just to consume this hosted service. Indexing still happens behind the service. Source: https://github.com/MystenLabs/sui/blob/main/crates/sui-indexer-alt-graphql/schema.graphql</a:t>
             </a:r>
             <a:endParaRPr lang="en-US" dirty="0"/>
           </a:p>
@@ -1401,7 +1396,7 @@
           <a:p>
             <a:r>
               <a:rPr lang="en-US" dirty="0"/>
-              <a:t>Transactions, events and checkpoints are the subscription roots. Transaction filters also include function, kind, afterCheckpoint, atCheckpoint and beforeCheckpoint. Events accept sender, module, type and checkpoint boundaries. POST { query, variables } to /graphql/subscriptions with Accept: text/event-stream. This is not a websocket. The shared src/lib/sse.ts parser handles keepalive comments, split CRLF frames, multiline data and empty complete events. GraphQL errors can arrive inside HTTP 200 and must trigger failure/retry, not a false Live state. Sources: live schema checked 15 October 2026; https://github.com/MystenLabs/sui/blob/main/crates/sui-indexer-alt-graphql/schema.graphql</a:t>
+              <a:t>This is the actual repository document. Point out the affectedAddress filter and how the selection set is limited to receipt data. A match is only a candidate payment: the client also checks SUCCESS and keeps positive net changes for the shop, grouped by normalized coin type using BigInt. Outgoing transfers and failed transactions must not become sales. The first 50 balance changes are enough for the small demo transfers, not a complete accounting guarantee for arbitrary complex transactions.</a:t>
             </a:r>
             <a:endParaRPr lang="en-US" dirty="0"/>
           </a:p>
@@ -1489,8 +1484,7 @@
           <a:p>
             <a:r>
               <a:rPr lang="en-US" dirty="0"/>
-              <a:t>Read both balances before and after a transfer. The payer’s net debit includes gas; it need not equal exactly the payment. The shop receives the payment amount. Both cards include coin-object balances and address balances. Their latest change is measured between gRPC reads, so concurrent activity can affect it. The app labels the delta as latest change, not exact transaction accounting.
-Live demo: wait for Live, send 0.01 test SUI, then inspect the feed and View receipt. Confirmation can precede GraphQL indexing. The receipt requires SUCCESS and a positive net balance change to the shop; sum each coin with BigInt before formatting. Outgoing transfers and failures are not sales. The class screenshot payment is 9dc36To1WB6PxSqHFyzbsYGSMtJ7JBVDSfuxkxnNUksv on testnet.</a:t>
+              <a:t>POST the GraphQL query and variables to /graphql/subscriptions. The response is text/event-stream. Browser EventSource cannot send the POST body, and a websocket client uses the wrong transport. The shared browser/Node parser handles comments, split CRLF frames, multiline data and complete events. GraphQL errors may be inside HTTP 200, so the caller must treat them as errors and reconnect appropriately. The seven automated tests include these parser cases.</a:t>
             </a:r>
             <a:endParaRPr lang="en-US" dirty="0"/>
           </a:p>
@@ -1578,8 +1572,7 @@
           <a:p>
             <a:r>
               <a:rPr lang="en-US" dirty="0"/>
-              <a:t>The recovered tag is assigned to a payment whose chain timestamp predates the connection start. It is an instructional approximation using browser time, not a protocol flag. The important assertions are the transaction digest appearing once and the totals remaining correct. Refresh the page, click Open till again, and show that replay does not duplicate the already stored payment.
-Live exercise: click Pause feed, send another payment, then Resume feed. This aborts only the subscription; chain activity and independent balance reads continue. After recovery, refresh the page and reopen the till. Ask the class to check that the digest appears once and the total is unchanged.</a:t>
+              <a:t>Capture an opening checkpoint before the first subscription so a disconnect before any delivery can still recover. Once a cursor exists, resume with after. Treat cursors as opaque and scoped to the shop and query. Persist progress for every matching delivery, even one that is not a sale. Checkpoint order comes first, then transaction position, with event position within a transaction for events. Per-subscriber throttling and server disconnects require bounded processing, backoff and retry. Our client cancels stale streams and retries when a shop changes. A successful reconnect alone is not proof that your app stored every payment.</a:t>
             </a:r>
             <a:endParaRPr lang="en-US" dirty="0"/>
           </a:p>
@@ -1667,8 +1660,7 @@
           <a:p>
             <a:r>
               <a:rPr lang="en-US" dirty="0"/>
-              <a:t>The old app could miss a payment if it disconnected before its first matching delivery: no cursor had been saved. The upgraded app captures the latest indexed checkpoint before opening the stream and persists it. When there is no cursor, it sends afterCheckpoint. Once a cursor exists, after takes over. Do not parse or manufacture a cursor; treat it as opaque and keep it scoped to the shop and query.
-Persist each cursor together with its receipts in one versioned per-shop snapshot. Advancing the cursor first could lose a receipt on a crash. Deduplicate by digest plus normalized coin type. The browser list retains at most 500 records, so it is not a complete ledger. Ordering follows checkpoint, transaction position and, for events, event position. Treat cursors as opaque. Reconnect with backoff; cancel old retries when the account or shop changes.</a:t>
+              <a:t>A TypeScript subscriber can write to SQLite or Postgres. The cursor is the progress watermark; this receipt writer uses PRIMARY KEY (digest, coin_type) as its unique business-record key, rather than assuming that a cursor itself identifies one payment. INSERT OR IGNORE makes replay idempotent. Commit rows and watermark together, or roll back both. Amounts are base-unit text and totals use BigInt. Local exercise: copy .env.example, set SHOP_ADDRESS and FROM_CHECKPOINT, run pnpm indexer, stop it, pay, restart, then pnpm totals. The tested restart retained three receipts totalling 0.03 SUI without duplication. Use one database per shop. Vercel does not run this long-lived writer.</a:t>
             </a:r>
             <a:endParaRPr lang="en-US" dirty="0"/>
           </a:p>
@@ -1756,8 +1748,7 @@
           <a:p>
             <a:r>
               <a:rPr lang="en-US" dirty="0"/>
-              <a:t>This is the writer excerpt with log lines omitted and arguments wrapped. INSERT OR IGNORE handles the primary key on digest and coin_type. Save the watermark even when a matching transaction produces no incoming receipt. Demonstrate stopping and restarting the indexer. Its stored cursor resumes the same feed. A failure between insert and watermark must roll both back. The code is for one shop per database file.
-Terminal walkthrough: use Node 24, run pnpm install, copy .env.example to .env, set SHOP_ADDRESS and FROM_CHECKPOINT from the UI, then run pnpm indexer. Stop the writer, send a payment, restart, and run pnpm totals in another terminal. Use one TILL_DB per shop. The tested writer backfilled three receipts totalling 0.03 SUI and resumed its watermark without duplicates. Amounts are stored as text and summed with BigInt. SQLite runs locally; the Vercel app does not host this long-running process.</a:t>
+              <a:t>The subscription writer is the lighter path for an application that does not need a full indexing pipeline. The custom framework becomes useful when throughput, backfill, transformations and recovery belong under your control. It brings operational work: database migrations, checkpoint watermarks, monitoring and reprocessing. This session explains that decision boundary; it does not build a new Rust indexer. Source: https://docs.sui.io/concepts/custom-indexing-framework</a:t>
             </a:r>
             <a:endParaRPr lang="en-US" dirty="0"/>
           </a:p>
@@ -2163,7 +2154,7 @@
                 <a:ea typeface="JetBrains Mono" pitchFamily="34" charset="-122"/>
                 <a:cs typeface="JetBrains Mono" pitchFamily="34" charset="-120"/>
               </a:rPr>
-              <a:t>[ ACCOUNT LAYER WEEK / DAY 03 ]</a:t>
+              <a:t>[ SUIHUB LAGOS / DAY 03 ]</a:t>
             </a:r>
             <a:endParaRPr lang="en-US" sz="1000" dirty="0"/>
           </a:p>
@@ -2255,8 +2246,8 @@
         </p:nvSpPr>
         <p:spPr>
           <a:xfrm>
-            <a:off x="7909560" y="0"/>
-            <a:ext cx="4288536" cy="6858000"/>
+            <a:off x="8366760" y="0"/>
+            <a:ext cx="3831336" cy="6858000"/>
           </a:xfrm>
           <a:prstGeom prst="rect">
             <a:avLst/>
@@ -2309,24 +2300,24 @@
         </p:nvSpPr>
         <p:spPr>
           <a:xfrm>
-            <a:off x="777240" y="1600200"/>
-            <a:ext cx="8961120" cy="2697480"/>
-          </a:xfrm>
-          <a:prstGeom prst="rect">
-            <a:avLst/>
-          </a:prstGeom>
-          <a:noFill/>
-          <a:ln/>
-        </p:spPr>
-        <p:txBody>
-          <a:bodyPr wrap="square" lIns="0" tIns="0" rIns="0" bIns="0" rtlCol="0" anchor="ctr"/>
-          <a:lstStyle/>
-          <a:p>
-            <a:pPr indent="0" marL="0">
-              <a:buNone/>
-            </a:pPr>
-            <a:r>
-              <a:rPr lang="en-US" sz="7200" dirty="0">
+            <a:off x="777240" y="1508760"/>
+            <a:ext cx="9784080" cy="1005840"/>
+          </a:xfrm>
+          <a:prstGeom prst="rect">
+            <a:avLst/>
+          </a:prstGeom>
+          <a:noFill/>
+          <a:ln/>
+        </p:spPr>
+        <p:txBody>
+          <a:bodyPr wrap="square" lIns="0" tIns="0" rIns="0" bIns="0" rtlCol="0" anchor="ctr"/>
+          <a:lstStyle/>
+          <a:p>
+            <a:pPr indent="0" marL="0">
+              <a:buNone/>
+            </a:pPr>
+            <a:r>
+              <a:rPr lang="en-US" sz="6200" dirty="0">
                 <a:solidFill>
                   <a:srgbClr val="FFFFFF"/>
                 </a:solidFill>
@@ -2334,55 +2325,55 @@
                 <a:ea typeface="DM Sans" pitchFamily="34" charset="-122"/>
                 <a:cs typeface="DM Sans" pitchFamily="34" charset="-120"/>
               </a:rPr>
-              <a:t>Real-time</a:t>
-            </a:r>
-            <a:endParaRPr lang="en-US" sz="7200" dirty="0"/>
-          </a:p>
-          <a:p>
-            <a:pPr indent="0" marL="0">
-              <a:buNone/>
-            </a:pPr>
-            <a:r>
-              <a:rPr lang="en-US" sz="7200" dirty="0">
-                <a:solidFill>
-                  <a:srgbClr val="FFFFFF"/>
+              <a:t>Real-Time Sui</a:t>
+            </a:r>
+            <a:endParaRPr lang="en-US" sz="6200" dirty="0"/>
+          </a:p>
+        </p:txBody>
+      </p:sp>
+      <p:sp>
+        <p:nvSpPr>
+          <p:cNvPr id="9" name="Text 6"/>
+          <p:cNvSpPr/>
+          <p:nvPr/>
+        </p:nvSpPr>
+        <p:spPr>
+          <a:xfrm>
+            <a:off x="777240" y="2788920"/>
+            <a:ext cx="7589520" cy="2057400"/>
+          </a:xfrm>
+          <a:prstGeom prst="rect">
+            <a:avLst/>
+          </a:prstGeom>
+          <a:noFill/>
+          <a:ln/>
+        </p:spPr>
+        <p:txBody>
+          <a:bodyPr wrap="square" lIns="0" tIns="0" rIns="0" bIns="0" rtlCol="0" anchor="ctr"/>
+          <a:lstStyle/>
+          <a:p>
+            <a:pPr indent="0" marL="0">
+              <a:buNone/>
+            </a:pPr>
+            <a:r>
+              <a:rPr lang="en-US" sz="3400" dirty="0">
+                <a:solidFill>
+                  <a:srgbClr val="ACB8DB"/>
                 </a:solidFill>
                 <a:latin typeface="DM Sans" pitchFamily="34" charset="0"/>
                 <a:ea typeface="DM Sans" pitchFamily="34" charset="-122"/>
                 <a:cs typeface="DM Sans" pitchFamily="34" charset="-120"/>
               </a:rPr>
-              <a:t>Sui.</a:t>
-            </a:r>
-            <a:endParaRPr lang="en-US" sz="7200" dirty="0"/>
-          </a:p>
-        </p:txBody>
-      </p:sp>
-      <p:sp>
-        <p:nvSpPr>
-          <p:cNvPr id="9" name="Text 6"/>
-          <p:cNvSpPr/>
-          <p:nvPr/>
-        </p:nvSpPr>
-        <p:spPr>
-          <a:xfrm>
-            <a:off x="777240" y="4389120"/>
-            <a:ext cx="8686800" cy="1051560"/>
-          </a:xfrm>
-          <a:prstGeom prst="rect">
-            <a:avLst/>
-          </a:prstGeom>
-          <a:noFill/>
-          <a:ln/>
-        </p:spPr>
-        <p:txBody>
-          <a:bodyPr wrap="square" lIns="0" tIns="0" rIns="0" bIns="0" rtlCol="0" anchor="ctr"/>
-          <a:lstStyle/>
-          <a:p>
-            <a:pPr indent="0" marL="0">
-              <a:buNone/>
-            </a:pPr>
-            <a:r>
-              <a:rPr lang="en-US" sz="2900" dirty="0">
+              <a:t>GraphQL Subscriptions</a:t>
+            </a:r>
+            <a:endParaRPr lang="en-US" sz="3400" dirty="0"/>
+          </a:p>
+          <a:p>
+            <a:pPr indent="0" marL="0">
+              <a:buNone/>
+            </a:pPr>
+            <a:r>
+              <a:rPr lang="en-US" sz="3400" dirty="0">
                 <a:solidFill>
                   <a:srgbClr val="ACB8DB"/>
                 </a:solidFill>
@@ -2390,16 +2381,16 @@
                 <a:ea typeface="DM Sans" pitchFamily="34" charset="-122"/>
                 <a:cs typeface="DM Sans" pitchFamily="34" charset="-120"/>
               </a:rPr>
-              <a:t>A payment happens.</a:t>
-            </a:r>
-            <a:endParaRPr lang="en-US" sz="2900" dirty="0"/>
-          </a:p>
-          <a:p>
-            <a:pPr indent="0" marL="0">
-              <a:buNone/>
-            </a:pPr>
-            <a:r>
-              <a:rPr lang="en-US" sz="2900" dirty="0">
+              <a:t>and the Data Stack</a:t>
+            </a:r>
+            <a:endParaRPr lang="en-US" sz="3400" dirty="0"/>
+          </a:p>
+          <a:p>
+            <a:pPr indent="0" marL="0">
+              <a:buNone/>
+            </a:pPr>
+            <a:r>
+              <a:rPr lang="en-US" sz="3400" dirty="0">
                 <a:solidFill>
                   <a:srgbClr val="ACB8DB"/>
                 </a:solidFill>
@@ -2407,9 +2398,9 @@
                 <a:ea typeface="DM Sans" pitchFamily="34" charset="-122"/>
                 <a:cs typeface="DM Sans" pitchFamily="34" charset="-120"/>
               </a:rPr>
-              <a:t>Your app should know.</a:t>
-            </a:r>
-            <a:endParaRPr lang="en-US" sz="2900" dirty="0"/>
+              <a:t>After JSON-RPC</a:t>
+            </a:r>
+            <a:endParaRPr lang="en-US" sz="3400" dirty="0"/>
           </a:p>
         </p:txBody>
       </p:sp>
@@ -2421,24 +2412,24 @@
         </p:nvSpPr>
         <p:spPr>
           <a:xfrm>
-            <a:off x="777240" y="5833872"/>
-            <a:ext cx="10058400" cy="274320"/>
-          </a:xfrm>
-          <a:prstGeom prst="rect">
-            <a:avLst/>
-          </a:prstGeom>
-          <a:noFill/>
-          <a:ln/>
-        </p:spPr>
-        <p:txBody>
-          <a:bodyPr wrap="square" lIns="0" tIns="0" rIns="0" bIns="0" rtlCol="0" anchor="ctr"/>
-          <a:lstStyle/>
-          <a:p>
-            <a:pPr indent="0" marL="0">
-              <a:buNone/>
-            </a:pPr>
-            <a:r>
-              <a:rPr lang="en-US" sz="1200" dirty="0">
+            <a:off x="777240" y="5760720"/>
+            <a:ext cx="10058400" cy="320040"/>
+          </a:xfrm>
+          <a:prstGeom prst="rect">
+            <a:avLst/>
+          </a:prstGeom>
+          <a:noFill/>
+          <a:ln/>
+        </p:spPr>
+        <p:txBody>
+          <a:bodyPr wrap="square" lIns="0" tIns="0" rIns="0" bIns="0" rtlCol="0" anchor="ctr"/>
+          <a:lstStyle/>
+          <a:p>
+            <a:pPr indent="0" marL="0">
+              <a:buNone/>
+            </a:pPr>
+            <a:r>
+              <a:rPr lang="en-US" sz="1100" dirty="0">
                 <a:solidFill>
                   <a:srgbClr val="9BAFFF"/>
                 </a:solidFill>
@@ -2446,9 +2437,9 @@
                 <a:ea typeface="JetBrains Mono" pitchFamily="34" charset="-122"/>
                 <a:cs typeface="JetBrains Mono" pitchFamily="34" charset="-120"/>
               </a:rPr>
-              <a:t>GRAPHQL SUBSCRIPTIONS / THE NEW DATA STACK</a:t>
-            </a:r>
-            <a:endParaRPr lang="en-US" sz="1200" dirty="0"/>
+              <a:t>MAP THE STACK / BUILD TILL / MIGRATE YOUR APP</a:t>
+            </a:r>
+            <a:endParaRPr lang="en-US" sz="1100" dirty="0"/>
           </a:p>
         </p:txBody>
       </p:sp>
@@ -2517,7 +2508,7 @@
                 <a:ea typeface="JetBrains Mono" pitchFamily="34" charset="-122"/>
                 <a:cs typeface="JetBrains Mono" pitchFamily="34" charset="-120"/>
               </a:rPr>
-              <a:t>[ 04 / ARCHIVED RECEIPT ]</a:t>
+              <a:t>[ ARCHIVAL STORE + GRAPHQL ]</a:t>
             </a:r>
             <a:endParaRPr lang="en-US" sz="1000" dirty="0"/>
           </a:p>
@@ -2556,7 +2547,7 @@
                 <a:ea typeface="DM Sans" pitchFamily="34" charset="-122"/>
                 <a:cs typeface="DM Sans" pitchFamily="34" charset="-120"/>
               </a:rPr>
-              <a:t>A full node can forget. History remains.</a:t>
+              <a:t>Find history beyond the full node.</a:t>
             </a:r>
             <a:endParaRPr lang="en-US" sz="3700" dirty="0"/>
           </a:p>
@@ -2931,7 +2922,7 @@
                 <a:ea typeface="DM Sans" pitchFamily="34" charset="-122"/>
                 <a:cs typeface="DM Sans" pitchFamily="34" charset="-120"/>
               </a:rPr>
-              <a:t>Verified 15 October 2026   /   Transaction dated 7 October 2025   /   Checkpoint 250,000,000</a:t>
+              <a:t>Known receipt: 7 October 2025   /   Checkpoint 250,000,000   /   GraphQL found it</a:t>
             </a:r>
             <a:endParaRPr lang="en-US" sz="1000" dirty="0"/>
           </a:p>
@@ -3002,7 +2993,7 @@
                 <a:ea typeface="JetBrains Mono" pitchFamily="34" charset="-122"/>
                 <a:cs typeface="JetBrains Mono" pitchFamily="34" charset="-120"/>
               </a:rPr>
-              <a:t>[ GOTCHAS / OBSERVED 15 OCTOBER 2026 ]</a:t>
+              <a:t>[ LIMITS + PROVIDERS + GOTCHAS ]</a:t>
             </a:r>
             <a:endParaRPr lang="en-US" sz="1000" dirty="0"/>
           </a:p>
@@ -3041,7 +3032,7 @@
                 <a:ea typeface="DM Sans" pitchFamily="34" charset="-122"/>
                 <a:cs typeface="DM Sans" pitchFamily="34" charset="-120"/>
               </a:rPr>
-              <a:t>Plan for limits and real-world gaps.</a:t>
+              <a:t>Public endpoints are for development.</a:t>
             </a:r>
             <a:endParaRPr lang="en-US" sz="3700" dirty="0"/>
           </a:p>
@@ -3185,7 +3176,7 @@
                 <a:ea typeface="JetBrains Mono" pitchFamily="34" charset="-122"/>
                 <a:cs typeface="JetBrains Mono" pitchFamily="34" charset="-120"/>
               </a:rPr>
-              <a:t>PAGINATION</a:t>
+              <a:t>QUERY BUDGET / OBSERVED</a:t>
             </a:r>
             <a:endParaRPr lang="en-US" sz="1100" dirty="0"/>
           </a:p>
@@ -3224,7 +3215,7 @@
                 <a:ea typeface="DM Sans" pitchFamily="34" charset="-122"/>
                 <a:cs typeface="DM Sans" pitchFamily="34" charset="-120"/>
               </a:rPr>
-              <a:t>20 default / 50 max</a:t>
+              <a:t>5,000 bytes · 40 seconds</a:t>
             </a:r>
             <a:endParaRPr lang="en-US" sz="2300" dirty="0"/>
           </a:p>
@@ -3263,7 +3254,7 @@
                 <a:ea typeface="DM Sans" pitchFamily="34" charset="-122"/>
                 <a:cs typeface="DM Sans" pitchFamily="34" charset="-120"/>
               </a:rPr>
-              <a:t>Observed for Query.transactions. Page longer history.</a:t>
+              <a:t>Query payload and timeout limits vary by service.</a:t>
             </a:r>
             <a:endParaRPr lang="en-US" sz="1500" dirty="0"/>
           </a:p>
@@ -3329,7 +3320,7 @@
                 <a:ea typeface="JetBrains Mono" pitchFamily="34" charset="-122"/>
                 <a:cs typeface="JetBrains Mono" pitchFamily="34" charset="-120"/>
               </a:rPr>
-              <a:t>QUERY TIMEOUT</a:t>
+              <a:t>PAGINATION / OBSERVED</a:t>
             </a:r>
             <a:endParaRPr lang="en-US" sz="1100" dirty="0"/>
           </a:p>
@@ -3368,7 +3359,7 @@
                 <a:ea typeface="DM Sans" pitchFamily="34" charset="-122"/>
                 <a:cs typeface="DM Sans" pitchFamily="34" charset="-120"/>
               </a:rPr>
-              <a:t>40 seconds</a:t>
+              <a:t>20 default · 50 maximum</a:t>
             </a:r>
             <a:endParaRPr lang="en-US" sz="2300" dirty="0"/>
           </a:p>
@@ -3407,7 +3398,7 @@
                 <a:ea typeface="DM Sans" pitchFamily="34" charset="-122"/>
                 <a:cs typeface="DM Sans" pitchFamily="34" charset="-120"/>
               </a:rPr>
-              <a:t>Keep selections small. Provider settings can change.</a:t>
+              <a:t>Page Query.transactions and nested collections.</a:t>
             </a:r>
             <a:endParaRPr lang="en-US" sz="1500" dirty="0"/>
           </a:p>
@@ -3473,7 +3464,7 @@
                 <a:ea typeface="JetBrains Mono" pitchFamily="34" charset="-122"/>
                 <a:cs typeface="JetBrains Mono" pitchFamily="34" charset="-120"/>
               </a:rPr>
-              <a:t>LIVE FILTER GAP</a:t>
+              <a:t>BEFORE LAUNCH</a:t>
             </a:r>
             <a:endParaRPr lang="en-US" sz="1100" dirty="0"/>
           </a:p>
@@ -3512,7 +3503,7 @@
                 <a:ea typeface="DM Sans" pitchFamily="34" charset="-122"/>
                 <a:cs typeface="DM Sans" pitchFamily="34" charset="-120"/>
               </a:rPr>
-              <a:t>Confirmed, but missing?</a:t>
+              <a:t>Choose a production endpoint.</a:t>
             </a:r>
             <a:endParaRPr lang="en-US" sz="2300" dirty="0"/>
           </a:p>
@@ -3551,7 +3542,7 @@
                 <a:ea typeface="DM Sans" pitchFamily="34" charset="-122"/>
                 <a:cs typeface="DM Sans" pitchFamily="34" charset="-120"/>
               </a:rPr>
-              <a:t>Address-balance deposits appeared after catch-up.</a:t>
+              <a:t>Check quotas, throttling, retention, auth and uptime.</a:t>
             </a:r>
             <a:endParaRPr lang="en-US" sz="1500" dirty="0"/>
           </a:p>
@@ -3617,7 +3608,7 @@
                 <a:ea typeface="JetBrains Mono" pitchFamily="34" charset="-122"/>
                 <a:cs typeface="JetBrains Mono" pitchFamily="34" charset="-120"/>
               </a:rPr>
-              <a:t>PRODUCTION</a:t>
+              <a:t>REAL DEMO GOTCHA</a:t>
             </a:r>
             <a:endParaRPr lang="en-US" sz="1100" dirty="0"/>
           </a:p>
@@ -3656,7 +3647,7 @@
                 <a:ea typeface="DM Sans" pitchFamily="34" charset="-122"/>
                 <a:cs typeface="DM Sans" pitchFamily="34" charset="-120"/>
               </a:rPr>
-              <a:t>Check your provider.</a:t>
+              <a:t>Confirmed, but missing live?</a:t>
             </a:r>
             <a:endParaRPr lang="en-US" sz="2300" dirty="0"/>
           </a:p>
@@ -3695,7 +3686,7 @@
                 <a:ea typeface="DM Sans" pitchFamily="34" charset="-122"/>
                 <a:cs typeface="DM Sans" pitchFamily="34" charset="-120"/>
               </a:rPr>
-              <a:t>Throttling, retention, quotas, auth and uptime matter.</a:t>
+              <a:t>Address-balance deposits appeared after catch-up.</a:t>
             </a:r>
             <a:endParaRPr lang="en-US" sz="1500" dirty="0"/>
           </a:p>
@@ -3715,7 +3706,7 @@
     <p:bg>
       <p:bgPr>
         <a:solidFill>
-          <a:srgbClr val="07080F"/>
+          <a:srgbClr val="F4F5F8"/>
         </a:solidFill>
       </p:bgPr>
     </p:bg>
@@ -3760,13 +3751,13 @@
             <a:r>
               <a:rPr lang="en-US" sz="1000" spc="150" kern="0" dirty="0">
                 <a:solidFill>
-                  <a:srgbClr val="ACB8DB"/>
-                </a:solidFill>
-                <a:latin typeface="JetBrains Mono" pitchFamily="34" charset="0"/>
-                <a:ea typeface="JetBrains Mono" pitchFamily="34" charset="-122"/>
-                <a:cs typeface="JetBrains Mono" pitchFamily="34" charset="-120"/>
-              </a:rPr>
-              <a:t>[ MIGRATION/ / THREE RUNNABLE EXAMPLES ]</a:t>
+                  <a:srgbClr val="69738B"/>
+                </a:solidFill>
+                <a:latin typeface="JetBrains Mono" pitchFamily="34" charset="0"/>
+                <a:ea typeface="JetBrains Mono" pitchFamily="34" charset="-122"/>
+                <a:cs typeface="JetBrains Mono" pitchFamily="34" charset="-120"/>
+              </a:rPr>
+              <a:t>[ HANDS-ON / YOUR OWN SHOP ]</a:t>
             </a:r>
             <a:endParaRPr lang="en-US" sz="1000" dirty="0"/>
           </a:p>
@@ -3799,13 +3790,13 @@
             <a:r>
               <a:rPr lang="en-US" sz="3700" dirty="0">
                 <a:solidFill>
-                  <a:srgbClr val="FFFFFF"/>
+                  <a:srgbClr val="131725"/>
                 </a:solidFill>
                 <a:latin typeface="DM Sans" pitchFamily="34" charset="0"/>
                 <a:ea typeface="DM Sans" pitchFamily="34" charset="-122"/>
                 <a:cs typeface="DM Sans" pitchFamily="34" charset="-120"/>
               </a:rPr>
-              <a:t>Migrate the intention, not just the method.</a:t>
+              <a:t>Build Till on the stack we just mapped.</a:t>
             </a:r>
             <a:endParaRPr lang="en-US" sz="3700" dirty="0"/>
           </a:p>
@@ -3838,7 +3829,7 @@
             <a:r>
               <a:rPr lang="en-US" sz="800" spc="100" kern="0" dirty="0">
                 <a:solidFill>
-                  <a:srgbClr val="ACB8DB"/>
+                  <a:srgbClr val="69738B"/>
                 </a:solidFill>
                 <a:latin typeface="JetBrains Mono" pitchFamily="34" charset="0"/>
                 <a:ea typeface="JetBrains Mono" pitchFamily="34" charset="-122"/>
@@ -3877,7 +3868,7 @@
             <a:r>
               <a:rPr lang="en-US" sz="1000" dirty="0">
                 <a:solidFill>
-                  <a:srgbClr val="ACB8DB"/>
+                  <a:srgbClr val="69738B"/>
                 </a:solidFill>
                 <a:latin typeface="JetBrains Mono" pitchFamily="34" charset="0"/>
                 <a:ea typeface="JetBrains Mono" pitchFamily="34" charset="-122"/>
@@ -3889,52 +3880,88 @@
           </a:p>
         </p:txBody>
       </p:sp>
-      <p:sp>
-        <p:nvSpPr>
-          <p:cNvPr id="7" name="Shape 4"/>
-          <p:cNvSpPr/>
-          <p:nvPr/>
-        </p:nvSpPr>
-        <p:spPr>
-          <a:xfrm>
-            <a:off x="777240" y="2267712"/>
-            <a:ext cx="10637520" cy="3794760"/>
-          </a:xfrm>
-          <a:prstGeom prst="rect">
-            <a:avLst/>
-          </a:prstGeom>
-          <a:solidFill>
-            <a:srgbClr val="111529"/>
-          </a:solidFill>
-          <a:ln w="12700">
-            <a:solidFill>
-              <a:srgbClr val="111529">
-                <a:alpha val="0"/>
-              </a:srgbClr>
-            </a:solidFill>
-            <a:prstDash val="solid"/>
-          </a:ln>
-        </p:spPr>
-      </p:sp>
-      <p:sp>
-        <p:nvSpPr>
-          <p:cNvPr id="8" name="Text 5"/>
-          <p:cNvSpPr/>
-          <p:nvPr/>
-        </p:nvSpPr>
-        <p:spPr>
-          <a:xfrm>
-            <a:off x="1033272" y="2432304"/>
-            <a:ext cx="10125456" cy="3520440"/>
-          </a:xfrm>
-          <a:prstGeom prst="rect">
-            <a:avLst/>
-          </a:prstGeom>
-          <a:noFill/>
-          <a:ln/>
-        </p:spPr>
-        <p:txBody>
-          <a:bodyPr wrap="square" lIns="0" tIns="0" rIns="0" bIns="0" rtlCol="0" anchor="t"/>
+      <p:pic>
+        <p:nvPicPr>
+          <p:cNvPr id="7" name="Image 0" descr="/Users/emmanuelosadebe/Documents/SUI-HUB-CLASSES/account-layer-week/day3-till/teaching/assets/overview.png">    </p:cNvPr>
+          <p:cNvPicPr>
+            <a:picLocks noChangeAspect="1"/>
+          </p:cNvPicPr>
+          <p:nvPr/>
+        </p:nvPicPr>
+        <p:blipFill>
+          <a:blip r:embed="rId1"/>
+          <a:stretch>
+            <a:fillRect/>
+          </a:stretch>
+        </p:blipFill>
+        <p:spPr>
+          <a:xfrm>
+            <a:off x="937129" y="2194560"/>
+            <a:ext cx="6263901" cy="3703320"/>
+          </a:xfrm>
+          <a:prstGeom prst="rect">
+            <a:avLst/>
+          </a:prstGeom>
+        </p:spPr>
+      </p:pic>
+      <p:sp>
+        <p:nvSpPr>
+          <p:cNvPr id="8" name="Text 4"/>
+          <p:cNvSpPr/>
+          <p:nvPr/>
+        </p:nvSpPr>
+        <p:spPr>
+          <a:xfrm>
+            <a:off x="7818120" y="2423160"/>
+            <a:ext cx="3474720" cy="228600"/>
+          </a:xfrm>
+          <a:prstGeom prst="rect">
+            <a:avLst/>
+          </a:prstGeom>
+          <a:noFill/>
+          <a:ln/>
+        </p:spPr>
+        <p:txBody>
+          <a:bodyPr wrap="square" lIns="0" tIns="0" rIns="0" bIns="0" rtlCol="0" anchor="ctr"/>
+          <a:lstStyle/>
+          <a:p>
+            <a:pPr indent="0" marL="0">
+              <a:buNone/>
+            </a:pPr>
+            <a:r>
+              <a:rPr lang="en-US" sz="1000" spc="100" kern="0" dirty="0">
+                <a:solidFill>
+                  <a:srgbClr val="2338FF"/>
+                </a:solidFill>
+                <a:latin typeface="JetBrains Mono" pitchFamily="34" charset="0"/>
+                <a:ea typeface="JetBrains Mono" pitchFamily="34" charset="-122"/>
+                <a:cs typeface="JetBrains Mono" pitchFamily="34" charset="-120"/>
+              </a:rPr>
+              <a:t>PERSONAL</a:t>
+            </a:r>
+            <a:endParaRPr lang="en-US" sz="1000" dirty="0"/>
+          </a:p>
+        </p:txBody>
+      </p:sp>
+      <p:sp>
+        <p:nvSpPr>
+          <p:cNvPr id="9" name="Text 5"/>
+          <p:cNvSpPr/>
+          <p:nvPr/>
+        </p:nvSpPr>
+        <p:spPr>
+          <a:xfrm>
+            <a:off x="7818120" y="2743200"/>
+            <a:ext cx="3474720" cy="731520"/>
+          </a:xfrm>
+          <a:prstGeom prst="rect">
+            <a:avLst/>
+          </a:prstGeom>
+          <a:noFill/>
+          <a:ln/>
+        </p:spPr>
+        <p:txBody>
+          <a:bodyPr wrap="square" lIns="0" tIns="0" rIns="0" bIns="0" rtlCol="0" anchor="ctr"/>
           <a:lstStyle/>
           <a:p>
             <a:pPr indent="0" marL="0">
@@ -3943,179 +3970,210 @@
             <a:r>
               <a:rPr lang="en-US" sz="2000" dirty="0">
                 <a:solidFill>
-                  <a:srgbClr val="D9E1FF"/>
-                </a:solidFill>
-                <a:latin typeface="JetBrains Mono" pitchFamily="34" charset="0"/>
-                <a:ea typeface="JetBrains Mono" pitchFamily="34" charset="-122"/>
-                <a:cs typeface="JetBrains Mono" pitchFamily="34" charset="-120"/>
-              </a:rPr>
-              <a:t>pnpm migrate:legacy   # inspect the JSON-RPC error body</a:t>
-            </a:r>
-            <a:endParaRPr lang="en-US" sz="2000" dirty="0"/>
-          </a:p>
-          <a:p>
-            <a:pPr indent="0" marL="0">
-              <a:buNone/>
-            </a:pPr>
-            <a:r>
-              <a:rPr lang="en-US" sz="2000" dirty="0">
-                <a:solidFill>
-                  <a:srgbClr val="D9E1FF"/>
-                </a:solidFill>
-                <a:latin typeface="JetBrains Mono" pitchFamily="34" charset="0"/>
-                <a:ea typeface="JetBrains Mono" pitchFamily="34" charset="-122"/>
-                <a:cs typeface="JetBrains Mono" pitchFamily="34" charset="-120"/>
-              </a:rPr>
-              <a:t>pnpm migrate:grpc     # current balance through gRPC</a:t>
-            </a:r>
-            <a:endParaRPr lang="en-US" sz="2000" dirty="0"/>
-          </a:p>
-          <a:p>
-            <a:pPr indent="0" marL="0">
-              <a:buNone/>
-            </a:pPr>
-            <a:r>
-              <a:rPr lang="en-US" sz="2000" dirty="0">
-                <a:solidFill>
-                  <a:srgbClr val="D9E1FF"/>
-                </a:solidFill>
-                <a:latin typeface="JetBrains Mono" pitchFamily="34" charset="0"/>
-                <a:ea typeface="JetBrains Mono" pitchFamily="34" charset="-122"/>
-                <a:cs typeface="JetBrains Mono" pitchFamily="34" charset="-120"/>
-              </a:rPr>
-              <a:t>pnpm migrate:graphql  # structured indexed query</a:t>
-            </a:r>
-            <a:endParaRPr lang="en-US" sz="2000" dirty="0"/>
-          </a:p>
-          <a:p>
-            <a:pPr indent="0" marL="0">
-              <a:buNone/>
-            </a:pPr>
-            <a:endParaRPr lang="en-US" sz="2000" dirty="0"/>
-          </a:p>
-          <a:p>
-            <a:pPr indent="0" marL="0">
-              <a:buNone/>
-            </a:pPr>
-            <a:r>
-              <a:rPr lang="en-US" sz="2000" dirty="0">
-                <a:solidFill>
-                  <a:srgbClr val="D9E1FF"/>
-                </a:solidFill>
-                <a:latin typeface="JetBrains Mono" pitchFamily="34" charset="0"/>
-                <a:ea typeface="JetBrains Mono" pitchFamily="34" charset="-122"/>
-                <a:cs typeface="JetBrains Mono" pitchFamily="34" charset="-120"/>
-              </a:rPr>
-              <a:t>// gRPC SDK shape used by the app:</a:t>
-            </a:r>
-            <a:endParaRPr lang="en-US" sz="2000" dirty="0"/>
-          </a:p>
-          <a:p>
-            <a:pPr indent="0" marL="0">
-              <a:buNone/>
-            </a:pPr>
-            <a:r>
-              <a:rPr lang="en-US" sz="2000" dirty="0">
-                <a:solidFill>
-                  <a:srgbClr val="D9E1FF"/>
-                </a:solidFill>
-                <a:latin typeface="JetBrains Mono" pitchFamily="34" charset="0"/>
-                <a:ea typeface="JetBrains Mono" pitchFamily="34" charset="-122"/>
-                <a:cs typeface="JetBrains Mono" pitchFamily="34" charset="-120"/>
-              </a:rPr>
-              <a:t>const { balance } = await client.getBalance({</a:t>
-            </a:r>
-            <a:endParaRPr lang="en-US" sz="2000" dirty="0"/>
-          </a:p>
-          <a:p>
-            <a:pPr indent="0" marL="0">
-              <a:buNone/>
-            </a:pPr>
-            <a:r>
-              <a:rPr lang="en-US" sz="2000" dirty="0">
-                <a:solidFill>
-                  <a:srgbClr val="D9E1FF"/>
-                </a:solidFill>
-                <a:latin typeface="JetBrains Mono" pitchFamily="34" charset="0"/>
-                <a:ea typeface="JetBrains Mono" pitchFamily="34" charset="-122"/>
-                <a:cs typeface="JetBrains Mono" pitchFamily="34" charset="-120"/>
-              </a:rPr>
-              <a:t>  owner: address, coinType: '0x2::sui::SUI'</a:t>
-            </a:r>
-            <a:endParaRPr lang="en-US" sz="2000" dirty="0"/>
-          </a:p>
-          <a:p>
-            <a:pPr indent="0" marL="0">
-              <a:buNone/>
-            </a:pPr>
-            <a:r>
-              <a:rPr lang="en-US" sz="2000" dirty="0">
-                <a:solidFill>
-                  <a:srgbClr val="D9E1FF"/>
-                </a:solidFill>
-                <a:latin typeface="JetBrains Mono" pitchFamily="34" charset="0"/>
-                <a:ea typeface="JetBrains Mono" pitchFamily="34" charset="-122"/>
-                <a:cs typeface="JetBrains Mono" pitchFamily="34" charset="-120"/>
-              </a:rPr>
-              <a:t>});</a:t>
-            </a:r>
-            <a:endParaRPr lang="en-US" sz="2000" dirty="0"/>
-          </a:p>
-          <a:p>
-            <a:pPr indent="0" marL="0">
-              <a:buNone/>
-            </a:pPr>
-            <a:r>
-              <a:rPr lang="en-US" sz="2000" dirty="0">
-                <a:solidFill>
-                  <a:srgbClr val="D9E1FF"/>
-                </a:solidFill>
-                <a:latin typeface="JetBrains Mono" pitchFamily="34" charset="0"/>
-                <a:ea typeface="JetBrains Mono" pitchFamily="34" charset="-122"/>
-                <a:cs typeface="JetBrains Mono" pitchFamily="34" charset="-120"/>
-              </a:rPr>
-              <a:t>// balance.balance includes coin and address balances.</a:t>
-            </a:r>
-            <a:endParaRPr lang="en-US" sz="2000" dirty="0"/>
-          </a:p>
-        </p:txBody>
-      </p:sp>
-      <p:sp>
-        <p:nvSpPr>
-          <p:cNvPr id="9" name="Text 6"/>
-          <p:cNvSpPr/>
-          <p:nvPr/>
-        </p:nvSpPr>
-        <p:spPr>
-          <a:xfrm>
-            <a:off x="777240" y="6053328"/>
-            <a:ext cx="10515600" cy="228600"/>
-          </a:xfrm>
-          <a:prstGeom prst="rect">
-            <a:avLst/>
-          </a:prstGeom>
-          <a:noFill/>
-          <a:ln/>
-        </p:spPr>
-        <p:txBody>
-          <a:bodyPr wrap="square" lIns="0" tIns="0" rIns="0" bIns="0" rtlCol="0" anchor="ctr"/>
-          <a:lstStyle/>
-          <a:p>
-            <a:pPr indent="0" marL="0">
-              <a:buNone/>
-            </a:pPr>
-            <a:r>
-              <a:rPr lang="en-US" sz="1100" dirty="0">
-                <a:solidFill>
-                  <a:srgbClr val="ACB8DB"/>
+                  <a:srgbClr val="131725"/>
                 </a:solidFill>
                 <a:latin typeface="DM Sans" pitchFamily="34" charset="0"/>
                 <a:ea typeface="DM Sans" pitchFamily="34" charset="-122"/>
                 <a:cs typeface="DM Sans" pitchFamily="34" charset="-120"/>
               </a:rPr>
-              <a:t>Execute and read current state with gRPC. Query indexed history with GraphQL.</a:t>
-            </a:r>
-            <a:endParaRPr lang="en-US" sz="1100" dirty="0"/>
+              <a:t>Your payer. Your shop.</a:t>
+            </a:r>
+            <a:endParaRPr lang="en-US" sz="2000" dirty="0"/>
+          </a:p>
+        </p:txBody>
+      </p:sp>
+      <p:sp>
+        <p:nvSpPr>
+          <p:cNvPr id="10" name="Text 6"/>
+          <p:cNvSpPr/>
+          <p:nvPr/>
+        </p:nvSpPr>
+        <p:spPr>
+          <a:xfrm>
+            <a:off x="7818120" y="3557016"/>
+            <a:ext cx="3474720" cy="228600"/>
+          </a:xfrm>
+          <a:prstGeom prst="rect">
+            <a:avLst/>
+          </a:prstGeom>
+          <a:noFill/>
+          <a:ln/>
+        </p:spPr>
+        <p:txBody>
+          <a:bodyPr wrap="square" lIns="0" tIns="0" rIns="0" bIns="0" rtlCol="0" anchor="ctr"/>
+          <a:lstStyle/>
+          <a:p>
+            <a:pPr indent="0" marL="0">
+              <a:buNone/>
+            </a:pPr>
+            <a:r>
+              <a:rPr lang="en-US" sz="1000" spc="100" kern="0" dirty="0">
+                <a:solidFill>
+                  <a:srgbClr val="2338FF"/>
+                </a:solidFill>
+                <a:latin typeface="JetBrains Mono" pitchFamily="34" charset="0"/>
+                <a:ea typeface="JetBrains Mono" pitchFamily="34" charset="-122"/>
+                <a:cs typeface="JetBrains Mono" pitchFamily="34" charset="-120"/>
+              </a:rPr>
+              <a:t>LIVE</a:t>
+            </a:r>
+            <a:endParaRPr lang="en-US" sz="1000" dirty="0"/>
+          </a:p>
+        </p:txBody>
+      </p:sp>
+      <p:sp>
+        <p:nvSpPr>
+          <p:cNvPr id="11" name="Text 7"/>
+          <p:cNvSpPr/>
+          <p:nvPr/>
+        </p:nvSpPr>
+        <p:spPr>
+          <a:xfrm>
+            <a:off x="7818120" y="3877056"/>
+            <a:ext cx="3474720" cy="731520"/>
+          </a:xfrm>
+          <a:prstGeom prst="rect">
+            <a:avLst/>
+          </a:prstGeom>
+          <a:noFill/>
+          <a:ln/>
+        </p:spPr>
+        <p:txBody>
+          <a:bodyPr wrap="square" lIns="0" tIns="0" rIns="0" bIns="0" rtlCol="0" anchor="ctr"/>
+          <a:lstStyle/>
+          <a:p>
+            <a:pPr indent="0" marL="0">
+              <a:buNone/>
+            </a:pPr>
+            <a:r>
+              <a:rPr lang="en-US" sz="2000" dirty="0">
+                <a:solidFill>
+                  <a:srgbClr val="131725"/>
+                </a:solidFill>
+                <a:latin typeface="DM Sans" pitchFamily="34" charset="0"/>
+                <a:ea typeface="DM Sans" pitchFamily="34" charset="-122"/>
+                <a:cs typeface="DM Sans" pitchFamily="34" charset="-120"/>
+              </a:rPr>
+              <a:t>A receipt from the stream.</a:t>
+            </a:r>
+            <a:endParaRPr lang="en-US" sz="2000" dirty="0"/>
+          </a:p>
+        </p:txBody>
+      </p:sp>
+      <p:sp>
+        <p:nvSpPr>
+          <p:cNvPr id="12" name="Text 8"/>
+          <p:cNvSpPr/>
+          <p:nvPr/>
+        </p:nvSpPr>
+        <p:spPr>
+          <a:xfrm>
+            <a:off x="7818120" y="4690872"/>
+            <a:ext cx="3474720" cy="228600"/>
+          </a:xfrm>
+          <a:prstGeom prst="rect">
+            <a:avLst/>
+          </a:prstGeom>
+          <a:noFill/>
+          <a:ln/>
+        </p:spPr>
+        <p:txBody>
+          <a:bodyPr wrap="square" lIns="0" tIns="0" rIns="0" bIns="0" rtlCol="0" anchor="ctr"/>
+          <a:lstStyle/>
+          <a:p>
+            <a:pPr indent="0" marL="0">
+              <a:buNone/>
+            </a:pPr>
+            <a:r>
+              <a:rPr lang="en-US" sz="1000" spc="100" kern="0" dirty="0">
+                <a:solidFill>
+                  <a:srgbClr val="2338FF"/>
+                </a:solidFill>
+                <a:latin typeface="JetBrains Mono" pitchFamily="34" charset="0"/>
+                <a:ea typeface="JetBrains Mono" pitchFamily="34" charset="-122"/>
+                <a:cs typeface="JetBrains Mono" pitchFamily="34" charset="-120"/>
+              </a:rPr>
+              <a:t>RECOVERABLE</a:t>
+            </a:r>
+            <a:endParaRPr lang="en-US" sz="1000" dirty="0"/>
+          </a:p>
+        </p:txBody>
+      </p:sp>
+      <p:sp>
+        <p:nvSpPr>
+          <p:cNvPr id="13" name="Text 9"/>
+          <p:cNvSpPr/>
+          <p:nvPr/>
+        </p:nvSpPr>
+        <p:spPr>
+          <a:xfrm>
+            <a:off x="7818120" y="5010912"/>
+            <a:ext cx="3474720" cy="731520"/>
+          </a:xfrm>
+          <a:prstGeom prst="rect">
+            <a:avLst/>
+          </a:prstGeom>
+          <a:noFill/>
+          <a:ln/>
+        </p:spPr>
+        <p:txBody>
+          <a:bodyPr wrap="square" lIns="0" tIns="0" rIns="0" bIns="0" rtlCol="0" anchor="ctr"/>
+          <a:lstStyle/>
+          <a:p>
+            <a:pPr indent="0" marL="0">
+              <a:buNone/>
+            </a:pPr>
+            <a:r>
+              <a:rPr lang="en-US" sz="2000" dirty="0">
+                <a:solidFill>
+                  <a:srgbClr val="131725"/>
+                </a:solidFill>
+                <a:latin typeface="DM Sans" pitchFamily="34" charset="0"/>
+                <a:ea typeface="DM Sans" pitchFamily="34" charset="-122"/>
+                <a:cs typeface="DM Sans" pitchFamily="34" charset="-120"/>
+              </a:rPr>
+              <a:t>A saved place to resume.</a:t>
+            </a:r>
+            <a:endParaRPr lang="en-US" sz="2000" dirty="0"/>
+          </a:p>
+        </p:txBody>
+      </p:sp>
+      <p:sp>
+        <p:nvSpPr>
+          <p:cNvPr id="14" name="Text 10"/>
+          <p:cNvSpPr/>
+          <p:nvPr/>
+        </p:nvSpPr>
+        <p:spPr>
+          <a:xfrm>
+            <a:off x="777240" y="6080760"/>
+            <a:ext cx="10607040" cy="201168"/>
+          </a:xfrm>
+          <a:prstGeom prst="rect">
+            <a:avLst/>
+          </a:prstGeom>
+          <a:noFill/>
+          <a:ln/>
+        </p:spPr>
+        <p:txBody>
+          <a:bodyPr wrap="square" lIns="0" tIns="0" rIns="0" bIns="0" rtlCol="0" anchor="ctr"/>
+          <a:lstStyle/>
+          <a:p>
+            <a:pPr indent="0" marL="0">
+              <a:buNone/>
+            </a:pPr>
+            <a:r>
+              <a:rPr lang="en-US" sz="1000" dirty="0">
+                <a:solidFill>
+                  <a:srgbClr val="69738B"/>
+                </a:solidFill>
+                <a:latin typeface="DM Sans" pitchFamily="34" charset="0"/>
+                <a:ea typeface="DM Sans" pitchFamily="34" charset="-122"/>
+                <a:cs typeface="DM Sans" pitchFamily="34" charset="-120"/>
+              </a:rPr>
+              <a:t>Current verified walkthrough: test SUI. The advertised USDC payment still needs verification.</a:t>
+            </a:r>
+            <a:endParaRPr lang="en-US" sz="1000" dirty="0"/>
           </a:p>
         </p:txBody>
       </p:sp>
@@ -4184,7 +4242,7 @@
                 <a:ea typeface="JetBrains Mono" pitchFamily="34" charset="-122"/>
                 <a:cs typeface="JetBrains Mono" pitchFamily="34" charset="-120"/>
               </a:rPr>
-              <a:t>[ REFRESH / SWITCH / RESET / UPGRADE ]</a:t>
+              <a:t>[ HANDS-ON / DELIVERY + LIFECYCLE ]</a:t>
             </a:r>
             <a:endParaRPr lang="en-US" sz="1000" dirty="0"/>
           </a:p>
@@ -4223,7 +4281,7 @@
                 <a:ea typeface="DM Sans" pitchFamily="34" charset="-122"/>
                 <a:cs typeface="DM Sans" pitchFamily="34" charset="-120"/>
               </a:rPr>
-              <a:t>The lifecycle is part of the demo.</a:t>
+              <a:t>Pause mid-sale. Recover. Reconcile.</a:t>
             </a:r>
             <a:endParaRPr lang="en-US" sz="3700" dirty="0"/>
           </a:p>
@@ -4307,59 +4365,56 @@
           </a:p>
         </p:txBody>
       </p:sp>
-      <p:sp>
-        <p:nvSpPr>
-          <p:cNvPr id="7" name="Shape 4"/>
-          <p:cNvSpPr/>
-          <p:nvPr/>
-        </p:nvSpPr>
-        <p:spPr>
-          <a:xfrm>
-            <a:off x="777240" y="2286000"/>
-            <a:ext cx="5204460" cy="1664208"/>
-          </a:xfrm>
-          <a:prstGeom prst="rect">
-            <a:avLst/>
-          </a:prstGeom>
-          <a:solidFill>
-            <a:srgbClr val="FFFFFF"/>
-          </a:solidFill>
-          <a:ln w="12700">
-            <a:solidFill>
-              <a:srgbClr val="FFFFFF">
-                <a:alpha val="0"/>
-              </a:srgbClr>
-            </a:solidFill>
-            <a:prstDash val="solid"/>
-          </a:ln>
-        </p:spPr>
-      </p:sp>
-      <p:sp>
-        <p:nvSpPr>
-          <p:cNvPr id="8" name="Text 5"/>
-          <p:cNvSpPr/>
-          <p:nvPr/>
-        </p:nvSpPr>
-        <p:spPr>
-          <a:xfrm>
-            <a:off x="1005840" y="2496312"/>
-            <a:ext cx="4747260" cy="274320"/>
-          </a:xfrm>
-          <a:prstGeom prst="rect">
-            <a:avLst/>
-          </a:prstGeom>
-          <a:noFill/>
-          <a:ln/>
-        </p:spPr>
-        <p:txBody>
-          <a:bodyPr wrap="square" lIns="0" tIns="0" rIns="0" bIns="0" rtlCol="0" anchor="ctr"/>
-          <a:lstStyle/>
-          <a:p>
-            <a:pPr indent="0" marL="0">
-              <a:buNone/>
-            </a:pPr>
-            <a:r>
-              <a:rPr lang="en-US" sz="1100" dirty="0">
+      <p:pic>
+        <p:nvPicPr>
+          <p:cNvPr id="7" name="Image 0" descr="/Users/emmanuelosadebe/Documents/SUI-HUB-CLASSES/account-layer-week/day3-till/teaching/assets/recovery.png">    </p:cNvPr>
+          <p:cNvPicPr>
+            <a:picLocks noChangeAspect="1"/>
+          </p:cNvPicPr>
+          <p:nvPr/>
+        </p:nvPicPr>
+        <p:blipFill>
+          <a:blip r:embed="rId1"/>
+          <a:stretch>
+            <a:fillRect/>
+          </a:stretch>
+        </p:blipFill>
+        <p:spPr>
+          <a:xfrm>
+            <a:off x="2002370" y="2194560"/>
+            <a:ext cx="4133419" cy="3703320"/>
+          </a:xfrm>
+          <a:prstGeom prst="rect">
+            <a:avLst/>
+          </a:prstGeom>
+        </p:spPr>
+      </p:pic>
+      <p:sp>
+        <p:nvSpPr>
+          <p:cNvPr id="8" name="Text 4"/>
+          <p:cNvSpPr/>
+          <p:nvPr/>
+        </p:nvSpPr>
+        <p:spPr>
+          <a:xfrm>
+            <a:off x="7818120" y="2423160"/>
+            <a:ext cx="3474720" cy="228600"/>
+          </a:xfrm>
+          <a:prstGeom prst="rect">
+            <a:avLst/>
+          </a:prstGeom>
+          <a:noFill/>
+          <a:ln/>
+        </p:spPr>
+        <p:txBody>
+          <a:bodyPr wrap="square" lIns="0" tIns="0" rIns="0" bIns="0" rtlCol="0" anchor="ctr"/>
+          <a:lstStyle/>
+          <a:p>
+            <a:pPr indent="0" marL="0">
+              <a:buNone/>
+            </a:pPr>
+            <a:r>
+              <a:rPr lang="en-US" sz="1000" spc="100" kern="0" dirty="0">
                 <a:solidFill>
                   <a:srgbClr val="2338FF"/>
                 </a:solidFill>
@@ -4367,38 +4422,38 @@
                 <a:ea typeface="JetBrains Mono" pitchFamily="34" charset="-122"/>
                 <a:cs typeface="JetBrains Mono" pitchFamily="34" charset="-120"/>
               </a:rPr>
-              <a:t>REFRESH</a:t>
-            </a:r>
-            <a:endParaRPr lang="en-US" sz="1100" dirty="0"/>
-          </a:p>
-        </p:txBody>
-      </p:sp>
-      <p:sp>
-        <p:nvSpPr>
-          <p:cNvPr id="9" name="Text 6"/>
-          <p:cNvSpPr/>
-          <p:nvPr/>
-        </p:nvSpPr>
-        <p:spPr>
-          <a:xfrm>
-            <a:off x="1005840" y="2889504"/>
-            <a:ext cx="4747260" cy="365760"/>
-          </a:xfrm>
-          <a:prstGeom prst="rect">
-            <a:avLst/>
-          </a:prstGeom>
-          <a:noFill/>
-          <a:ln/>
-        </p:spPr>
-        <p:txBody>
-          <a:bodyPr wrap="square" lIns="0" tIns="0" rIns="0" bIns="0" rtlCol="0" anchor="ctr"/>
-          <a:lstStyle/>
-          <a:p>
-            <a:pPr indent="0" marL="0">
-              <a:buNone/>
-            </a:pPr>
-            <a:r>
-              <a:rPr lang="en-US" sz="2300" dirty="0">
+              <a:t>01 / PAUSE</a:t>
+            </a:r>
+            <a:endParaRPr lang="en-US" sz="1000" dirty="0"/>
+          </a:p>
+        </p:txBody>
+      </p:sp>
+      <p:sp>
+        <p:nvSpPr>
+          <p:cNvPr id="9" name="Text 5"/>
+          <p:cNvSpPr/>
+          <p:nvPr/>
+        </p:nvSpPr>
+        <p:spPr>
+          <a:xfrm>
+            <a:off x="7818120" y="2743200"/>
+            <a:ext cx="3474720" cy="731520"/>
+          </a:xfrm>
+          <a:prstGeom prst="rect">
+            <a:avLst/>
+          </a:prstGeom>
+          <a:noFill/>
+          <a:ln/>
+        </p:spPr>
+        <p:txBody>
+          <a:bodyPr wrap="square" lIns="0" tIns="0" rIns="0" bIns="0" rtlCol="0" anchor="ctr"/>
+          <a:lstStyle/>
+          <a:p>
+            <a:pPr indent="0" marL="0">
+              <a:buNone/>
+            </a:pPr>
+            <a:r>
+              <a:rPr lang="en-US" sz="2000" dirty="0">
                 <a:solidFill>
                   <a:srgbClr val="131725"/>
                 </a:solidFill>
@@ -4406,480 +4461,204 @@
                 <a:ea typeface="DM Sans" pitchFamily="34" charset="-122"/>
                 <a:cs typeface="DM Sans" pitchFamily="34" charset="-120"/>
               </a:rPr>
-              <a:t>Resume explicitly.</a:t>
-            </a:r>
-            <a:endParaRPr lang="en-US" sz="2300" dirty="0"/>
-          </a:p>
-        </p:txBody>
-      </p:sp>
-      <p:sp>
-        <p:nvSpPr>
-          <p:cNvPr id="10" name="Text 7"/>
-          <p:cNvSpPr/>
-          <p:nvPr/>
-        </p:nvSpPr>
-        <p:spPr>
-          <a:xfrm>
-            <a:off x="1005840" y="3310128"/>
-            <a:ext cx="4747260" cy="530352"/>
-          </a:xfrm>
-          <a:prstGeom prst="rect">
-            <a:avLst/>
-          </a:prstGeom>
-          <a:noFill/>
-          <a:ln/>
-        </p:spPr>
-        <p:txBody>
-          <a:bodyPr wrap="square" lIns="0" tIns="0" rIns="0" bIns="0" rtlCol="0" anchor="ctr"/>
-          <a:lstStyle/>
-          <a:p>
-            <a:pPr indent="0" marL="0">
-              <a:buNone/>
-            </a:pPr>
-            <a:r>
-              <a:rPr lang="en-US" sz="1500" dirty="0">
-                <a:solidFill>
-                  <a:srgbClr val="69738B"/>
+              <a:t>The listener stops.</a:t>
+            </a:r>
+            <a:endParaRPr lang="en-US" sz="2000" dirty="0"/>
+          </a:p>
+        </p:txBody>
+      </p:sp>
+      <p:sp>
+        <p:nvSpPr>
+          <p:cNvPr id="10" name="Text 6"/>
+          <p:cNvSpPr/>
+          <p:nvPr/>
+        </p:nvSpPr>
+        <p:spPr>
+          <a:xfrm>
+            <a:off x="7818120" y="3557016"/>
+            <a:ext cx="3474720" cy="228600"/>
+          </a:xfrm>
+          <a:prstGeom prst="rect">
+            <a:avLst/>
+          </a:prstGeom>
+          <a:noFill/>
+          <a:ln/>
+        </p:spPr>
+        <p:txBody>
+          <a:bodyPr wrap="square" lIns="0" tIns="0" rIns="0" bIns="0" rtlCol="0" anchor="ctr"/>
+          <a:lstStyle/>
+          <a:p>
+            <a:pPr indent="0" marL="0">
+              <a:buNone/>
+            </a:pPr>
+            <a:r>
+              <a:rPr lang="en-US" sz="1000" spc="100" kern="0" dirty="0">
+                <a:solidFill>
+                  <a:srgbClr val="2338FF"/>
+                </a:solidFill>
+                <a:latin typeface="JetBrains Mono" pitchFamily="34" charset="0"/>
+                <a:ea typeface="JetBrains Mono" pitchFamily="34" charset="-122"/>
+                <a:cs typeface="JetBrains Mono" pitchFamily="34" charset="-120"/>
+              </a:rPr>
+              <a:t>02 / PAY</a:t>
+            </a:r>
+            <a:endParaRPr lang="en-US" sz="1000" dirty="0"/>
+          </a:p>
+        </p:txBody>
+      </p:sp>
+      <p:sp>
+        <p:nvSpPr>
+          <p:cNvPr id="11" name="Text 7"/>
+          <p:cNvSpPr/>
+          <p:nvPr/>
+        </p:nvSpPr>
+        <p:spPr>
+          <a:xfrm>
+            <a:off x="7818120" y="3877056"/>
+            <a:ext cx="3474720" cy="731520"/>
+          </a:xfrm>
+          <a:prstGeom prst="rect">
+            <a:avLst/>
+          </a:prstGeom>
+          <a:noFill/>
+          <a:ln/>
+        </p:spPr>
+        <p:txBody>
+          <a:bodyPr wrap="square" lIns="0" tIns="0" rIns="0" bIns="0" rtlCol="0" anchor="ctr"/>
+          <a:lstStyle/>
+          <a:p>
+            <a:pPr indent="0" marL="0">
+              <a:buNone/>
+            </a:pPr>
+            <a:r>
+              <a:rPr lang="en-US" sz="2000" dirty="0">
+                <a:solidFill>
+                  <a:srgbClr val="131725"/>
                 </a:solidFill>
                 <a:latin typeface="DM Sans" pitchFamily="34" charset="0"/>
                 <a:ea typeface="DM Sans" pitchFamily="34" charset="-122"/>
                 <a:cs typeface="DM Sans" pitchFamily="34" charset="-120"/>
               </a:rPr>
-              <a:t>Open till restores the saved per-shop position.</a:t>
-            </a:r>
-            <a:endParaRPr lang="en-US" sz="1500" dirty="0"/>
-          </a:p>
-        </p:txBody>
-      </p:sp>
-      <p:sp>
-        <p:nvSpPr>
-          <p:cNvPr id="11" name="Shape 8"/>
-          <p:cNvSpPr/>
-          <p:nvPr/>
-        </p:nvSpPr>
-        <p:spPr>
-          <a:xfrm>
-            <a:off x="6210300" y="2286000"/>
-            <a:ext cx="5204460" cy="1664208"/>
-          </a:xfrm>
-          <a:prstGeom prst="rect">
-            <a:avLst/>
-          </a:prstGeom>
-          <a:solidFill>
-            <a:srgbClr val="2338FF"/>
-          </a:solidFill>
-          <a:ln w="12700">
-            <a:solidFill>
-              <a:srgbClr val="2338FF">
-                <a:alpha val="0"/>
-              </a:srgbClr>
-            </a:solidFill>
-            <a:prstDash val="solid"/>
-          </a:ln>
-        </p:spPr>
-      </p:sp>
-      <p:sp>
-        <p:nvSpPr>
-          <p:cNvPr id="12" name="Text 9"/>
-          <p:cNvSpPr/>
-          <p:nvPr/>
-        </p:nvSpPr>
-        <p:spPr>
-          <a:xfrm>
-            <a:off x="6438900" y="2496312"/>
-            <a:ext cx="4747260" cy="274320"/>
-          </a:xfrm>
-          <a:prstGeom prst="rect">
-            <a:avLst/>
-          </a:prstGeom>
-          <a:noFill/>
-          <a:ln/>
-        </p:spPr>
-        <p:txBody>
-          <a:bodyPr wrap="square" lIns="0" tIns="0" rIns="0" bIns="0" rtlCol="0" anchor="ctr"/>
-          <a:lstStyle/>
-          <a:p>
-            <a:pPr indent="0" marL="0">
-              <a:buNone/>
-            </a:pPr>
-            <a:r>
-              <a:rPr lang="en-US" sz="1100" dirty="0">
-                <a:solidFill>
-                  <a:srgbClr val="BFC9FF"/>
-                </a:solidFill>
-                <a:latin typeface="JetBrains Mono" pitchFamily="34" charset="0"/>
-                <a:ea typeface="JetBrains Mono" pitchFamily="34" charset="-122"/>
-                <a:cs typeface="JetBrains Mono" pitchFamily="34" charset="-120"/>
-              </a:rPr>
-              <a:t>SWITCH ACCOUNT</a:t>
-            </a:r>
-            <a:endParaRPr lang="en-US" sz="1100" dirty="0"/>
-          </a:p>
-        </p:txBody>
-      </p:sp>
-      <p:sp>
-        <p:nvSpPr>
-          <p:cNvPr id="13" name="Text 10"/>
-          <p:cNvSpPr/>
-          <p:nvPr/>
-        </p:nvSpPr>
-        <p:spPr>
-          <a:xfrm>
-            <a:off x="6438900" y="2889504"/>
-            <a:ext cx="4747260" cy="365760"/>
-          </a:xfrm>
-          <a:prstGeom prst="rect">
-            <a:avLst/>
-          </a:prstGeom>
-          <a:noFill/>
-          <a:ln/>
-        </p:spPr>
-        <p:txBody>
-          <a:bodyPr wrap="square" lIns="0" tIns="0" rIns="0" bIns="0" rtlCol="0" anchor="ctr"/>
-          <a:lstStyle/>
-          <a:p>
-            <a:pPr indent="0" marL="0">
-              <a:buNone/>
-            </a:pPr>
-            <a:r>
-              <a:rPr lang="en-US" sz="2300" dirty="0">
-                <a:solidFill>
-                  <a:srgbClr val="FFFFFF"/>
+              <a:t>The chain keeps going.</a:t>
+            </a:r>
+            <a:endParaRPr lang="en-US" sz="2000" dirty="0"/>
+          </a:p>
+        </p:txBody>
+      </p:sp>
+      <p:sp>
+        <p:nvSpPr>
+          <p:cNvPr id="12" name="Text 8"/>
+          <p:cNvSpPr/>
+          <p:nvPr/>
+        </p:nvSpPr>
+        <p:spPr>
+          <a:xfrm>
+            <a:off x="7818120" y="4690872"/>
+            <a:ext cx="3474720" cy="228600"/>
+          </a:xfrm>
+          <a:prstGeom prst="rect">
+            <a:avLst/>
+          </a:prstGeom>
+          <a:noFill/>
+          <a:ln/>
+        </p:spPr>
+        <p:txBody>
+          <a:bodyPr wrap="square" lIns="0" tIns="0" rIns="0" bIns="0" rtlCol="0" anchor="ctr"/>
+          <a:lstStyle/>
+          <a:p>
+            <a:pPr indent="0" marL="0">
+              <a:buNone/>
+            </a:pPr>
+            <a:r>
+              <a:rPr lang="en-US" sz="1000" spc="100" kern="0" dirty="0">
+                <a:solidFill>
+                  <a:srgbClr val="2338FF"/>
+                </a:solidFill>
+                <a:latin typeface="JetBrains Mono" pitchFamily="34" charset="0"/>
+                <a:ea typeface="JetBrains Mono" pitchFamily="34" charset="-122"/>
+                <a:cs typeface="JetBrains Mono" pitchFamily="34" charset="-120"/>
+              </a:rPr>
+              <a:t>03 / RESUME</a:t>
+            </a:r>
+            <a:endParaRPr lang="en-US" sz="1000" dirty="0"/>
+          </a:p>
+        </p:txBody>
+      </p:sp>
+      <p:sp>
+        <p:nvSpPr>
+          <p:cNvPr id="13" name="Text 9"/>
+          <p:cNvSpPr/>
+          <p:nvPr/>
+        </p:nvSpPr>
+        <p:spPr>
+          <a:xfrm>
+            <a:off x="7818120" y="5010912"/>
+            <a:ext cx="3474720" cy="731520"/>
+          </a:xfrm>
+          <a:prstGeom prst="rect">
+            <a:avLst/>
+          </a:prstGeom>
+          <a:noFill/>
+          <a:ln/>
+        </p:spPr>
+        <p:txBody>
+          <a:bodyPr wrap="square" lIns="0" tIns="0" rIns="0" bIns="0" rtlCol="0" anchor="ctr"/>
+          <a:lstStyle/>
+          <a:p>
+            <a:pPr indent="0" marL="0">
+              <a:buNone/>
+            </a:pPr>
+            <a:r>
+              <a:rPr lang="en-US" sz="2000" dirty="0">
+                <a:solidFill>
+                  <a:srgbClr val="131725"/>
                 </a:solidFill>
                 <a:latin typeface="DM Sans" pitchFamily="34" charset="0"/>
                 <a:ea typeface="DM Sans" pitchFamily="34" charset="-122"/>
                 <a:cs typeface="DM Sans" pitchFamily="34" charset="-120"/>
               </a:rPr>
-              <a:t>Switch the shop too.</a:t>
-            </a:r>
-            <a:endParaRPr lang="en-US" sz="2300" dirty="0"/>
-          </a:p>
-        </p:txBody>
-      </p:sp>
-      <p:sp>
-        <p:nvSpPr>
-          <p:cNvPr id="14" name="Text 11"/>
-          <p:cNvSpPr/>
-          <p:nvPr/>
-        </p:nvSpPr>
-        <p:spPr>
-          <a:xfrm>
-            <a:off x="6438900" y="3310128"/>
-            <a:ext cx="4747260" cy="530352"/>
-          </a:xfrm>
-          <a:prstGeom prst="rect">
-            <a:avLst/>
-          </a:prstGeom>
-          <a:noFill/>
-          <a:ln/>
-        </p:spPr>
-        <p:txBody>
-          <a:bodyPr wrap="square" lIns="0" tIns="0" rIns="0" bIns="0" rtlCol="0" anchor="ctr"/>
-          <a:lstStyle/>
-          <a:p>
-            <a:pPr indent="0" marL="0">
-              <a:buNone/>
-            </a:pPr>
-            <a:r>
-              <a:rPr lang="en-US" sz="1500" dirty="0">
-                <a:solidFill>
-                  <a:srgbClr val="DFE4FF"/>
+              <a:t>Missed receipts return.</a:t>
+            </a:r>
+            <a:endParaRPr lang="en-US" sz="2000" dirty="0"/>
+          </a:p>
+        </p:txBody>
+      </p:sp>
+      <p:sp>
+        <p:nvSpPr>
+          <p:cNvPr id="14" name="Text 10"/>
+          <p:cNvSpPr/>
+          <p:nvPr/>
+        </p:nvSpPr>
+        <p:spPr>
+          <a:xfrm>
+            <a:off x="777240" y="6080760"/>
+            <a:ext cx="10607040" cy="201168"/>
+          </a:xfrm>
+          <a:prstGeom prst="rect">
+            <a:avLst/>
+          </a:prstGeom>
+          <a:noFill/>
+          <a:ln/>
+        </p:spPr>
+        <p:txBody>
+          <a:bodyPr wrap="square" lIns="0" tIns="0" rIns="0" bIns="0" rtlCol="0" anchor="ctr"/>
+          <a:lstStyle/>
+          <a:p>
+            <a:pPr indent="0" marL="0">
+              <a:buNone/>
+            </a:pPr>
+            <a:r>
+              <a:rPr lang="en-US" sz="1000" dirty="0">
+                <a:solidFill>
+                  <a:srgbClr val="69738B"/>
                 </a:solidFill>
                 <a:latin typeface="DM Sans" pitchFamily="34" charset="0"/>
                 <a:ea typeface="DM Sans" pitchFamily="34" charset="-122"/>
                 <a:cs typeface="DM Sans" pitchFamily="34" charset="-120"/>
               </a:rPr>
-              <a:t>A connected payer gets its own personal receiving address.</a:t>
-            </a:r>
-            <a:endParaRPr lang="en-US" sz="1500" dirty="0"/>
-          </a:p>
-        </p:txBody>
-      </p:sp>
-      <p:sp>
-        <p:nvSpPr>
-          <p:cNvPr id="15" name="Shape 12"/>
-          <p:cNvSpPr/>
-          <p:nvPr/>
-        </p:nvSpPr>
-        <p:spPr>
-          <a:xfrm>
-            <a:off x="777240" y="4114800"/>
-            <a:ext cx="5204460" cy="1664208"/>
-          </a:xfrm>
-          <a:prstGeom prst="rect">
-            <a:avLst/>
-          </a:prstGeom>
-          <a:solidFill>
-            <a:srgbClr val="FFFFFF"/>
-          </a:solidFill>
-          <a:ln w="12700">
-            <a:solidFill>
-              <a:srgbClr val="FFFFFF">
-                <a:alpha val="0"/>
-              </a:srgbClr>
-            </a:solidFill>
-            <a:prstDash val="solid"/>
-          </a:ln>
-        </p:spPr>
-      </p:sp>
-      <p:sp>
-        <p:nvSpPr>
-          <p:cNvPr id="16" name="Text 13"/>
-          <p:cNvSpPr/>
-          <p:nvPr/>
-        </p:nvSpPr>
-        <p:spPr>
-          <a:xfrm>
-            <a:off x="1005840" y="4325112"/>
-            <a:ext cx="4747260" cy="274320"/>
-          </a:xfrm>
-          <a:prstGeom prst="rect">
-            <a:avLst/>
-          </a:prstGeom>
-          <a:noFill/>
-          <a:ln/>
-        </p:spPr>
-        <p:txBody>
-          <a:bodyPr wrap="square" lIns="0" tIns="0" rIns="0" bIns="0" rtlCol="0" anchor="ctr"/>
-          <a:lstStyle/>
-          <a:p>
-            <a:pPr indent="0" marL="0">
-              <a:buNone/>
-            </a:pPr>
-            <a:r>
-              <a:rPr lang="en-US" sz="1100" dirty="0">
-                <a:solidFill>
-                  <a:srgbClr val="2338FF"/>
-                </a:solidFill>
-                <a:latin typeface="JetBrains Mono" pitchFamily="34" charset="0"/>
-                <a:ea typeface="JetBrains Mono" pitchFamily="34" charset="-122"/>
-                <a:cs typeface="JetBrains Mono" pitchFamily="34" charset="-120"/>
-              </a:rPr>
-              <a:t>RESET SESSION</a:t>
-            </a:r>
-            <a:endParaRPr lang="en-US" sz="1100" dirty="0"/>
-          </a:p>
-        </p:txBody>
-      </p:sp>
-      <p:sp>
-        <p:nvSpPr>
-          <p:cNvPr id="17" name="Text 14"/>
-          <p:cNvSpPr/>
-          <p:nvPr/>
-        </p:nvSpPr>
-        <p:spPr>
-          <a:xfrm>
-            <a:off x="1005840" y="4718304"/>
-            <a:ext cx="4747260" cy="365760"/>
-          </a:xfrm>
-          <a:prstGeom prst="rect">
-            <a:avLst/>
-          </a:prstGeom>
-          <a:noFill/>
-          <a:ln/>
-        </p:spPr>
-        <p:txBody>
-          <a:bodyPr wrap="square" lIns="0" tIns="0" rIns="0" bIns="0" rtlCol="0" anchor="ctr"/>
-          <a:lstStyle/>
-          <a:p>
-            <a:pPr indent="0" marL="0">
-              <a:buNone/>
-            </a:pPr>
-            <a:r>
-              <a:rPr lang="en-US" sz="2300" dirty="0">
-                <a:solidFill>
-                  <a:srgbClr val="131725"/>
-                </a:solidFill>
-                <a:latin typeface="DM Sans" pitchFamily="34" charset="0"/>
-                <a:ea typeface="DM Sans" pitchFamily="34" charset="-122"/>
-                <a:cs typeface="DM Sans" pitchFamily="34" charset="-120"/>
-              </a:rPr>
-              <a:t>Clear tracking only.</a:t>
-            </a:r>
-            <a:endParaRPr lang="en-US" sz="2300" dirty="0"/>
-          </a:p>
-        </p:txBody>
-      </p:sp>
-      <p:sp>
-        <p:nvSpPr>
-          <p:cNvPr id="18" name="Text 15"/>
-          <p:cNvSpPr/>
-          <p:nvPr/>
-        </p:nvSpPr>
-        <p:spPr>
-          <a:xfrm>
-            <a:off x="1005840" y="5138928"/>
-            <a:ext cx="4747260" cy="530352"/>
-          </a:xfrm>
-          <a:prstGeom prst="rect">
-            <a:avLst/>
-          </a:prstGeom>
-          <a:noFill/>
-          <a:ln/>
-        </p:spPr>
-        <p:txBody>
-          <a:bodyPr wrap="square" lIns="0" tIns="0" rIns="0" bIns="0" rtlCol="0" anchor="ctr"/>
-          <a:lstStyle/>
-          <a:p>
-            <a:pPr indent="0" marL="0">
-              <a:buNone/>
-            </a:pPr>
-            <a:r>
-              <a:rPr lang="en-US" sz="1500" dirty="0">
-                <a:solidFill>
-                  <a:srgbClr val="69738B"/>
-                </a:solidFill>
-                <a:latin typeface="DM Sans" pitchFamily="34" charset="0"/>
-                <a:ea typeface="DM Sans" pitchFamily="34" charset="-122"/>
-                <a:cs typeface="DM Sans" pitchFamily="34" charset="-120"/>
-              </a:rPr>
-              <a:t>Existing onchain funds and wallet keys stay in place.</a:t>
-            </a:r>
-            <a:endParaRPr lang="en-US" sz="1500" dirty="0"/>
-          </a:p>
-        </p:txBody>
-      </p:sp>
-      <p:sp>
-        <p:nvSpPr>
-          <p:cNvPr id="19" name="Shape 16"/>
-          <p:cNvSpPr/>
-          <p:nvPr/>
-        </p:nvSpPr>
-        <p:spPr>
-          <a:xfrm>
-            <a:off x="6210300" y="4114800"/>
-            <a:ext cx="5204460" cy="1664208"/>
-          </a:xfrm>
-          <a:prstGeom prst="rect">
-            <a:avLst/>
-          </a:prstGeom>
-          <a:solidFill>
-            <a:srgbClr val="FFFFFF"/>
-          </a:solidFill>
-          <a:ln w="12700">
-            <a:solidFill>
-              <a:srgbClr val="FFFFFF">
-                <a:alpha val="0"/>
-              </a:srgbClr>
-            </a:solidFill>
-            <a:prstDash val="solid"/>
-          </a:ln>
-        </p:spPr>
-      </p:sp>
-      <p:sp>
-        <p:nvSpPr>
-          <p:cNvPr id="20" name="Text 17"/>
-          <p:cNvSpPr/>
-          <p:nvPr/>
-        </p:nvSpPr>
-        <p:spPr>
-          <a:xfrm>
-            <a:off x="6438900" y="4325112"/>
-            <a:ext cx="4747260" cy="274320"/>
-          </a:xfrm>
-          <a:prstGeom prst="rect">
-            <a:avLst/>
-          </a:prstGeom>
-          <a:noFill/>
-          <a:ln/>
-        </p:spPr>
-        <p:txBody>
-          <a:bodyPr wrap="square" lIns="0" tIns="0" rIns="0" bIns="0" rtlCol="0" anchor="ctr"/>
-          <a:lstStyle/>
-          <a:p>
-            <a:pPr indent="0" marL="0">
-              <a:buNone/>
-            </a:pPr>
-            <a:r>
-              <a:rPr lang="en-US" sz="1100" dirty="0">
-                <a:solidFill>
-                  <a:srgbClr val="2338FF"/>
-                </a:solidFill>
-                <a:latin typeface="JetBrains Mono" pitchFamily="34" charset="0"/>
-                <a:ea typeface="JetBrains Mono" pitchFamily="34" charset="-122"/>
-                <a:cs typeface="JetBrains Mono" pitchFamily="34" charset="-120"/>
-              </a:rPr>
-              <a:t>UPGRADE</a:t>
-            </a:r>
-            <a:endParaRPr lang="en-US" sz="1100" dirty="0"/>
-          </a:p>
-        </p:txBody>
-      </p:sp>
-      <p:sp>
-        <p:nvSpPr>
-          <p:cNvPr id="21" name="Text 18"/>
-          <p:cNvSpPr/>
-          <p:nvPr/>
-        </p:nvSpPr>
-        <p:spPr>
-          <a:xfrm>
-            <a:off x="6438900" y="4718304"/>
-            <a:ext cx="4747260" cy="365760"/>
-          </a:xfrm>
-          <a:prstGeom prst="rect">
-            <a:avLst/>
-          </a:prstGeom>
-          <a:noFill/>
-          <a:ln/>
-        </p:spPr>
-        <p:txBody>
-          <a:bodyPr wrap="square" lIns="0" tIns="0" rIns="0" bIns="0" rtlCol="0" anchor="ctr"/>
-          <a:lstStyle/>
-          <a:p>
-            <a:pPr indent="0" marL="0">
-              <a:buNone/>
-            </a:pPr>
-            <a:r>
-              <a:rPr lang="en-US" sz="2300" dirty="0">
-                <a:solidFill>
-                  <a:srgbClr val="131725"/>
-                </a:solidFill>
-                <a:latin typeface="DM Sans" pitchFamily="34" charset="0"/>
-                <a:ea typeface="DM Sans" pitchFamily="34" charset="-122"/>
-                <a:cs typeface="DM Sans" pitchFamily="34" charset="-120"/>
-              </a:rPr>
-              <a:t>Treat cursors carefully.</a:t>
-            </a:r>
-            <a:endParaRPr lang="en-US" sz="2300" dirty="0"/>
-          </a:p>
-        </p:txBody>
-      </p:sp>
-      <p:sp>
-        <p:nvSpPr>
-          <p:cNvPr id="22" name="Text 19"/>
-          <p:cNvSpPr/>
-          <p:nvPr/>
-        </p:nvSpPr>
-        <p:spPr>
-          <a:xfrm>
-            <a:off x="6438900" y="5138928"/>
-            <a:ext cx="4747260" cy="530352"/>
-          </a:xfrm>
-          <a:prstGeom prst="rect">
-            <a:avLst/>
-          </a:prstGeom>
-          <a:noFill/>
-          <a:ln/>
-        </p:spPr>
-        <p:txBody>
-          <a:bodyPr wrap="square" lIns="0" tIns="0" rIns="0" bIns="0" rtlCol="0" anchor="ctr"/>
-          <a:lstStyle/>
-          <a:p>
-            <a:pPr indent="0" marL="0">
-              <a:buNone/>
-            </a:pPr>
-            <a:r>
-              <a:rPr lang="en-US" sz="1500" dirty="0">
-                <a:solidFill>
-                  <a:srgbClr val="69738B"/>
-                </a:solidFill>
-                <a:latin typeface="DM Sans" pitchFamily="34" charset="0"/>
-                <a:ea typeface="DM Sans" pitchFamily="34" charset="-122"/>
-                <a:cs typeface="DM Sans" pitchFamily="34" charset="-120"/>
-              </a:rPr>
-              <a:t>Version local state. Rebuild if query semantics change.</a:t>
-            </a:r>
-            <a:endParaRPr lang="en-US" sz="1500" dirty="0"/>
+              <a:t>Reload → resume   /   Switch payer → personal shop   /   Reset tracking → funds stay onchain</a:t>
+            </a:r>
+            <a:endParaRPr lang="en-US" sz="1000" dirty="0"/>
           </a:p>
         </p:txBody>
       </p:sp>
@@ -4894,6 +4673,390 @@
 <file path=ppt/slides/slide14.xml><?xml version="1.0" encoding="utf-8"?>
 <p:sld xmlns:a="http://schemas.openxmlformats.org/drawingml/2006/main" xmlns:r="http://schemas.openxmlformats.org/officeDocument/2006/relationships" xmlns:p="http://schemas.openxmlformats.org/presentationml/2006/main">
   <p:cSld name="Slide 14">
+    <p:bg>
+      <p:bgPr>
+        <a:solidFill>
+          <a:srgbClr val="07080F"/>
+        </a:solidFill>
+      </p:bgPr>
+    </p:bg>
+    <p:spTree>
+      <p:nvGrpSpPr>
+        <p:cNvPr id="1" name=""/>
+        <p:cNvGrpSpPr/>
+        <p:nvPr/>
+      </p:nvGrpSpPr>
+      <p:grpSpPr>
+        <a:xfrm>
+          <a:off x="0" y="0"/>
+          <a:ext cx="0" cy="0"/>
+          <a:chOff x="0" y="0"/>
+          <a:chExt cx="0" cy="0"/>
+        </a:xfrm>
+      </p:grpSpPr>
+      <p:sp>
+        <p:nvSpPr>
+          <p:cNvPr id="2" name="Text 0"/>
+          <p:cNvSpPr/>
+          <p:nvPr/>
+        </p:nvSpPr>
+        <p:spPr>
+          <a:xfrm>
+            <a:off x="777240" y="502920"/>
+            <a:ext cx="10637520" cy="274320"/>
+          </a:xfrm>
+          <a:prstGeom prst="rect">
+            <a:avLst/>
+          </a:prstGeom>
+          <a:noFill/>
+          <a:ln/>
+        </p:spPr>
+        <p:txBody>
+          <a:bodyPr wrap="square" lIns="0" tIns="0" rIns="0" bIns="0" rtlCol="0" anchor="ctr"/>
+          <a:lstStyle/>
+          <a:p>
+            <a:pPr indent="0" marL="0">
+              <a:buNone/>
+            </a:pPr>
+            <a:r>
+              <a:rPr lang="en-US" sz="1000" spc="150" kern="0" dirty="0">
+                <a:solidFill>
+                  <a:srgbClr val="ACB8DB"/>
+                </a:solidFill>
+                <a:latin typeface="JetBrains Mono" pitchFamily="34" charset="0"/>
+                <a:ea typeface="JetBrains Mono" pitchFamily="34" charset="-122"/>
+                <a:cs typeface="JetBrains Mono" pitchFamily="34" charset="-120"/>
+              </a:rPr>
+              <a:t>[ MIGRATION/ / RUNNABLE EXAMPLES ]</a:t>
+            </a:r>
+            <a:endParaRPr lang="en-US" sz="1000" dirty="0"/>
+          </a:p>
+        </p:txBody>
+      </p:sp>
+      <p:sp>
+        <p:nvSpPr>
+          <p:cNvPr id="3" name="Text 1"/>
+          <p:cNvSpPr/>
+          <p:nvPr/>
+        </p:nvSpPr>
+        <p:spPr>
+          <a:xfrm>
+            <a:off x="777240" y="932688"/>
+            <a:ext cx="10637520" cy="1143000"/>
+          </a:xfrm>
+          <a:prstGeom prst="rect">
+            <a:avLst/>
+          </a:prstGeom>
+          <a:noFill/>
+          <a:ln/>
+        </p:spPr>
+        <p:txBody>
+          <a:bodyPr wrap="square" lIns="0" tIns="0" rIns="0" bIns="0" rtlCol="0" anchor="ctr"/>
+          <a:lstStyle/>
+          <a:p>
+            <a:pPr indent="0" marL="0">
+              <a:buNone/>
+            </a:pPr>
+            <a:r>
+              <a:rPr lang="en-US" sz="3700" dirty="0">
+                <a:solidFill>
+                  <a:srgbClr val="FFFFFF"/>
+                </a:solidFill>
+                <a:latin typeface="DM Sans" pitchFamily="34" charset="0"/>
+                <a:ea typeface="DM Sans" pitchFamily="34" charset="-122"/>
+                <a:cs typeface="DM Sans" pitchFamily="34" charset="-120"/>
+              </a:rPr>
+              <a:t>Migrate a JSON-RPC call.</a:t>
+            </a:r>
+            <a:endParaRPr lang="en-US" sz="3700" dirty="0"/>
+          </a:p>
+        </p:txBody>
+      </p:sp>
+      <p:sp>
+        <p:nvSpPr>
+          <p:cNvPr id="4" name="Text 2"/>
+          <p:cNvSpPr/>
+          <p:nvPr/>
+        </p:nvSpPr>
+        <p:spPr>
+          <a:xfrm>
+            <a:off x="777240" y="6437376"/>
+            <a:ext cx="7315200" cy="182880"/>
+          </a:xfrm>
+          <a:prstGeom prst="rect">
+            <a:avLst/>
+          </a:prstGeom>
+          <a:noFill/>
+          <a:ln/>
+        </p:spPr>
+        <p:txBody>
+          <a:bodyPr wrap="square" lIns="0" tIns="0" rIns="0" bIns="0" rtlCol="0" anchor="ctr"/>
+          <a:lstStyle/>
+          <a:p>
+            <a:pPr indent="0" marL="0">
+              <a:buNone/>
+            </a:pPr>
+            <a:r>
+              <a:rPr lang="en-US" sz="800" spc="100" kern="0" dirty="0">
+                <a:solidFill>
+                  <a:srgbClr val="ACB8DB"/>
+                </a:solidFill>
+                <a:latin typeface="JetBrains Mono" pitchFamily="34" charset="0"/>
+                <a:ea typeface="JetBrains Mono" pitchFamily="34" charset="-122"/>
+                <a:cs typeface="JetBrains Mono" pitchFamily="34" charset="-120"/>
+              </a:rPr>
+              <a:t>SUIHUB LAGOS / ACCOUNT LAYER WEEK</a:t>
+            </a:r>
+            <a:endParaRPr lang="en-US" sz="800" dirty="0"/>
+          </a:p>
+        </p:txBody>
+      </p:sp>
+      <p:sp>
+        <p:nvSpPr>
+          <p:cNvPr id="5" name="Text 3"/>
+          <p:cNvSpPr/>
+          <p:nvPr/>
+        </p:nvSpPr>
+        <p:spPr>
+          <a:xfrm>
+            <a:off x="10698480" y="6419088"/>
+            <a:ext cx="685800" cy="210312"/>
+          </a:xfrm>
+          <a:prstGeom prst="rect">
+            <a:avLst/>
+          </a:prstGeom>
+          <a:noFill/>
+          <a:ln/>
+        </p:spPr>
+        <p:txBody>
+          <a:bodyPr wrap="square" lIns="0" tIns="0" rIns="0" bIns="0" rtlCol="0" anchor="ctr"/>
+          <a:lstStyle/>
+          <a:p>
+            <a:pPr algn="r" indent="0" marL="0">
+              <a:buNone/>
+            </a:pPr>
+            <a:r>
+              <a:rPr lang="en-US" sz="1000" dirty="0">
+                <a:solidFill>
+                  <a:srgbClr val="ACB8DB"/>
+                </a:solidFill>
+                <a:latin typeface="JetBrains Mono" pitchFamily="34" charset="0"/>
+                <a:ea typeface="JetBrains Mono" pitchFamily="34" charset="-122"/>
+                <a:cs typeface="JetBrains Mono" pitchFamily="34" charset="-120"/>
+              </a:rPr>
+              <a:t>14</a:t>
+            </a:r>
+            <a:endParaRPr lang="en-US" sz="1000" dirty="0"/>
+          </a:p>
+        </p:txBody>
+      </p:sp>
+      <p:sp>
+        <p:nvSpPr>
+          <p:cNvPr id="7" name="Shape 4"/>
+          <p:cNvSpPr/>
+          <p:nvPr/>
+        </p:nvSpPr>
+        <p:spPr>
+          <a:xfrm>
+            <a:off x="777240" y="2267712"/>
+            <a:ext cx="10637520" cy="3794760"/>
+          </a:xfrm>
+          <a:prstGeom prst="rect">
+            <a:avLst/>
+          </a:prstGeom>
+          <a:solidFill>
+            <a:srgbClr val="111529"/>
+          </a:solidFill>
+          <a:ln w="12700">
+            <a:solidFill>
+              <a:srgbClr val="111529">
+                <a:alpha val="0"/>
+              </a:srgbClr>
+            </a:solidFill>
+            <a:prstDash val="solid"/>
+          </a:ln>
+        </p:spPr>
+      </p:sp>
+      <p:sp>
+        <p:nvSpPr>
+          <p:cNvPr id="8" name="Text 5"/>
+          <p:cNvSpPr/>
+          <p:nvPr/>
+        </p:nvSpPr>
+        <p:spPr>
+          <a:xfrm>
+            <a:off x="1033272" y="2432304"/>
+            <a:ext cx="10125456" cy="3520440"/>
+          </a:xfrm>
+          <a:prstGeom prst="rect">
+            <a:avLst/>
+          </a:prstGeom>
+          <a:noFill/>
+          <a:ln/>
+        </p:spPr>
+        <p:txBody>
+          <a:bodyPr wrap="square" lIns="0" tIns="0" rIns="0" bIns="0" rtlCol="0" anchor="t"/>
+          <a:lstStyle/>
+          <a:p>
+            <a:pPr indent="0" marL="0">
+              <a:buNone/>
+            </a:pPr>
+            <a:r>
+              <a:rPr lang="en-US" sz="2000" dirty="0">
+                <a:solidFill>
+                  <a:srgbClr val="D9E1FF"/>
+                </a:solidFill>
+                <a:latin typeface="JetBrains Mono" pitchFamily="34" charset="0"/>
+                <a:ea typeface="JetBrains Mono" pitchFamily="34" charset="-122"/>
+                <a:cs typeface="JetBrains Mono" pitchFamily="34" charset="-120"/>
+              </a:rPr>
+              <a:t>pnpm migrate:legacy   # inspect the JSON-RPC error body</a:t>
+            </a:r>
+            <a:endParaRPr lang="en-US" sz="2000" dirty="0"/>
+          </a:p>
+          <a:p>
+            <a:pPr indent="0" marL="0">
+              <a:buNone/>
+            </a:pPr>
+            <a:r>
+              <a:rPr lang="en-US" sz="2000" dirty="0">
+                <a:solidFill>
+                  <a:srgbClr val="D9E1FF"/>
+                </a:solidFill>
+                <a:latin typeface="JetBrains Mono" pitchFamily="34" charset="0"/>
+                <a:ea typeface="JetBrains Mono" pitchFamily="34" charset="-122"/>
+                <a:cs typeface="JetBrains Mono" pitchFamily="34" charset="-120"/>
+              </a:rPr>
+              <a:t>pnpm migrate:grpc     # current balance through gRPC</a:t>
+            </a:r>
+            <a:endParaRPr lang="en-US" sz="2000" dirty="0"/>
+          </a:p>
+          <a:p>
+            <a:pPr indent="0" marL="0">
+              <a:buNone/>
+            </a:pPr>
+            <a:r>
+              <a:rPr lang="en-US" sz="2000" dirty="0">
+                <a:solidFill>
+                  <a:srgbClr val="D9E1FF"/>
+                </a:solidFill>
+                <a:latin typeface="JetBrains Mono" pitchFamily="34" charset="0"/>
+                <a:ea typeface="JetBrains Mono" pitchFamily="34" charset="-122"/>
+                <a:cs typeface="JetBrains Mono" pitchFamily="34" charset="-120"/>
+              </a:rPr>
+              <a:t>pnpm migrate:graphql  # structured indexed query</a:t>
+            </a:r>
+            <a:endParaRPr lang="en-US" sz="2000" dirty="0"/>
+          </a:p>
+          <a:p>
+            <a:pPr indent="0" marL="0">
+              <a:buNone/>
+            </a:pPr>
+            <a:endParaRPr lang="en-US" sz="2000" dirty="0"/>
+          </a:p>
+          <a:p>
+            <a:pPr indent="0" marL="0">
+              <a:buNone/>
+            </a:pPr>
+            <a:r>
+              <a:rPr lang="en-US" sz="2000" dirty="0">
+                <a:solidFill>
+                  <a:srgbClr val="D9E1FF"/>
+                </a:solidFill>
+                <a:latin typeface="JetBrains Mono" pitchFamily="34" charset="0"/>
+                <a:ea typeface="JetBrains Mono" pitchFamily="34" charset="-122"/>
+                <a:cs typeface="JetBrains Mono" pitchFamily="34" charset="-120"/>
+              </a:rPr>
+              <a:t>// From migration/migrated-grpc.ts:</a:t>
+            </a:r>
+            <a:endParaRPr lang="en-US" sz="2000" dirty="0"/>
+          </a:p>
+          <a:p>
+            <a:pPr indent="0" marL="0">
+              <a:buNone/>
+            </a:pPr>
+            <a:r>
+              <a:rPr lang="en-US" sz="2000" dirty="0">
+                <a:solidFill>
+                  <a:srgbClr val="D9E1FF"/>
+                </a:solidFill>
+                <a:latin typeface="JetBrains Mono" pitchFamily="34" charset="0"/>
+                <a:ea typeface="JetBrains Mono" pitchFamily="34" charset="-122"/>
+                <a:cs typeface="JetBrains Mono" pitchFamily="34" charset="-120"/>
+              </a:rPr>
+              <a:t>const { balance } = await client.getBalance({ owner: SHOP });</a:t>
+            </a:r>
+            <a:endParaRPr lang="en-US" sz="2000" dirty="0"/>
+          </a:p>
+          <a:p>
+            <a:pPr indent="0" marL="0">
+              <a:buNone/>
+            </a:pPr>
+            <a:r>
+              <a:rPr lang="en-US" sz="2000" dirty="0">
+                <a:solidFill>
+                  <a:srgbClr val="D9E1FF"/>
+                </a:solidFill>
+                <a:latin typeface="JetBrains Mono" pitchFamily="34" charset="0"/>
+                <a:ea typeface="JetBrains Mono" pitchFamily="34" charset="-122"/>
+                <a:cs typeface="JetBrains Mono" pitchFamily="34" charset="-120"/>
+              </a:rPr>
+              <a:t>console.log('getBalance     ', balance);</a:t>
+            </a:r>
+            <a:endParaRPr lang="en-US" sz="2000" dirty="0"/>
+          </a:p>
+        </p:txBody>
+      </p:sp>
+      <p:sp>
+        <p:nvSpPr>
+          <p:cNvPr id="9" name="Text 6"/>
+          <p:cNvSpPr/>
+          <p:nvPr/>
+        </p:nvSpPr>
+        <p:spPr>
+          <a:xfrm>
+            <a:off x="777240" y="6053328"/>
+            <a:ext cx="10515600" cy="228600"/>
+          </a:xfrm>
+          <a:prstGeom prst="rect">
+            <a:avLst/>
+          </a:prstGeom>
+          <a:noFill/>
+          <a:ln/>
+        </p:spPr>
+        <p:txBody>
+          <a:bodyPr wrap="square" lIns="0" tIns="0" rIns="0" bIns="0" rtlCol="0" anchor="ctr"/>
+          <a:lstStyle/>
+          <a:p>
+            <a:pPr indent="0" marL="0">
+              <a:buNone/>
+            </a:pPr>
+            <a:r>
+              <a:rPr lang="en-US" sz="1100" dirty="0">
+                <a:solidFill>
+                  <a:srgbClr val="ACB8DB"/>
+                </a:solidFill>
+                <a:latin typeface="DM Sans" pitchFamily="34" charset="0"/>
+                <a:ea typeface="DM Sans" pitchFamily="34" charset="-122"/>
+                <a:cs typeface="DM Sans" pitchFamily="34" charset="-120"/>
+              </a:rPr>
+              <a:t>suix_getBalance → getBalance or Address.balance   /   Transaction and event examples included</a:t>
+            </a:r>
+            <a:endParaRPr lang="en-US" sz="1100" dirty="0"/>
+          </a:p>
+        </p:txBody>
+      </p:sp>
+    </p:spTree>
+  </p:cSld>
+  <p:clrMapOvr>
+    <a:masterClrMapping/>
+  </p:clrMapOvr>
+</p:sld>
+</file>
+
+<file path=ppt/slides/slide15.xml><?xml version="1.0" encoding="utf-8"?>
+<p:sld xmlns:a="http://schemas.openxmlformats.org/drawingml/2006/main" xmlns:r="http://schemas.openxmlformats.org/officeDocument/2006/relationships" xmlns:p="http://schemas.openxmlformats.org/presentationml/2006/main">
+  <p:cSld name="Slide 15">
     <p:bg>
       <p:bgPr>
         <a:solidFill>
@@ -4948,7 +5111,7 @@
                 <a:ea typeface="JetBrains Mono" pitchFamily="34" charset="-122"/>
                 <a:cs typeface="JetBrains Mono" pitchFamily="34" charset="-120"/>
               </a:rPr>
-              <a:t>[ STUDENT CHALLENGE ]</a:t>
+              <a:t>[ THE ROOM’S PROJECTS / WORKSHOP ]</a:t>
             </a:r>
             <a:endParaRPr lang="en-US" sz="1000" dirty="0"/>
           </a:p>
@@ -4987,7 +5150,7 @@
                 <a:ea typeface="DM Sans" pitchFamily="34" charset="-122"/>
                 <a:cs typeface="DM Sans" pitchFamily="34" charset="-120"/>
               </a:rPr>
-              <a:t>Your turn: prove all four.</a:t>
+              <a:t>Now migrate one call in your own app.</a:t>
             </a:r>
             <a:endParaRPr lang="en-US" sz="3700" dirty="0"/>
           </a:p>
@@ -5065,7 +5228,7 @@
                 <a:ea typeface="JetBrains Mono" pitchFamily="34" charset="-122"/>
                 <a:cs typeface="JetBrains Mono" pitchFamily="34" charset="-120"/>
               </a:rPr>
-              <a:t>14</a:t>
+              <a:t>15</a:t>
             </a:r>
             <a:endParaRPr lang="en-US" sz="1000" dirty="0"/>
           </a:p>
@@ -5170,7 +5333,7 @@
                 <a:ea typeface="DM Sans" pitchFamily="34" charset="-122"/>
                 <a:cs typeface="DM Sans" pitchFamily="34" charset="-120"/>
               </a:rPr>
-              <a:t>Isolation</a:t>
+              <a:t>Find</a:t>
             </a:r>
             <a:endParaRPr lang="en-US" sz="2500" dirty="0"/>
           </a:p>
@@ -5209,7 +5372,7 @@
                 <a:ea typeface="DM Sans" pitchFamily="34" charset="-122"/>
                 <a:cs typeface="DM Sans" pitchFamily="34" charset="-120"/>
               </a:rPr>
-              <a:t>Two browsers show different shops</a:t>
+              <a:t>Locate one JSON-RPC read or polling loop</a:t>
             </a:r>
             <a:endParaRPr lang="en-US" sz="1600" dirty="0"/>
           </a:p>
@@ -5314,7 +5477,7 @@
                 <a:ea typeface="DM Sans" pitchFamily="34" charset="-122"/>
                 <a:cs typeface="DM Sans" pitchFamily="34" charset="-120"/>
               </a:rPr>
-              <a:t>Payment</a:t>
+              <a:t>Choose</a:t>
             </a:r>
             <a:endParaRPr lang="en-US" sz="2500" dirty="0"/>
           </a:p>
@@ -5353,7 +5516,7 @@
                 <a:ea typeface="DM Sans" pitchFamily="34" charset="-122"/>
                 <a:cs typeface="DM Sans" pitchFamily="34" charset="-120"/>
               </a:rPr>
-              <a:t>A receipt matches a real digest</a:t>
+              <a:t>gRPC, GraphQL, subscription or indexer</a:t>
             </a:r>
             <a:endParaRPr lang="en-US" sz="1600" dirty="0"/>
           </a:p>
@@ -5458,7 +5621,7 @@
                 <a:ea typeface="DM Sans" pitchFamily="34" charset="-122"/>
                 <a:cs typeface="DM Sans" pitchFamily="34" charset="-120"/>
               </a:rPr>
-              <a:t>Recovery</a:t>
+              <a:t>Replace</a:t>
             </a:r>
             <a:endParaRPr lang="en-US" sz="2500" dirty="0"/>
           </a:p>
@@ -5497,7 +5660,7 @@
                 <a:ea typeface="DM Sans" pitchFamily="34" charset="-122"/>
                 <a:cs typeface="DM Sans" pitchFamily="34" charset="-120"/>
               </a:rPr>
-              <a:t>Pause, pay, resume and reload</a:t>
+              <a:t>Port fields, response shape and pagination</a:t>
             </a:r>
             <a:endParaRPr lang="en-US" sz="1600" dirty="0"/>
           </a:p>
@@ -5602,7 +5765,7 @@
                 <a:ea typeface="DM Sans" pitchFamily="34" charset="-122"/>
                 <a:cs typeface="DM Sans" pitchFamily="34" charset="-120"/>
               </a:rPr>
-              <a:t>History</a:t>
+              <a:t>Prove</a:t>
             </a:r>
             <a:endParaRPr lang="en-US" sz="2500" dirty="0"/>
           </a:p>
@@ -5641,7 +5804,7 @@
                 <a:ea typeface="DM Sans" pitchFamily="34" charset="-122"/>
                 <a:cs typeface="DM Sans" pitchFamily="34" charset="-120"/>
               </a:rPr>
-              <a:t>Find the October 2025 receipt</a:t>
+              <a:t>Check results, reconnect and old-history behaviour</a:t>
             </a:r>
             <a:endParaRPr lang="en-US" sz="1600" dirty="0"/>
           </a:p>
@@ -5680,220 +5843,15 @@
                 <a:ea typeface="DM Sans" pitchFamily="34" charset="-122"/>
                 <a:cs typeface="DM Sans" pitchFamily="34" charset="-120"/>
               </a:rPr>
-              <a:t>day3-till.vercel.app   /   Pay, pause, recover, reload. Then inspect an old receipt.</a:t>
+              <a:t>Deliverable: one working migrated call, with a clear reason for the chosen data service.</a:t>
             </a:r>
             <a:endParaRPr lang="en-US" sz="2000" dirty="0"/>
           </a:p>
         </p:txBody>
       </p:sp>
-    </p:spTree>
-  </p:cSld>
-  <p:clrMapOvr>
-    <a:masterClrMapping/>
-  </p:clrMapOvr>
-</p:sld>
-</file>
-
-<file path=ppt/slides/slide15.xml><?xml version="1.0" encoding="utf-8"?>
-<p:sld xmlns:a="http://schemas.openxmlformats.org/drawingml/2006/main" xmlns:r="http://schemas.openxmlformats.org/officeDocument/2006/relationships" xmlns:p="http://schemas.openxmlformats.org/presentationml/2006/main">
-  <p:cSld name="Slide 15">
-    <p:bg>
-      <p:bgPr>
-        <a:solidFill>
-          <a:srgbClr val="07080F"/>
-        </a:solidFill>
-      </p:bgPr>
-    </p:bg>
-    <p:spTree>
-      <p:nvGrpSpPr>
-        <p:cNvPr id="1" name=""/>
-        <p:cNvGrpSpPr/>
-        <p:nvPr/>
-      </p:nvGrpSpPr>
-      <p:grpSpPr>
-        <a:xfrm>
-          <a:off x="0" y="0"/>
-          <a:ext cx="0" cy="0"/>
-          <a:chOff x="0" y="0"/>
-          <a:chExt cx="0" cy="0"/>
-        </a:xfrm>
-      </p:grpSpPr>
-      <p:sp>
-        <p:nvSpPr>
-          <p:cNvPr id="2" name="Text 0"/>
-          <p:cNvSpPr/>
-          <p:nvPr/>
-        </p:nvSpPr>
-        <p:spPr>
-          <a:xfrm>
-            <a:off x="777240" y="502920"/>
-            <a:ext cx="10637520" cy="274320"/>
-          </a:xfrm>
-          <a:prstGeom prst="rect">
-            <a:avLst/>
-          </a:prstGeom>
-          <a:noFill/>
-          <a:ln/>
-        </p:spPr>
-        <p:txBody>
-          <a:bodyPr wrap="square" lIns="0" tIns="0" rIns="0" bIns="0" rtlCol="0" anchor="ctr"/>
-          <a:lstStyle/>
-          <a:p>
-            <a:pPr indent="0" marL="0">
-              <a:buNone/>
-            </a:pPr>
-            <a:r>
-              <a:rPr lang="en-US" sz="1000" spc="150" kern="0" dirty="0">
-                <a:solidFill>
-                  <a:srgbClr val="ACB8DB"/>
-                </a:solidFill>
-                <a:latin typeface="JetBrains Mono" pitchFamily="34" charset="0"/>
-                <a:ea typeface="JetBrains Mono" pitchFamily="34" charset="-122"/>
-                <a:cs typeface="JetBrains Mono" pitchFamily="34" charset="-120"/>
-              </a:rPr>
-              <a:t>[ TAKE IT WITH YOU ]</a:t>
-            </a:r>
-            <a:endParaRPr lang="en-US" sz="1000" dirty="0"/>
-          </a:p>
-        </p:txBody>
-      </p:sp>
-      <p:sp>
-        <p:nvSpPr>
-          <p:cNvPr id="3" name="Text 1"/>
-          <p:cNvSpPr/>
-          <p:nvPr/>
-        </p:nvSpPr>
-        <p:spPr>
-          <a:xfrm>
-            <a:off x="777240" y="6437376"/>
-            <a:ext cx="7315200" cy="182880"/>
-          </a:xfrm>
-          <a:prstGeom prst="rect">
-            <a:avLst/>
-          </a:prstGeom>
-          <a:noFill/>
-          <a:ln/>
-        </p:spPr>
-        <p:txBody>
-          <a:bodyPr wrap="square" lIns="0" tIns="0" rIns="0" bIns="0" rtlCol="0" anchor="ctr"/>
-          <a:lstStyle/>
-          <a:p>
-            <a:pPr indent="0" marL="0">
-              <a:buNone/>
-            </a:pPr>
-            <a:r>
-              <a:rPr lang="en-US" sz="800" spc="100" kern="0" dirty="0">
-                <a:solidFill>
-                  <a:srgbClr val="ACB8DB"/>
-                </a:solidFill>
-                <a:latin typeface="JetBrains Mono" pitchFamily="34" charset="0"/>
-                <a:ea typeface="JetBrains Mono" pitchFamily="34" charset="-122"/>
-                <a:cs typeface="JetBrains Mono" pitchFamily="34" charset="-120"/>
-              </a:rPr>
-              <a:t>SUIHUB LAGOS / ACCOUNT LAYER WEEK</a:t>
-            </a:r>
-            <a:endParaRPr lang="en-US" sz="800" dirty="0"/>
-          </a:p>
-        </p:txBody>
-      </p:sp>
-      <p:sp>
-        <p:nvSpPr>
-          <p:cNvPr id="4" name="Text 2"/>
-          <p:cNvSpPr/>
-          <p:nvPr/>
-        </p:nvSpPr>
-        <p:spPr>
-          <a:xfrm>
-            <a:off x="10698480" y="6419088"/>
-            <a:ext cx="685800" cy="210312"/>
-          </a:xfrm>
-          <a:prstGeom prst="rect">
-            <a:avLst/>
-          </a:prstGeom>
-          <a:noFill/>
-          <a:ln/>
-        </p:spPr>
-        <p:txBody>
-          <a:bodyPr wrap="square" lIns="0" tIns="0" rIns="0" bIns="0" rtlCol="0" anchor="ctr"/>
-          <a:lstStyle/>
-          <a:p>
-            <a:pPr algn="r" indent="0" marL="0">
-              <a:buNone/>
-            </a:pPr>
-            <a:r>
-              <a:rPr lang="en-US" sz="1000" dirty="0">
-                <a:solidFill>
-                  <a:srgbClr val="ACB8DB"/>
-                </a:solidFill>
-                <a:latin typeface="JetBrains Mono" pitchFamily="34" charset="0"/>
-                <a:ea typeface="JetBrains Mono" pitchFamily="34" charset="-122"/>
-                <a:cs typeface="JetBrains Mono" pitchFamily="34" charset="-120"/>
-              </a:rPr>
-              <a:t>15</a:t>
-            </a:r>
-            <a:endParaRPr lang="en-US" sz="1000" dirty="0"/>
-          </a:p>
-        </p:txBody>
-      </p:sp>
-      <p:sp>
-        <p:nvSpPr>
-          <p:cNvPr id="6" name="Text 3"/>
-          <p:cNvSpPr/>
-          <p:nvPr/>
-        </p:nvSpPr>
-        <p:spPr>
-          <a:xfrm>
-            <a:off x="777240" y="1508760"/>
-            <a:ext cx="10515600" cy="2286000"/>
-          </a:xfrm>
-          <a:prstGeom prst="rect">
-            <a:avLst/>
-          </a:prstGeom>
-          <a:noFill/>
-          <a:ln/>
-        </p:spPr>
-        <p:txBody>
-          <a:bodyPr wrap="square" lIns="0" tIns="0" rIns="0" bIns="0" rtlCol="0" anchor="ctr"/>
-          <a:lstStyle/>
-          <a:p>
-            <a:pPr indent="0" marL="0">
-              <a:buNone/>
-            </a:pPr>
-            <a:r>
-              <a:rPr lang="en-US" sz="6200" dirty="0">
-                <a:solidFill>
-                  <a:srgbClr val="FFFFFF"/>
-                </a:solidFill>
-                <a:latin typeface="DM Sans" pitchFamily="34" charset="0"/>
-                <a:ea typeface="DM Sans" pitchFamily="34" charset="-122"/>
-                <a:cs typeface="DM Sans" pitchFamily="34" charset="-120"/>
-              </a:rPr>
-              <a:t>Make it live.</a:t>
-            </a:r>
-            <a:endParaRPr lang="en-US" sz="6200" dirty="0"/>
-          </a:p>
-          <a:p>
-            <a:pPr indent="0" marL="0">
-              <a:buNone/>
-            </a:pPr>
-            <a:r>
-              <a:rPr lang="en-US" sz="6200" dirty="0">
-                <a:solidFill>
-                  <a:srgbClr val="FFFFFF"/>
-                </a:solidFill>
-                <a:latin typeface="DM Sans" pitchFamily="34" charset="0"/>
-                <a:ea typeface="DM Sans" pitchFamily="34" charset="-122"/>
-                <a:cs typeface="DM Sans" pitchFamily="34" charset="-120"/>
-              </a:rPr>
-              <a:t>Make it recover.</a:t>
-            </a:r>
-            <a:endParaRPr lang="en-US" sz="6200" dirty="0"/>
-          </a:p>
-        </p:txBody>
-      </p:sp>
-      <p:sp>
-        <p:nvSpPr>
-          <p:cNvPr id="7" name="Text 4">
+      <p:sp>
+        <p:nvSpPr>
+          <p:cNvPr id="24" name="Text 21">
             <a:hlinkClick r:id="rId1" tooltip=""/>
           </p:cNvPr>
           <p:cNvSpPr/>
@@ -5901,26 +5859,26 @@
         </p:nvSpPr>
         <p:spPr>
           <a:xfrm>
-            <a:off x="777240" y="4297680"/>
-            <a:ext cx="10515600" cy="548640"/>
-          </a:xfrm>
-          <a:prstGeom prst="rect">
-            <a:avLst/>
-          </a:prstGeom>
-          <a:noFill/>
-          <a:ln/>
-        </p:spPr>
-        <p:txBody>
-          <a:bodyPr wrap="square" lIns="0" tIns="0" rIns="0" bIns="0" rtlCol="0" anchor="ctr"/>
-          <a:lstStyle/>
-          <a:p>
-            <a:pPr indent="0" marL="0">
-              <a:buNone/>
-            </a:pPr>
-            <a:r>
-              <a:rPr lang="en-US" sz="2900" u="sng" dirty="0">
-                <a:solidFill>
-                  <a:srgbClr val="9DADFF"/>
+            <a:off x="777240" y="6062472"/>
+            <a:ext cx="4297680" cy="228600"/>
+          </a:xfrm>
+          <a:prstGeom prst="rect">
+            <a:avLst/>
+          </a:prstGeom>
+          <a:noFill/>
+          <a:ln/>
+        </p:spPr>
+        <p:txBody>
+          <a:bodyPr wrap="square" lIns="0" tIns="0" rIns="0" bIns="0" rtlCol="0" anchor="ctr"/>
+          <a:lstStyle/>
+          <a:p>
+            <a:pPr indent="0" marL="0">
+              <a:buNone/>
+            </a:pPr>
+            <a:r>
+              <a:rPr lang="en-US" sz="1200" u="sng" dirty="0">
+                <a:solidFill>
+                  <a:srgbClr val="2338FF"/>
                 </a:solidFill>
                 <a:latin typeface="DM Sans" pitchFamily="34" charset="0"/>
                 <a:ea typeface="DM Sans" pitchFamily="34" charset="-122"/>
@@ -5935,13 +5893,13 @@
               </a:rPr>
               <a:t>day3-till.vercel.app</a:t>
             </a:r>
-            <a:endParaRPr lang="en-US" sz="2900" dirty="0"/>
-          </a:p>
-        </p:txBody>
-      </p:sp>
-      <p:sp>
-        <p:nvSpPr>
-          <p:cNvPr id="8" name="Text 5">
+            <a:endParaRPr lang="en-US" sz="1200" dirty="0"/>
+          </a:p>
+        </p:txBody>
+      </p:sp>
+      <p:sp>
+        <p:nvSpPr>
+          <p:cNvPr id="25" name="Text 22">
             <a:hlinkClick r:id="rId2" tooltip=""/>
           </p:cNvPr>
           <p:cNvSpPr/>
@@ -5949,26 +5907,26 @@
         </p:nvSpPr>
         <p:spPr>
           <a:xfrm>
-            <a:off x="777240" y="5010912"/>
-            <a:ext cx="10515600" cy="384048"/>
-          </a:xfrm>
-          <a:prstGeom prst="rect">
-            <a:avLst/>
-          </a:prstGeom>
-          <a:noFill/>
-          <a:ln/>
-        </p:spPr>
-        <p:txBody>
-          <a:bodyPr wrap="square" lIns="0" tIns="0" rIns="0" bIns="0" rtlCol="0" anchor="ctr"/>
-          <a:lstStyle/>
-          <a:p>
-            <a:pPr indent="0" marL="0">
-              <a:buNone/>
-            </a:pPr>
-            <a:r>
-              <a:rPr lang="en-US" sz="1900" u="sng" dirty="0">
-                <a:solidFill>
-                  <a:srgbClr val="ACB8DB"/>
+            <a:off x="5715000" y="6062472"/>
+            <a:ext cx="5669280" cy="228600"/>
+          </a:xfrm>
+          <a:prstGeom prst="rect">
+            <a:avLst/>
+          </a:prstGeom>
+          <a:noFill/>
+          <a:ln/>
+        </p:spPr>
+        <p:txBody>
+          <a:bodyPr wrap="square" lIns="0" tIns="0" rIns="0" bIns="0" rtlCol="0" anchor="ctr"/>
+          <a:lstStyle/>
+          <a:p>
+            <a:pPr indent="0" marL="0">
+              <a:buNone/>
+            </a:pPr>
+            <a:r>
+              <a:rPr lang="en-US" sz="1200" u="sng" dirty="0">
+                <a:solidFill>
+                  <a:srgbClr val="2338FF"/>
                 </a:solidFill>
                 <a:latin typeface="DM Sans" pitchFamily="34" charset="0"/>
                 <a:ea typeface="DM Sans" pitchFamily="34" charset="-122"/>
@@ -5983,46 +5941,7 @@
               </a:rPr>
               <a:t>github.com/Nuel-osas/day3-till</a:t>
             </a:r>
-            <a:endParaRPr lang="en-US" sz="1900" dirty="0"/>
-          </a:p>
-        </p:txBody>
-      </p:sp>
-      <p:sp>
-        <p:nvSpPr>
-          <p:cNvPr id="9" name="Text 6"/>
-          <p:cNvSpPr/>
-          <p:nvPr/>
-        </p:nvSpPr>
-        <p:spPr>
-          <a:xfrm>
-            <a:off x="777240" y="5833872"/>
-            <a:ext cx="10515600" cy="228600"/>
-          </a:xfrm>
-          <a:prstGeom prst="rect">
-            <a:avLst/>
-          </a:prstGeom>
-          <a:noFill/>
-          <a:ln/>
-        </p:spPr>
-        <p:txBody>
-          <a:bodyPr wrap="square" lIns="0" tIns="0" rIns="0" bIns="0" rtlCol="0" anchor="ctr"/>
-          <a:lstStyle/>
-          <a:p>
-            <a:pPr indent="0" marL="0">
-              <a:buNone/>
-            </a:pPr>
-            <a:r>
-              <a:rPr lang="en-US" sz="1100" dirty="0">
-                <a:solidFill>
-                  <a:srgbClr val="ACB8DB"/>
-                </a:solidFill>
-                <a:latin typeface="JetBrains Mono" pitchFamily="34" charset="0"/>
-                <a:ea typeface="JetBrains Mono" pitchFamily="34" charset="-122"/>
-                <a:cs typeface="JetBrains Mono" pitchFamily="34" charset="-120"/>
-              </a:rPr>
-              <a:t>YOUR NEXT BUILD / A LIVE FEED WITH A MEMORY</a:t>
-            </a:r>
-            <a:endParaRPr lang="en-US" sz="1100" dirty="0"/>
+            <a:endParaRPr lang="en-US" sz="1200" dirty="0"/>
           </a:p>
         </p:txBody>
       </p:sp>
@@ -6091,7 +6010,7 @@
                 <a:ea typeface="JetBrains Mono" pitchFamily="34" charset="-122"/>
                 <a:cs typeface="JetBrains Mono" pitchFamily="34" charset="-120"/>
               </a:rPr>
-              <a:t>[ TODAY’S DEMO ]</a:t>
+              <a:t>[ THE MIGRATION CONTEXT ]</a:t>
             </a:r>
             <a:endParaRPr lang="en-US" sz="1000" dirty="0"/>
           </a:p>
@@ -6130,7 +6049,7 @@
                 <a:ea typeface="DM Sans" pitchFamily="34" charset="-122"/>
                 <a:cs typeface="DM Sans" pitchFamily="34" charset="-120"/>
               </a:rPr>
-              <a:t>Meet your live till.</a:t>
+              <a:t>Why this session, now?</a:t>
             </a:r>
             <a:endParaRPr lang="en-US" sz="3700" dirty="0"/>
           </a:p>
@@ -6214,56 +6133,59 @@
           </a:p>
         </p:txBody>
       </p:sp>
-      <p:pic>
-        <p:nvPicPr>
-          <p:cNvPr id="7" name="Image 0" descr="/Users/emmanuelosadebe/Documents/SUI-HUB-CLASSES/account-layer-week/day3-till/teaching/assets/overview.png">    </p:cNvPr>
-          <p:cNvPicPr>
-            <a:picLocks noChangeAspect="1"/>
-          </p:cNvPicPr>
-          <p:nvPr/>
-        </p:nvPicPr>
-        <p:blipFill>
-          <a:blip r:embed="rId1"/>
-          <a:stretch>
-            <a:fillRect/>
-          </a:stretch>
-        </p:blipFill>
-        <p:spPr>
-          <a:xfrm>
-            <a:off x="937129" y="2194560"/>
-            <a:ext cx="6263901" cy="3703320"/>
-          </a:xfrm>
-          <a:prstGeom prst="rect">
-            <a:avLst/>
-          </a:prstGeom>
-        </p:spPr>
-      </p:pic>
-      <p:sp>
-        <p:nvSpPr>
-          <p:cNvPr id="8" name="Text 4"/>
-          <p:cNvSpPr/>
-          <p:nvPr/>
-        </p:nvSpPr>
-        <p:spPr>
-          <a:xfrm>
-            <a:off x="7818120" y="2423160"/>
-            <a:ext cx="3474720" cy="228600"/>
-          </a:xfrm>
-          <a:prstGeom prst="rect">
-            <a:avLst/>
-          </a:prstGeom>
-          <a:noFill/>
-          <a:ln/>
-        </p:spPr>
-        <p:txBody>
-          <a:bodyPr wrap="square" lIns="0" tIns="0" rIns="0" bIns="0" rtlCol="0" anchor="ctr"/>
-          <a:lstStyle/>
-          <a:p>
-            <a:pPr indent="0" marL="0">
-              <a:buNone/>
-            </a:pPr>
-            <a:r>
-              <a:rPr lang="en-US" sz="1000" spc="100" kern="0" dirty="0">
+      <p:sp>
+        <p:nvSpPr>
+          <p:cNvPr id="7" name="Shape 4"/>
+          <p:cNvSpPr/>
+          <p:nvPr/>
+        </p:nvSpPr>
+        <p:spPr>
+          <a:xfrm>
+            <a:off x="777240" y="2286000"/>
+            <a:ext cx="3393440" cy="3337560"/>
+          </a:xfrm>
+          <a:prstGeom prst="rect">
+            <a:avLst/>
+          </a:prstGeom>
+          <a:solidFill>
+            <a:srgbClr val="FFFFFF"/>
+          </a:solidFill>
+          <a:ln w="12700">
+            <a:solidFill>
+              <a:srgbClr val="FFFFFF">
+                <a:alpha val="0"/>
+              </a:srgbClr>
+            </a:solidFill>
+            <a:prstDash val="solid"/>
+          </a:ln>
+        </p:spPr>
+      </p:sp>
+      <p:sp>
+        <p:nvSpPr>
+          <p:cNvPr id="8" name="Text 5"/>
+          <p:cNvSpPr/>
+          <p:nvPr/>
+        </p:nvSpPr>
+        <p:spPr>
+          <a:xfrm>
+            <a:off x="1005840" y="2496312"/>
+            <a:ext cx="2936240" cy="274320"/>
+          </a:xfrm>
+          <a:prstGeom prst="rect">
+            <a:avLst/>
+          </a:prstGeom>
+          <a:noFill/>
+          <a:ln/>
+        </p:spPr>
+        <p:txBody>
+          <a:bodyPr wrap="square" lIns="0" tIns="0" rIns="0" bIns="0" rtlCol="0" anchor="ctr"/>
+          <a:lstStyle/>
+          <a:p>
+            <a:pPr indent="0" marL="0">
+              <a:buNone/>
+            </a:pPr>
+            <a:r>
+              <a:rPr lang="en-US" sz="1100" dirty="0">
                 <a:solidFill>
                   <a:srgbClr val="2338FF"/>
                 </a:solidFill>
@@ -6271,38 +6193,38 @@
                 <a:ea typeface="JetBrains Mono" pitchFamily="34" charset="-122"/>
                 <a:cs typeface="JetBrains Mono" pitchFamily="34" charset="-120"/>
               </a:rPr>
-              <a:t>PERSONAL</a:t>
-            </a:r>
-            <a:endParaRPr lang="en-US" sz="1000" dirty="0"/>
-          </a:p>
-        </p:txBody>
-      </p:sp>
-      <p:sp>
-        <p:nvSpPr>
-          <p:cNvPr id="9" name="Text 5"/>
-          <p:cNvSpPr/>
-          <p:nvPr/>
-        </p:nvSpPr>
-        <p:spPr>
-          <a:xfrm>
-            <a:off x="7818120" y="2743200"/>
-            <a:ext cx="3474720" cy="731520"/>
-          </a:xfrm>
-          <a:prstGeom prst="rect">
-            <a:avLst/>
-          </a:prstGeom>
-          <a:noFill/>
-          <a:ln/>
-        </p:spPr>
-        <p:txBody>
-          <a:bodyPr wrap="square" lIns="0" tIns="0" rIns="0" bIns="0" rtlCol="0" anchor="ctr"/>
-          <a:lstStyle/>
-          <a:p>
-            <a:pPr indent="0" marL="0">
-              <a:buNone/>
-            </a:pPr>
-            <a:r>
-              <a:rPr lang="en-US" sz="2000" dirty="0">
+              <a:t>JULY 2026</a:t>
+            </a:r>
+            <a:endParaRPr lang="en-US" sz="1100" dirty="0"/>
+          </a:p>
+        </p:txBody>
+      </p:sp>
+      <p:sp>
+        <p:nvSpPr>
+          <p:cNvPr id="9" name="Text 6"/>
+          <p:cNvSpPr/>
+          <p:nvPr/>
+        </p:nvSpPr>
+        <p:spPr>
+          <a:xfrm>
+            <a:off x="1005840" y="2889504"/>
+            <a:ext cx="2936240" cy="960120"/>
+          </a:xfrm>
+          <a:prstGeom prst="rect">
+            <a:avLst/>
+          </a:prstGeom>
+          <a:noFill/>
+          <a:ln/>
+        </p:spPr>
+        <p:txBody>
+          <a:bodyPr wrap="square" lIns="0" tIns="0" rIns="0" bIns="0" rtlCol="0" anchor="ctr"/>
+          <a:lstStyle/>
+          <a:p>
+            <a:pPr indent="0" marL="0">
+              <a:buNone/>
+            </a:pPr>
+            <a:r>
+              <a:rPr lang="en-US" sz="2500" dirty="0">
                 <a:solidFill>
                   <a:srgbClr val="131725"/>
                 </a:solidFill>
@@ -6310,204 +6232,336 @@
                 <a:ea typeface="DM Sans" pitchFamily="34" charset="-122"/>
                 <a:cs typeface="DM Sans" pitchFamily="34" charset="-120"/>
               </a:rPr>
-              <a:t>Your payer. Your shop.</a:t>
-            </a:r>
-            <a:endParaRPr lang="en-US" sz="2000" dirty="0"/>
-          </a:p>
-        </p:txBody>
-      </p:sp>
-      <p:sp>
-        <p:nvSpPr>
-          <p:cNvPr id="10" name="Text 6"/>
-          <p:cNvSpPr/>
-          <p:nvPr/>
-        </p:nvSpPr>
-        <p:spPr>
-          <a:xfrm>
-            <a:off x="7818120" y="3557016"/>
-            <a:ext cx="3474720" cy="228600"/>
-          </a:xfrm>
-          <a:prstGeom prst="rect">
-            <a:avLst/>
-          </a:prstGeom>
-          <a:noFill/>
-          <a:ln/>
-        </p:spPr>
-        <p:txBody>
-          <a:bodyPr wrap="square" lIns="0" tIns="0" rIns="0" bIns="0" rtlCol="0" anchor="ctr"/>
-          <a:lstStyle/>
-          <a:p>
-            <a:pPr indent="0" marL="0">
-              <a:buNone/>
-            </a:pPr>
-            <a:r>
-              <a:rPr lang="en-US" sz="1000" spc="100" kern="0" dirty="0">
-                <a:solidFill>
-                  <a:srgbClr val="2338FF"/>
-                </a:solidFill>
-                <a:latin typeface="JetBrains Mono" pitchFamily="34" charset="0"/>
-                <a:ea typeface="JetBrains Mono" pitchFamily="34" charset="-122"/>
-                <a:cs typeface="JetBrains Mono" pitchFamily="34" charset="-120"/>
-              </a:rPr>
-              <a:t>LIVE</a:t>
-            </a:r>
-            <a:endParaRPr lang="en-US" sz="1000" dirty="0"/>
-          </a:p>
-        </p:txBody>
-      </p:sp>
-      <p:sp>
-        <p:nvSpPr>
-          <p:cNvPr id="11" name="Text 7"/>
-          <p:cNvSpPr/>
-          <p:nvPr/>
-        </p:nvSpPr>
-        <p:spPr>
-          <a:xfrm>
-            <a:off x="7818120" y="3877056"/>
-            <a:ext cx="3474720" cy="731520"/>
-          </a:xfrm>
-          <a:prstGeom prst="rect">
-            <a:avLst/>
-          </a:prstGeom>
-          <a:noFill/>
-          <a:ln/>
-        </p:spPr>
-        <p:txBody>
-          <a:bodyPr wrap="square" lIns="0" tIns="0" rIns="0" bIns="0" rtlCol="0" anchor="ctr"/>
-          <a:lstStyle/>
-          <a:p>
-            <a:pPr indent="0" marL="0">
-              <a:buNone/>
-            </a:pPr>
-            <a:r>
-              <a:rPr lang="en-US" sz="2000" dirty="0">
-                <a:solidFill>
-                  <a:srgbClr val="131725"/>
+              <a:t>JSON-RPC shutoff</a:t>
+            </a:r>
+            <a:endParaRPr lang="en-US" sz="2500" dirty="0"/>
+          </a:p>
+        </p:txBody>
+      </p:sp>
+      <p:sp>
+        <p:nvSpPr>
+          <p:cNvPr id="10" name="Text 7"/>
+          <p:cNvSpPr/>
+          <p:nvPr/>
+        </p:nvSpPr>
+        <p:spPr>
+          <a:xfrm>
+            <a:off x="1005840" y="4005072"/>
+            <a:ext cx="2936240" cy="1371600"/>
+          </a:xfrm>
+          <a:prstGeom prst="rect">
+            <a:avLst/>
+          </a:prstGeom>
+          <a:noFill/>
+          <a:ln/>
+        </p:spPr>
+        <p:txBody>
+          <a:bodyPr wrap="square" lIns="0" tIns="0" rIns="0" bIns="0" rtlCol="0" anchor="ctr"/>
+          <a:lstStyle/>
+          <a:p>
+            <a:pPr indent="0" marL="0">
+              <a:buNone/>
+            </a:pPr>
+            <a:r>
+              <a:rPr lang="en-US" sz="1900" dirty="0">
+                <a:solidFill>
+                  <a:srgbClr val="69738B"/>
                 </a:solidFill>
                 <a:latin typeface="DM Sans" pitchFamily="34" charset="0"/>
                 <a:ea typeface="DM Sans" pitchFamily="34" charset="-122"/>
                 <a:cs typeface="DM Sans" pitchFamily="34" charset="-120"/>
               </a:rPr>
-              <a:t>A receipt from the stream.</a:t>
-            </a:r>
-            <a:endParaRPr lang="en-US" sz="2000" dirty="0"/>
-          </a:p>
-        </p:txBody>
-      </p:sp>
-      <p:sp>
-        <p:nvSpPr>
-          <p:cNvPr id="12" name="Text 8"/>
-          <p:cNvSpPr/>
-          <p:nvPr/>
-        </p:nvSpPr>
-        <p:spPr>
-          <a:xfrm>
-            <a:off x="7818120" y="4690872"/>
-            <a:ext cx="3474720" cy="228600"/>
-          </a:xfrm>
-          <a:prstGeom prst="rect">
-            <a:avLst/>
-          </a:prstGeom>
-          <a:noFill/>
-          <a:ln/>
-        </p:spPr>
-        <p:txBody>
-          <a:bodyPr wrap="square" lIns="0" tIns="0" rIns="0" bIns="0" rtlCol="0" anchor="ctr"/>
-          <a:lstStyle/>
-          <a:p>
-            <a:pPr indent="0" marL="0">
-              <a:buNone/>
-            </a:pPr>
-            <a:r>
-              <a:rPr lang="en-US" sz="1000" spc="100" kern="0" dirty="0">
-                <a:solidFill>
-                  <a:srgbClr val="2338FF"/>
-                </a:solidFill>
-                <a:latin typeface="JetBrains Mono" pitchFamily="34" charset="0"/>
-                <a:ea typeface="JetBrains Mono" pitchFamily="34" charset="-122"/>
-                <a:cs typeface="JetBrains Mono" pitchFamily="34" charset="-120"/>
-              </a:rPr>
-              <a:t>RECOVERABLE</a:t>
-            </a:r>
-            <a:endParaRPr lang="en-US" sz="1000" dirty="0"/>
-          </a:p>
-        </p:txBody>
-      </p:sp>
-      <p:sp>
-        <p:nvSpPr>
-          <p:cNvPr id="13" name="Text 9"/>
-          <p:cNvSpPr/>
-          <p:nvPr/>
-        </p:nvSpPr>
-        <p:spPr>
-          <a:xfrm>
-            <a:off x="7818120" y="5010912"/>
-            <a:ext cx="3474720" cy="731520"/>
-          </a:xfrm>
-          <a:prstGeom prst="rect">
-            <a:avLst/>
-          </a:prstGeom>
-          <a:noFill/>
-          <a:ln/>
-        </p:spPr>
-        <p:txBody>
-          <a:bodyPr wrap="square" lIns="0" tIns="0" rIns="0" bIns="0" rtlCol="0" anchor="ctr"/>
-          <a:lstStyle/>
-          <a:p>
-            <a:pPr indent="0" marL="0">
-              <a:buNone/>
-            </a:pPr>
-            <a:r>
-              <a:rPr lang="en-US" sz="2000" dirty="0">
-                <a:solidFill>
-                  <a:srgbClr val="131725"/>
+              <a:t>Foundation mainnet disablement began the week of 27 July.</a:t>
+            </a:r>
+            <a:endParaRPr lang="en-US" sz="1900" dirty="0"/>
+          </a:p>
+        </p:txBody>
+      </p:sp>
+      <p:sp>
+        <p:nvSpPr>
+          <p:cNvPr id="11" name="Shape 8"/>
+          <p:cNvSpPr/>
+          <p:nvPr/>
+        </p:nvSpPr>
+        <p:spPr>
+          <a:xfrm>
+            <a:off x="4399280" y="2286000"/>
+            <a:ext cx="3393440" cy="3337560"/>
+          </a:xfrm>
+          <a:prstGeom prst="rect">
+            <a:avLst/>
+          </a:prstGeom>
+          <a:solidFill>
+            <a:srgbClr val="2338FF"/>
+          </a:solidFill>
+          <a:ln w="12700">
+            <a:solidFill>
+              <a:srgbClr val="2338FF">
+                <a:alpha val="0"/>
+              </a:srgbClr>
+            </a:solidFill>
+            <a:prstDash val="solid"/>
+          </a:ln>
+        </p:spPr>
+      </p:sp>
+      <p:sp>
+        <p:nvSpPr>
+          <p:cNvPr id="12" name="Text 9"/>
+          <p:cNvSpPr/>
+          <p:nvPr/>
+        </p:nvSpPr>
+        <p:spPr>
+          <a:xfrm>
+            <a:off x="4627880" y="2496312"/>
+            <a:ext cx="2936240" cy="274320"/>
+          </a:xfrm>
+          <a:prstGeom prst="rect">
+            <a:avLst/>
+          </a:prstGeom>
+          <a:noFill/>
+          <a:ln/>
+        </p:spPr>
+        <p:txBody>
+          <a:bodyPr wrap="square" lIns="0" tIns="0" rIns="0" bIns="0" rtlCol="0" anchor="ctr"/>
+          <a:lstStyle/>
+          <a:p>
+            <a:pPr indent="0" marL="0">
+              <a:buNone/>
+            </a:pPr>
+            <a:r>
+              <a:rPr lang="en-US" sz="1100" dirty="0">
+                <a:solidFill>
+                  <a:srgbClr val="BFC9FF"/>
+                </a:solidFill>
+                <a:latin typeface="JetBrains Mono" pitchFamily="34" charset="0"/>
+                <a:ea typeface="JetBrains Mono" pitchFamily="34" charset="-122"/>
+                <a:cs typeface="JetBrains Mono" pitchFamily="34" charset="-120"/>
+              </a:rPr>
+              <a:t>21 SEPTEMBER</a:t>
+            </a:r>
+            <a:endParaRPr lang="en-US" sz="1100" dirty="0"/>
+          </a:p>
+        </p:txBody>
+      </p:sp>
+      <p:sp>
+        <p:nvSpPr>
+          <p:cNvPr id="13" name="Text 10"/>
+          <p:cNvSpPr/>
+          <p:nvPr/>
+        </p:nvSpPr>
+        <p:spPr>
+          <a:xfrm>
+            <a:off x="4627880" y="2889504"/>
+            <a:ext cx="2936240" cy="960120"/>
+          </a:xfrm>
+          <a:prstGeom prst="rect">
+            <a:avLst/>
+          </a:prstGeom>
+          <a:noFill/>
+          <a:ln/>
+        </p:spPr>
+        <p:txBody>
+          <a:bodyPr wrap="square" lIns="0" tIns="0" rIns="0" bIns="0" rtlCol="0" anchor="ctr"/>
+          <a:lstStyle/>
+          <a:p>
+            <a:pPr indent="0" marL="0">
+              <a:buNone/>
+            </a:pPr>
+            <a:r>
+              <a:rPr lang="en-US" sz="2500" dirty="0">
+                <a:solidFill>
+                  <a:srgbClr val="FFFFFF"/>
                 </a:solidFill>
                 <a:latin typeface="DM Sans" pitchFamily="34" charset="0"/>
                 <a:ea typeface="DM Sans" pitchFamily="34" charset="-122"/>
                 <a:cs typeface="DM Sans" pitchFamily="34" charset="-120"/>
               </a:rPr>
-              <a:t>A saved place to resume.</a:t>
-            </a:r>
-            <a:endParaRPr lang="en-US" sz="2000" dirty="0"/>
-          </a:p>
-        </p:txBody>
-      </p:sp>
-      <p:sp>
-        <p:nvSpPr>
-          <p:cNvPr id="14" name="Text 10"/>
-          <p:cNvSpPr/>
-          <p:nvPr/>
-        </p:nvSpPr>
-        <p:spPr>
-          <a:xfrm>
-            <a:off x="777240" y="6080760"/>
-            <a:ext cx="10607040" cy="201168"/>
-          </a:xfrm>
-          <a:prstGeom prst="rect">
-            <a:avLst/>
-          </a:prstGeom>
-          <a:noFill/>
-          <a:ln/>
-        </p:spPr>
-        <p:txBody>
-          <a:bodyPr wrap="square" lIns="0" tIns="0" rIns="0" bIns="0" rtlCol="0" anchor="ctr"/>
-          <a:lstStyle/>
-          <a:p>
-            <a:pPr indent="0" marL="0">
-              <a:buNone/>
-            </a:pPr>
-            <a:r>
-              <a:rPr lang="en-US" sz="1000" dirty="0">
-                <a:solidFill>
-                  <a:srgbClr val="69738B"/>
+              <a:t>Subscriptions live</a:t>
+            </a:r>
+            <a:endParaRPr lang="en-US" sz="2500" dirty="0"/>
+          </a:p>
+        </p:txBody>
+      </p:sp>
+      <p:sp>
+        <p:nvSpPr>
+          <p:cNvPr id="14" name="Text 11"/>
+          <p:cNvSpPr/>
+          <p:nvPr/>
+        </p:nvSpPr>
+        <p:spPr>
+          <a:xfrm>
+            <a:off x="4627880" y="4005072"/>
+            <a:ext cx="2936240" cy="1371600"/>
+          </a:xfrm>
+          <a:prstGeom prst="rect">
+            <a:avLst/>
+          </a:prstGeom>
+          <a:noFill/>
+          <a:ln/>
+        </p:spPr>
+        <p:txBody>
+          <a:bodyPr wrap="square" lIns="0" tIns="0" rIns="0" bIns="0" rtlCol="0" anchor="ctr"/>
+          <a:lstStyle/>
+          <a:p>
+            <a:pPr indent="0" marL="0">
+              <a:buNone/>
+            </a:pPr>
+            <a:r>
+              <a:rPr lang="en-US" sz="1900" dirty="0">
+                <a:solidFill>
+                  <a:srgbClr val="DFE4FF"/>
                 </a:solidFill>
                 <a:latin typeface="DM Sans" pitchFamily="34" charset="0"/>
                 <a:ea typeface="DM Sans" pitchFamily="34" charset="-122"/>
                 <a:cs typeface="DM Sans" pitchFamily="34" charset="-120"/>
               </a:rPr>
-              <a:t>Live app: day3-till.vercel.app   /   Real testnet transactions. Personal student wallets.</a:t>
-            </a:r>
-            <a:endParaRPr lang="en-US" sz="1000" dirty="0"/>
+              <a:t>GraphQL subscriptions announced for mainnet and testnet.</a:t>
+            </a:r>
+            <a:endParaRPr lang="en-US" sz="1900" dirty="0"/>
+          </a:p>
+        </p:txBody>
+      </p:sp>
+      <p:sp>
+        <p:nvSpPr>
+          <p:cNvPr id="15" name="Shape 12"/>
+          <p:cNvSpPr/>
+          <p:nvPr/>
+        </p:nvSpPr>
+        <p:spPr>
+          <a:xfrm>
+            <a:off x="8021320" y="2286000"/>
+            <a:ext cx="3393440" cy="3337560"/>
+          </a:xfrm>
+          <a:prstGeom prst="rect">
+            <a:avLst/>
+          </a:prstGeom>
+          <a:solidFill>
+            <a:srgbClr val="FFFFFF"/>
+          </a:solidFill>
+          <a:ln w="12700">
+            <a:solidFill>
+              <a:srgbClr val="FFFFFF">
+                <a:alpha val="0"/>
+              </a:srgbClr>
+            </a:solidFill>
+            <a:prstDash val="solid"/>
+          </a:ln>
+        </p:spPr>
+      </p:sp>
+      <p:sp>
+        <p:nvSpPr>
+          <p:cNvPr id="16" name="Text 13"/>
+          <p:cNvSpPr/>
+          <p:nvPr/>
+        </p:nvSpPr>
+        <p:spPr>
+          <a:xfrm>
+            <a:off x="8249920" y="2496312"/>
+            <a:ext cx="2936240" cy="274320"/>
+          </a:xfrm>
+          <a:prstGeom prst="rect">
+            <a:avLst/>
+          </a:prstGeom>
+          <a:noFill/>
+          <a:ln/>
+        </p:spPr>
+        <p:txBody>
+          <a:bodyPr wrap="square" lIns="0" tIns="0" rIns="0" bIns="0" rtlCol="0" anchor="ctr"/>
+          <a:lstStyle/>
+          <a:p>
+            <a:pPr indent="0" marL="0">
+              <a:buNone/>
+            </a:pPr>
+            <a:r>
+              <a:rPr lang="en-US" sz="1100" dirty="0">
+                <a:solidFill>
+                  <a:srgbClr val="2338FF"/>
+                </a:solidFill>
+                <a:latin typeface="JetBrains Mono" pitchFamily="34" charset="0"/>
+                <a:ea typeface="JetBrains Mono" pitchFamily="34" charset="-122"/>
+                <a:cs typeface="JetBrains Mono" pitchFamily="34" charset="-120"/>
+              </a:rPr>
+              <a:t>YOUR APP</a:t>
+            </a:r>
+            <a:endParaRPr lang="en-US" sz="1100" dirty="0"/>
+          </a:p>
+        </p:txBody>
+      </p:sp>
+      <p:sp>
+        <p:nvSpPr>
+          <p:cNvPr id="17" name="Text 14"/>
+          <p:cNvSpPr/>
+          <p:nvPr/>
+        </p:nvSpPr>
+        <p:spPr>
+          <a:xfrm>
+            <a:off x="8249920" y="2889504"/>
+            <a:ext cx="2936240" cy="960120"/>
+          </a:xfrm>
+          <a:prstGeom prst="rect">
+            <a:avLst/>
+          </a:prstGeom>
+          <a:noFill/>
+          <a:ln/>
+        </p:spPr>
+        <p:txBody>
+          <a:bodyPr wrap="square" lIns="0" tIns="0" rIns="0" bIns="0" rtlCol="0" anchor="ctr"/>
+          <a:lstStyle/>
+          <a:p>
+            <a:pPr indent="0" marL="0">
+              <a:buNone/>
+            </a:pPr>
+            <a:r>
+              <a:rPr lang="en-US" sz="2500" dirty="0">
+                <a:solidFill>
+                  <a:srgbClr val="131725"/>
+                </a:solidFill>
+                <a:latin typeface="DM Sans" pitchFamily="34" charset="0"/>
+                <a:ea typeface="DM Sans" pitchFamily="34" charset="-122"/>
+                <a:cs typeface="DM Sans" pitchFamily="34" charset="-120"/>
+              </a:rPr>
+              <a:t>Choose its data path.</a:t>
+            </a:r>
+            <a:endParaRPr lang="en-US" sz="2500" dirty="0"/>
+          </a:p>
+        </p:txBody>
+      </p:sp>
+      <p:sp>
+        <p:nvSpPr>
+          <p:cNvPr id="18" name="Text 15"/>
+          <p:cNvSpPr/>
+          <p:nvPr/>
+        </p:nvSpPr>
+        <p:spPr>
+          <a:xfrm>
+            <a:off x="8249920" y="4005072"/>
+            <a:ext cx="2936240" cy="1371600"/>
+          </a:xfrm>
+          <a:prstGeom prst="rect">
+            <a:avLst/>
+          </a:prstGeom>
+          <a:noFill/>
+          <a:ln/>
+        </p:spPr>
+        <p:txBody>
+          <a:bodyPr wrap="square" lIns="0" tIns="0" rIns="0" bIns="0" rtlCol="0" anchor="ctr"/>
+          <a:lstStyle/>
+          <a:p>
+            <a:pPr indent="0" marL="0">
+              <a:buNone/>
+            </a:pPr>
+            <a:r>
+              <a:rPr lang="en-US" sz="1900" dirty="0">
+                <a:solidFill>
+                  <a:srgbClr val="69738B"/>
+                </a:solidFill>
+                <a:latin typeface="DM Sans" pitchFamily="34" charset="0"/>
+                <a:ea typeface="DM Sans" pitchFamily="34" charset="-122"/>
+                <a:cs typeface="DM Sans" pitchFamily="34" charset="-120"/>
+              </a:rPr>
+              <a:t>Read current state, stream activity, retrieve history and migrate.</a:t>
+            </a:r>
+            <a:endParaRPr lang="en-US" sz="1900" dirty="0"/>
           </a:p>
         </p:txBody>
       </p:sp>
@@ -6615,7 +6669,7 @@
                 <a:ea typeface="DM Sans" pitchFamily="34" charset="-122"/>
                 <a:cs typeface="DM Sans" pitchFamily="34" charset="-120"/>
               </a:rPr>
-              <a:t>Four layers. Four different jobs.</a:t>
+              <a:t>Four layers. Choose for your workload.</a:t>
             </a:r>
             <a:endParaRPr lang="en-US" sz="3700" dirty="0"/>
           </a:p>
@@ -6759,7 +6813,7 @@
                 <a:ea typeface="JetBrains Mono" pitchFamily="34" charset="-122"/>
                 <a:cs typeface="JetBrains Mono" pitchFamily="34" charset="-120"/>
               </a:rPr>
-              <a:t>01 / gRPC</a:t>
+              <a:t>gRPC / WALLET + GAME</a:t>
             </a:r>
             <a:endParaRPr lang="en-US" sz="1100" dirty="0"/>
           </a:p>
@@ -6798,7 +6852,7 @@
                 <a:ea typeface="DM Sans" pitchFamily="34" charset="-122"/>
                 <a:cs typeface="DM Sans" pitchFamily="34" charset="-120"/>
               </a:rPr>
-              <a:t>Read and act now.</a:t>
+              <a:t>Current state and actions</a:t>
             </a:r>
             <a:endParaRPr lang="en-US" sz="2300" dirty="0"/>
           </a:p>
@@ -6837,7 +6891,7 @@
                 <a:ea typeface="DM Sans" pitchFamily="34" charset="-122"/>
                 <a:cs typeface="DM Sans" pitchFamily="34" charset="-120"/>
               </a:rPr>
-              <a:t>Balances, objects, execution and checkpoints.</a:t>
+              <a:t>Balances, execution and live checkpoint streams.</a:t>
             </a:r>
             <a:endParaRPr lang="en-US" sz="1500" dirty="0"/>
           </a:p>
@@ -6903,7 +6957,7 @@
                 <a:ea typeface="JetBrains Mono" pitchFamily="34" charset="-122"/>
                 <a:cs typeface="JetBrains Mono" pitchFamily="34" charset="-120"/>
               </a:rPr>
-              <a:t>02 / GRAPHQL</a:t>
+              <a:t>GRAPHQL / APP + SHOP</a:t>
             </a:r>
             <a:endParaRPr lang="en-US" sz="1100" dirty="0"/>
           </a:p>
@@ -6942,7 +6996,7 @@
                 <a:ea typeface="DM Sans" pitchFamily="34" charset="-122"/>
                 <a:cs typeface="DM Sans" pitchFamily="34" charset="-120"/>
               </a:rPr>
-              <a:t>Ask for a screen.</a:t>
+              <a:t>Filtered reads and feeds</a:t>
             </a:r>
             <a:endParaRPr lang="en-US" sz="2300" dirty="0"/>
           </a:p>
@@ -6981,7 +7035,7 @@
                 <a:ea typeface="DM Sans" pitchFamily="34" charset="-122"/>
                 <a:cs typeface="DM Sans" pitchFamily="34" charset="-120"/>
               </a:rPr>
-              <a:t>Filtered history, selected fields and subscriptions.</a:t>
+              <a:t>Select fields, join history and subscribe to activity.</a:t>
             </a:r>
             <a:endParaRPr lang="en-US" sz="1500" dirty="0"/>
           </a:p>
@@ -7047,7 +7101,7 @@
                 <a:ea typeface="JetBrains Mono" pitchFamily="34" charset="-122"/>
                 <a:cs typeface="JetBrains Mono" pitchFamily="34" charset="-120"/>
               </a:rPr>
-              <a:t>03 / ARCHIVE</a:t>
+              <a:t>ARCHIVE / OLD RECEIPTS</a:t>
             </a:r>
             <a:endParaRPr lang="en-US" sz="1100" dirty="0"/>
           </a:p>
@@ -7086,7 +7140,7 @@
                 <a:ea typeface="DM Sans" pitchFamily="34" charset="-122"/>
                 <a:cs typeface="DM Sans" pitchFamily="34" charset="-120"/>
               </a:rPr>
-              <a:t>Keep the past.</a:t>
+              <a:t>History past retention</a:t>
             </a:r>
             <a:endParaRPr lang="en-US" sz="2300" dirty="0"/>
           </a:p>
@@ -7125,7 +7179,7 @@
                 <a:ea typeface="DM Sans" pitchFamily="34" charset="-122"/>
                 <a:cs typeface="DM Sans" pitchFamily="34" charset="-120"/>
               </a:rPr>
-              <a:t>History beyond a full node’s retention.</a:t>
+              <a:t>Retrieve records a full node has pruned.</a:t>
             </a:r>
             <a:endParaRPr lang="en-US" sz="1500" dirty="0"/>
           </a:p>
@@ -7191,7 +7245,7 @@
                 <a:ea typeface="JetBrains Mono" pitchFamily="34" charset="-122"/>
                 <a:cs typeface="JetBrains Mono" pitchFamily="34" charset="-120"/>
               </a:rPr>
-              <a:t>04 / YOUR INDEXER</a:t>
+              <a:t>CUSTOM INDEXER / ANALYTICS</a:t>
             </a:r>
             <a:endParaRPr lang="en-US" sz="1100" dirty="0"/>
           </a:p>
@@ -7230,7 +7284,7 @@
                 <a:ea typeface="DM Sans" pitchFamily="34" charset="-122"/>
                 <a:cs typeface="DM Sans" pitchFamily="34" charset="-120"/>
               </a:rPr>
-              <a:t>Own the data model.</a:t>
+              <a:t>Your own data model</a:t>
             </a:r>
             <a:endParaRPr lang="en-US" sz="2300" dirty="0"/>
           </a:p>
@@ -7269,7 +7323,7 @@
                 <a:ea typeface="DM Sans" pitchFamily="34" charset="-122"/>
                 <a:cs typeface="DM Sans" pitchFamily="34" charset="-120"/>
               </a:rPr>
-              <a:t>Durable aggregates, joins and reprocessing.</a:t>
+              <a:t>Backfill checkpoints, transform data and own aggregates.</a:t>
             </a:r>
             <a:endParaRPr lang="en-US" sz="1500" dirty="0"/>
           </a:p>
@@ -7286,6 +7340,589 @@
 <file path=ppt/slides/slide4.xml><?xml version="1.0" encoding="utf-8"?>
 <p:sld xmlns:a="http://schemas.openxmlformats.org/drawingml/2006/main" xmlns:r="http://schemas.openxmlformats.org/officeDocument/2006/relationships" xmlns:p="http://schemas.openxmlformats.org/presentationml/2006/main">
   <p:cSld name="Slide 4">
+    <p:bg>
+      <p:bgPr>
+        <a:solidFill>
+          <a:srgbClr val="F4F5F8"/>
+        </a:solidFill>
+      </p:bgPr>
+    </p:bg>
+    <p:spTree>
+      <p:nvGrpSpPr>
+        <p:cNvPr id="1" name=""/>
+        <p:cNvGrpSpPr/>
+        <p:nvPr/>
+      </p:nvGrpSpPr>
+      <p:grpSpPr>
+        <a:xfrm>
+          <a:off x="0" y="0"/>
+          <a:ext cx="0" cy="0"/>
+          <a:chOff x="0" y="0"/>
+          <a:chExt cx="0" cy="0"/>
+        </a:xfrm>
+      </p:grpSpPr>
+      <p:sp>
+        <p:nvSpPr>
+          <p:cNvPr id="2" name="Text 0"/>
+          <p:cNvSpPr/>
+          <p:nvPr/>
+        </p:nvSpPr>
+        <p:spPr>
+          <a:xfrm>
+            <a:off x="777240" y="502920"/>
+            <a:ext cx="10637520" cy="274320"/>
+          </a:xfrm>
+          <a:prstGeom prst="rect">
+            <a:avLst/>
+          </a:prstGeom>
+          <a:noFill/>
+          <a:ln/>
+        </p:spPr>
+        <p:txBody>
+          <a:bodyPr wrap="square" lIns="0" tIns="0" rIns="0" bIns="0" rtlCol="0" anchor="ctr"/>
+          <a:lstStyle/>
+          <a:p>
+            <a:pPr indent="0" marL="0">
+              <a:buNone/>
+            </a:pPr>
+            <a:r>
+              <a:rPr lang="en-US" sz="1000" spc="150" kern="0" dirty="0">
+                <a:solidFill>
+                  <a:srgbClr val="69738B"/>
+                </a:solidFill>
+                <a:latin typeface="JetBrains Mono" pitchFamily="34" charset="0"/>
+                <a:ea typeface="JetBrains Mono" pitchFamily="34" charset="-122"/>
+                <a:cs typeface="JetBrains Mono" pitchFamily="34" charset="-120"/>
+              </a:rPr>
+              <a:t>[ TRANSACTIONS + EVENTS ]</a:t>
+            </a:r>
+            <a:endParaRPr lang="en-US" sz="1000" dirty="0"/>
+          </a:p>
+        </p:txBody>
+      </p:sp>
+      <p:sp>
+        <p:nvSpPr>
+          <p:cNvPr id="3" name="Text 1"/>
+          <p:cNvSpPr/>
+          <p:nvPr/>
+        </p:nvSpPr>
+        <p:spPr>
+          <a:xfrm>
+            <a:off x="777240" y="932688"/>
+            <a:ext cx="10637520" cy="1143000"/>
+          </a:xfrm>
+          <a:prstGeom prst="rect">
+            <a:avLst/>
+          </a:prstGeom>
+          <a:noFill/>
+          <a:ln/>
+        </p:spPr>
+        <p:txBody>
+          <a:bodyPr wrap="square" lIns="0" tIns="0" rIns="0" bIns="0" rtlCol="0" anchor="ctr"/>
+          <a:lstStyle/>
+          <a:p>
+            <a:pPr indent="0" marL="0">
+              <a:buNone/>
+            </a:pPr>
+            <a:r>
+              <a:rPr lang="en-US" sz="3700" dirty="0">
+                <a:solidFill>
+                  <a:srgbClr val="131725"/>
+                </a:solidFill>
+                <a:latin typeface="DM Sans" pitchFamily="34" charset="0"/>
+                <a:ea typeface="DM Sans" pitchFamily="34" charset="-122"/>
+                <a:cs typeface="DM Sans" pitchFamily="34" charset="-120"/>
+              </a:rPr>
+              <a:t>Subscribe to what your screen needs.</a:t>
+            </a:r>
+            <a:endParaRPr lang="en-US" sz="3700" dirty="0"/>
+          </a:p>
+        </p:txBody>
+      </p:sp>
+      <p:sp>
+        <p:nvSpPr>
+          <p:cNvPr id="4" name="Text 2"/>
+          <p:cNvSpPr/>
+          <p:nvPr/>
+        </p:nvSpPr>
+        <p:spPr>
+          <a:xfrm>
+            <a:off x="777240" y="6437376"/>
+            <a:ext cx="7315200" cy="182880"/>
+          </a:xfrm>
+          <a:prstGeom prst="rect">
+            <a:avLst/>
+          </a:prstGeom>
+          <a:noFill/>
+          <a:ln/>
+        </p:spPr>
+        <p:txBody>
+          <a:bodyPr wrap="square" lIns="0" tIns="0" rIns="0" bIns="0" rtlCol="0" anchor="ctr"/>
+          <a:lstStyle/>
+          <a:p>
+            <a:pPr indent="0" marL="0">
+              <a:buNone/>
+            </a:pPr>
+            <a:r>
+              <a:rPr lang="en-US" sz="800" spc="100" kern="0" dirty="0">
+                <a:solidFill>
+                  <a:srgbClr val="69738B"/>
+                </a:solidFill>
+                <a:latin typeface="JetBrains Mono" pitchFamily="34" charset="0"/>
+                <a:ea typeface="JetBrains Mono" pitchFamily="34" charset="-122"/>
+                <a:cs typeface="JetBrains Mono" pitchFamily="34" charset="-120"/>
+              </a:rPr>
+              <a:t>SUIHUB LAGOS / ACCOUNT LAYER WEEK</a:t>
+            </a:r>
+            <a:endParaRPr lang="en-US" sz="800" dirty="0"/>
+          </a:p>
+        </p:txBody>
+      </p:sp>
+      <p:sp>
+        <p:nvSpPr>
+          <p:cNvPr id="5" name="Text 3"/>
+          <p:cNvSpPr/>
+          <p:nvPr/>
+        </p:nvSpPr>
+        <p:spPr>
+          <a:xfrm>
+            <a:off x="10698480" y="6419088"/>
+            <a:ext cx="685800" cy="210312"/>
+          </a:xfrm>
+          <a:prstGeom prst="rect">
+            <a:avLst/>
+          </a:prstGeom>
+          <a:noFill/>
+          <a:ln/>
+        </p:spPr>
+        <p:txBody>
+          <a:bodyPr wrap="square" lIns="0" tIns="0" rIns="0" bIns="0" rtlCol="0" anchor="ctr"/>
+          <a:lstStyle/>
+          <a:p>
+            <a:pPr algn="r" indent="0" marL="0">
+              <a:buNone/>
+            </a:pPr>
+            <a:r>
+              <a:rPr lang="en-US" sz="1000" dirty="0">
+                <a:solidFill>
+                  <a:srgbClr val="69738B"/>
+                </a:solidFill>
+                <a:latin typeface="JetBrains Mono" pitchFamily="34" charset="0"/>
+                <a:ea typeface="JetBrains Mono" pitchFamily="34" charset="-122"/>
+                <a:cs typeface="JetBrains Mono" pitchFamily="34" charset="-120"/>
+              </a:rPr>
+              <a:t>04</a:t>
+            </a:r>
+            <a:endParaRPr lang="en-US" sz="1000" dirty="0"/>
+          </a:p>
+        </p:txBody>
+      </p:sp>
+      <p:sp>
+        <p:nvSpPr>
+          <p:cNvPr id="7" name="Shape 4"/>
+          <p:cNvSpPr/>
+          <p:nvPr/>
+        </p:nvSpPr>
+        <p:spPr>
+          <a:xfrm>
+            <a:off x="777240" y="2286000"/>
+            <a:ext cx="5204460" cy="3337560"/>
+          </a:xfrm>
+          <a:prstGeom prst="rect">
+            <a:avLst/>
+          </a:prstGeom>
+          <a:solidFill>
+            <a:srgbClr val="FFFFFF"/>
+          </a:solidFill>
+          <a:ln w="12700">
+            <a:solidFill>
+              <a:srgbClr val="FFFFFF">
+                <a:alpha val="0"/>
+              </a:srgbClr>
+            </a:solidFill>
+            <a:prstDash val="solid"/>
+          </a:ln>
+        </p:spPr>
+      </p:sp>
+      <p:sp>
+        <p:nvSpPr>
+          <p:cNvPr id="8" name="Text 5"/>
+          <p:cNvSpPr/>
+          <p:nvPr/>
+        </p:nvSpPr>
+        <p:spPr>
+          <a:xfrm>
+            <a:off x="1005840" y="2496312"/>
+            <a:ext cx="4747260" cy="274320"/>
+          </a:xfrm>
+          <a:prstGeom prst="rect">
+            <a:avLst/>
+          </a:prstGeom>
+          <a:noFill/>
+          <a:ln/>
+        </p:spPr>
+        <p:txBody>
+          <a:bodyPr wrap="square" lIns="0" tIns="0" rIns="0" bIns="0" rtlCol="0" anchor="ctr"/>
+          <a:lstStyle/>
+          <a:p>
+            <a:pPr indent="0" marL="0">
+              <a:buNone/>
+            </a:pPr>
+            <a:r>
+              <a:rPr lang="en-US" sz="1100" dirty="0">
+                <a:solidFill>
+                  <a:srgbClr val="2338FF"/>
+                </a:solidFill>
+                <a:latin typeface="JetBrains Mono" pitchFamily="34" charset="0"/>
+                <a:ea typeface="JetBrains Mono" pitchFamily="34" charset="-122"/>
+                <a:cs typeface="JetBrains Mono" pitchFamily="34" charset="-120"/>
+              </a:rPr>
+              <a:t>TRANSACTIONS</a:t>
+            </a:r>
+            <a:endParaRPr lang="en-US" sz="1100" dirty="0"/>
+          </a:p>
+        </p:txBody>
+      </p:sp>
+      <p:sp>
+        <p:nvSpPr>
+          <p:cNvPr id="9" name="Text 6"/>
+          <p:cNvSpPr/>
+          <p:nvPr/>
+        </p:nvSpPr>
+        <p:spPr>
+          <a:xfrm>
+            <a:off x="1005840" y="2889504"/>
+            <a:ext cx="4747260" cy="960120"/>
+          </a:xfrm>
+          <a:prstGeom prst="rect">
+            <a:avLst/>
+          </a:prstGeom>
+          <a:noFill/>
+          <a:ln/>
+        </p:spPr>
+        <p:txBody>
+          <a:bodyPr wrap="square" lIns="0" tIns="0" rIns="0" bIns="0" rtlCol="0" anchor="ctr"/>
+          <a:lstStyle/>
+          <a:p>
+            <a:pPr indent="0" marL="0">
+              <a:buNone/>
+            </a:pPr>
+            <a:r>
+              <a:rPr lang="en-US" sz="2500" dirty="0">
+                <a:solidFill>
+                  <a:srgbClr val="131725"/>
+                </a:solidFill>
+                <a:latin typeface="DM Sans" pitchFamily="34" charset="0"/>
+                <a:ea typeface="DM Sans" pitchFamily="34" charset="-122"/>
+                <a:cs typeface="DM Sans" pitchFamily="34" charset="-120"/>
+              </a:rPr>
+              <a:t>Address, object or call</a:t>
+            </a:r>
+            <a:endParaRPr lang="en-US" sz="2500" dirty="0"/>
+          </a:p>
+        </p:txBody>
+      </p:sp>
+      <p:sp>
+        <p:nvSpPr>
+          <p:cNvPr id="10" name="Text 7"/>
+          <p:cNvSpPr/>
+          <p:nvPr/>
+        </p:nvSpPr>
+        <p:spPr>
+          <a:xfrm>
+            <a:off x="1005840" y="4005072"/>
+            <a:ext cx="4747260" cy="1371600"/>
+          </a:xfrm>
+          <a:prstGeom prst="rect">
+            <a:avLst/>
+          </a:prstGeom>
+          <a:noFill/>
+          <a:ln/>
+        </p:spPr>
+        <p:txBody>
+          <a:bodyPr wrap="square" lIns="0" tIns="0" rIns="0" bIns="0" rtlCol="0" anchor="ctr"/>
+          <a:lstStyle/>
+          <a:p>
+            <a:pPr indent="0" marL="0">
+              <a:buNone/>
+            </a:pPr>
+            <a:r>
+              <a:rPr lang="en-US" sz="1900" dirty="0">
+                <a:solidFill>
+                  <a:srgbClr val="69738B"/>
+                </a:solidFill>
+                <a:latin typeface="DM Sans" pitchFamily="34" charset="0"/>
+                <a:ea typeface="DM Sans" pitchFamily="34" charset="-122"/>
+                <a:cs typeface="DM Sans" pitchFamily="34" charset="-120"/>
+              </a:rPr>
+              <a:t>affectedAddress · affectedObject</a:t>
+            </a:r>
+            <a:endParaRPr lang="en-US" sz="1900" dirty="0"/>
+          </a:p>
+          <a:p>
+            <a:pPr indent="0" marL="0">
+              <a:buNone/>
+            </a:pPr>
+            <a:r>
+              <a:rPr lang="en-US" sz="1900" dirty="0">
+                <a:solidFill>
+                  <a:srgbClr val="69738B"/>
+                </a:solidFill>
+                <a:latin typeface="DM Sans" pitchFamily="34" charset="0"/>
+                <a:ea typeface="DM Sans" pitchFamily="34" charset="-122"/>
+                <a:cs typeface="DM Sans" pitchFamily="34" charset="-120"/>
+              </a:rPr>
+              <a:t>function · kind · sentAddress</a:t>
+            </a:r>
+            <a:endParaRPr lang="en-US" sz="1900" dirty="0"/>
+          </a:p>
+          <a:p>
+            <a:pPr indent="0" marL="0">
+              <a:buNone/>
+            </a:pPr>
+            <a:r>
+              <a:rPr lang="en-US" sz="1900" dirty="0">
+                <a:solidFill>
+                  <a:srgbClr val="69738B"/>
+                </a:solidFill>
+                <a:latin typeface="DM Sans" pitchFamily="34" charset="0"/>
+                <a:ea typeface="DM Sans" pitchFamily="34" charset="-122"/>
+                <a:cs typeface="DM Sans" pitchFamily="34" charset="-120"/>
+              </a:rPr>
+              <a:t>Checkpoint bounds + cursor</a:t>
+            </a:r>
+            <a:endParaRPr lang="en-US" sz="1900" dirty="0"/>
+          </a:p>
+        </p:txBody>
+      </p:sp>
+      <p:sp>
+        <p:nvSpPr>
+          <p:cNvPr id="11" name="Shape 8"/>
+          <p:cNvSpPr/>
+          <p:nvPr/>
+        </p:nvSpPr>
+        <p:spPr>
+          <a:xfrm>
+            <a:off x="6210300" y="2286000"/>
+            <a:ext cx="5204460" cy="3337560"/>
+          </a:xfrm>
+          <a:prstGeom prst="rect">
+            <a:avLst/>
+          </a:prstGeom>
+          <a:solidFill>
+            <a:srgbClr val="2338FF"/>
+          </a:solidFill>
+          <a:ln w="12700">
+            <a:solidFill>
+              <a:srgbClr val="2338FF">
+                <a:alpha val="0"/>
+              </a:srgbClr>
+            </a:solidFill>
+            <a:prstDash val="solid"/>
+          </a:ln>
+        </p:spPr>
+      </p:sp>
+      <p:sp>
+        <p:nvSpPr>
+          <p:cNvPr id="12" name="Text 9"/>
+          <p:cNvSpPr/>
+          <p:nvPr/>
+        </p:nvSpPr>
+        <p:spPr>
+          <a:xfrm>
+            <a:off x="6438900" y="2496312"/>
+            <a:ext cx="4747260" cy="274320"/>
+          </a:xfrm>
+          <a:prstGeom prst="rect">
+            <a:avLst/>
+          </a:prstGeom>
+          <a:noFill/>
+          <a:ln/>
+        </p:spPr>
+        <p:txBody>
+          <a:bodyPr wrap="square" lIns="0" tIns="0" rIns="0" bIns="0" rtlCol="0" anchor="ctr"/>
+          <a:lstStyle/>
+          <a:p>
+            <a:pPr indent="0" marL="0">
+              <a:buNone/>
+            </a:pPr>
+            <a:r>
+              <a:rPr lang="en-US" sz="1100" dirty="0">
+                <a:solidFill>
+                  <a:srgbClr val="BFC9FF"/>
+                </a:solidFill>
+                <a:latin typeface="JetBrains Mono" pitchFamily="34" charset="0"/>
+                <a:ea typeface="JetBrains Mono" pitchFamily="34" charset="-122"/>
+                <a:cs typeface="JetBrains Mono" pitchFamily="34" charset="-120"/>
+              </a:rPr>
+              <a:t>EVENTS</a:t>
+            </a:r>
+            <a:endParaRPr lang="en-US" sz="1100" dirty="0"/>
+          </a:p>
+        </p:txBody>
+      </p:sp>
+      <p:sp>
+        <p:nvSpPr>
+          <p:cNvPr id="13" name="Text 10"/>
+          <p:cNvSpPr/>
+          <p:nvPr/>
+        </p:nvSpPr>
+        <p:spPr>
+          <a:xfrm>
+            <a:off x="6438900" y="2889504"/>
+            <a:ext cx="4747260" cy="960120"/>
+          </a:xfrm>
+          <a:prstGeom prst="rect">
+            <a:avLst/>
+          </a:prstGeom>
+          <a:noFill/>
+          <a:ln/>
+        </p:spPr>
+        <p:txBody>
+          <a:bodyPr wrap="square" lIns="0" tIns="0" rIns="0" bIns="0" rtlCol="0" anchor="ctr"/>
+          <a:lstStyle/>
+          <a:p>
+            <a:pPr indent="0" marL="0">
+              <a:buNone/>
+            </a:pPr>
+            <a:r>
+              <a:rPr lang="en-US" sz="2500" dirty="0">
+                <a:solidFill>
+                  <a:srgbClr val="FFFFFF"/>
+                </a:solidFill>
+                <a:latin typeface="DM Sans" pitchFamily="34" charset="0"/>
+                <a:ea typeface="DM Sans" pitchFamily="34" charset="-122"/>
+                <a:cs typeface="DM Sans" pitchFamily="34" charset="-120"/>
+              </a:rPr>
+              <a:t>Sender, module or type</a:t>
+            </a:r>
+            <a:endParaRPr lang="en-US" sz="2500" dirty="0"/>
+          </a:p>
+        </p:txBody>
+      </p:sp>
+      <p:sp>
+        <p:nvSpPr>
+          <p:cNvPr id="14" name="Text 11"/>
+          <p:cNvSpPr/>
+          <p:nvPr/>
+        </p:nvSpPr>
+        <p:spPr>
+          <a:xfrm>
+            <a:off x="6438900" y="4005072"/>
+            <a:ext cx="4747260" cy="1371600"/>
+          </a:xfrm>
+          <a:prstGeom prst="rect">
+            <a:avLst/>
+          </a:prstGeom>
+          <a:noFill/>
+          <a:ln/>
+        </p:spPr>
+        <p:txBody>
+          <a:bodyPr wrap="square" lIns="0" tIns="0" rIns="0" bIns="0" rtlCol="0" anchor="ctr"/>
+          <a:lstStyle/>
+          <a:p>
+            <a:pPr indent="0" marL="0">
+              <a:buNone/>
+            </a:pPr>
+            <a:r>
+              <a:rPr lang="en-US" sz="1900" dirty="0">
+                <a:solidFill>
+                  <a:srgbClr val="DFE4FF"/>
+                </a:solidFill>
+                <a:latin typeface="DM Sans" pitchFamily="34" charset="0"/>
+                <a:ea typeface="DM Sans" pitchFamily="34" charset="-122"/>
+                <a:cs typeface="DM Sans" pitchFamily="34" charset="-120"/>
+              </a:rPr>
+              <a:t>sender · module · type</a:t>
+            </a:r>
+            <a:endParaRPr lang="en-US" sz="1900" dirty="0"/>
+          </a:p>
+          <a:p>
+            <a:pPr indent="0" marL="0">
+              <a:buNone/>
+            </a:pPr>
+            <a:r>
+              <a:rPr lang="en-US" sz="1900" dirty="0">
+                <a:solidFill>
+                  <a:srgbClr val="DFE4FF"/>
+                </a:solidFill>
+                <a:latin typeface="DM Sans" pitchFamily="34" charset="0"/>
+                <a:ea typeface="DM Sans" pitchFamily="34" charset="-122"/>
+                <a:cs typeface="DM Sans" pitchFamily="34" charset="-120"/>
+              </a:rPr>
+              <a:t>Checkpoint bounds + cursor</a:t>
+            </a:r>
+            <a:endParaRPr lang="en-US" sz="1900" dirty="0"/>
+          </a:p>
+          <a:p>
+            <a:pPr indent="0" marL="0">
+              <a:buNone/>
+            </a:pPr>
+            <a:r>
+              <a:rPr lang="en-US" sz="1900" dirty="0">
+                <a:solidFill>
+                  <a:srgbClr val="DFE4FF"/>
+                </a:solidFill>
+                <a:latin typeface="DM Sans" pitchFamily="34" charset="0"/>
+                <a:ea typeface="DM Sans" pitchFamily="34" charset="-122"/>
+                <a:cs typeface="DM Sans" pitchFamily="34" charset="-120"/>
+              </a:rPr>
+              <a:t>Select only the fields you need.</a:t>
+            </a:r>
+            <a:endParaRPr lang="en-US" sz="1900" dirty="0"/>
+          </a:p>
+        </p:txBody>
+      </p:sp>
+      <p:sp>
+        <p:nvSpPr>
+          <p:cNvPr id="15" name="Text 12"/>
+          <p:cNvSpPr/>
+          <p:nvPr/>
+        </p:nvSpPr>
+        <p:spPr>
+          <a:xfrm>
+            <a:off x="777240" y="5989320"/>
+            <a:ext cx="10607040" cy="320040"/>
+          </a:xfrm>
+          <a:prstGeom prst="rect">
+            <a:avLst/>
+          </a:prstGeom>
+          <a:noFill/>
+          <a:ln/>
+        </p:spPr>
+        <p:txBody>
+          <a:bodyPr wrap="square" lIns="0" tIns="0" rIns="0" bIns="0" rtlCol="0" anchor="ctr"/>
+          <a:lstStyle/>
+          <a:p>
+            <a:pPr indent="0" marL="0">
+              <a:buNone/>
+            </a:pPr>
+            <a:r>
+              <a:rPr lang="en-US" sz="1600" dirty="0">
+                <a:solidFill>
+                  <a:srgbClr val="69738B"/>
+                </a:solidFill>
+                <a:latin typeface="DM Sans" pitchFamily="34" charset="0"/>
+                <a:ea typeface="DM Sans" pitchFamily="34" charset="-122"/>
+                <a:cs typeface="DM Sans" pitchFamily="34" charset="-120"/>
+              </a:rPr>
+              <a:t>Till selects digest, sender, status, timestamp, checkpoint and balance changes.</a:t>
+            </a:r>
+            <a:endParaRPr lang="en-US" sz="1600" dirty="0"/>
+          </a:p>
+        </p:txBody>
+      </p:sp>
+    </p:spTree>
+  </p:cSld>
+  <p:clrMapOvr>
+    <a:masterClrMapping/>
+  </p:clrMapOvr>
+</p:sld>
+</file>
+
+<file path=ppt/slides/slide5.xml><?xml version="1.0" encoding="utf-8"?>
+<p:sld xmlns:a="http://schemas.openxmlformats.org/drawingml/2006/main" xmlns:r="http://schemas.openxmlformats.org/officeDocument/2006/relationships" xmlns:p="http://schemas.openxmlformats.org/presentationml/2006/main">
+  <p:cSld name="Slide 5">
     <p:bg>
       <p:bgPr>
         <a:solidFill>
@@ -7379,7 +8016,7 @@
                 <a:ea typeface="DM Sans" pitchFamily="34" charset="-122"/>
                 <a:cs typeface="DM Sans" pitchFamily="34" charset="-120"/>
               </a:rPr>
-              <a:t>One document. Any shop.</a:t>
+              <a:t>The actual Till subscription.</a:t>
             </a:r>
             <a:endParaRPr lang="en-US" sz="3700" dirty="0"/>
           </a:p>
@@ -7457,7 +8094,7 @@
                 <a:ea typeface="JetBrains Mono" pitchFamily="34" charset="-122"/>
                 <a:cs typeface="JetBrains Mono" pitchFamily="34" charset="-120"/>
               </a:rPr>
-              <a:t>04</a:t>
+              <a:t>05</a:t>
             </a:r>
             <a:endParaRPr lang="en-US" sz="1000" dirty="0"/>
           </a:p>
@@ -7783,7 +8420,7 @@
                 <a:ea typeface="DM Sans" pitchFamily="34" charset="-122"/>
                 <a:cs typeface="DM Sans" pitchFamily="34" charset="-120"/>
               </a:rPr>
-              <a:t>Select a small payload. Every matching transaction carries a cursor.</a:t>
+              <a:t>A matching transaction becomes a receipt only after success and balance-change checks.</a:t>
             </a:r>
             <a:endParaRPr lang="en-US" sz="1100" dirty="0"/>
           </a:p>
@@ -7797,13 +8434,13 @@
 </p:sld>
 </file>
 
-<file path=ppt/slides/slide5.xml><?xml version="1.0" encoding="utf-8"?>
+<file path=ppt/slides/slide6.xml><?xml version="1.0" encoding="utf-8"?>
 <p:sld xmlns:a="http://schemas.openxmlformats.org/drawingml/2006/main" xmlns:r="http://schemas.openxmlformats.org/officeDocument/2006/relationships" xmlns:p="http://schemas.openxmlformats.org/presentationml/2006/main">
-  <p:cSld name="Slide 5">
+  <p:cSld name="Slide 6">
     <p:bg>
       <p:bgPr>
         <a:solidFill>
-          <a:srgbClr val="F4F5F8"/>
+          <a:srgbClr val="07080F"/>
         </a:solidFill>
       </p:bgPr>
     </p:bg>
@@ -7848,13 +8485,13 @@
             <a:r>
               <a:rPr lang="en-US" sz="1000" spc="150" kern="0" dirty="0">
                 <a:solidFill>
-                  <a:srgbClr val="69738B"/>
-                </a:solidFill>
-                <a:latin typeface="JetBrains Mono" pitchFamily="34" charset="0"/>
-                <a:ea typeface="JetBrains Mono" pitchFamily="34" charset="-122"/>
-                <a:cs typeface="JetBrains Mono" pitchFamily="34" charset="-120"/>
-              </a:rPr>
-              <a:t>[ SUBSCRIPTIONS + TRANSPORT ]</a:t>
+                  <a:srgbClr val="ACB8DB"/>
+                </a:solidFill>
+                <a:latin typeface="JetBrains Mono" pitchFamily="34" charset="0"/>
+                <a:ea typeface="JetBrains Mono" pitchFamily="34" charset="-122"/>
+                <a:cs typeface="JetBrains Mono" pitchFamily="34" charset="-120"/>
+              </a:rPr>
+              <a:t>[ SRC/LIB/SSE.TS ]</a:t>
             </a:r>
             <a:endParaRPr lang="en-US" sz="1000" dirty="0"/>
           </a:p>
@@ -7887,13 +8524,13 @@
             <a:r>
               <a:rPr lang="en-US" sz="3700" dirty="0">
                 <a:solidFill>
-                  <a:srgbClr val="131725"/>
+                  <a:srgbClr val="FFFFFF"/>
                 </a:solidFill>
                 <a:latin typeface="DM Sans" pitchFamily="34" charset="0"/>
                 <a:ea typeface="DM Sans" pitchFamily="34" charset="-122"/>
                 <a:cs typeface="DM Sans" pitchFamily="34" charset="-120"/>
               </a:rPr>
-              <a:t>Choose a filter. Open the stream.</a:t>
+              <a:t>POST + SSE. Stream with fetch.</a:t>
             </a:r>
             <a:endParaRPr lang="en-US" sz="3700" dirty="0"/>
           </a:p>
@@ -7926,7 +8563,7 @@
             <a:r>
               <a:rPr lang="en-US" sz="800" spc="100" kern="0" dirty="0">
                 <a:solidFill>
-                  <a:srgbClr val="69738B"/>
+                  <a:srgbClr val="ACB8DB"/>
                 </a:solidFill>
                 <a:latin typeface="JetBrains Mono" pitchFamily="34" charset="0"/>
                 <a:ea typeface="JetBrains Mono" pitchFamily="34" charset="-122"/>
@@ -7965,13 +8602,13 @@
             <a:r>
               <a:rPr lang="en-US" sz="1000" dirty="0">
                 <a:solidFill>
-                  <a:srgbClr val="69738B"/>
-                </a:solidFill>
-                <a:latin typeface="JetBrains Mono" pitchFamily="34" charset="0"/>
-                <a:ea typeface="JetBrains Mono" pitchFamily="34" charset="-122"/>
-                <a:cs typeface="JetBrains Mono" pitchFamily="34" charset="-120"/>
-              </a:rPr>
-              <a:t>05</a:t>
+                  <a:srgbClr val="ACB8DB"/>
+                </a:solidFill>
+                <a:latin typeface="JetBrains Mono" pitchFamily="34" charset="0"/>
+                <a:ea typeface="JetBrains Mono" pitchFamily="34" charset="-122"/>
+                <a:cs typeface="JetBrains Mono" pitchFamily="34" charset="-120"/>
+              </a:rPr>
+              <a:t>06</a:t>
             </a:r>
             <a:endParaRPr lang="en-US" sz="1000" dirty="0"/>
           </a:p>
@@ -7985,18 +8622,18 @@
         </p:nvSpPr>
         <p:spPr>
           <a:xfrm>
-            <a:off x="777240" y="2286000"/>
-            <a:ext cx="5204460" cy="1664208"/>
+            <a:off x="777240" y="2267712"/>
+            <a:ext cx="10637520" cy="3794760"/>
           </a:xfrm>
           <a:prstGeom prst="rect">
             <a:avLst/>
           </a:prstGeom>
           <a:solidFill>
-            <a:srgbClr val="FFFFFF"/>
+            <a:srgbClr val="111529"/>
           </a:solidFill>
           <a:ln w="12700">
             <a:solidFill>
-              <a:srgbClr val="FFFFFF">
+              <a:srgbClr val="111529">
                 <a:alpha val="0"/>
               </a:srgbClr>
             </a:solidFill>
@@ -8012,8 +8649,200 @@
         </p:nvSpPr>
         <p:spPr>
           <a:xfrm>
-            <a:off x="1005840" y="2496312"/>
-            <a:ext cx="4747260" cy="274320"/>
+            <a:off x="1033272" y="2432304"/>
+            <a:ext cx="10125456" cy="3520440"/>
+          </a:xfrm>
+          <a:prstGeom prst="rect">
+            <a:avLst/>
+          </a:prstGeom>
+          <a:noFill/>
+          <a:ln/>
+        </p:spPr>
+        <p:txBody>
+          <a:bodyPr wrap="square" lIns="0" tIns="0" rIns="0" bIns="0" rtlCol="0" anchor="t"/>
+          <a:lstStyle/>
+          <a:p>
+            <a:pPr indent="0" marL="0">
+              <a:buNone/>
+            </a:pPr>
+            <a:r>
+              <a:rPr lang="en-US" sz="1613" dirty="0">
+                <a:solidFill>
+                  <a:srgbClr val="D9E1FF"/>
+                </a:solidFill>
+                <a:latin typeface="JetBrains Mono" pitchFamily="34" charset="0"/>
+                <a:ea typeface="JetBrains Mono" pitchFamily="34" charset="-122"/>
+                <a:cs typeface="JetBrains Mono" pitchFamily="34" charset="-120"/>
+              </a:rPr>
+              <a:t>const res = await fetch(url, {</a:t>
+            </a:r>
+            <a:endParaRPr lang="en-US" sz="1613" dirty="0"/>
+          </a:p>
+          <a:p>
+            <a:pPr indent="0" marL="0">
+              <a:buNone/>
+            </a:pPr>
+            <a:r>
+              <a:rPr lang="en-US" sz="1613" dirty="0">
+                <a:solidFill>
+                  <a:srgbClr val="D9E1FF"/>
+                </a:solidFill>
+                <a:latin typeface="JetBrains Mono" pitchFamily="34" charset="0"/>
+                <a:ea typeface="JetBrains Mono" pitchFamily="34" charset="-122"/>
+                <a:cs typeface="JetBrains Mono" pitchFamily="34" charset="-120"/>
+              </a:rPr>
+              <a:t>    method: 'POST',</a:t>
+            </a:r>
+            <a:endParaRPr lang="en-US" sz="1613" dirty="0"/>
+          </a:p>
+          <a:p>
+            <a:pPr indent="0" marL="0">
+              <a:buNone/>
+            </a:pPr>
+            <a:r>
+              <a:rPr lang="en-US" sz="1613" dirty="0">
+                <a:solidFill>
+                  <a:srgbClr val="D9E1FF"/>
+                </a:solidFill>
+                <a:latin typeface="JetBrains Mono" pitchFamily="34" charset="0"/>
+                <a:ea typeface="JetBrains Mono" pitchFamily="34" charset="-122"/>
+                <a:cs typeface="JetBrains Mono" pitchFamily="34" charset="-120"/>
+              </a:rPr>
+              <a:t>    headers: { 'content-type': 'application/json', accept: 'text/event-stream' },</a:t>
+            </a:r>
+            <a:endParaRPr lang="en-US" sz="1613" dirty="0"/>
+          </a:p>
+          <a:p>
+            <a:pPr indent="0" marL="0">
+              <a:buNone/>
+            </a:pPr>
+            <a:r>
+              <a:rPr lang="en-US" sz="1613" dirty="0">
+                <a:solidFill>
+                  <a:srgbClr val="D9E1FF"/>
+                </a:solidFill>
+                <a:latin typeface="JetBrains Mono" pitchFamily="34" charset="0"/>
+                <a:ea typeface="JetBrains Mono" pitchFamily="34" charset="-122"/>
+                <a:cs typeface="JetBrains Mono" pitchFamily="34" charset="-120"/>
+              </a:rPr>
+              <a:t>    body: JSON.stringify({ query, variables }), signal,</a:t>
+            </a:r>
+            <a:endParaRPr lang="en-US" sz="1613" dirty="0"/>
+          </a:p>
+          <a:p>
+            <a:pPr indent="0" marL="0">
+              <a:buNone/>
+            </a:pPr>
+            <a:r>
+              <a:rPr lang="en-US" sz="1613" dirty="0">
+                <a:solidFill>
+                  <a:srgbClr val="D9E1FF"/>
+                </a:solidFill>
+                <a:latin typeface="JetBrains Mono" pitchFamily="34" charset="0"/>
+                <a:ea typeface="JetBrains Mono" pitchFamily="34" charset="-122"/>
+                <a:cs typeface="JetBrains Mono" pitchFamily="34" charset="-120"/>
+              </a:rPr>
+              <a:t>  });</a:t>
+            </a:r>
+            <a:endParaRPr lang="en-US" sz="1613" dirty="0"/>
+          </a:p>
+          <a:p>
+            <a:pPr indent="0" marL="0">
+              <a:buNone/>
+            </a:pPr>
+            <a:r>
+              <a:rPr lang="en-US" sz="1613" dirty="0">
+                <a:solidFill>
+                  <a:srgbClr val="D9E1FF"/>
+                </a:solidFill>
+                <a:latin typeface="JetBrains Mono" pitchFamily="34" charset="0"/>
+                <a:ea typeface="JetBrains Mono" pitchFamily="34" charset="-122"/>
+                <a:cs typeface="JetBrains Mono" pitchFamily="34" charset="-120"/>
+              </a:rPr>
+              <a:t>  if (!res.ok || !res.body) throw new Error(`Subscription HTTP ${res.status}`);</a:t>
+            </a:r>
+            <a:endParaRPr lang="en-US" sz="1613" dirty="0"/>
+          </a:p>
+          <a:p>
+            <a:pPr indent="0" marL="0">
+              <a:buNone/>
+            </a:pPr>
+            <a:r>
+              <a:rPr lang="en-US" sz="1613" dirty="0">
+                <a:solidFill>
+                  <a:srgbClr val="D9E1FF"/>
+                </a:solidFill>
+                <a:latin typeface="JetBrains Mono" pitchFamily="34" charset="0"/>
+                <a:ea typeface="JetBrains Mono" pitchFamily="34" charset="-122"/>
+                <a:cs typeface="JetBrains Mono" pitchFamily="34" charset="-120"/>
+              </a:rPr>
+              <a:t>  if (!res.headers.get('content-type')?.includes('text/event-stream')) {</a:t>
+            </a:r>
+            <a:endParaRPr lang="en-US" sz="1613" dirty="0"/>
+          </a:p>
+          <a:p>
+            <a:pPr indent="0" marL="0">
+              <a:buNone/>
+            </a:pPr>
+            <a:r>
+              <a:rPr lang="en-US" sz="1613" dirty="0">
+                <a:solidFill>
+                  <a:srgbClr val="D9E1FF"/>
+                </a:solidFill>
+                <a:latin typeface="JetBrains Mono" pitchFamily="34" charset="0"/>
+                <a:ea typeface="JetBrains Mono" pitchFamily="34" charset="-122"/>
+                <a:cs typeface="JetBrains Mono" pitchFamily="34" charset="-120"/>
+              </a:rPr>
+              <a:t>    throw new Error('Expected an event stream');</a:t>
+            </a:r>
+            <a:endParaRPr lang="en-US" sz="1613" dirty="0"/>
+          </a:p>
+          <a:p>
+            <a:pPr indent="0" marL="0">
+              <a:buNone/>
+            </a:pPr>
+            <a:r>
+              <a:rPr lang="en-US" sz="1613" dirty="0">
+                <a:solidFill>
+                  <a:srgbClr val="D9E1FF"/>
+                </a:solidFill>
+                <a:latin typeface="JetBrains Mono" pitchFamily="34" charset="0"/>
+                <a:ea typeface="JetBrains Mono" pitchFamily="34" charset="-122"/>
+                <a:cs typeface="JetBrains Mono" pitchFamily="34" charset="-120"/>
+              </a:rPr>
+              <a:t>  }</a:t>
+            </a:r>
+            <a:endParaRPr lang="en-US" sz="1613" dirty="0"/>
+          </a:p>
+          <a:p>
+            <a:pPr indent="0" marL="0">
+              <a:buNone/>
+            </a:pPr>
+            <a:r>
+              <a:rPr lang="en-US" sz="1613" dirty="0">
+                <a:solidFill>
+                  <a:srgbClr val="D9E1FF"/>
+                </a:solidFill>
+                <a:latin typeface="JetBrains Mono" pitchFamily="34" charset="0"/>
+                <a:ea typeface="JetBrains Mono" pitchFamily="34" charset="-122"/>
+                <a:cs typeface="JetBrains Mono" pitchFamily="34" charset="-120"/>
+              </a:rPr>
+              <a:t>  const reader = res.body.pipeThrough(new TextDecoderStream()).getReader();</a:t>
+            </a:r>
+            <a:endParaRPr lang="en-US" sz="1613" dirty="0"/>
+          </a:p>
+        </p:txBody>
+      </p:sp>
+      <p:sp>
+        <p:nvSpPr>
+          <p:cNvPr id="9" name="Text 6"/>
+          <p:cNvSpPr/>
+          <p:nvPr/>
+        </p:nvSpPr>
+        <p:spPr>
+          <a:xfrm>
+            <a:off x="777240" y="6053328"/>
+            <a:ext cx="10515600" cy="228600"/>
           </a:xfrm>
           <a:prstGeom prst="rect">
             <a:avLst/>
@@ -8031,932 +8860,15 @@
             <a:r>
               <a:rPr lang="en-US" sz="1100" dirty="0">
                 <a:solidFill>
-                  <a:srgbClr val="2338FF"/>
-                </a:solidFill>
-                <a:latin typeface="JetBrains Mono" pitchFamily="34" charset="0"/>
-                <a:ea typeface="JetBrains Mono" pitchFamily="34" charset="-122"/>
-                <a:cs typeface="JetBrains Mono" pitchFamily="34" charset="-120"/>
-              </a:rPr>
-              <a:t>TRANSACTIONS</a:t>
-            </a:r>
-            <a:endParaRPr lang="en-US" sz="1100" dirty="0"/>
-          </a:p>
-        </p:txBody>
-      </p:sp>
-      <p:sp>
-        <p:nvSpPr>
-          <p:cNvPr id="9" name="Text 6"/>
-          <p:cNvSpPr/>
-          <p:nvPr/>
-        </p:nvSpPr>
-        <p:spPr>
-          <a:xfrm>
-            <a:off x="1005840" y="2889504"/>
-            <a:ext cx="4747260" cy="365760"/>
-          </a:xfrm>
-          <a:prstGeom prst="rect">
-            <a:avLst/>
-          </a:prstGeom>
-          <a:noFill/>
-          <a:ln/>
-        </p:spPr>
-        <p:txBody>
-          <a:bodyPr wrap="square" lIns="0" tIns="0" rIns="0" bIns="0" rtlCol="0" anchor="ctr"/>
-          <a:lstStyle/>
-          <a:p>
-            <a:pPr indent="0" marL="0">
-              <a:buNone/>
-            </a:pPr>
-            <a:r>
-              <a:rPr lang="en-US" sz="2300" dirty="0">
-                <a:solidFill>
-                  <a:srgbClr val="131725"/>
+                  <a:srgbClr val="ACB8DB"/>
                 </a:solidFill>
                 <a:latin typeface="DM Sans" pitchFamily="34" charset="0"/>
                 <a:ea typeface="DM Sans" pitchFamily="34" charset="-122"/>
                 <a:cs typeface="DM Sans" pitchFamily="34" charset="-120"/>
               </a:rPr>
-              <a:t>Who or what?</a:t>
-            </a:r>
-            <a:endParaRPr lang="en-US" sz="2300" dirty="0"/>
-          </a:p>
-        </p:txBody>
-      </p:sp>
-      <p:sp>
-        <p:nvSpPr>
-          <p:cNvPr id="10" name="Text 7"/>
-          <p:cNvSpPr/>
-          <p:nvPr/>
-        </p:nvSpPr>
-        <p:spPr>
-          <a:xfrm>
-            <a:off x="1005840" y="3310128"/>
-            <a:ext cx="4747260" cy="530352"/>
-          </a:xfrm>
-          <a:prstGeom prst="rect">
-            <a:avLst/>
-          </a:prstGeom>
-          <a:noFill/>
-          <a:ln/>
-        </p:spPr>
-        <p:txBody>
-          <a:bodyPr wrap="square" lIns="0" tIns="0" rIns="0" bIns="0" rtlCol="0" anchor="ctr"/>
-          <a:lstStyle/>
-          <a:p>
-            <a:pPr indent="0" marL="0">
-              <a:buNone/>
-            </a:pPr>
-            <a:r>
-              <a:rPr lang="en-US" sz="1500" dirty="0">
-                <a:solidFill>
-                  <a:srgbClr val="69738B"/>
-                </a:solidFill>
-                <a:latin typeface="DM Sans" pitchFamily="34" charset="0"/>
-                <a:ea typeface="DM Sans" pitchFamily="34" charset="-122"/>
-                <a:cs typeface="DM Sans" pitchFamily="34" charset="-120"/>
-              </a:rPr>
-              <a:t>affectedAddress · affectedObject · sentAddress</a:t>
-            </a:r>
-            <a:endParaRPr lang="en-US" sz="1500" dirty="0"/>
-          </a:p>
-        </p:txBody>
-      </p:sp>
-      <p:sp>
-        <p:nvSpPr>
-          <p:cNvPr id="11" name="Shape 8"/>
-          <p:cNvSpPr/>
-          <p:nvPr/>
-        </p:nvSpPr>
-        <p:spPr>
-          <a:xfrm>
-            <a:off x="6210300" y="2286000"/>
-            <a:ext cx="5204460" cy="1664208"/>
-          </a:xfrm>
-          <a:prstGeom prst="rect">
-            <a:avLst/>
-          </a:prstGeom>
-          <a:solidFill>
-            <a:srgbClr val="FFFFFF"/>
-          </a:solidFill>
-          <a:ln w="12700">
-            <a:solidFill>
-              <a:srgbClr val="FFFFFF">
-                <a:alpha val="0"/>
-              </a:srgbClr>
-            </a:solidFill>
-            <a:prstDash val="solid"/>
-          </a:ln>
-        </p:spPr>
-      </p:sp>
-      <p:sp>
-        <p:nvSpPr>
-          <p:cNvPr id="12" name="Text 9"/>
-          <p:cNvSpPr/>
-          <p:nvPr/>
-        </p:nvSpPr>
-        <p:spPr>
-          <a:xfrm>
-            <a:off x="6438900" y="2496312"/>
-            <a:ext cx="4747260" cy="274320"/>
-          </a:xfrm>
-          <a:prstGeom prst="rect">
-            <a:avLst/>
-          </a:prstGeom>
-          <a:noFill/>
-          <a:ln/>
-        </p:spPr>
-        <p:txBody>
-          <a:bodyPr wrap="square" lIns="0" tIns="0" rIns="0" bIns="0" rtlCol="0" anchor="ctr"/>
-          <a:lstStyle/>
-          <a:p>
-            <a:pPr indent="0" marL="0">
-              <a:buNone/>
-            </a:pPr>
-            <a:r>
-              <a:rPr lang="en-US" sz="1100" dirty="0">
-                <a:solidFill>
-                  <a:srgbClr val="2338FF"/>
-                </a:solidFill>
-                <a:latin typeface="JetBrains Mono" pitchFamily="34" charset="0"/>
-                <a:ea typeface="JetBrains Mono" pitchFamily="34" charset="-122"/>
-                <a:cs typeface="JetBrains Mono" pitchFamily="34" charset="-120"/>
-              </a:rPr>
-              <a:t>EVENTS</a:t>
+              <a:t>POST /graphql/subscriptions   /   text/event-stream   /   EventSource cannot POST the query</a:t>
             </a:r>
             <a:endParaRPr lang="en-US" sz="1100" dirty="0"/>
-          </a:p>
-        </p:txBody>
-      </p:sp>
-      <p:sp>
-        <p:nvSpPr>
-          <p:cNvPr id="13" name="Text 10"/>
-          <p:cNvSpPr/>
-          <p:nvPr/>
-        </p:nvSpPr>
-        <p:spPr>
-          <a:xfrm>
-            <a:off x="6438900" y="2889504"/>
-            <a:ext cx="4747260" cy="365760"/>
-          </a:xfrm>
-          <a:prstGeom prst="rect">
-            <a:avLst/>
-          </a:prstGeom>
-          <a:noFill/>
-          <a:ln/>
-        </p:spPr>
-        <p:txBody>
-          <a:bodyPr wrap="square" lIns="0" tIns="0" rIns="0" bIns="0" rtlCol="0" anchor="ctr"/>
-          <a:lstStyle/>
-          <a:p>
-            <a:pPr indent="0" marL="0">
-              <a:buNone/>
-            </a:pPr>
-            <a:r>
-              <a:rPr lang="en-US" sz="2300" dirty="0">
-                <a:solidFill>
-                  <a:srgbClr val="131725"/>
-                </a:solidFill>
-                <a:latin typeface="DM Sans" pitchFamily="34" charset="0"/>
-                <a:ea typeface="DM Sans" pitchFamily="34" charset="-122"/>
-                <a:cs typeface="DM Sans" pitchFamily="34" charset="-120"/>
-              </a:rPr>
-              <a:t>Which event?</a:t>
-            </a:r>
-            <a:endParaRPr lang="en-US" sz="2300" dirty="0"/>
-          </a:p>
-        </p:txBody>
-      </p:sp>
-      <p:sp>
-        <p:nvSpPr>
-          <p:cNvPr id="14" name="Text 11"/>
-          <p:cNvSpPr/>
-          <p:nvPr/>
-        </p:nvSpPr>
-        <p:spPr>
-          <a:xfrm>
-            <a:off x="6438900" y="3310128"/>
-            <a:ext cx="4747260" cy="530352"/>
-          </a:xfrm>
-          <a:prstGeom prst="rect">
-            <a:avLst/>
-          </a:prstGeom>
-          <a:noFill/>
-          <a:ln/>
-        </p:spPr>
-        <p:txBody>
-          <a:bodyPr wrap="square" lIns="0" tIns="0" rIns="0" bIns="0" rtlCol="0" anchor="ctr"/>
-          <a:lstStyle/>
-          <a:p>
-            <a:pPr indent="0" marL="0">
-              <a:buNone/>
-            </a:pPr>
-            <a:r>
-              <a:rPr lang="en-US" sz="1500" dirty="0">
-                <a:solidFill>
-                  <a:srgbClr val="69738B"/>
-                </a:solidFill>
-                <a:latin typeface="DM Sans" pitchFamily="34" charset="0"/>
-                <a:ea typeface="DM Sans" pitchFamily="34" charset="-122"/>
-                <a:cs typeface="DM Sans" pitchFamily="34" charset="-120"/>
-              </a:rPr>
-              <a:t>sender · module · type + checkpoint bounds.</a:t>
-            </a:r>
-            <a:endParaRPr lang="en-US" sz="1500" dirty="0"/>
-          </a:p>
-        </p:txBody>
-      </p:sp>
-      <p:sp>
-        <p:nvSpPr>
-          <p:cNvPr id="15" name="Shape 12"/>
-          <p:cNvSpPr/>
-          <p:nvPr/>
-        </p:nvSpPr>
-        <p:spPr>
-          <a:xfrm>
-            <a:off x="777240" y="4114800"/>
-            <a:ext cx="5204460" cy="1664208"/>
-          </a:xfrm>
-          <a:prstGeom prst="rect">
-            <a:avLst/>
-          </a:prstGeom>
-          <a:solidFill>
-            <a:srgbClr val="FFFFFF"/>
-          </a:solidFill>
-          <a:ln w="12700">
-            <a:solidFill>
-              <a:srgbClr val="FFFFFF">
-                <a:alpha val="0"/>
-              </a:srgbClr>
-            </a:solidFill>
-            <a:prstDash val="solid"/>
-          </a:ln>
-        </p:spPr>
-      </p:sp>
-      <p:sp>
-        <p:nvSpPr>
-          <p:cNvPr id="16" name="Text 13"/>
-          <p:cNvSpPr/>
-          <p:nvPr/>
-        </p:nvSpPr>
-        <p:spPr>
-          <a:xfrm>
-            <a:off x="1005840" y="4325112"/>
-            <a:ext cx="4747260" cy="274320"/>
-          </a:xfrm>
-          <a:prstGeom prst="rect">
-            <a:avLst/>
-          </a:prstGeom>
-          <a:noFill/>
-          <a:ln/>
-        </p:spPr>
-        <p:txBody>
-          <a:bodyPr wrap="square" lIns="0" tIns="0" rIns="0" bIns="0" rtlCol="0" anchor="ctr"/>
-          <a:lstStyle/>
-          <a:p>
-            <a:pPr indent="0" marL="0">
-              <a:buNone/>
-            </a:pPr>
-            <a:r>
-              <a:rPr lang="en-US" sz="1100" dirty="0">
-                <a:solidFill>
-                  <a:srgbClr val="2338FF"/>
-                </a:solidFill>
-                <a:latin typeface="JetBrains Mono" pitchFamily="34" charset="0"/>
-                <a:ea typeface="JetBrains Mono" pitchFamily="34" charset="-122"/>
-                <a:cs typeface="JetBrains Mono" pitchFamily="34" charset="-120"/>
-              </a:rPr>
-              <a:t>CHECKPOINTS</a:t>
-            </a:r>
-            <a:endParaRPr lang="en-US" sz="1100" dirty="0"/>
-          </a:p>
-        </p:txBody>
-      </p:sp>
-      <p:sp>
-        <p:nvSpPr>
-          <p:cNvPr id="17" name="Text 14"/>
-          <p:cNvSpPr/>
-          <p:nvPr/>
-        </p:nvSpPr>
-        <p:spPr>
-          <a:xfrm>
-            <a:off x="1005840" y="4718304"/>
-            <a:ext cx="4747260" cy="365760"/>
-          </a:xfrm>
-          <a:prstGeom prst="rect">
-            <a:avLst/>
-          </a:prstGeom>
-          <a:noFill/>
-          <a:ln/>
-        </p:spPr>
-        <p:txBody>
-          <a:bodyPr wrap="square" lIns="0" tIns="0" rIns="0" bIns="0" rtlCol="0" anchor="ctr"/>
-          <a:lstStyle/>
-          <a:p>
-            <a:pPr indent="0" marL="0">
-              <a:buNone/>
-            </a:pPr>
-            <a:r>
-              <a:rPr lang="en-US" sz="2300" dirty="0">
-                <a:solidFill>
-                  <a:srgbClr val="131725"/>
-                </a:solidFill>
-                <a:latin typeface="DM Sans" pitchFamily="34" charset="0"/>
-                <a:ea typeface="DM Sans" pitchFamily="34" charset="-122"/>
-                <a:cs typeface="DM Sans" pitchFamily="34" charset="-120"/>
-              </a:rPr>
-              <a:t>Follow chain progress.</a:t>
-            </a:r>
-            <a:endParaRPr lang="en-US" sz="2300" dirty="0"/>
-          </a:p>
-        </p:txBody>
-      </p:sp>
-      <p:sp>
-        <p:nvSpPr>
-          <p:cNvPr id="18" name="Text 15"/>
-          <p:cNvSpPr/>
-          <p:nvPr/>
-        </p:nvSpPr>
-        <p:spPr>
-          <a:xfrm>
-            <a:off x="1005840" y="5138928"/>
-            <a:ext cx="4747260" cy="530352"/>
-          </a:xfrm>
-          <a:prstGeom prst="rect">
-            <a:avLst/>
-          </a:prstGeom>
-          <a:noFill/>
-          <a:ln/>
-        </p:spPr>
-        <p:txBody>
-          <a:bodyPr wrap="square" lIns="0" tIns="0" rIns="0" bIns="0" rtlCol="0" anchor="ctr"/>
-          <a:lstStyle/>
-          <a:p>
-            <a:pPr indent="0" marL="0">
-              <a:buNone/>
-            </a:pPr>
-            <a:r>
-              <a:rPr lang="en-US" sz="1500" dirty="0">
-                <a:solidFill>
-                  <a:srgbClr val="69738B"/>
-                </a:solidFill>
-                <a:latin typeface="DM Sans" pitchFamily="34" charset="0"/>
-                <a:ea typeface="DM Sans" pitchFamily="34" charset="-122"/>
-                <a:cs typeface="DM Sans" pitchFamily="34" charset="-120"/>
-              </a:rPr>
-              <a:t>Ordered delivery with a saved resume position.</a:t>
-            </a:r>
-            <a:endParaRPr lang="en-US" sz="1500" dirty="0"/>
-          </a:p>
-        </p:txBody>
-      </p:sp>
-      <p:sp>
-        <p:nvSpPr>
-          <p:cNvPr id="19" name="Shape 16"/>
-          <p:cNvSpPr/>
-          <p:nvPr/>
-        </p:nvSpPr>
-        <p:spPr>
-          <a:xfrm>
-            <a:off x="6210300" y="4114800"/>
-            <a:ext cx="5204460" cy="1664208"/>
-          </a:xfrm>
-          <a:prstGeom prst="rect">
-            <a:avLst/>
-          </a:prstGeom>
-          <a:solidFill>
-            <a:srgbClr val="2338FF"/>
-          </a:solidFill>
-          <a:ln w="12700">
-            <a:solidFill>
-              <a:srgbClr val="2338FF">
-                <a:alpha val="0"/>
-              </a:srgbClr>
-            </a:solidFill>
-            <a:prstDash val="solid"/>
-          </a:ln>
-        </p:spPr>
-      </p:sp>
-      <p:sp>
-        <p:nvSpPr>
-          <p:cNvPr id="20" name="Text 17"/>
-          <p:cNvSpPr/>
-          <p:nvPr/>
-        </p:nvSpPr>
-        <p:spPr>
-          <a:xfrm>
-            <a:off x="6438900" y="4325112"/>
-            <a:ext cx="4747260" cy="274320"/>
-          </a:xfrm>
-          <a:prstGeom prst="rect">
-            <a:avLst/>
-          </a:prstGeom>
-          <a:noFill/>
-          <a:ln/>
-        </p:spPr>
-        <p:txBody>
-          <a:bodyPr wrap="square" lIns="0" tIns="0" rIns="0" bIns="0" rtlCol="0" anchor="ctr"/>
-          <a:lstStyle/>
-          <a:p>
-            <a:pPr indent="0" marL="0">
-              <a:buNone/>
-            </a:pPr>
-            <a:r>
-              <a:rPr lang="en-US" sz="1100" dirty="0">
-                <a:solidFill>
-                  <a:srgbClr val="BFC9FF"/>
-                </a:solidFill>
-                <a:latin typeface="JetBrains Mono" pitchFamily="34" charset="0"/>
-                <a:ea typeface="JetBrains Mono" pitchFamily="34" charset="-122"/>
-                <a:cs typeface="JetBrains Mono" pitchFamily="34" charset="-120"/>
-              </a:rPr>
-              <a:t>SSE OVER POST</a:t>
-            </a:r>
-            <a:endParaRPr lang="en-US" sz="1100" dirty="0"/>
-          </a:p>
-        </p:txBody>
-      </p:sp>
-      <p:sp>
-        <p:nvSpPr>
-          <p:cNvPr id="21" name="Text 18"/>
-          <p:cNvSpPr/>
-          <p:nvPr/>
-        </p:nvSpPr>
-        <p:spPr>
-          <a:xfrm>
-            <a:off x="6438900" y="4718304"/>
-            <a:ext cx="4747260" cy="365760"/>
-          </a:xfrm>
-          <a:prstGeom prst="rect">
-            <a:avLst/>
-          </a:prstGeom>
-          <a:noFill/>
-          <a:ln/>
-        </p:spPr>
-        <p:txBody>
-          <a:bodyPr wrap="square" lIns="0" tIns="0" rIns="0" bIns="0" rtlCol="0" anchor="ctr"/>
-          <a:lstStyle/>
-          <a:p>
-            <a:pPr indent="0" marL="0">
-              <a:buNone/>
-            </a:pPr>
-            <a:r>
-              <a:rPr lang="en-US" sz="2300" dirty="0">
-                <a:solidFill>
-                  <a:srgbClr val="FFFFFF"/>
-                </a:solidFill>
-                <a:latin typeface="DM Sans" pitchFamily="34" charset="0"/>
-                <a:ea typeface="DM Sans" pitchFamily="34" charset="-122"/>
-                <a:cs typeface="DM Sans" pitchFamily="34" charset="-120"/>
-              </a:rPr>
-              <a:t>Use fetch to listen.</a:t>
-            </a:r>
-            <a:endParaRPr lang="en-US" sz="2300" dirty="0"/>
-          </a:p>
-        </p:txBody>
-      </p:sp>
-      <p:sp>
-        <p:nvSpPr>
-          <p:cNvPr id="22" name="Text 19"/>
-          <p:cNvSpPr/>
-          <p:nvPr/>
-        </p:nvSpPr>
-        <p:spPr>
-          <a:xfrm>
-            <a:off x="6438900" y="5138928"/>
-            <a:ext cx="4747260" cy="530352"/>
-          </a:xfrm>
-          <a:prstGeom prst="rect">
-            <a:avLst/>
-          </a:prstGeom>
-          <a:noFill/>
-          <a:ln/>
-        </p:spPr>
-        <p:txBody>
-          <a:bodyPr wrap="square" lIns="0" tIns="0" rIns="0" bIns="0" rtlCol="0" anchor="ctr"/>
-          <a:lstStyle/>
-          <a:p>
-            <a:pPr indent="0" marL="0">
-              <a:buNone/>
-            </a:pPr>
-            <a:r>
-              <a:rPr lang="en-US" sz="1500" dirty="0">
-                <a:solidFill>
-                  <a:srgbClr val="DFE4FF"/>
-                </a:solidFill>
-                <a:latin typeface="DM Sans" pitchFamily="34" charset="0"/>
-                <a:ea typeface="DM Sans" pitchFamily="34" charset="-122"/>
-                <a:cs typeface="DM Sans" pitchFamily="34" charset="-120"/>
-              </a:rPr>
-              <a:t>EventSource cannot send the GraphQL query body.</a:t>
-            </a:r>
-            <a:endParaRPr lang="en-US" sz="1500" dirty="0"/>
-          </a:p>
-        </p:txBody>
-      </p:sp>
-    </p:spTree>
-  </p:cSld>
-  <p:clrMapOvr>
-    <a:masterClrMapping/>
-  </p:clrMapOvr>
-</p:sld>
-</file>
-
-<file path=ppt/slides/slide6.xml><?xml version="1.0" encoding="utf-8"?>
-<p:sld xmlns:a="http://schemas.openxmlformats.org/drawingml/2006/main" xmlns:r="http://schemas.openxmlformats.org/officeDocument/2006/relationships" xmlns:p="http://schemas.openxmlformats.org/presentationml/2006/main">
-  <p:cSld name="Slide 6">
-    <p:bg>
-      <p:bgPr>
-        <a:solidFill>
-          <a:srgbClr val="F4F5F8"/>
-        </a:solidFill>
-      </p:bgPr>
-    </p:bg>
-    <p:spTree>
-      <p:nvGrpSpPr>
-        <p:cNvPr id="1" name=""/>
-        <p:cNvGrpSpPr/>
-        <p:nvPr/>
-      </p:nvGrpSpPr>
-      <p:grpSpPr>
-        <a:xfrm>
-          <a:off x="0" y="0"/>
-          <a:ext cx="0" cy="0"/>
-          <a:chOff x="0" y="0"/>
-          <a:chExt cx="0" cy="0"/>
-        </a:xfrm>
-      </p:grpSpPr>
-      <p:sp>
-        <p:nvSpPr>
-          <p:cNvPr id="2" name="Text 0"/>
-          <p:cNvSpPr/>
-          <p:nvPr/>
-        </p:nvSpPr>
-        <p:spPr>
-          <a:xfrm>
-            <a:off x="777240" y="502920"/>
-            <a:ext cx="10637520" cy="274320"/>
-          </a:xfrm>
-          <a:prstGeom prst="rect">
-            <a:avLst/>
-          </a:prstGeom>
-          <a:noFill/>
-          <a:ln/>
-        </p:spPr>
-        <p:txBody>
-          <a:bodyPr wrap="square" lIns="0" tIns="0" rIns="0" bIns="0" rtlCol="0" anchor="ctr"/>
-          <a:lstStyle/>
-          <a:p>
-            <a:pPr indent="0" marL="0">
-              <a:buNone/>
-            </a:pPr>
-            <a:r>
-              <a:rPr lang="en-US" sz="1000" spc="150" kern="0" dirty="0">
-                <a:solidFill>
-                  <a:srgbClr val="69738B"/>
-                </a:solidFill>
-                <a:latin typeface="JetBrains Mono" pitchFamily="34" charset="0"/>
-                <a:ea typeface="JetBrains Mono" pitchFamily="34" charset="-122"/>
-                <a:cs typeface="JetBrains Mono" pitchFamily="34" charset="-120"/>
-              </a:rPr>
-              <a:t>[ RED OUT / GREEN IN ]</a:t>
-            </a:r>
-            <a:endParaRPr lang="en-US" sz="1000" dirty="0"/>
-          </a:p>
-        </p:txBody>
-      </p:sp>
-      <p:sp>
-        <p:nvSpPr>
-          <p:cNvPr id="3" name="Text 1"/>
-          <p:cNvSpPr/>
-          <p:nvPr/>
-        </p:nvSpPr>
-        <p:spPr>
-          <a:xfrm>
-            <a:off x="777240" y="932688"/>
-            <a:ext cx="10637520" cy="1143000"/>
-          </a:xfrm>
-          <a:prstGeom prst="rect">
-            <a:avLst/>
-          </a:prstGeom>
-          <a:noFill/>
-          <a:ln/>
-        </p:spPr>
-        <p:txBody>
-          <a:bodyPr wrap="square" lIns="0" tIns="0" rIns="0" bIns="0" rtlCol="0" anchor="ctr"/>
-          <a:lstStyle/>
-          <a:p>
-            <a:pPr indent="0" marL="0">
-              <a:buNone/>
-            </a:pPr>
-            <a:r>
-              <a:rPr lang="en-US" sz="3700" dirty="0">
-                <a:solidFill>
-                  <a:srgbClr val="131725"/>
-                </a:solidFill>
-                <a:latin typeface="DM Sans" pitchFamily="34" charset="0"/>
-                <a:ea typeface="DM Sans" pitchFamily="34" charset="-122"/>
-                <a:cs typeface="DM Sans" pitchFamily="34" charset="-120"/>
-              </a:rPr>
-              <a:t>Watch the money move.</a:t>
-            </a:r>
-            <a:endParaRPr lang="en-US" sz="3700" dirty="0"/>
-          </a:p>
-        </p:txBody>
-      </p:sp>
-      <p:sp>
-        <p:nvSpPr>
-          <p:cNvPr id="4" name="Text 2"/>
-          <p:cNvSpPr/>
-          <p:nvPr/>
-        </p:nvSpPr>
-        <p:spPr>
-          <a:xfrm>
-            <a:off x="777240" y="6437376"/>
-            <a:ext cx="7315200" cy="182880"/>
-          </a:xfrm>
-          <a:prstGeom prst="rect">
-            <a:avLst/>
-          </a:prstGeom>
-          <a:noFill/>
-          <a:ln/>
-        </p:spPr>
-        <p:txBody>
-          <a:bodyPr wrap="square" lIns="0" tIns="0" rIns="0" bIns="0" rtlCol="0" anchor="ctr"/>
-          <a:lstStyle/>
-          <a:p>
-            <a:pPr indent="0" marL="0">
-              <a:buNone/>
-            </a:pPr>
-            <a:r>
-              <a:rPr lang="en-US" sz="800" spc="100" kern="0" dirty="0">
-                <a:solidFill>
-                  <a:srgbClr val="69738B"/>
-                </a:solidFill>
-                <a:latin typeface="JetBrains Mono" pitchFamily="34" charset="0"/>
-                <a:ea typeface="JetBrains Mono" pitchFamily="34" charset="-122"/>
-                <a:cs typeface="JetBrains Mono" pitchFamily="34" charset="-120"/>
-              </a:rPr>
-              <a:t>SUIHUB LAGOS / ACCOUNT LAYER WEEK</a:t>
-            </a:r>
-            <a:endParaRPr lang="en-US" sz="800" dirty="0"/>
-          </a:p>
-        </p:txBody>
-      </p:sp>
-      <p:sp>
-        <p:nvSpPr>
-          <p:cNvPr id="5" name="Text 3"/>
-          <p:cNvSpPr/>
-          <p:nvPr/>
-        </p:nvSpPr>
-        <p:spPr>
-          <a:xfrm>
-            <a:off x="10698480" y="6419088"/>
-            <a:ext cx="685800" cy="210312"/>
-          </a:xfrm>
-          <a:prstGeom prst="rect">
-            <a:avLst/>
-          </a:prstGeom>
-          <a:noFill/>
-          <a:ln/>
-        </p:spPr>
-        <p:txBody>
-          <a:bodyPr wrap="square" lIns="0" tIns="0" rIns="0" bIns="0" rtlCol="0" anchor="ctr"/>
-          <a:lstStyle/>
-          <a:p>
-            <a:pPr algn="r" indent="0" marL="0">
-              <a:buNone/>
-            </a:pPr>
-            <a:r>
-              <a:rPr lang="en-US" sz="1000" dirty="0">
-                <a:solidFill>
-                  <a:srgbClr val="69738B"/>
-                </a:solidFill>
-                <a:latin typeface="JetBrains Mono" pitchFamily="34" charset="0"/>
-                <a:ea typeface="JetBrains Mono" pitchFamily="34" charset="-122"/>
-                <a:cs typeface="JetBrains Mono" pitchFamily="34" charset="-120"/>
-              </a:rPr>
-              <a:t>06</a:t>
-            </a:r>
-            <a:endParaRPr lang="en-US" sz="1000" dirty="0"/>
-          </a:p>
-        </p:txBody>
-      </p:sp>
-      <p:pic>
-        <p:nvPicPr>
-          <p:cNvPr id="7" name="Image 0" descr="/Users/emmanuelosadebe/Documents/SUI-HUB-CLASSES/account-layer-week/day3-till/teaching/assets/balances.png">    </p:cNvPr>
-          <p:cNvPicPr>
-            <a:picLocks noChangeAspect="1"/>
-          </p:cNvPicPr>
-          <p:nvPr/>
-        </p:nvPicPr>
-        <p:blipFill>
-          <a:blip r:embed="rId1"/>
-          <a:stretch>
-            <a:fillRect/>
-          </a:stretch>
-        </p:blipFill>
-        <p:spPr>
-          <a:xfrm>
-            <a:off x="777240" y="2922002"/>
-            <a:ext cx="10643616" cy="1654075"/>
-          </a:xfrm>
-          <a:prstGeom prst="rect">
-            <a:avLst/>
-          </a:prstGeom>
-        </p:spPr>
-      </p:pic>
-      <p:sp>
-        <p:nvSpPr>
-          <p:cNvPr id="8" name="Text 4"/>
-          <p:cNvSpPr/>
-          <p:nvPr/>
-        </p:nvSpPr>
-        <p:spPr>
-          <a:xfrm>
-            <a:off x="777240" y="2331720"/>
-            <a:ext cx="5029200" cy="274320"/>
-          </a:xfrm>
-          <a:prstGeom prst="rect">
-            <a:avLst/>
-          </a:prstGeom>
-          <a:noFill/>
-          <a:ln/>
-        </p:spPr>
-        <p:txBody>
-          <a:bodyPr wrap="square" lIns="0" tIns="0" rIns="0" bIns="0" rtlCol="0" anchor="ctr"/>
-          <a:lstStyle/>
-          <a:p>
-            <a:pPr indent="0" marL="0">
-              <a:buNone/>
-            </a:pPr>
-            <a:r>
-              <a:rPr lang="en-US" sz="1200" dirty="0">
-                <a:solidFill>
-                  <a:srgbClr val="C5424E"/>
-                </a:solidFill>
-                <a:latin typeface="JetBrains Mono" pitchFamily="34" charset="0"/>
-                <a:ea typeface="JetBrains Mono" pitchFamily="34" charset="-122"/>
-                <a:cs typeface="JetBrains Mono" pitchFamily="34" charset="-120"/>
-              </a:rPr>
-              <a:t>PAYER / MONEY OUT</a:t>
-            </a:r>
-            <a:endParaRPr lang="en-US" sz="1200" dirty="0"/>
-          </a:p>
-        </p:txBody>
-      </p:sp>
-      <p:sp>
-        <p:nvSpPr>
-          <p:cNvPr id="9" name="Text 5"/>
-          <p:cNvSpPr/>
-          <p:nvPr/>
-        </p:nvSpPr>
-        <p:spPr>
-          <a:xfrm>
-            <a:off x="6400800" y="2331720"/>
-            <a:ext cx="5029200" cy="274320"/>
-          </a:xfrm>
-          <a:prstGeom prst="rect">
-            <a:avLst/>
-          </a:prstGeom>
-          <a:noFill/>
-          <a:ln/>
-        </p:spPr>
-        <p:txBody>
-          <a:bodyPr wrap="square" lIns="0" tIns="0" rIns="0" bIns="0" rtlCol="0" anchor="ctr"/>
-          <a:lstStyle/>
-          <a:p>
-            <a:pPr indent="0" marL="0">
-              <a:buNone/>
-            </a:pPr>
-            <a:r>
-              <a:rPr lang="en-US" sz="1200" dirty="0">
-                <a:solidFill>
-                  <a:srgbClr val="078256"/>
-                </a:solidFill>
-                <a:latin typeface="JetBrains Mono" pitchFamily="34" charset="0"/>
-                <a:ea typeface="JetBrains Mono" pitchFamily="34" charset="-122"/>
-                <a:cs typeface="JetBrains Mono" pitchFamily="34" charset="-120"/>
-              </a:rPr>
-              <a:t>SHOP / MONEY IN</a:t>
-            </a:r>
-            <a:endParaRPr lang="en-US" sz="1200" dirty="0"/>
-          </a:p>
-        </p:txBody>
-      </p:sp>
-      <p:sp>
-        <p:nvSpPr>
-          <p:cNvPr id="10" name="Text 6"/>
-          <p:cNvSpPr/>
-          <p:nvPr/>
-        </p:nvSpPr>
-        <p:spPr>
-          <a:xfrm>
-            <a:off x="777240" y="5166360"/>
-            <a:ext cx="5029200" cy="457200"/>
-          </a:xfrm>
-          <a:prstGeom prst="rect">
-            <a:avLst/>
-          </a:prstGeom>
-          <a:noFill/>
-          <a:ln/>
-        </p:spPr>
-        <p:txBody>
-          <a:bodyPr wrap="square" lIns="0" tIns="0" rIns="0" bIns="0" rtlCol="0" anchor="ctr"/>
-          <a:lstStyle/>
-          <a:p>
-            <a:pPr indent="0" marL="0">
-              <a:buNone/>
-            </a:pPr>
-            <a:r>
-              <a:rPr lang="en-US" sz="2800" dirty="0">
-                <a:solidFill>
-                  <a:srgbClr val="C5424E"/>
-                </a:solidFill>
-                <a:latin typeface="DM Sans" pitchFamily="34" charset="0"/>
-                <a:ea typeface="DM Sans" pitchFamily="34" charset="-122"/>
-                <a:cs typeface="DM Sans" pitchFamily="34" charset="-120"/>
-              </a:rPr>
-              <a:t>Payment + gas</a:t>
-            </a:r>
-            <a:endParaRPr lang="en-US" sz="2800" dirty="0"/>
-          </a:p>
-        </p:txBody>
-      </p:sp>
-      <p:sp>
-        <p:nvSpPr>
-          <p:cNvPr id="11" name="Text 7"/>
-          <p:cNvSpPr/>
-          <p:nvPr/>
-        </p:nvSpPr>
-        <p:spPr>
-          <a:xfrm>
-            <a:off x="6400800" y="5166360"/>
-            <a:ext cx="5029200" cy="457200"/>
-          </a:xfrm>
-          <a:prstGeom prst="rect">
-            <a:avLst/>
-          </a:prstGeom>
-          <a:noFill/>
-          <a:ln/>
-        </p:spPr>
-        <p:txBody>
-          <a:bodyPr wrap="square" lIns="0" tIns="0" rIns="0" bIns="0" rtlCol="0" anchor="ctr"/>
-          <a:lstStyle/>
-          <a:p>
-            <a:pPr indent="0" marL="0">
-              <a:buNone/>
-            </a:pPr>
-            <a:r>
-              <a:rPr lang="en-US" sz="2800" dirty="0">
-                <a:solidFill>
-                  <a:srgbClr val="078256"/>
-                </a:solidFill>
-                <a:latin typeface="DM Sans" pitchFamily="34" charset="0"/>
-                <a:ea typeface="DM Sans" pitchFamily="34" charset="-122"/>
-                <a:cs typeface="DM Sans" pitchFamily="34" charset="-120"/>
-              </a:rPr>
-              <a:t>Payment received</a:t>
-            </a:r>
-            <a:endParaRPr lang="en-US" sz="2800" dirty="0"/>
-          </a:p>
-        </p:txBody>
-      </p:sp>
-      <p:sp>
-        <p:nvSpPr>
-          <p:cNvPr id="12" name="Text 8"/>
-          <p:cNvSpPr/>
-          <p:nvPr/>
-        </p:nvSpPr>
-        <p:spPr>
-          <a:xfrm>
-            <a:off x="777240" y="6080760"/>
-            <a:ext cx="10607040" cy="201168"/>
-          </a:xfrm>
-          <a:prstGeom prst="rect">
-            <a:avLst/>
-          </a:prstGeom>
-          <a:noFill/>
-          <a:ln/>
-        </p:spPr>
-        <p:txBody>
-          <a:bodyPr wrap="square" lIns="0" tIns="0" rIns="0" bIns="0" rtlCol="0" anchor="ctr"/>
-          <a:lstStyle/>
-          <a:p>
-            <a:pPr indent="0" marL="0">
-              <a:buNone/>
-            </a:pPr>
-            <a:r>
-              <a:rPr lang="en-US" sz="1000" dirty="0">
-                <a:solidFill>
-                  <a:srgbClr val="69738B"/>
-                </a:solidFill>
-                <a:latin typeface="DM Sans" pitchFamily="34" charset="0"/>
-                <a:ea typeface="DM Sans" pitchFamily="34" charset="-122"/>
-                <a:cs typeface="DM Sans" pitchFamily="34" charset="-120"/>
-              </a:rPr>
-              <a:t>Payer ↓ payment + gas   /   Shop ↑ received value   /   Balances refresh independently of the feed</a:t>
-            </a:r>
-            <a:endParaRPr lang="en-US" sz="1000" dirty="0"/>
           </a:p>
         </p:txBody>
       </p:sp>
@@ -9025,7 +8937,7 @@
                 <a:ea typeface="JetBrains Mono" pitchFamily="34" charset="-122"/>
                 <a:cs typeface="JetBrains Mono" pitchFamily="34" charset="-120"/>
               </a:rPr>
-              <a:t>[ LIVE DEMO / RECOVERY ]</a:t>
+              <a:t>[ CURSOR → BACKFILL → LIVE ]</a:t>
             </a:r>
             <a:endParaRPr lang="en-US" sz="1000" dirty="0"/>
           </a:p>
@@ -9064,7 +8976,7 @@
                 <a:ea typeface="DM Sans" pitchFamily="34" charset="-122"/>
                 <a:cs typeface="DM Sans" pitchFamily="34" charset="-120"/>
               </a:rPr>
-              <a:t>It catches up from where you stopped.</a:t>
+              <a:t>Resume from a durable position.</a:t>
             </a:r>
             <a:endParaRPr lang="en-US" sz="3700" dirty="0"/>
           </a:p>
@@ -9148,56 +9060,59 @@
           </a:p>
         </p:txBody>
       </p:sp>
-      <p:pic>
-        <p:nvPicPr>
-          <p:cNvPr id="7" name="Image 0" descr="/Users/emmanuelosadebe/Documents/SUI-HUB-CLASSES/account-layer-week/day3-till/teaching/assets/recovery.png">    </p:cNvPr>
-          <p:cNvPicPr>
-            <a:picLocks noChangeAspect="1"/>
-          </p:cNvPicPr>
-          <p:nvPr/>
-        </p:nvPicPr>
-        <p:blipFill>
-          <a:blip r:embed="rId1"/>
-          <a:stretch>
-            <a:fillRect/>
-          </a:stretch>
-        </p:blipFill>
-        <p:spPr>
-          <a:xfrm>
-            <a:off x="2002370" y="2194560"/>
-            <a:ext cx="4133419" cy="3703320"/>
-          </a:xfrm>
-          <a:prstGeom prst="rect">
-            <a:avLst/>
-          </a:prstGeom>
-        </p:spPr>
-      </p:pic>
-      <p:sp>
-        <p:nvSpPr>
-          <p:cNvPr id="8" name="Text 4"/>
-          <p:cNvSpPr/>
-          <p:nvPr/>
-        </p:nvSpPr>
-        <p:spPr>
-          <a:xfrm>
-            <a:off x="7818120" y="2423160"/>
-            <a:ext cx="3474720" cy="228600"/>
-          </a:xfrm>
-          <a:prstGeom prst="rect">
-            <a:avLst/>
-          </a:prstGeom>
-          <a:noFill/>
-          <a:ln/>
-        </p:spPr>
-        <p:txBody>
-          <a:bodyPr wrap="square" lIns="0" tIns="0" rIns="0" bIns="0" rtlCol="0" anchor="ctr"/>
-          <a:lstStyle/>
-          <a:p>
-            <a:pPr indent="0" marL="0">
-              <a:buNone/>
-            </a:pPr>
-            <a:r>
-              <a:rPr lang="en-US" sz="1000" spc="100" kern="0" dirty="0">
+      <p:sp>
+        <p:nvSpPr>
+          <p:cNvPr id="7" name="Shape 4"/>
+          <p:cNvSpPr/>
+          <p:nvPr/>
+        </p:nvSpPr>
+        <p:spPr>
+          <a:xfrm>
+            <a:off x="777240" y="2606040"/>
+            <a:ext cx="2474214" cy="2468880"/>
+          </a:xfrm>
+          <a:prstGeom prst="rect">
+            <a:avLst/>
+          </a:prstGeom>
+          <a:solidFill>
+            <a:srgbClr val="FFFFFF"/>
+          </a:solidFill>
+          <a:ln w="12700">
+            <a:solidFill>
+              <a:srgbClr val="FFFFFF">
+                <a:alpha val="0"/>
+              </a:srgbClr>
+            </a:solidFill>
+            <a:prstDash val="solid"/>
+          </a:ln>
+        </p:spPr>
+      </p:sp>
+      <p:sp>
+        <p:nvSpPr>
+          <p:cNvPr id="8" name="Text 5"/>
+          <p:cNvSpPr/>
+          <p:nvPr/>
+        </p:nvSpPr>
+        <p:spPr>
+          <a:xfrm>
+            <a:off x="978408" y="2816352"/>
+            <a:ext cx="2071878" cy="320040"/>
+          </a:xfrm>
+          <a:prstGeom prst="rect">
+            <a:avLst/>
+          </a:prstGeom>
+          <a:noFill/>
+          <a:ln/>
+        </p:spPr>
+        <p:txBody>
+          <a:bodyPr wrap="square" lIns="0" tIns="0" rIns="0" bIns="0" rtlCol="0" anchor="ctr"/>
+          <a:lstStyle/>
+          <a:p>
+            <a:pPr indent="0" marL="0">
+              <a:buNone/>
+            </a:pPr>
+            <a:r>
+              <a:rPr lang="en-US" sz="1300" dirty="0">
                 <a:solidFill>
                   <a:srgbClr val="2338FF"/>
                 </a:solidFill>
@@ -9205,38 +9120,38 @@
                 <a:ea typeface="JetBrains Mono" pitchFamily="34" charset="-122"/>
                 <a:cs typeface="JetBrains Mono" pitchFamily="34" charset="-120"/>
               </a:rPr>
-              <a:t>01 / PAUSE</a:t>
-            </a:r>
-            <a:endParaRPr lang="en-US" sz="1000" dirty="0"/>
-          </a:p>
-        </p:txBody>
-      </p:sp>
-      <p:sp>
-        <p:nvSpPr>
-          <p:cNvPr id="9" name="Text 5"/>
-          <p:cNvSpPr/>
-          <p:nvPr/>
-        </p:nvSpPr>
-        <p:spPr>
-          <a:xfrm>
-            <a:off x="7818120" y="2743200"/>
-            <a:ext cx="3474720" cy="731520"/>
-          </a:xfrm>
-          <a:prstGeom prst="rect">
-            <a:avLst/>
-          </a:prstGeom>
-          <a:noFill/>
-          <a:ln/>
-        </p:spPr>
-        <p:txBody>
-          <a:bodyPr wrap="square" lIns="0" tIns="0" rIns="0" bIns="0" rtlCol="0" anchor="ctr"/>
-          <a:lstStyle/>
-          <a:p>
-            <a:pPr indent="0" marL="0">
-              <a:buNone/>
-            </a:pPr>
-            <a:r>
-              <a:rPr lang="en-US" sz="2000" dirty="0">
+              <a:t>01</a:t>
+            </a:r>
+            <a:endParaRPr lang="en-US" sz="1300" dirty="0"/>
+          </a:p>
+        </p:txBody>
+      </p:sp>
+      <p:sp>
+        <p:nvSpPr>
+          <p:cNvPr id="9" name="Text 6"/>
+          <p:cNvSpPr/>
+          <p:nvPr/>
+        </p:nvSpPr>
+        <p:spPr>
+          <a:xfrm>
+            <a:off x="978408" y="3429000"/>
+            <a:ext cx="2071878" cy="594360"/>
+          </a:xfrm>
+          <a:prstGeom prst="rect">
+            <a:avLst/>
+          </a:prstGeom>
+          <a:noFill/>
+          <a:ln/>
+        </p:spPr>
+        <p:txBody>
+          <a:bodyPr wrap="square" lIns="0" tIns="0" rIns="0" bIns="0" rtlCol="0" anchor="ctr"/>
+          <a:lstStyle/>
+          <a:p>
+            <a:pPr indent="0" marL="0">
+              <a:buNone/>
+            </a:pPr>
+            <a:r>
+              <a:rPr lang="en-US" sz="2500" dirty="0">
                 <a:solidFill>
                   <a:srgbClr val="131725"/>
                 </a:solidFill>
@@ -9244,116 +9159,104 @@
                 <a:ea typeface="DM Sans" pitchFamily="34" charset="-122"/>
                 <a:cs typeface="DM Sans" pitchFamily="34" charset="-120"/>
               </a:rPr>
-              <a:t>The listener stops.</a:t>
-            </a:r>
-            <a:endParaRPr lang="en-US" sz="2000" dirty="0"/>
-          </a:p>
-        </p:txBody>
-      </p:sp>
-      <p:sp>
-        <p:nvSpPr>
-          <p:cNvPr id="10" name="Text 6"/>
-          <p:cNvSpPr/>
-          <p:nvPr/>
-        </p:nvSpPr>
-        <p:spPr>
-          <a:xfrm>
-            <a:off x="7818120" y="3557016"/>
-            <a:ext cx="3474720" cy="228600"/>
-          </a:xfrm>
-          <a:prstGeom prst="rect">
-            <a:avLst/>
-          </a:prstGeom>
-          <a:noFill/>
-          <a:ln/>
-        </p:spPr>
-        <p:txBody>
-          <a:bodyPr wrap="square" lIns="0" tIns="0" rIns="0" bIns="0" rtlCol="0" anchor="ctr"/>
-          <a:lstStyle/>
-          <a:p>
-            <a:pPr indent="0" marL="0">
-              <a:buNone/>
-            </a:pPr>
-            <a:r>
-              <a:rPr lang="en-US" sz="1000" spc="100" kern="0" dirty="0">
-                <a:solidFill>
-                  <a:srgbClr val="2338FF"/>
-                </a:solidFill>
-                <a:latin typeface="JetBrains Mono" pitchFamily="34" charset="0"/>
-                <a:ea typeface="JetBrains Mono" pitchFamily="34" charset="-122"/>
-                <a:cs typeface="JetBrains Mono" pitchFamily="34" charset="-120"/>
-              </a:rPr>
-              <a:t>02 / PAY</a:t>
-            </a:r>
-            <a:endParaRPr lang="en-US" sz="1000" dirty="0"/>
-          </a:p>
-        </p:txBody>
-      </p:sp>
-      <p:sp>
-        <p:nvSpPr>
-          <p:cNvPr id="11" name="Text 7"/>
-          <p:cNvSpPr/>
-          <p:nvPr/>
-        </p:nvSpPr>
-        <p:spPr>
-          <a:xfrm>
-            <a:off x="7818120" y="3877056"/>
-            <a:ext cx="3474720" cy="731520"/>
-          </a:xfrm>
-          <a:prstGeom prst="rect">
-            <a:avLst/>
-          </a:prstGeom>
-          <a:noFill/>
-          <a:ln/>
-        </p:spPr>
-        <p:txBody>
-          <a:bodyPr wrap="square" lIns="0" tIns="0" rIns="0" bIns="0" rtlCol="0" anchor="ctr"/>
-          <a:lstStyle/>
-          <a:p>
-            <a:pPr indent="0" marL="0">
-              <a:buNone/>
-            </a:pPr>
-            <a:r>
-              <a:rPr lang="en-US" sz="2000" dirty="0">
-                <a:solidFill>
-                  <a:srgbClr val="131725"/>
+              <a:t>First start</a:t>
+            </a:r>
+            <a:endParaRPr lang="en-US" sz="2500" dirty="0"/>
+          </a:p>
+        </p:txBody>
+      </p:sp>
+      <p:sp>
+        <p:nvSpPr>
+          <p:cNvPr id="10" name="Text 7"/>
+          <p:cNvSpPr/>
+          <p:nvPr/>
+        </p:nvSpPr>
+        <p:spPr>
+          <a:xfrm>
+            <a:off x="978408" y="4114800"/>
+            <a:ext cx="2071878" cy="768096"/>
+          </a:xfrm>
+          <a:prstGeom prst="rect">
+            <a:avLst/>
+          </a:prstGeom>
+          <a:noFill/>
+          <a:ln/>
+        </p:spPr>
+        <p:txBody>
+          <a:bodyPr wrap="square" lIns="0" tIns="0" rIns="0" bIns="0" rtlCol="0" anchor="ctr"/>
+          <a:lstStyle/>
+          <a:p>
+            <a:pPr indent="0" marL="0">
+              <a:buNone/>
+            </a:pPr>
+            <a:r>
+              <a:rPr lang="en-US" sz="1600" dirty="0">
+                <a:solidFill>
+                  <a:srgbClr val="69738B"/>
                 </a:solidFill>
                 <a:latin typeface="DM Sans" pitchFamily="34" charset="0"/>
                 <a:ea typeface="DM Sans" pitchFamily="34" charset="-122"/>
                 <a:cs typeface="DM Sans" pitchFamily="34" charset="-120"/>
               </a:rPr>
-              <a:t>The chain keeps going.</a:t>
-            </a:r>
-            <a:endParaRPr lang="en-US" sz="2000" dirty="0"/>
-          </a:p>
-        </p:txBody>
-      </p:sp>
-      <p:sp>
-        <p:nvSpPr>
-          <p:cNvPr id="12" name="Text 8"/>
-          <p:cNvSpPr/>
-          <p:nvPr/>
-        </p:nvSpPr>
-        <p:spPr>
-          <a:xfrm>
-            <a:off x="7818120" y="4690872"/>
-            <a:ext cx="3474720" cy="228600"/>
-          </a:xfrm>
-          <a:prstGeom prst="rect">
-            <a:avLst/>
-          </a:prstGeom>
-          <a:noFill/>
-          <a:ln/>
-        </p:spPr>
-        <p:txBody>
-          <a:bodyPr wrap="square" lIns="0" tIns="0" rIns="0" bIns="0" rtlCol="0" anchor="ctr"/>
-          <a:lstStyle/>
-          <a:p>
-            <a:pPr indent="0" marL="0">
-              <a:buNone/>
-            </a:pPr>
-            <a:r>
-              <a:rPr lang="en-US" sz="1000" spc="100" kern="0" dirty="0">
+              <a:t>afterCheckpoint sets the opening boundary</a:t>
+            </a:r>
+            <a:endParaRPr lang="en-US" sz="1600" dirty="0"/>
+          </a:p>
+        </p:txBody>
+      </p:sp>
+      <p:sp>
+        <p:nvSpPr>
+          <p:cNvPr id="11" name="Shape 8"/>
+          <p:cNvSpPr/>
+          <p:nvPr/>
+        </p:nvSpPr>
+        <p:spPr>
+          <a:xfrm>
+            <a:off x="3498342" y="2606040"/>
+            <a:ext cx="2474214" cy="2468880"/>
+          </a:xfrm>
+          <a:prstGeom prst="rect">
+            <a:avLst/>
+          </a:prstGeom>
+          <a:solidFill>
+            <a:srgbClr val="FFFFFF"/>
+          </a:solidFill>
+          <a:ln w="12700">
+            <a:solidFill>
+              <a:srgbClr val="FFFFFF">
+                <a:alpha val="0"/>
+              </a:srgbClr>
+            </a:solidFill>
+            <a:prstDash val="solid"/>
+          </a:ln>
+        </p:spPr>
+      </p:sp>
+      <p:sp>
+        <p:nvSpPr>
+          <p:cNvPr id="12" name="Text 9"/>
+          <p:cNvSpPr/>
+          <p:nvPr/>
+        </p:nvSpPr>
+        <p:spPr>
+          <a:xfrm>
+            <a:off x="3699510" y="2816352"/>
+            <a:ext cx="2071878" cy="320040"/>
+          </a:xfrm>
+          <a:prstGeom prst="rect">
+            <a:avLst/>
+          </a:prstGeom>
+          <a:noFill/>
+          <a:ln/>
+        </p:spPr>
+        <p:txBody>
+          <a:bodyPr wrap="square" lIns="0" tIns="0" rIns="0" bIns="0" rtlCol="0" anchor="ctr"/>
+          <a:lstStyle/>
+          <a:p>
+            <a:pPr indent="0" marL="0">
+              <a:buNone/>
+            </a:pPr>
+            <a:r>
+              <a:rPr lang="en-US" sz="1300" dirty="0">
                 <a:solidFill>
                   <a:srgbClr val="2338FF"/>
                 </a:solidFill>
@@ -9361,38 +9264,38 @@
                 <a:ea typeface="JetBrains Mono" pitchFamily="34" charset="-122"/>
                 <a:cs typeface="JetBrains Mono" pitchFamily="34" charset="-120"/>
               </a:rPr>
-              <a:t>03 / RESUME</a:t>
-            </a:r>
-            <a:endParaRPr lang="en-US" sz="1000" dirty="0"/>
-          </a:p>
-        </p:txBody>
-      </p:sp>
-      <p:sp>
-        <p:nvSpPr>
-          <p:cNvPr id="13" name="Text 9"/>
-          <p:cNvSpPr/>
-          <p:nvPr/>
-        </p:nvSpPr>
-        <p:spPr>
-          <a:xfrm>
-            <a:off x="7818120" y="5010912"/>
-            <a:ext cx="3474720" cy="731520"/>
-          </a:xfrm>
-          <a:prstGeom prst="rect">
-            <a:avLst/>
-          </a:prstGeom>
-          <a:noFill/>
-          <a:ln/>
-        </p:spPr>
-        <p:txBody>
-          <a:bodyPr wrap="square" lIns="0" tIns="0" rIns="0" bIns="0" rtlCol="0" anchor="ctr"/>
-          <a:lstStyle/>
-          <a:p>
-            <a:pPr indent="0" marL="0">
-              <a:buNone/>
-            </a:pPr>
-            <a:r>
-              <a:rPr lang="en-US" sz="2000" dirty="0">
+              <a:t>02</a:t>
+            </a:r>
+            <a:endParaRPr lang="en-US" sz="1300" dirty="0"/>
+          </a:p>
+        </p:txBody>
+      </p:sp>
+      <p:sp>
+        <p:nvSpPr>
+          <p:cNvPr id="13" name="Text 10"/>
+          <p:cNvSpPr/>
+          <p:nvPr/>
+        </p:nvSpPr>
+        <p:spPr>
+          <a:xfrm>
+            <a:off x="3699510" y="3429000"/>
+            <a:ext cx="2071878" cy="594360"/>
+          </a:xfrm>
+          <a:prstGeom prst="rect">
+            <a:avLst/>
+          </a:prstGeom>
+          <a:noFill/>
+          <a:ln/>
+        </p:spPr>
+        <p:txBody>
+          <a:bodyPr wrap="square" lIns="0" tIns="0" rIns="0" bIns="0" rtlCol="0" anchor="ctr"/>
+          <a:lstStyle/>
+          <a:p>
+            <a:pPr indent="0" marL="0">
+              <a:buNone/>
+            </a:pPr>
+            <a:r>
+              <a:rPr lang="en-US" sz="2500" dirty="0">
                 <a:solidFill>
                   <a:srgbClr val="131725"/>
                 </a:solidFill>
@@ -9400,38 +9303,38 @@
                 <a:ea typeface="DM Sans" pitchFamily="34" charset="-122"/>
                 <a:cs typeface="DM Sans" pitchFamily="34" charset="-120"/>
               </a:rPr>
-              <a:t>Missed receipts return.</a:t>
-            </a:r>
-            <a:endParaRPr lang="en-US" sz="2000" dirty="0"/>
-          </a:p>
-        </p:txBody>
-      </p:sp>
-      <p:sp>
-        <p:nvSpPr>
-          <p:cNvPr id="14" name="Text 10"/>
-          <p:cNvSpPr/>
-          <p:nvPr/>
-        </p:nvSpPr>
-        <p:spPr>
-          <a:xfrm>
-            <a:off x="777240" y="6080760"/>
-            <a:ext cx="10607040" cy="201168"/>
-          </a:xfrm>
-          <a:prstGeom prst="rect">
-            <a:avLst/>
-          </a:prstGeom>
-          <a:noFill/>
-          <a:ln/>
-        </p:spPr>
-        <p:txBody>
-          <a:bodyPr wrap="square" lIns="0" tIns="0" rIns="0" bIns="0" rtlCol="0" anchor="ctr"/>
-          <a:lstStyle/>
-          <a:p>
-            <a:pPr indent="0" marL="0">
-              <a:buNone/>
-            </a:pPr>
-            <a:r>
-              <a:rPr lang="en-US" sz="1000" dirty="0">
+              <a:t>Every delivery</a:t>
+            </a:r>
+            <a:endParaRPr lang="en-US" sz="2500" dirty="0"/>
+          </a:p>
+        </p:txBody>
+      </p:sp>
+      <p:sp>
+        <p:nvSpPr>
+          <p:cNvPr id="14" name="Text 11"/>
+          <p:cNvSpPr/>
+          <p:nvPr/>
+        </p:nvSpPr>
+        <p:spPr>
+          <a:xfrm>
+            <a:off x="3699510" y="4114800"/>
+            <a:ext cx="2071878" cy="768096"/>
+          </a:xfrm>
+          <a:prstGeom prst="rect">
+            <a:avLst/>
+          </a:prstGeom>
+          <a:noFill/>
+          <a:ln/>
+        </p:spPr>
+        <p:txBody>
+          <a:bodyPr wrap="square" lIns="0" tIns="0" rIns="0" bIns="0" rtlCol="0" anchor="ctr"/>
+          <a:lstStyle/>
+          <a:p>
+            <a:pPr indent="0" marL="0">
+              <a:buNone/>
+            </a:pPr>
+            <a:r>
+              <a:rPr lang="en-US" sz="1600" dirty="0">
                 <a:solidFill>
                   <a:srgbClr val="69738B"/>
                 </a:solidFill>
@@ -9439,9 +9342,336 @@
                 <a:ea typeface="DM Sans" pitchFamily="34" charset="-122"/>
                 <a:cs typeface="DM Sans" pitchFamily="34" charset="-120"/>
               </a:rPr>
-              <a:t>Saved position → historical catch-up → live delivery on the same connection</a:t>
-            </a:r>
-            <a:endParaRPr lang="en-US" sz="1000" dirty="0"/>
+              <a:t>Persist the cursor with processed data</a:t>
+            </a:r>
+            <a:endParaRPr lang="en-US" sz="1600" dirty="0"/>
+          </a:p>
+        </p:txBody>
+      </p:sp>
+      <p:sp>
+        <p:nvSpPr>
+          <p:cNvPr id="15" name="Shape 12"/>
+          <p:cNvSpPr/>
+          <p:nvPr/>
+        </p:nvSpPr>
+        <p:spPr>
+          <a:xfrm>
+            <a:off x="6219444" y="2606040"/>
+            <a:ext cx="2474214" cy="2468880"/>
+          </a:xfrm>
+          <a:prstGeom prst="rect">
+            <a:avLst/>
+          </a:prstGeom>
+          <a:solidFill>
+            <a:srgbClr val="FFFFFF"/>
+          </a:solidFill>
+          <a:ln w="12700">
+            <a:solidFill>
+              <a:srgbClr val="FFFFFF">
+                <a:alpha val="0"/>
+              </a:srgbClr>
+            </a:solidFill>
+            <a:prstDash val="solid"/>
+          </a:ln>
+        </p:spPr>
+      </p:sp>
+      <p:sp>
+        <p:nvSpPr>
+          <p:cNvPr id="16" name="Text 13"/>
+          <p:cNvSpPr/>
+          <p:nvPr/>
+        </p:nvSpPr>
+        <p:spPr>
+          <a:xfrm>
+            <a:off x="6420612" y="2816352"/>
+            <a:ext cx="2071878" cy="320040"/>
+          </a:xfrm>
+          <a:prstGeom prst="rect">
+            <a:avLst/>
+          </a:prstGeom>
+          <a:noFill/>
+          <a:ln/>
+        </p:spPr>
+        <p:txBody>
+          <a:bodyPr wrap="square" lIns="0" tIns="0" rIns="0" bIns="0" rtlCol="0" anchor="ctr"/>
+          <a:lstStyle/>
+          <a:p>
+            <a:pPr indent="0" marL="0">
+              <a:buNone/>
+            </a:pPr>
+            <a:r>
+              <a:rPr lang="en-US" sz="1300" dirty="0">
+                <a:solidFill>
+                  <a:srgbClr val="2338FF"/>
+                </a:solidFill>
+                <a:latin typeface="JetBrains Mono" pitchFamily="34" charset="0"/>
+                <a:ea typeface="JetBrains Mono" pitchFamily="34" charset="-122"/>
+                <a:cs typeface="JetBrains Mono" pitchFamily="34" charset="-120"/>
+              </a:rPr>
+              <a:t>03</a:t>
+            </a:r>
+            <a:endParaRPr lang="en-US" sz="1300" dirty="0"/>
+          </a:p>
+        </p:txBody>
+      </p:sp>
+      <p:sp>
+        <p:nvSpPr>
+          <p:cNvPr id="17" name="Text 14"/>
+          <p:cNvSpPr/>
+          <p:nvPr/>
+        </p:nvSpPr>
+        <p:spPr>
+          <a:xfrm>
+            <a:off x="6420612" y="3429000"/>
+            <a:ext cx="2071878" cy="594360"/>
+          </a:xfrm>
+          <a:prstGeom prst="rect">
+            <a:avLst/>
+          </a:prstGeom>
+          <a:noFill/>
+          <a:ln/>
+        </p:spPr>
+        <p:txBody>
+          <a:bodyPr wrap="square" lIns="0" tIns="0" rIns="0" bIns="0" rtlCol="0" anchor="ctr"/>
+          <a:lstStyle/>
+          <a:p>
+            <a:pPr indent="0" marL="0">
+              <a:buNone/>
+            </a:pPr>
+            <a:r>
+              <a:rPr lang="en-US" sz="2500" dirty="0">
+                <a:solidFill>
+                  <a:srgbClr val="131725"/>
+                </a:solidFill>
+                <a:latin typeface="DM Sans" pitchFamily="34" charset="0"/>
+                <a:ea typeface="DM Sans" pitchFamily="34" charset="-122"/>
+                <a:cs typeface="DM Sans" pitchFamily="34" charset="-120"/>
+              </a:rPr>
+              <a:t>Reconnect</a:t>
+            </a:r>
+            <a:endParaRPr lang="en-US" sz="2500" dirty="0"/>
+          </a:p>
+        </p:txBody>
+      </p:sp>
+      <p:sp>
+        <p:nvSpPr>
+          <p:cNvPr id="18" name="Text 15"/>
+          <p:cNvSpPr/>
+          <p:nvPr/>
+        </p:nvSpPr>
+        <p:spPr>
+          <a:xfrm>
+            <a:off x="6420612" y="4114800"/>
+            <a:ext cx="2071878" cy="768096"/>
+          </a:xfrm>
+          <a:prstGeom prst="rect">
+            <a:avLst/>
+          </a:prstGeom>
+          <a:noFill/>
+          <a:ln/>
+        </p:spPr>
+        <p:txBody>
+          <a:bodyPr wrap="square" lIns="0" tIns="0" rIns="0" bIns="0" rtlCol="0" anchor="ctr"/>
+          <a:lstStyle/>
+          <a:p>
+            <a:pPr indent="0" marL="0">
+              <a:buNone/>
+            </a:pPr>
+            <a:r>
+              <a:rPr lang="en-US" sz="1600" dirty="0">
+                <a:solidFill>
+                  <a:srgbClr val="69738B"/>
+                </a:solidFill>
+                <a:latin typeface="DM Sans" pitchFamily="34" charset="0"/>
+                <a:ea typeface="DM Sans" pitchFamily="34" charset="-122"/>
+                <a:cs typeface="DM Sans" pitchFamily="34" charset="-120"/>
+              </a:rPr>
+              <a:t>after resumes from the last saved cursor</a:t>
+            </a:r>
+            <a:endParaRPr lang="en-US" sz="1600" dirty="0"/>
+          </a:p>
+        </p:txBody>
+      </p:sp>
+      <p:sp>
+        <p:nvSpPr>
+          <p:cNvPr id="19" name="Shape 16"/>
+          <p:cNvSpPr/>
+          <p:nvPr/>
+        </p:nvSpPr>
+        <p:spPr>
+          <a:xfrm>
+            <a:off x="8940546" y="2606040"/>
+            <a:ext cx="2474214" cy="2468880"/>
+          </a:xfrm>
+          <a:prstGeom prst="rect">
+            <a:avLst/>
+          </a:prstGeom>
+          <a:solidFill>
+            <a:srgbClr val="2338FF"/>
+          </a:solidFill>
+          <a:ln w="12700">
+            <a:solidFill>
+              <a:srgbClr val="2338FF">
+                <a:alpha val="0"/>
+              </a:srgbClr>
+            </a:solidFill>
+            <a:prstDash val="solid"/>
+          </a:ln>
+        </p:spPr>
+      </p:sp>
+      <p:sp>
+        <p:nvSpPr>
+          <p:cNvPr id="20" name="Text 17"/>
+          <p:cNvSpPr/>
+          <p:nvPr/>
+        </p:nvSpPr>
+        <p:spPr>
+          <a:xfrm>
+            <a:off x="9141714" y="2816352"/>
+            <a:ext cx="2071878" cy="320040"/>
+          </a:xfrm>
+          <a:prstGeom prst="rect">
+            <a:avLst/>
+          </a:prstGeom>
+          <a:noFill/>
+          <a:ln/>
+        </p:spPr>
+        <p:txBody>
+          <a:bodyPr wrap="square" lIns="0" tIns="0" rIns="0" bIns="0" rtlCol="0" anchor="ctr"/>
+          <a:lstStyle/>
+          <a:p>
+            <a:pPr indent="0" marL="0">
+              <a:buNone/>
+            </a:pPr>
+            <a:r>
+              <a:rPr lang="en-US" sz="1300" dirty="0">
+                <a:solidFill>
+                  <a:srgbClr val="C4CEFF"/>
+                </a:solidFill>
+                <a:latin typeface="JetBrains Mono" pitchFamily="34" charset="0"/>
+                <a:ea typeface="JetBrains Mono" pitchFamily="34" charset="-122"/>
+                <a:cs typeface="JetBrains Mono" pitchFamily="34" charset="-120"/>
+              </a:rPr>
+              <a:t>04</a:t>
+            </a:r>
+            <a:endParaRPr lang="en-US" sz="1300" dirty="0"/>
+          </a:p>
+        </p:txBody>
+      </p:sp>
+      <p:sp>
+        <p:nvSpPr>
+          <p:cNvPr id="21" name="Text 18"/>
+          <p:cNvSpPr/>
+          <p:nvPr/>
+        </p:nvSpPr>
+        <p:spPr>
+          <a:xfrm>
+            <a:off x="9141714" y="3429000"/>
+            <a:ext cx="2071878" cy="594360"/>
+          </a:xfrm>
+          <a:prstGeom prst="rect">
+            <a:avLst/>
+          </a:prstGeom>
+          <a:noFill/>
+          <a:ln/>
+        </p:spPr>
+        <p:txBody>
+          <a:bodyPr wrap="square" lIns="0" tIns="0" rIns="0" bIns="0" rtlCol="0" anchor="ctr"/>
+          <a:lstStyle/>
+          <a:p>
+            <a:pPr indent="0" marL="0">
+              <a:buNone/>
+            </a:pPr>
+            <a:r>
+              <a:rPr lang="en-US" sz="2500" dirty="0">
+                <a:solidFill>
+                  <a:srgbClr val="FFFFFF"/>
+                </a:solidFill>
+                <a:latin typeface="DM Sans" pitchFamily="34" charset="0"/>
+                <a:ea typeface="DM Sans" pitchFamily="34" charset="-122"/>
+                <a:cs typeface="DM Sans" pitchFamily="34" charset="-120"/>
+              </a:rPr>
+              <a:t>Catch up</a:t>
+            </a:r>
+            <a:endParaRPr lang="en-US" sz="2500" dirty="0"/>
+          </a:p>
+        </p:txBody>
+      </p:sp>
+      <p:sp>
+        <p:nvSpPr>
+          <p:cNvPr id="22" name="Text 19"/>
+          <p:cNvSpPr/>
+          <p:nvPr/>
+        </p:nvSpPr>
+        <p:spPr>
+          <a:xfrm>
+            <a:off x="9141714" y="4114800"/>
+            <a:ext cx="2071878" cy="768096"/>
+          </a:xfrm>
+          <a:prstGeom prst="rect">
+            <a:avLst/>
+          </a:prstGeom>
+          <a:noFill/>
+          <a:ln/>
+        </p:spPr>
+        <p:txBody>
+          <a:bodyPr wrap="square" lIns="0" tIns="0" rIns="0" bIns="0" rtlCol="0" anchor="ctr"/>
+          <a:lstStyle/>
+          <a:p>
+            <a:pPr indent="0" marL="0">
+              <a:buNone/>
+            </a:pPr>
+            <a:r>
+              <a:rPr lang="en-US" sz="1600" dirty="0">
+                <a:solidFill>
+                  <a:srgbClr val="D4DCFF"/>
+                </a:solidFill>
+                <a:latin typeface="DM Sans" pitchFamily="34" charset="0"/>
+                <a:ea typeface="DM Sans" pitchFamily="34" charset="-122"/>
+                <a:cs typeface="DM Sans" pitchFamily="34" charset="-120"/>
+              </a:rPr>
+              <a:t>Replay missed activity, then switch to live</a:t>
+            </a:r>
+            <a:endParaRPr lang="en-US" sz="1600" dirty="0"/>
+          </a:p>
+        </p:txBody>
+      </p:sp>
+      <p:sp>
+        <p:nvSpPr>
+          <p:cNvPr id="23" name="Text 20"/>
+          <p:cNvSpPr/>
+          <p:nvPr/>
+        </p:nvSpPr>
+        <p:spPr>
+          <a:xfrm>
+            <a:off x="777240" y="5468112"/>
+            <a:ext cx="10515600" cy="502920"/>
+          </a:xfrm>
+          <a:prstGeom prst="rect">
+            <a:avLst/>
+          </a:prstGeom>
+          <a:noFill/>
+          <a:ln/>
+        </p:spPr>
+        <p:txBody>
+          <a:bodyPr wrap="square" lIns="0" tIns="0" rIns="0" bIns="0" rtlCol="0" anchor="ctr"/>
+          <a:lstStyle/>
+          <a:p>
+            <a:pPr indent="0" marL="0">
+              <a:buNone/>
+            </a:pPr>
+            <a:r>
+              <a:rPr lang="en-US" sz="2000" dirty="0">
+                <a:solidFill>
+                  <a:srgbClr val="69738B"/>
+                </a:solidFill>
+                <a:latin typeface="DM Sans" pitchFamily="34" charset="0"/>
+                <a:ea typeface="DM Sans" pitchFamily="34" charset="-122"/>
+                <a:cs typeface="DM Sans" pitchFamily="34" charset="-120"/>
+              </a:rPr>
+              <a:t>Checkpoint order → transaction order → event order. Respect subscriber throttling.</a:t>
+            </a:r>
+            <a:endParaRPr lang="en-US" sz="2000" dirty="0"/>
           </a:p>
         </p:txBody>
       </p:sp>
@@ -9456,6 +9686,503 @@
 <file path=ppt/slides/slide8.xml><?xml version="1.0" encoding="utf-8"?>
 <p:sld xmlns:a="http://schemas.openxmlformats.org/drawingml/2006/main" xmlns:r="http://schemas.openxmlformats.org/officeDocument/2006/relationships" xmlns:p="http://schemas.openxmlformats.org/presentationml/2006/main">
   <p:cSld name="Slide 8">
+    <p:bg>
+      <p:bgPr>
+        <a:solidFill>
+          <a:srgbClr val="07080F"/>
+        </a:solidFill>
+      </p:bgPr>
+    </p:bg>
+    <p:spTree>
+      <p:nvGrpSpPr>
+        <p:cNvPr id="1" name=""/>
+        <p:cNvGrpSpPr/>
+        <p:nvPr/>
+      </p:nvGrpSpPr>
+      <p:grpSpPr>
+        <a:xfrm>
+          <a:off x="0" y="0"/>
+          <a:ext cx="0" cy="0"/>
+          <a:chOff x="0" y="0"/>
+          <a:chExt cx="0" cy="0"/>
+        </a:xfrm>
+      </p:grpSpPr>
+      <p:sp>
+        <p:nvSpPr>
+          <p:cNvPr id="2" name="Text 0"/>
+          <p:cNvSpPr/>
+          <p:nvPr/>
+        </p:nvSpPr>
+        <p:spPr>
+          <a:xfrm>
+            <a:off x="777240" y="502920"/>
+            <a:ext cx="10637520" cy="274320"/>
+          </a:xfrm>
+          <a:prstGeom prst="rect">
+            <a:avLst/>
+          </a:prstGeom>
+          <a:noFill/>
+          <a:ln/>
+        </p:spPr>
+        <p:txBody>
+          <a:bodyPr wrap="square" lIns="0" tIns="0" rIns="0" bIns="0" rtlCol="0" anchor="ctr"/>
+          <a:lstStyle/>
+          <a:p>
+            <a:pPr indent="0" marL="0">
+              <a:buNone/>
+            </a:pPr>
+            <a:r>
+              <a:rPr lang="en-US" sz="1000" spc="150" kern="0" dirty="0">
+                <a:solidFill>
+                  <a:srgbClr val="ACB8DB"/>
+                </a:solidFill>
+                <a:latin typeface="JetBrains Mono" pitchFamily="34" charset="0"/>
+                <a:ea typeface="JetBrains Mono" pitchFamily="34" charset="-122"/>
+                <a:cs typeface="JetBrains Mono" pitchFamily="34" charset="-120"/>
+              </a:rPr>
+              <a:t>[ INDEXER/INDEXER.TS / EXCERPT ]</a:t>
+            </a:r>
+            <a:endParaRPr lang="en-US" sz="1000" dirty="0"/>
+          </a:p>
+        </p:txBody>
+      </p:sp>
+      <p:sp>
+        <p:nvSpPr>
+          <p:cNvPr id="3" name="Text 1"/>
+          <p:cNvSpPr/>
+          <p:nvPr/>
+        </p:nvSpPr>
+        <p:spPr>
+          <a:xfrm>
+            <a:off x="777240" y="932688"/>
+            <a:ext cx="10637520" cy="1143000"/>
+          </a:xfrm>
+          <a:prstGeom prst="rect">
+            <a:avLst/>
+          </a:prstGeom>
+          <a:noFill/>
+          <a:ln/>
+        </p:spPr>
+        <p:txBody>
+          <a:bodyPr wrap="square" lIns="0" tIns="0" rIns="0" bIns="0" rtlCol="0" anchor="ctr"/>
+          <a:lstStyle/>
+          <a:p>
+            <a:pPr indent="0" marL="0">
+              <a:buNone/>
+            </a:pPr>
+            <a:r>
+              <a:rPr lang="en-US" sz="3700" dirty="0">
+                <a:solidFill>
+                  <a:srgbClr val="FFFFFF"/>
+                </a:solidFill>
+                <a:latin typeface="DM Sans" pitchFamily="34" charset="0"/>
+                <a:ea typeface="DM Sans" pitchFamily="34" charset="-122"/>
+                <a:cs typeface="DM Sans" pitchFamily="34" charset="-120"/>
+              </a:rPr>
+              <a:t>A small indexer: commit data and cursor.</a:t>
+            </a:r>
+            <a:endParaRPr lang="en-US" sz="3700" dirty="0"/>
+          </a:p>
+        </p:txBody>
+      </p:sp>
+      <p:sp>
+        <p:nvSpPr>
+          <p:cNvPr id="4" name="Text 2"/>
+          <p:cNvSpPr/>
+          <p:nvPr/>
+        </p:nvSpPr>
+        <p:spPr>
+          <a:xfrm>
+            <a:off x="777240" y="6437376"/>
+            <a:ext cx="7315200" cy="182880"/>
+          </a:xfrm>
+          <a:prstGeom prst="rect">
+            <a:avLst/>
+          </a:prstGeom>
+          <a:noFill/>
+          <a:ln/>
+        </p:spPr>
+        <p:txBody>
+          <a:bodyPr wrap="square" lIns="0" tIns="0" rIns="0" bIns="0" rtlCol="0" anchor="ctr"/>
+          <a:lstStyle/>
+          <a:p>
+            <a:pPr indent="0" marL="0">
+              <a:buNone/>
+            </a:pPr>
+            <a:r>
+              <a:rPr lang="en-US" sz="800" spc="100" kern="0" dirty="0">
+                <a:solidFill>
+                  <a:srgbClr val="ACB8DB"/>
+                </a:solidFill>
+                <a:latin typeface="JetBrains Mono" pitchFamily="34" charset="0"/>
+                <a:ea typeface="JetBrains Mono" pitchFamily="34" charset="-122"/>
+                <a:cs typeface="JetBrains Mono" pitchFamily="34" charset="-120"/>
+              </a:rPr>
+              <a:t>SUIHUB LAGOS / ACCOUNT LAYER WEEK</a:t>
+            </a:r>
+            <a:endParaRPr lang="en-US" sz="800" dirty="0"/>
+          </a:p>
+        </p:txBody>
+      </p:sp>
+      <p:sp>
+        <p:nvSpPr>
+          <p:cNvPr id="5" name="Text 3"/>
+          <p:cNvSpPr/>
+          <p:nvPr/>
+        </p:nvSpPr>
+        <p:spPr>
+          <a:xfrm>
+            <a:off x="10698480" y="6419088"/>
+            <a:ext cx="685800" cy="210312"/>
+          </a:xfrm>
+          <a:prstGeom prst="rect">
+            <a:avLst/>
+          </a:prstGeom>
+          <a:noFill/>
+          <a:ln/>
+        </p:spPr>
+        <p:txBody>
+          <a:bodyPr wrap="square" lIns="0" tIns="0" rIns="0" bIns="0" rtlCol="0" anchor="ctr"/>
+          <a:lstStyle/>
+          <a:p>
+            <a:pPr algn="r" indent="0" marL="0">
+              <a:buNone/>
+            </a:pPr>
+            <a:r>
+              <a:rPr lang="en-US" sz="1000" dirty="0">
+                <a:solidFill>
+                  <a:srgbClr val="ACB8DB"/>
+                </a:solidFill>
+                <a:latin typeface="JetBrains Mono" pitchFamily="34" charset="0"/>
+                <a:ea typeface="JetBrains Mono" pitchFamily="34" charset="-122"/>
+                <a:cs typeface="JetBrains Mono" pitchFamily="34" charset="-120"/>
+              </a:rPr>
+              <a:t>08</a:t>
+            </a:r>
+            <a:endParaRPr lang="en-US" sz="1000" dirty="0"/>
+          </a:p>
+        </p:txBody>
+      </p:sp>
+      <p:sp>
+        <p:nvSpPr>
+          <p:cNvPr id="7" name="Shape 4"/>
+          <p:cNvSpPr/>
+          <p:nvPr/>
+        </p:nvSpPr>
+        <p:spPr>
+          <a:xfrm>
+            <a:off x="777240" y="2267712"/>
+            <a:ext cx="10637520" cy="3794760"/>
+          </a:xfrm>
+          <a:prstGeom prst="rect">
+            <a:avLst/>
+          </a:prstGeom>
+          <a:solidFill>
+            <a:srgbClr val="111529"/>
+          </a:solidFill>
+          <a:ln w="12700">
+            <a:solidFill>
+              <a:srgbClr val="111529">
+                <a:alpha val="0"/>
+              </a:srgbClr>
+            </a:solidFill>
+            <a:prstDash val="solid"/>
+          </a:ln>
+        </p:spPr>
+      </p:sp>
+      <p:sp>
+        <p:nvSpPr>
+          <p:cNvPr id="8" name="Text 5"/>
+          <p:cNvSpPr/>
+          <p:nvPr/>
+        </p:nvSpPr>
+        <p:spPr>
+          <a:xfrm>
+            <a:off x="1033272" y="2432304"/>
+            <a:ext cx="10125456" cy="3520440"/>
+          </a:xfrm>
+          <a:prstGeom prst="rect">
+            <a:avLst/>
+          </a:prstGeom>
+          <a:noFill/>
+          <a:ln/>
+        </p:spPr>
+        <p:txBody>
+          <a:bodyPr wrap="square" lIns="0" tIns="0" rIns="0" bIns="0" rtlCol="0" anchor="t"/>
+          <a:lstStyle/>
+          <a:p>
+            <a:pPr indent="0" marL="0">
+              <a:buNone/>
+            </a:pPr>
+            <a:r>
+              <a:rPr lang="en-US" sz="1567" dirty="0">
+                <a:solidFill>
+                  <a:srgbClr val="D9E1FF"/>
+                </a:solidFill>
+                <a:latin typeface="JetBrains Mono" pitchFamily="34" charset="0"/>
+                <a:ea typeface="JetBrains Mono" pitchFamily="34" charset="-122"/>
+                <a:cs typeface="JetBrains Mono" pitchFamily="34" charset="-120"/>
+              </a:rPr>
+              <a:t>db.exec('BEGIN');</a:t>
+            </a:r>
+            <a:endParaRPr lang="en-US" sz="1567" dirty="0"/>
+          </a:p>
+          <a:p>
+            <a:pPr indent="0" marL="0">
+              <a:buNone/>
+            </a:pPr>
+            <a:r>
+              <a:rPr lang="en-US" sz="1567" dirty="0">
+                <a:solidFill>
+                  <a:srgbClr val="D9E1FF"/>
+                </a:solidFill>
+                <a:latin typeface="JetBrains Mono" pitchFamily="34" charset="0"/>
+                <a:ea typeface="JetBrains Mono" pitchFamily="34" charset="-122"/>
+                <a:cs typeface="JetBrains Mono" pitchFamily="34" charset="-120"/>
+              </a:rPr>
+              <a:t>try {</a:t>
+            </a:r>
+            <a:endParaRPr lang="en-US" sz="1567" dirty="0"/>
+          </a:p>
+          <a:p>
+            <a:pPr indent="0" marL="0">
+              <a:buNone/>
+            </a:pPr>
+            <a:r>
+              <a:rPr lang="en-US" sz="1567" dirty="0">
+                <a:solidFill>
+                  <a:srgbClr val="D9E1FF"/>
+                </a:solidFill>
+                <a:latin typeface="JetBrains Mono" pitchFamily="34" charset="0"/>
+                <a:ea typeface="JetBrains Mono" pitchFamily="34" charset="-122"/>
+                <a:cs typeface="JetBrains Mono" pitchFamily="34" charset="-120"/>
+              </a:rPr>
+              <a:t>  for (const p of payments) {</a:t>
+            </a:r>
+            <a:endParaRPr lang="en-US" sz="1567" dirty="0"/>
+          </a:p>
+          <a:p>
+            <a:pPr indent="0" marL="0">
+              <a:buNone/>
+            </a:pPr>
+            <a:r>
+              <a:rPr lang="en-US" sz="1567" dirty="0">
+                <a:solidFill>
+                  <a:srgbClr val="D9E1FF"/>
+                </a:solidFill>
+                <a:latin typeface="JetBrains Mono" pitchFamily="34" charset="0"/>
+                <a:ea typeface="JetBrains Mono" pitchFamily="34" charset="-122"/>
+                <a:cs typeface="JetBrains Mono" pitchFamily="34" charset="-120"/>
+              </a:rPr>
+              <a:t>    insert.run(p.digest, p.coinType, p.amount,</a:t>
+            </a:r>
+            <a:endParaRPr lang="en-US" sz="1567" dirty="0"/>
+          </a:p>
+          <a:p>
+            <a:pPr indent="0" marL="0">
+              <a:buNone/>
+            </a:pPr>
+            <a:r>
+              <a:rPr lang="en-US" sz="1567" dirty="0">
+                <a:solidFill>
+                  <a:srgbClr val="D9E1FF"/>
+                </a:solidFill>
+                <a:latin typeface="JetBrains Mono" pitchFamily="34" charset="0"/>
+                <a:ea typeface="JetBrains Mono" pitchFamily="34" charset="-122"/>
+                <a:cs typeface="JetBrains Mono" pitchFamily="34" charset="-120"/>
+              </a:rPr>
+              <a:t>      p.sender, p.checkpoint, p.timestamp, p.cursor);</a:t>
+            </a:r>
+            <a:endParaRPr lang="en-US" sz="1567" dirty="0"/>
+          </a:p>
+          <a:p>
+            <a:pPr indent="0" marL="0">
+              <a:buNone/>
+            </a:pPr>
+            <a:r>
+              <a:rPr lang="en-US" sz="1567" dirty="0">
+                <a:solidFill>
+                  <a:srgbClr val="D9E1FF"/>
+                </a:solidFill>
+                <a:latin typeface="JetBrains Mono" pitchFamily="34" charset="0"/>
+                <a:ea typeface="JetBrains Mono" pitchFamily="34" charset="-122"/>
+                <a:cs typeface="JetBrains Mono" pitchFamily="34" charset="-120"/>
+              </a:rPr>
+              <a:t>  }</a:t>
+            </a:r>
+            <a:endParaRPr lang="en-US" sz="1567" dirty="0"/>
+          </a:p>
+          <a:p>
+            <a:pPr indent="0" marL="0">
+              <a:buNone/>
+            </a:pPr>
+            <a:r>
+              <a:rPr lang="en-US" sz="1567" dirty="0">
+                <a:solidFill>
+                  <a:srgbClr val="D9E1FF"/>
+                </a:solidFill>
+                <a:latin typeface="JetBrains Mono" pitchFamily="34" charset="0"/>
+                <a:ea typeface="JetBrains Mono" pitchFamily="34" charset="-122"/>
+                <a:cs typeface="JetBrains Mono" pitchFamily="34" charset="-120"/>
+              </a:rPr>
+              <a:t>  saveCursor.run(shop, d.transactions.cursor,</a:t>
+            </a:r>
+            <a:endParaRPr lang="en-US" sz="1567" dirty="0"/>
+          </a:p>
+          <a:p>
+            <a:pPr indent="0" marL="0">
+              <a:buNone/>
+            </a:pPr>
+            <a:r>
+              <a:rPr lang="en-US" sz="1567" dirty="0">
+                <a:solidFill>
+                  <a:srgbClr val="D9E1FF"/>
+                </a:solidFill>
+                <a:latin typeface="JetBrains Mono" pitchFamily="34" charset="0"/>
+                <a:ea typeface="JetBrains Mono" pitchFamily="34" charset="-122"/>
+                <a:cs typeface="JetBrains Mono" pitchFamily="34" charset="-120"/>
+              </a:rPr>
+              <a:t>    new Date().toISOString());</a:t>
+            </a:r>
+            <a:endParaRPr lang="en-US" sz="1567" dirty="0"/>
+          </a:p>
+          <a:p>
+            <a:pPr indent="0" marL="0">
+              <a:buNone/>
+            </a:pPr>
+            <a:r>
+              <a:rPr lang="en-US" sz="1567" dirty="0">
+                <a:solidFill>
+                  <a:srgbClr val="D9E1FF"/>
+                </a:solidFill>
+                <a:latin typeface="JetBrains Mono" pitchFamily="34" charset="0"/>
+                <a:ea typeface="JetBrains Mono" pitchFamily="34" charset="-122"/>
+                <a:cs typeface="JetBrains Mono" pitchFamily="34" charset="-120"/>
+              </a:rPr>
+              <a:t>  db.exec('COMMIT');</a:t>
+            </a:r>
+            <a:endParaRPr lang="en-US" sz="1567" dirty="0"/>
+          </a:p>
+          <a:p>
+            <a:pPr indent="0" marL="0">
+              <a:buNone/>
+            </a:pPr>
+            <a:r>
+              <a:rPr lang="en-US" sz="1567" dirty="0">
+                <a:solidFill>
+                  <a:srgbClr val="D9E1FF"/>
+                </a:solidFill>
+                <a:latin typeface="JetBrains Mono" pitchFamily="34" charset="0"/>
+                <a:ea typeface="JetBrains Mono" pitchFamily="34" charset="-122"/>
+                <a:cs typeface="JetBrains Mono" pitchFamily="34" charset="-120"/>
+              </a:rPr>
+              <a:t>} catch (e) {</a:t>
+            </a:r>
+            <a:endParaRPr lang="en-US" sz="1567" dirty="0"/>
+          </a:p>
+          <a:p>
+            <a:pPr indent="0" marL="0">
+              <a:buNone/>
+            </a:pPr>
+            <a:r>
+              <a:rPr lang="en-US" sz="1567" dirty="0">
+                <a:solidFill>
+                  <a:srgbClr val="D9E1FF"/>
+                </a:solidFill>
+                <a:latin typeface="JetBrains Mono" pitchFamily="34" charset="0"/>
+                <a:ea typeface="JetBrains Mono" pitchFamily="34" charset="-122"/>
+                <a:cs typeface="JetBrains Mono" pitchFamily="34" charset="-120"/>
+              </a:rPr>
+              <a:t>  db.exec('ROLLBACK');</a:t>
+            </a:r>
+            <a:endParaRPr lang="en-US" sz="1567" dirty="0"/>
+          </a:p>
+          <a:p>
+            <a:pPr indent="0" marL="0">
+              <a:buNone/>
+            </a:pPr>
+            <a:r>
+              <a:rPr lang="en-US" sz="1567" dirty="0">
+                <a:solidFill>
+                  <a:srgbClr val="D9E1FF"/>
+                </a:solidFill>
+                <a:latin typeface="JetBrains Mono" pitchFamily="34" charset="0"/>
+                <a:ea typeface="JetBrains Mono" pitchFamily="34" charset="-122"/>
+                <a:cs typeface="JetBrains Mono" pitchFamily="34" charset="-120"/>
+              </a:rPr>
+              <a:t>  throw e;</a:t>
+            </a:r>
+            <a:endParaRPr lang="en-US" sz="1567" dirty="0"/>
+          </a:p>
+          <a:p>
+            <a:pPr indent="0" marL="0">
+              <a:buNone/>
+            </a:pPr>
+            <a:r>
+              <a:rPr lang="en-US" sz="1567" dirty="0">
+                <a:solidFill>
+                  <a:srgbClr val="D9E1FF"/>
+                </a:solidFill>
+                <a:latin typeface="JetBrains Mono" pitchFamily="34" charset="0"/>
+                <a:ea typeface="JetBrains Mono" pitchFamily="34" charset="-122"/>
+                <a:cs typeface="JetBrains Mono" pitchFamily="34" charset="-120"/>
+              </a:rPr>
+              <a:t>}</a:t>
+            </a:r>
+            <a:endParaRPr lang="en-US" sz="1567" dirty="0"/>
+          </a:p>
+        </p:txBody>
+      </p:sp>
+      <p:sp>
+        <p:nvSpPr>
+          <p:cNvPr id="9" name="Text 6"/>
+          <p:cNvSpPr/>
+          <p:nvPr/>
+        </p:nvSpPr>
+        <p:spPr>
+          <a:xfrm>
+            <a:off x="777240" y="6053328"/>
+            <a:ext cx="10515600" cy="228600"/>
+          </a:xfrm>
+          <a:prstGeom prst="rect">
+            <a:avLst/>
+          </a:prstGeom>
+          <a:noFill/>
+          <a:ln/>
+        </p:spPr>
+        <p:txBody>
+          <a:bodyPr wrap="square" lIns="0" tIns="0" rIns="0" bIns="0" rtlCol="0" anchor="ctr"/>
+          <a:lstStyle/>
+          <a:p>
+            <a:pPr indent="0" marL="0">
+              <a:buNone/>
+            </a:pPr>
+            <a:r>
+              <a:rPr lang="en-US" sz="1100" dirty="0">
+                <a:solidFill>
+                  <a:srgbClr val="ACB8DB"/>
+                </a:solidFill>
+                <a:latin typeface="DM Sans" pitchFamily="34" charset="0"/>
+                <a:ea typeface="DM Sans" pitchFamily="34" charset="-122"/>
+                <a:cs typeface="DM Sans" pitchFamily="34" charset="-120"/>
+              </a:rPr>
+              <a:t>pnpm indexer → stop → pay → restart → pnpm totals   /   Atomic writes + unique receipt keys</a:t>
+            </a:r>
+            <a:endParaRPr lang="en-US" sz="1100" dirty="0"/>
+          </a:p>
+        </p:txBody>
+      </p:sp>
+    </p:spTree>
+  </p:cSld>
+  <p:clrMapOvr>
+    <a:masterClrMapping/>
+  </p:clrMapOvr>
+</p:sld>
+</file>
+
+<file path=ppt/slides/slide9.xml><?xml version="1.0" encoding="utf-8"?>
+<p:sld xmlns:a="http://schemas.openxmlformats.org/drawingml/2006/main" xmlns:r="http://schemas.openxmlformats.org/officeDocument/2006/relationships" xmlns:p="http://schemas.openxmlformats.org/presentationml/2006/main">
+  <p:cSld name="Slide 9">
     <p:bg>
       <p:bgPr>
         <a:solidFill>
@@ -9510,7 +10237,7 @@
                 <a:ea typeface="JetBrains Mono" pitchFamily="34" charset="-122"/>
                 <a:cs typeface="JetBrains Mono" pitchFamily="34" charset="-120"/>
               </a:rPr>
-              <a:t>[ RESUME STRATEGY ]</a:t>
+              <a:t>[ SUBSCRIPTION WRITER → CUSTOM PIPELINE ]</a:t>
             </a:r>
             <a:endParaRPr lang="en-US" sz="1000" dirty="0"/>
           </a:p>
@@ -9549,7 +10276,7 @@
                 <a:ea typeface="DM Sans" pitchFamily="34" charset="-122"/>
                 <a:cs typeface="DM Sans" pitchFamily="34" charset="-120"/>
               </a:rPr>
-              <a:t>No cursor yet? Keep a checkpoint.</a:t>
+              <a:t>When should you use the Rust framework?</a:t>
             </a:r>
             <a:endParaRPr lang="en-US" sz="3700" dirty="0"/>
           </a:p>
@@ -9627,7 +10354,7 @@
                 <a:ea typeface="JetBrains Mono" pitchFamily="34" charset="-122"/>
                 <a:cs typeface="JetBrains Mono" pitchFamily="34" charset="-120"/>
               </a:rPr>
-              <a:t>08</a:t>
+              <a:t>09</a:t>
             </a:r>
             <a:endParaRPr lang="en-US" sz="1000" dirty="0"/>
           </a:p>
@@ -9641,8 +10368,8 @@
         </p:nvSpPr>
         <p:spPr>
           <a:xfrm>
-            <a:off x="777240" y="2606040"/>
-            <a:ext cx="2474214" cy="2468880"/>
+            <a:off x="777240" y="2286000"/>
+            <a:ext cx="5204460" cy="3337560"/>
           </a:xfrm>
           <a:prstGeom prst="rect">
             <a:avLst/>
@@ -9668,24 +10395,24 @@
         </p:nvSpPr>
         <p:spPr>
           <a:xfrm>
-            <a:off x="978408" y="2816352"/>
-            <a:ext cx="2071878" cy="320040"/>
-          </a:xfrm>
-          <a:prstGeom prst="rect">
-            <a:avLst/>
-          </a:prstGeom>
-          <a:noFill/>
-          <a:ln/>
-        </p:spPr>
-        <p:txBody>
-          <a:bodyPr wrap="square" lIns="0" tIns="0" rIns="0" bIns="0" rtlCol="0" anchor="ctr"/>
-          <a:lstStyle/>
-          <a:p>
-            <a:pPr indent="0" marL="0">
-              <a:buNone/>
-            </a:pPr>
-            <a:r>
-              <a:rPr lang="en-US" sz="1300" dirty="0">
+            <a:off x="1005840" y="2496312"/>
+            <a:ext cx="4747260" cy="274320"/>
+          </a:xfrm>
+          <a:prstGeom prst="rect">
+            <a:avLst/>
+          </a:prstGeom>
+          <a:noFill/>
+          <a:ln/>
+        </p:spPr>
+        <p:txBody>
+          <a:bodyPr wrap="square" lIns="0" tIns="0" rIns="0" bIns="0" rtlCol="0" anchor="ctr"/>
+          <a:lstStyle/>
+          <a:p>
+            <a:pPr indent="0" marL="0">
+              <a:buNone/>
+            </a:pPr>
+            <a:r>
+              <a:rPr lang="en-US" sz="1100" dirty="0">
                 <a:solidFill>
                   <a:srgbClr val="2338FF"/>
                 </a:solidFill>
@@ -9693,9 +10420,9 @@
                 <a:ea typeface="JetBrains Mono" pitchFamily="34" charset="-122"/>
                 <a:cs typeface="JetBrains Mono" pitchFamily="34" charset="-120"/>
               </a:rPr>
-              <a:t>01</a:t>
-            </a:r>
-            <a:endParaRPr lang="en-US" sz="1300" dirty="0"/>
+              <a:t>SQLITE / POSTGRES WRITER</a:t>
+            </a:r>
+            <a:endParaRPr lang="en-US" sz="1100" dirty="0"/>
           </a:p>
         </p:txBody>
       </p:sp>
@@ -9707,8 +10434,8 @@
         </p:nvSpPr>
         <p:spPr>
           <a:xfrm>
-            <a:off x="978408" y="3429000"/>
-            <a:ext cx="2071878" cy="594360"/>
+            <a:off x="1005840" y="2889504"/>
+            <a:ext cx="4747260" cy="960120"/>
           </a:xfrm>
           <a:prstGeom prst="rect">
             <a:avLst/>
@@ -9732,7 +10459,7 @@
                 <a:ea typeface="DM Sans" pitchFamily="34" charset="-122"/>
                 <a:cs typeface="DM Sans" pitchFamily="34" charset="-120"/>
               </a:rPr>
-              <a:t>First open</a:t>
+              <a:t>A focused application feed</a:t>
             </a:r>
             <a:endParaRPr lang="en-US" sz="2500" dirty="0"/>
           </a:p>
@@ -9746,24 +10473,24 @@
         </p:nvSpPr>
         <p:spPr>
           <a:xfrm>
-            <a:off x="978408" y="4114800"/>
-            <a:ext cx="2071878" cy="768096"/>
-          </a:xfrm>
-          <a:prstGeom prst="rect">
-            <a:avLst/>
-          </a:prstGeom>
-          <a:noFill/>
-          <a:ln/>
-        </p:spPr>
-        <p:txBody>
-          <a:bodyPr wrap="square" lIns="0" tIns="0" rIns="0" bIns="0" rtlCol="0" anchor="ctr"/>
-          <a:lstStyle/>
-          <a:p>
-            <a:pPr indent="0" marL="0">
-              <a:buNone/>
-            </a:pPr>
-            <a:r>
-              <a:rPr lang="en-US" sz="1600" dirty="0">
+            <a:off x="1005840" y="4005072"/>
+            <a:ext cx="4747260" cy="1371600"/>
+          </a:xfrm>
+          <a:prstGeom prst="rect">
+            <a:avLst/>
+          </a:prstGeom>
+          <a:noFill/>
+          <a:ln/>
+        </p:spPr>
+        <p:txBody>
+          <a:bodyPr wrap="square" lIns="0" tIns="0" rIns="0" bIns="0" rtlCol="0" anchor="ctr"/>
+          <a:lstStyle/>
+          <a:p>
+            <a:pPr indent="0" marL="0">
+              <a:buNone/>
+            </a:pPr>
+            <a:r>
+              <a:rPr lang="en-US" sz="1900" dirty="0">
                 <a:solidFill>
                   <a:srgbClr val="69738B"/>
                 </a:solidFill>
@@ -9771,143 +10498,33 @@
                 <a:ea typeface="DM Sans" pitchFamily="34" charset="-122"/>
                 <a:cs typeface="DM Sans" pitchFamily="34" charset="-120"/>
               </a:rPr>
-              <a:t>Capture an opening checkpoint</a:t>
-            </a:r>
-            <a:endParaRPr lang="en-US" sz="1600" dirty="0"/>
-          </a:p>
-        </p:txBody>
-      </p:sp>
-      <p:sp>
-        <p:nvSpPr>
-          <p:cNvPr id="11" name="Shape 8"/>
-          <p:cNvSpPr/>
-          <p:nvPr/>
-        </p:nvSpPr>
-        <p:spPr>
-          <a:xfrm>
-            <a:off x="3498342" y="2606040"/>
-            <a:ext cx="2474214" cy="2468880"/>
-          </a:xfrm>
-          <a:prstGeom prst="rect">
-            <a:avLst/>
-          </a:prstGeom>
-          <a:solidFill>
-            <a:srgbClr val="FFFFFF"/>
-          </a:solidFill>
-          <a:ln w="12700">
-            <a:solidFill>
-              <a:srgbClr val="FFFFFF">
-                <a:alpha val="0"/>
-              </a:srgbClr>
-            </a:solidFill>
-            <a:prstDash val="solid"/>
-          </a:ln>
-        </p:spPr>
-      </p:sp>
-      <p:sp>
-        <p:nvSpPr>
-          <p:cNvPr id="12" name="Text 9"/>
-          <p:cNvSpPr/>
-          <p:nvPr/>
-        </p:nvSpPr>
-        <p:spPr>
-          <a:xfrm>
-            <a:off x="3699510" y="2816352"/>
-            <a:ext cx="2071878" cy="320040"/>
-          </a:xfrm>
-          <a:prstGeom prst="rect">
-            <a:avLst/>
-          </a:prstGeom>
-          <a:noFill/>
-          <a:ln/>
-        </p:spPr>
-        <p:txBody>
-          <a:bodyPr wrap="square" lIns="0" tIns="0" rIns="0" bIns="0" rtlCol="0" anchor="ctr"/>
-          <a:lstStyle/>
-          <a:p>
-            <a:pPr indent="0" marL="0">
-              <a:buNone/>
-            </a:pPr>
-            <a:r>
-              <a:rPr lang="en-US" sz="1300" dirty="0">
-                <a:solidFill>
-                  <a:srgbClr val="2338FF"/>
-                </a:solidFill>
-                <a:latin typeface="JetBrains Mono" pitchFamily="34" charset="0"/>
-                <a:ea typeface="JetBrains Mono" pitchFamily="34" charset="-122"/>
-                <a:cs typeface="JetBrains Mono" pitchFamily="34" charset="-120"/>
-              </a:rPr>
-              <a:t>02</a:t>
-            </a:r>
-            <a:endParaRPr lang="en-US" sz="1300" dirty="0"/>
-          </a:p>
-        </p:txBody>
-      </p:sp>
-      <p:sp>
-        <p:nvSpPr>
-          <p:cNvPr id="13" name="Text 10"/>
-          <p:cNvSpPr/>
-          <p:nvPr/>
-        </p:nvSpPr>
-        <p:spPr>
-          <a:xfrm>
-            <a:off x="3699510" y="3429000"/>
-            <a:ext cx="2071878" cy="594360"/>
-          </a:xfrm>
-          <a:prstGeom prst="rect">
-            <a:avLst/>
-          </a:prstGeom>
-          <a:noFill/>
-          <a:ln/>
-        </p:spPr>
-        <p:txBody>
-          <a:bodyPr wrap="square" lIns="0" tIns="0" rIns="0" bIns="0" rtlCol="0" anchor="ctr"/>
-          <a:lstStyle/>
-          <a:p>
-            <a:pPr indent="0" marL="0">
-              <a:buNone/>
-            </a:pPr>
-            <a:r>
-              <a:rPr lang="en-US" sz="2500" dirty="0">
-                <a:solidFill>
-                  <a:srgbClr val="131725"/>
+              <a:t>One shop, selected activity,</a:t>
+            </a:r>
+            <a:endParaRPr lang="en-US" sz="1900" dirty="0"/>
+          </a:p>
+          <a:p>
+            <a:pPr indent="0" marL="0">
+              <a:buNone/>
+            </a:pPr>
+            <a:r>
+              <a:rPr lang="en-US" sz="1900" dirty="0">
+                <a:solidFill>
+                  <a:srgbClr val="69738B"/>
                 </a:solidFill>
                 <a:latin typeface="DM Sans" pitchFamily="34" charset="0"/>
                 <a:ea typeface="DM Sans" pitchFamily="34" charset="-122"/>
                 <a:cs typeface="DM Sans" pitchFamily="34" charset="-120"/>
               </a:rPr>
-              <a:t>First delivery</a:t>
-            </a:r>
-            <a:endParaRPr lang="en-US" sz="2500" dirty="0"/>
-          </a:p>
-        </p:txBody>
-      </p:sp>
-      <p:sp>
-        <p:nvSpPr>
-          <p:cNvPr id="14" name="Text 11"/>
-          <p:cNvSpPr/>
-          <p:nvPr/>
-        </p:nvSpPr>
-        <p:spPr>
-          <a:xfrm>
-            <a:off x="3699510" y="4114800"/>
-            <a:ext cx="2071878" cy="768096"/>
-          </a:xfrm>
-          <a:prstGeom prst="rect">
-            <a:avLst/>
-          </a:prstGeom>
-          <a:noFill/>
-          <a:ln/>
-        </p:spPr>
-        <p:txBody>
-          <a:bodyPr wrap="square" lIns="0" tIns="0" rIns="0" bIns="0" rtlCol="0" anchor="ctr"/>
-          <a:lstStyle/>
-          <a:p>
-            <a:pPr indent="0" marL="0">
-              <a:buNone/>
-            </a:pPr>
-            <a:r>
-              <a:rPr lang="en-US" sz="1600" dirty="0">
+              <a:t>a small derived table</a:t>
+            </a:r>
+            <a:endParaRPr lang="en-US" sz="1900" dirty="0"/>
+          </a:p>
+          <a:p>
+            <a:pPr indent="0" marL="0">
+              <a:buNone/>
+            </a:pPr>
+            <a:r>
+              <a:rPr lang="en-US" sz="1900" dirty="0">
                 <a:solidFill>
                   <a:srgbClr val="69738B"/>
                 </a:solidFill>
@@ -9915,166 +10532,22 @@
                 <a:ea typeface="DM Sans" pitchFamily="34" charset="-122"/>
                 <a:cs typeface="DM Sans" pitchFamily="34" charset="-120"/>
               </a:rPr>
-              <a:t>Save the cursor with its payment</a:t>
-            </a:r>
-            <a:endParaRPr lang="en-US" sz="1600" dirty="0"/>
-          </a:p>
-        </p:txBody>
-      </p:sp>
-      <p:sp>
-        <p:nvSpPr>
-          <p:cNvPr id="15" name="Shape 12"/>
-          <p:cNvSpPr/>
-          <p:nvPr/>
-        </p:nvSpPr>
-        <p:spPr>
-          <a:xfrm>
-            <a:off x="6219444" y="2606040"/>
-            <a:ext cx="2474214" cy="2468880"/>
-          </a:xfrm>
-          <a:prstGeom prst="rect">
-            <a:avLst/>
-          </a:prstGeom>
-          <a:solidFill>
-            <a:srgbClr val="FFFFFF"/>
-          </a:solidFill>
-          <a:ln w="12700">
-            <a:solidFill>
-              <a:srgbClr val="FFFFFF">
-                <a:alpha val="0"/>
-              </a:srgbClr>
-            </a:solidFill>
-            <a:prstDash val="solid"/>
-          </a:ln>
-        </p:spPr>
-      </p:sp>
-      <p:sp>
-        <p:nvSpPr>
-          <p:cNvPr id="16" name="Text 13"/>
-          <p:cNvSpPr/>
-          <p:nvPr/>
-        </p:nvSpPr>
-        <p:spPr>
-          <a:xfrm>
-            <a:off x="6420612" y="2816352"/>
-            <a:ext cx="2071878" cy="320040"/>
-          </a:xfrm>
-          <a:prstGeom prst="rect">
-            <a:avLst/>
-          </a:prstGeom>
-          <a:noFill/>
-          <a:ln/>
-        </p:spPr>
-        <p:txBody>
-          <a:bodyPr wrap="square" lIns="0" tIns="0" rIns="0" bIns="0" rtlCol="0" anchor="ctr"/>
-          <a:lstStyle/>
-          <a:p>
-            <a:pPr indent="0" marL="0">
-              <a:buNone/>
-            </a:pPr>
-            <a:r>
-              <a:rPr lang="en-US" sz="1300" dirty="0">
-                <a:solidFill>
-                  <a:srgbClr val="2338FF"/>
-                </a:solidFill>
-                <a:latin typeface="JetBrains Mono" pitchFamily="34" charset="0"/>
-                <a:ea typeface="JetBrains Mono" pitchFamily="34" charset="-122"/>
-                <a:cs typeface="JetBrains Mono" pitchFamily="34" charset="-120"/>
-              </a:rPr>
-              <a:t>03</a:t>
-            </a:r>
-            <a:endParaRPr lang="en-US" sz="1300" dirty="0"/>
-          </a:p>
-        </p:txBody>
-      </p:sp>
-      <p:sp>
-        <p:nvSpPr>
-          <p:cNvPr id="17" name="Text 14"/>
-          <p:cNvSpPr/>
-          <p:nvPr/>
-        </p:nvSpPr>
-        <p:spPr>
-          <a:xfrm>
-            <a:off x="6420612" y="3429000"/>
-            <a:ext cx="2071878" cy="594360"/>
-          </a:xfrm>
-          <a:prstGeom prst="rect">
-            <a:avLst/>
-          </a:prstGeom>
-          <a:noFill/>
-          <a:ln/>
-        </p:spPr>
-        <p:txBody>
-          <a:bodyPr wrap="square" lIns="0" tIns="0" rIns="0" bIns="0" rtlCol="0" anchor="ctr"/>
-          <a:lstStyle/>
-          <a:p>
-            <a:pPr indent="0" marL="0">
-              <a:buNone/>
-            </a:pPr>
-            <a:r>
-              <a:rPr lang="en-US" sz="2500" dirty="0">
-                <a:solidFill>
-                  <a:srgbClr val="131725"/>
-                </a:solidFill>
-                <a:latin typeface="DM Sans" pitchFamily="34" charset="0"/>
-                <a:ea typeface="DM Sans" pitchFamily="34" charset="-122"/>
-                <a:cs typeface="DM Sans" pitchFamily="34" charset="-120"/>
-              </a:rPr>
-              <a:t>Reconnect</a:t>
-            </a:r>
-            <a:endParaRPr lang="en-US" sz="2500" dirty="0"/>
-          </a:p>
-        </p:txBody>
-      </p:sp>
-      <p:sp>
-        <p:nvSpPr>
-          <p:cNvPr id="18" name="Text 15"/>
-          <p:cNvSpPr/>
-          <p:nvPr/>
-        </p:nvSpPr>
-        <p:spPr>
-          <a:xfrm>
-            <a:off x="6420612" y="4114800"/>
-            <a:ext cx="2071878" cy="768096"/>
-          </a:xfrm>
-          <a:prstGeom prst="rect">
-            <a:avLst/>
-          </a:prstGeom>
-          <a:noFill/>
-          <a:ln/>
-        </p:spPr>
-        <p:txBody>
-          <a:bodyPr wrap="square" lIns="0" tIns="0" rIns="0" bIns="0" rtlCol="0" anchor="ctr"/>
-          <a:lstStyle/>
-          <a:p>
-            <a:pPr indent="0" marL="0">
-              <a:buNone/>
-            </a:pPr>
-            <a:r>
-              <a:rPr lang="en-US" sz="1600" dirty="0">
-                <a:solidFill>
-                  <a:srgbClr val="69738B"/>
-                </a:solidFill>
-                <a:latin typeface="DM Sans" pitchFamily="34" charset="0"/>
-                <a:ea typeface="DM Sans" pitchFamily="34" charset="-122"/>
-                <a:cs typeface="DM Sans" pitchFamily="34" charset="-120"/>
-              </a:rPr>
-              <a:t>Use after, or the opening checkpoint</a:t>
-            </a:r>
-            <a:endParaRPr lang="en-US" sz="1600" dirty="0"/>
-          </a:p>
-        </p:txBody>
-      </p:sp>
-      <p:sp>
-        <p:nvSpPr>
-          <p:cNvPr id="19" name="Shape 16"/>
-          <p:cNvSpPr/>
-          <p:nvPr/>
-        </p:nvSpPr>
-        <p:spPr>
-          <a:xfrm>
-            <a:off x="8940546" y="2606040"/>
-            <a:ext cx="2474214" cy="2468880"/>
+              <a:t>and straightforward totals.</a:t>
+            </a:r>
+            <a:endParaRPr lang="en-US" sz="1900" dirty="0"/>
+          </a:p>
+        </p:txBody>
+      </p:sp>
+      <p:sp>
+        <p:nvSpPr>
+          <p:cNvPr id="11" name="Shape 8"/>
+          <p:cNvSpPr/>
+          <p:nvPr/>
+        </p:nvSpPr>
+        <p:spPr>
+          <a:xfrm>
+            <a:off x="6210300" y="2286000"/>
+            <a:ext cx="5204460" cy="3337560"/>
           </a:xfrm>
           <a:prstGeom prst="rect">
             <a:avLst/>
@@ -10094,53 +10567,53 @@
       </p:sp>
       <p:sp>
         <p:nvSpPr>
-          <p:cNvPr id="20" name="Text 17"/>
-          <p:cNvSpPr/>
-          <p:nvPr/>
-        </p:nvSpPr>
-        <p:spPr>
-          <a:xfrm>
-            <a:off x="9141714" y="2816352"/>
-            <a:ext cx="2071878" cy="320040"/>
-          </a:xfrm>
-          <a:prstGeom prst="rect">
-            <a:avLst/>
-          </a:prstGeom>
-          <a:noFill/>
-          <a:ln/>
-        </p:spPr>
-        <p:txBody>
-          <a:bodyPr wrap="square" lIns="0" tIns="0" rIns="0" bIns="0" rtlCol="0" anchor="ctr"/>
-          <a:lstStyle/>
-          <a:p>
-            <a:pPr indent="0" marL="0">
-              <a:buNone/>
-            </a:pPr>
-            <a:r>
-              <a:rPr lang="en-US" sz="1300" dirty="0">
-                <a:solidFill>
-                  <a:srgbClr val="C4CEFF"/>
-                </a:solidFill>
-                <a:latin typeface="JetBrains Mono" pitchFamily="34" charset="0"/>
-                <a:ea typeface="JetBrains Mono" pitchFamily="34" charset="-122"/>
-                <a:cs typeface="JetBrains Mono" pitchFamily="34" charset="-120"/>
-              </a:rPr>
-              <a:t>04</a:t>
-            </a:r>
-            <a:endParaRPr lang="en-US" sz="1300" dirty="0"/>
-          </a:p>
-        </p:txBody>
-      </p:sp>
-      <p:sp>
-        <p:nvSpPr>
-          <p:cNvPr id="21" name="Text 18"/>
-          <p:cNvSpPr/>
-          <p:nvPr/>
-        </p:nvSpPr>
-        <p:spPr>
-          <a:xfrm>
-            <a:off x="9141714" y="3429000"/>
-            <a:ext cx="2071878" cy="594360"/>
+          <p:cNvPr id="12" name="Text 9"/>
+          <p:cNvSpPr/>
+          <p:nvPr/>
+        </p:nvSpPr>
+        <p:spPr>
+          <a:xfrm>
+            <a:off x="6438900" y="2496312"/>
+            <a:ext cx="4747260" cy="274320"/>
+          </a:xfrm>
+          <a:prstGeom prst="rect">
+            <a:avLst/>
+          </a:prstGeom>
+          <a:noFill/>
+          <a:ln/>
+        </p:spPr>
+        <p:txBody>
+          <a:bodyPr wrap="square" lIns="0" tIns="0" rIns="0" bIns="0" rtlCol="0" anchor="ctr"/>
+          <a:lstStyle/>
+          <a:p>
+            <a:pPr indent="0" marL="0">
+              <a:buNone/>
+            </a:pPr>
+            <a:r>
+              <a:rPr lang="en-US" sz="1100" dirty="0">
+                <a:solidFill>
+                  <a:srgbClr val="BFC9FF"/>
+                </a:solidFill>
+                <a:latin typeface="JetBrains Mono" pitchFamily="34" charset="0"/>
+                <a:ea typeface="JetBrains Mono" pitchFamily="34" charset="-122"/>
+                <a:cs typeface="JetBrains Mono" pitchFamily="34" charset="-120"/>
+              </a:rPr>
+              <a:t>RUST INDEXING FRAMEWORK</a:t>
+            </a:r>
+            <a:endParaRPr lang="en-US" sz="1100" dirty="0"/>
+          </a:p>
+        </p:txBody>
+      </p:sp>
+      <p:sp>
+        <p:nvSpPr>
+          <p:cNvPr id="13" name="Text 10"/>
+          <p:cNvSpPr/>
+          <p:nvPr/>
+        </p:nvSpPr>
+        <p:spPr>
+          <a:xfrm>
+            <a:off x="6438900" y="2889504"/>
+            <a:ext cx="4747260" cy="960120"/>
           </a:xfrm>
           <a:prstGeom prst="rect">
             <a:avLst/>
@@ -10164,7 +10637,7 @@
                 <a:ea typeface="DM Sans" pitchFamily="34" charset="-122"/>
                 <a:cs typeface="DM Sans" pitchFamily="34" charset="-120"/>
               </a:rPr>
-              <a:t>Continue</a:t>
+              <a:t>A checkpoint pipeline</a:t>
             </a:r>
             <a:endParaRPr lang="en-US" sz="2500" dirty="0"/>
           </a:p>
@@ -10172,565 +10645,74 @@
       </p:sp>
       <p:sp>
         <p:nvSpPr>
-          <p:cNvPr id="22" name="Text 19"/>
-          <p:cNvSpPr/>
-          <p:nvPr/>
-        </p:nvSpPr>
-        <p:spPr>
-          <a:xfrm>
-            <a:off x="9141714" y="4114800"/>
-            <a:ext cx="2071878" cy="768096"/>
-          </a:xfrm>
-          <a:prstGeom prst="rect">
-            <a:avLst/>
-          </a:prstGeom>
-          <a:noFill/>
-          <a:ln/>
-        </p:spPr>
-        <p:txBody>
-          <a:bodyPr wrap="square" lIns="0" tIns="0" rIns="0" bIns="0" rtlCol="0" anchor="ctr"/>
-          <a:lstStyle/>
-          <a:p>
-            <a:pPr indent="0" marL="0">
-              <a:buNone/>
-            </a:pPr>
-            <a:r>
-              <a:rPr lang="en-US" sz="1600" dirty="0">
-                <a:solidFill>
-                  <a:srgbClr val="D4DCFF"/>
+          <p:cNvPr id="14" name="Text 11"/>
+          <p:cNvSpPr/>
+          <p:nvPr/>
+        </p:nvSpPr>
+        <p:spPr>
+          <a:xfrm>
+            <a:off x="6438900" y="4005072"/>
+            <a:ext cx="4747260" cy="1371600"/>
+          </a:xfrm>
+          <a:prstGeom prst="rect">
+            <a:avLst/>
+          </a:prstGeom>
+          <a:noFill/>
+          <a:ln/>
+        </p:spPr>
+        <p:txBody>
+          <a:bodyPr wrap="square" lIns="0" tIns="0" rIns="0" bIns="0" rtlCol="0" anchor="ctr"/>
+          <a:lstStyle/>
+          <a:p>
+            <a:pPr indent="0" marL="0">
+              <a:buNone/>
+            </a:pPr>
+            <a:r>
+              <a:rPr lang="en-US" sz="1900" dirty="0">
+                <a:solidFill>
+                  <a:srgbClr val="DFE4FF"/>
                 </a:solidFill>
                 <a:latin typeface="DM Sans" pitchFamily="34" charset="0"/>
                 <a:ea typeface="DM Sans" pitchFamily="34" charset="-122"/>
                 <a:cs typeface="DM Sans" pitchFamily="34" charset="-120"/>
               </a:rPr>
-              <a:t>Replay first. Then follow live.</a:t>
-            </a:r>
-            <a:endParaRPr lang="en-US" sz="1600" dirty="0"/>
-          </a:p>
-        </p:txBody>
-      </p:sp>
-      <p:sp>
-        <p:nvSpPr>
-          <p:cNvPr id="23" name="Text 20"/>
-          <p:cNvSpPr/>
-          <p:nvPr/>
-        </p:nvSpPr>
-        <p:spPr>
-          <a:xfrm>
-            <a:off x="777240" y="5468112"/>
-            <a:ext cx="10515600" cy="502920"/>
-          </a:xfrm>
-          <a:prstGeom prst="rect">
-            <a:avLst/>
-          </a:prstGeom>
-          <a:noFill/>
-          <a:ln/>
-        </p:spPr>
-        <p:txBody>
-          <a:bodyPr wrap="square" lIns="0" tIns="0" rIns="0" bIns="0" rtlCol="0" anchor="ctr"/>
-          <a:lstStyle/>
-          <a:p>
-            <a:pPr indent="0" marL="0">
-              <a:buNone/>
-            </a:pPr>
-            <a:endParaRPr lang="en-US" sz="2000" dirty="0"/>
-          </a:p>
-        </p:txBody>
-      </p:sp>
-    </p:spTree>
-  </p:cSld>
-  <p:clrMapOvr>
-    <a:masterClrMapping/>
-  </p:clrMapOvr>
-</p:sld>
-</file>
-
-<file path=ppt/slides/slide9.xml><?xml version="1.0" encoding="utf-8"?>
-<p:sld xmlns:a="http://schemas.openxmlformats.org/drawingml/2006/main" xmlns:r="http://schemas.openxmlformats.org/officeDocument/2006/relationships" xmlns:p="http://schemas.openxmlformats.org/presentationml/2006/main">
-  <p:cSld name="Slide 9">
-    <p:bg>
-      <p:bgPr>
-        <a:solidFill>
-          <a:srgbClr val="07080F"/>
-        </a:solidFill>
-      </p:bgPr>
-    </p:bg>
-    <p:spTree>
-      <p:nvGrpSpPr>
-        <p:cNvPr id="1" name=""/>
-        <p:cNvGrpSpPr/>
-        <p:nvPr/>
-      </p:nvGrpSpPr>
-      <p:grpSpPr>
-        <a:xfrm>
-          <a:off x="0" y="0"/>
-          <a:ext cx="0" cy="0"/>
-          <a:chOff x="0" y="0"/>
-          <a:chExt cx="0" cy="0"/>
-        </a:xfrm>
-      </p:grpSpPr>
-      <p:sp>
-        <p:nvSpPr>
-          <p:cNvPr id="2" name="Text 0"/>
-          <p:cNvSpPr/>
-          <p:nvPr/>
-        </p:nvSpPr>
-        <p:spPr>
-          <a:xfrm>
-            <a:off x="777240" y="502920"/>
-            <a:ext cx="10637520" cy="274320"/>
-          </a:xfrm>
-          <a:prstGeom prst="rect">
-            <a:avLst/>
-          </a:prstGeom>
-          <a:noFill/>
-          <a:ln/>
-        </p:spPr>
-        <p:txBody>
-          <a:bodyPr wrap="square" lIns="0" tIns="0" rIns="0" bIns="0" rtlCol="0" anchor="ctr"/>
-          <a:lstStyle/>
-          <a:p>
-            <a:pPr indent="0" marL="0">
-              <a:buNone/>
-            </a:pPr>
-            <a:r>
-              <a:rPr lang="en-US" sz="1000" spc="150" kern="0" dirty="0">
-                <a:solidFill>
-                  <a:srgbClr val="ACB8DB"/>
-                </a:solidFill>
-                <a:latin typeface="JetBrains Mono" pitchFamily="34" charset="0"/>
-                <a:ea typeface="JetBrains Mono" pitchFamily="34" charset="-122"/>
-                <a:cs typeface="JetBrains Mono" pitchFamily="34" charset="-120"/>
-              </a:rPr>
-              <a:t>[ INDEXER/INDEXER.TS / EXCERPT ]</a:t>
-            </a:r>
-            <a:endParaRPr lang="en-US" sz="1000" dirty="0"/>
-          </a:p>
-        </p:txBody>
-      </p:sp>
-      <p:sp>
-        <p:nvSpPr>
-          <p:cNvPr id="3" name="Text 1"/>
-          <p:cNvSpPr/>
-          <p:nvPr/>
-        </p:nvSpPr>
-        <p:spPr>
-          <a:xfrm>
-            <a:off x="777240" y="932688"/>
-            <a:ext cx="10637520" cy="1143000"/>
-          </a:xfrm>
-          <a:prstGeom prst="rect">
-            <a:avLst/>
-          </a:prstGeom>
-          <a:noFill/>
-          <a:ln/>
-        </p:spPr>
-        <p:txBody>
-          <a:bodyPr wrap="square" lIns="0" tIns="0" rIns="0" bIns="0" rtlCol="0" anchor="ctr"/>
-          <a:lstStyle/>
-          <a:p>
-            <a:pPr indent="0" marL="0">
-              <a:buNone/>
-            </a:pPr>
-            <a:r>
-              <a:rPr lang="en-US" sz="3700" dirty="0">
-                <a:solidFill>
-                  <a:srgbClr val="FFFFFF"/>
+              <a:t>Large backfills, parallel work,</a:t>
+            </a:r>
+            <a:endParaRPr lang="en-US" sz="1900" dirty="0"/>
+          </a:p>
+          <a:p>
+            <a:pPr indent="0" marL="0">
+              <a:buNone/>
+            </a:pPr>
+            <a:r>
+              <a:rPr lang="en-US" sz="1900" dirty="0">
+                <a:solidFill>
+                  <a:srgbClr val="DFE4FF"/>
                 </a:solidFill>
                 <a:latin typeface="DM Sans" pitchFamily="34" charset="0"/>
                 <a:ea typeface="DM Sans" pitchFamily="34" charset="-122"/>
                 <a:cs typeface="DM Sans" pitchFamily="34" charset="-120"/>
               </a:rPr>
-              <a:t>The cursor belongs in the same commit.</a:t>
-            </a:r>
-            <a:endParaRPr lang="en-US" sz="3700" dirty="0"/>
-          </a:p>
-        </p:txBody>
-      </p:sp>
-      <p:sp>
-        <p:nvSpPr>
-          <p:cNvPr id="4" name="Text 2"/>
-          <p:cNvSpPr/>
-          <p:nvPr/>
-        </p:nvSpPr>
-        <p:spPr>
-          <a:xfrm>
-            <a:off x="777240" y="6437376"/>
-            <a:ext cx="7315200" cy="182880"/>
-          </a:xfrm>
-          <a:prstGeom prst="rect">
-            <a:avLst/>
-          </a:prstGeom>
-          <a:noFill/>
-          <a:ln/>
-        </p:spPr>
-        <p:txBody>
-          <a:bodyPr wrap="square" lIns="0" tIns="0" rIns="0" bIns="0" rtlCol="0" anchor="ctr"/>
-          <a:lstStyle/>
-          <a:p>
-            <a:pPr indent="0" marL="0">
-              <a:buNone/>
-            </a:pPr>
-            <a:r>
-              <a:rPr lang="en-US" sz="800" spc="100" kern="0" dirty="0">
-                <a:solidFill>
-                  <a:srgbClr val="ACB8DB"/>
-                </a:solidFill>
-                <a:latin typeface="JetBrains Mono" pitchFamily="34" charset="0"/>
-                <a:ea typeface="JetBrains Mono" pitchFamily="34" charset="-122"/>
-                <a:cs typeface="JetBrains Mono" pitchFamily="34" charset="-120"/>
-              </a:rPr>
-              <a:t>SUIHUB LAGOS / ACCOUNT LAYER WEEK</a:t>
-            </a:r>
-            <a:endParaRPr lang="en-US" sz="800" dirty="0"/>
-          </a:p>
-        </p:txBody>
-      </p:sp>
-      <p:sp>
-        <p:nvSpPr>
-          <p:cNvPr id="5" name="Text 3"/>
-          <p:cNvSpPr/>
-          <p:nvPr/>
-        </p:nvSpPr>
-        <p:spPr>
-          <a:xfrm>
-            <a:off x="10698480" y="6419088"/>
-            <a:ext cx="685800" cy="210312"/>
-          </a:xfrm>
-          <a:prstGeom prst="rect">
-            <a:avLst/>
-          </a:prstGeom>
-          <a:noFill/>
-          <a:ln/>
-        </p:spPr>
-        <p:txBody>
-          <a:bodyPr wrap="square" lIns="0" tIns="0" rIns="0" bIns="0" rtlCol="0" anchor="ctr"/>
-          <a:lstStyle/>
-          <a:p>
-            <a:pPr algn="r" indent="0" marL="0">
-              <a:buNone/>
-            </a:pPr>
-            <a:r>
-              <a:rPr lang="en-US" sz="1000" dirty="0">
-                <a:solidFill>
-                  <a:srgbClr val="ACB8DB"/>
-                </a:solidFill>
-                <a:latin typeface="JetBrains Mono" pitchFamily="34" charset="0"/>
-                <a:ea typeface="JetBrains Mono" pitchFamily="34" charset="-122"/>
-                <a:cs typeface="JetBrains Mono" pitchFamily="34" charset="-120"/>
-              </a:rPr>
-              <a:t>09</a:t>
-            </a:r>
-            <a:endParaRPr lang="en-US" sz="1000" dirty="0"/>
-          </a:p>
-        </p:txBody>
-      </p:sp>
-      <p:sp>
-        <p:nvSpPr>
-          <p:cNvPr id="7" name="Shape 4"/>
-          <p:cNvSpPr/>
-          <p:nvPr/>
-        </p:nvSpPr>
-        <p:spPr>
-          <a:xfrm>
-            <a:off x="777240" y="2267712"/>
-            <a:ext cx="10637520" cy="3794760"/>
-          </a:xfrm>
-          <a:prstGeom prst="rect">
-            <a:avLst/>
-          </a:prstGeom>
-          <a:solidFill>
-            <a:srgbClr val="111529"/>
-          </a:solidFill>
-          <a:ln w="12700">
-            <a:solidFill>
-              <a:srgbClr val="111529">
-                <a:alpha val="0"/>
-              </a:srgbClr>
-            </a:solidFill>
-            <a:prstDash val="solid"/>
-          </a:ln>
-        </p:spPr>
-      </p:sp>
-      <p:sp>
-        <p:nvSpPr>
-          <p:cNvPr id="8" name="Text 5"/>
-          <p:cNvSpPr/>
-          <p:nvPr/>
-        </p:nvSpPr>
-        <p:spPr>
-          <a:xfrm>
-            <a:off x="1033272" y="2432304"/>
-            <a:ext cx="10125456" cy="3520440"/>
-          </a:xfrm>
-          <a:prstGeom prst="rect">
-            <a:avLst/>
-          </a:prstGeom>
-          <a:noFill/>
-          <a:ln/>
-        </p:spPr>
-        <p:txBody>
-          <a:bodyPr wrap="square" lIns="0" tIns="0" rIns="0" bIns="0" rtlCol="0" anchor="t"/>
-          <a:lstStyle/>
-          <a:p>
-            <a:pPr indent="0" marL="0">
-              <a:buNone/>
-            </a:pPr>
-            <a:r>
-              <a:rPr lang="en-US" sz="1567" dirty="0">
-                <a:solidFill>
-                  <a:srgbClr val="D9E1FF"/>
-                </a:solidFill>
-                <a:latin typeface="JetBrains Mono" pitchFamily="34" charset="0"/>
-                <a:ea typeface="JetBrains Mono" pitchFamily="34" charset="-122"/>
-                <a:cs typeface="JetBrains Mono" pitchFamily="34" charset="-120"/>
-              </a:rPr>
-              <a:t>db.exec('BEGIN');</a:t>
-            </a:r>
-            <a:endParaRPr lang="en-US" sz="1567" dirty="0"/>
-          </a:p>
-          <a:p>
-            <a:pPr indent="0" marL="0">
-              <a:buNone/>
-            </a:pPr>
-            <a:r>
-              <a:rPr lang="en-US" sz="1567" dirty="0">
-                <a:solidFill>
-                  <a:srgbClr val="D9E1FF"/>
-                </a:solidFill>
-                <a:latin typeface="JetBrains Mono" pitchFamily="34" charset="0"/>
-                <a:ea typeface="JetBrains Mono" pitchFamily="34" charset="-122"/>
-                <a:cs typeface="JetBrains Mono" pitchFamily="34" charset="-120"/>
-              </a:rPr>
-              <a:t>try {</a:t>
-            </a:r>
-            <a:endParaRPr lang="en-US" sz="1567" dirty="0"/>
-          </a:p>
-          <a:p>
-            <a:pPr indent="0" marL="0">
-              <a:buNone/>
-            </a:pPr>
-            <a:r>
-              <a:rPr lang="en-US" sz="1567" dirty="0">
-                <a:solidFill>
-                  <a:srgbClr val="D9E1FF"/>
-                </a:solidFill>
-                <a:latin typeface="JetBrains Mono" pitchFamily="34" charset="0"/>
-                <a:ea typeface="JetBrains Mono" pitchFamily="34" charset="-122"/>
-                <a:cs typeface="JetBrains Mono" pitchFamily="34" charset="-120"/>
-              </a:rPr>
-              <a:t>  for (const p of payments) {</a:t>
-            </a:r>
-            <a:endParaRPr lang="en-US" sz="1567" dirty="0"/>
-          </a:p>
-          <a:p>
-            <a:pPr indent="0" marL="0">
-              <a:buNone/>
-            </a:pPr>
-            <a:r>
-              <a:rPr lang="en-US" sz="1567" dirty="0">
-                <a:solidFill>
-                  <a:srgbClr val="D9E1FF"/>
-                </a:solidFill>
-                <a:latin typeface="JetBrains Mono" pitchFamily="34" charset="0"/>
-                <a:ea typeface="JetBrains Mono" pitchFamily="34" charset="-122"/>
-                <a:cs typeface="JetBrains Mono" pitchFamily="34" charset="-120"/>
-              </a:rPr>
-              <a:t>    insert.run(p.digest, p.coinType, p.amount,</a:t>
-            </a:r>
-            <a:endParaRPr lang="en-US" sz="1567" dirty="0"/>
-          </a:p>
-          <a:p>
-            <a:pPr indent="0" marL="0">
-              <a:buNone/>
-            </a:pPr>
-            <a:r>
-              <a:rPr lang="en-US" sz="1567" dirty="0">
-                <a:solidFill>
-                  <a:srgbClr val="D9E1FF"/>
-                </a:solidFill>
-                <a:latin typeface="JetBrains Mono" pitchFamily="34" charset="0"/>
-                <a:ea typeface="JetBrains Mono" pitchFamily="34" charset="-122"/>
-                <a:cs typeface="JetBrains Mono" pitchFamily="34" charset="-120"/>
-              </a:rPr>
-              <a:t>      p.sender, p.checkpoint, p.timestamp, p.cursor);</a:t>
-            </a:r>
-            <a:endParaRPr lang="en-US" sz="1567" dirty="0"/>
-          </a:p>
-          <a:p>
-            <a:pPr indent="0" marL="0">
-              <a:buNone/>
-            </a:pPr>
-            <a:r>
-              <a:rPr lang="en-US" sz="1567" dirty="0">
-                <a:solidFill>
-                  <a:srgbClr val="D9E1FF"/>
-                </a:solidFill>
-                <a:latin typeface="JetBrains Mono" pitchFamily="34" charset="0"/>
-                <a:ea typeface="JetBrains Mono" pitchFamily="34" charset="-122"/>
-                <a:cs typeface="JetBrains Mono" pitchFamily="34" charset="-120"/>
-              </a:rPr>
-              <a:t>  }</a:t>
-            </a:r>
-            <a:endParaRPr lang="en-US" sz="1567" dirty="0"/>
-          </a:p>
-          <a:p>
-            <a:pPr indent="0" marL="0">
-              <a:buNone/>
-            </a:pPr>
-            <a:r>
-              <a:rPr lang="en-US" sz="1567" dirty="0">
-                <a:solidFill>
-                  <a:srgbClr val="D9E1FF"/>
-                </a:solidFill>
-                <a:latin typeface="JetBrains Mono" pitchFamily="34" charset="0"/>
-                <a:ea typeface="JetBrains Mono" pitchFamily="34" charset="-122"/>
-                <a:cs typeface="JetBrains Mono" pitchFamily="34" charset="-120"/>
-              </a:rPr>
-              <a:t>  saveCursor.run(shop, d.transactions.cursor,</a:t>
-            </a:r>
-            <a:endParaRPr lang="en-US" sz="1567" dirty="0"/>
-          </a:p>
-          <a:p>
-            <a:pPr indent="0" marL="0">
-              <a:buNone/>
-            </a:pPr>
-            <a:r>
-              <a:rPr lang="en-US" sz="1567" dirty="0">
-                <a:solidFill>
-                  <a:srgbClr val="D9E1FF"/>
-                </a:solidFill>
-                <a:latin typeface="JetBrains Mono" pitchFamily="34" charset="0"/>
-                <a:ea typeface="JetBrains Mono" pitchFamily="34" charset="-122"/>
-                <a:cs typeface="JetBrains Mono" pitchFamily="34" charset="-120"/>
-              </a:rPr>
-              <a:t>    new Date().toISOString());</a:t>
-            </a:r>
-            <a:endParaRPr lang="en-US" sz="1567" dirty="0"/>
-          </a:p>
-          <a:p>
-            <a:pPr indent="0" marL="0">
-              <a:buNone/>
-            </a:pPr>
-            <a:r>
-              <a:rPr lang="en-US" sz="1567" dirty="0">
-                <a:solidFill>
-                  <a:srgbClr val="D9E1FF"/>
-                </a:solidFill>
-                <a:latin typeface="JetBrains Mono" pitchFamily="34" charset="0"/>
-                <a:ea typeface="JetBrains Mono" pitchFamily="34" charset="-122"/>
-                <a:cs typeface="JetBrains Mono" pitchFamily="34" charset="-120"/>
-              </a:rPr>
-              <a:t>  db.exec('COMMIT');</a:t>
-            </a:r>
-            <a:endParaRPr lang="en-US" sz="1567" dirty="0"/>
-          </a:p>
-          <a:p>
-            <a:pPr indent="0" marL="0">
-              <a:buNone/>
-            </a:pPr>
-            <a:r>
-              <a:rPr lang="en-US" sz="1567" dirty="0">
-                <a:solidFill>
-                  <a:srgbClr val="D9E1FF"/>
-                </a:solidFill>
-                <a:latin typeface="JetBrains Mono" pitchFamily="34" charset="0"/>
-                <a:ea typeface="JetBrains Mono" pitchFamily="34" charset="-122"/>
-                <a:cs typeface="JetBrains Mono" pitchFamily="34" charset="-120"/>
-              </a:rPr>
-              <a:t>} catch (e) {</a:t>
-            </a:r>
-            <a:endParaRPr lang="en-US" sz="1567" dirty="0"/>
-          </a:p>
-          <a:p>
-            <a:pPr indent="0" marL="0">
-              <a:buNone/>
-            </a:pPr>
-            <a:r>
-              <a:rPr lang="en-US" sz="1567" dirty="0">
-                <a:solidFill>
-                  <a:srgbClr val="D9E1FF"/>
-                </a:solidFill>
-                <a:latin typeface="JetBrains Mono" pitchFamily="34" charset="0"/>
-                <a:ea typeface="JetBrains Mono" pitchFamily="34" charset="-122"/>
-                <a:cs typeface="JetBrains Mono" pitchFamily="34" charset="-120"/>
-              </a:rPr>
-              <a:t>  db.exec('ROLLBACK');</a:t>
-            </a:r>
-            <a:endParaRPr lang="en-US" sz="1567" dirty="0"/>
-          </a:p>
-          <a:p>
-            <a:pPr indent="0" marL="0">
-              <a:buNone/>
-            </a:pPr>
-            <a:r>
-              <a:rPr lang="en-US" sz="1567" dirty="0">
-                <a:solidFill>
-                  <a:srgbClr val="D9E1FF"/>
-                </a:solidFill>
-                <a:latin typeface="JetBrains Mono" pitchFamily="34" charset="0"/>
-                <a:ea typeface="JetBrains Mono" pitchFamily="34" charset="-122"/>
-                <a:cs typeface="JetBrains Mono" pitchFamily="34" charset="-120"/>
-              </a:rPr>
-              <a:t>  throw e;</a:t>
-            </a:r>
-            <a:endParaRPr lang="en-US" sz="1567" dirty="0"/>
-          </a:p>
-          <a:p>
-            <a:pPr indent="0" marL="0">
-              <a:buNone/>
-            </a:pPr>
-            <a:r>
-              <a:rPr lang="en-US" sz="1567" dirty="0">
-                <a:solidFill>
-                  <a:srgbClr val="D9E1FF"/>
-                </a:solidFill>
-                <a:latin typeface="JetBrains Mono" pitchFamily="34" charset="0"/>
-                <a:ea typeface="JetBrains Mono" pitchFamily="34" charset="-122"/>
-                <a:cs typeface="JetBrains Mono" pitchFamily="34" charset="-120"/>
-              </a:rPr>
-              <a:t>}</a:t>
-            </a:r>
-            <a:endParaRPr lang="en-US" sz="1567" dirty="0"/>
-          </a:p>
-        </p:txBody>
-      </p:sp>
-      <p:sp>
-        <p:nvSpPr>
-          <p:cNvPr id="9" name="Text 6"/>
-          <p:cNvSpPr/>
-          <p:nvPr/>
-        </p:nvSpPr>
-        <p:spPr>
-          <a:xfrm>
-            <a:off x="777240" y="6053328"/>
-            <a:ext cx="10515600" cy="228600"/>
-          </a:xfrm>
-          <a:prstGeom prst="rect">
-            <a:avLst/>
-          </a:prstGeom>
-          <a:noFill/>
-          <a:ln/>
-        </p:spPr>
-        <p:txBody>
-          <a:bodyPr wrap="square" lIns="0" tIns="0" rIns="0" bIns="0" rtlCol="0" anchor="ctr"/>
-          <a:lstStyle/>
-          <a:p>
-            <a:pPr indent="0" marL="0">
-              <a:buNone/>
-            </a:pPr>
-            <a:r>
-              <a:rPr lang="en-US" sz="1100" dirty="0">
-                <a:solidFill>
-                  <a:srgbClr val="ACB8DB"/>
+              <a:t>custom schemas, complex joins</a:t>
+            </a:r>
+            <a:endParaRPr lang="en-US" sz="1900" dirty="0"/>
+          </a:p>
+          <a:p>
+            <a:pPr indent="0" marL="0">
+              <a:buNone/>
+            </a:pPr>
+            <a:r>
+              <a:rPr lang="en-US" sz="1900" dirty="0">
+                <a:solidFill>
+                  <a:srgbClr val="DFE4FF"/>
                 </a:solidFill>
                 <a:latin typeface="DM Sans" pitchFamily="34" charset="0"/>
                 <a:ea typeface="DM Sans" pitchFamily="34" charset="-122"/>
                 <a:cs typeface="DM Sans" pitchFamily="34" charset="-120"/>
               </a:rPr>
-              <a:t>pnpm indexer → pnpm totals   /   PRIMARY KEY (digest, coin_type)   /   One commit</a:t>
-            </a:r>
-            <a:endParaRPr lang="en-US" sz="1100" dirty="0"/>
+              <a:t>and controlled reprocessing.</a:t>
+            </a:r>
+            <a:endParaRPr lang="en-US" sz="1900" dirty="0"/>
           </a:p>
         </p:txBody>
       </p:sp>

--- a/teaching/Day3_Till_Live_Data_Seedless_Style.pptx
+++ b/teaching/Day3_Till_Live_Data_Seedless_Style.pptx
@@ -610,7 +610,7 @@
             <a:r>
               <a:rPr lang="en-US" dirty="0"/>
               <a:t>EXPLAIN
-The old client calls getBalance over JSON-RPC. SuiGrpcClient exposes a typed balance wrapper. Adapt the response; do not reuse the old object shape blindly. Inspect totalBalance, coinBalance and addressBalance. The GraphQL alternative selects Address.balance and joins receipt and event data.
+The old client calls getBalance over JSON-RPC. SuiGrpcClient exposes a typed balance wrapper. Adapt the response; do not reuse the old object shape blindly. Inspect totalBalance, coinBalance and addressBalance. The GraphQL alternative selects Address.balance and joins receipt and event data. NEW SINCE BASECAMP: the frontend side matters as much as the node side. The SDK docs say the legacy @mysten/dapp-kit only supports the deprecated JSON-RPC API and will not receive further updates; migrate to @mysten/dapp-kit-react (with @mysten/dapp-kit-core underneath) and pass a SuiGrpcClient to createDAppKit. With v1.82 removing JSON-RPC from full nodes, an old dApp Kit app will stop reading once its provider upgrades. Also check result shape, total balance, errors and pagination, and obtain fresh API cursors.
 SHOW / DO
 Open migration/legacy-jsonrpc.ts and migration/migrated-grpc.ts. Panels use their imports, construction and calls, reformatted. Run pnpm migrate:legacy, pnpm migrate:grpc and pnpm migrate:graphql. The old public endpoint previously returned -32601 inside HTTP 200; provider behaviour varies. Other examples replace getTransactionBlock with getTransaction and queryEvents with listEvents. Normalize event type addresses in the gRPC example.
 ASK THE ROOM
@@ -709,7 +709,7 @@
             <a:r>
               <a:rPr lang="en-US" dirty="0"/>
               <a:t>EXPLAIN
-The final workshop is on students’ own projects. Give students without a project Till’s migration folder. The deliverable is a working change, not a verbal claim of migration.
+The final workshop is on students’ own projects. Give students without a project Till’s migration folder. The deliverable is a working change, not a verbal claim of migration. NEW SINCE BASECAMP: at Basecamp, Sui showed Sui Evals, an open benchmark of AI model knowledge of Sui; loading the Sui skills files reportedly raised median scores by about 35 points. MystenLabs/skills and the Sui docs MCP at sui.mcp.kapa.ai are public. Encourage students to point their coding agent at them for the migration, then verify the result themselves.
 SHOW / DO
 Allow 25 to 35 minutes. Find one JSON-RPC read or polling loop. State the screen’s need, choose the replacement and edit the code. Verify a known balance or transaction. For a feed, demonstrate disconnect and replay. For history, test an old digest and retention path. Name the production provider and quotas. Ask two students to show the diff and explain their choice.
 ASK THE ROOM
@@ -1105,7 +1105,7 @@
             <a:r>
               <a:rPr lang="en-US" dirty="0"/>
               <a:t>EXPLAIN
-Foundation mainnet JSON-RPC was disabled in the week of 27 July 2026; source removal was scheduled for mid-October. Availability at other providers can differ. The 21 September announcement adds GraphQL subscriptions. Application responsibilities remain, but can now use different interfaces.
+Foundation mainnet JSON-RPC was disabled in the week of 27 July 2026; source removal was scheduled for mid-October. Availability at other providers can differ. The 21 September announcement adds GraphQL subscriptions. Application responsibilities remain, but can now use different interfaces. NEW SINCE BASECAMP: testnet-v1.82.1 (13 October, protocol 139) removes the JSON-RPC service from the full node and deletes its old database on startup (PR 27907), the code-removal step the migration guide scheduled for mid-October. mainnet-v1.81.1 (7 October, protocol 138) added GraphQL Query.multiGetDynamicFields, derivedObject and multiGetDerivedObjects, and a nullable Balance.coinMetadata field. We have not seen v1.82 on mainnet yet; say testnet first.
 SHOW / DO
 Classify a screen: read the balance, observe a new payment, retrieve an old receipt. The same app can use more than one interface.
 ASK THE ROOM
@@ -1204,7 +1204,7 @@
             <a:r>
               <a:rPr lang="en-US" dirty="0"/>
               <a:t>EXPLAIN
-This is the full repository subscription, with whitespace adjusted. Cursor is delivery progress. Digest identifies the transaction. Status rejects failures. Owner, coin type and signed amount let the client calculate the shop credit. Checkpoint and timestamp place the receipt in history.
+This is the full repository subscription, with whitespace adjusted. Cursor is delivery progress. Digest identifies the transaction. Status rejects failures. Owner, coin type and signed amount let the client calculate the shop credit. Checkpoint and timestamp place the receipt in history. NEW SINCE BASECAMP: mainnet-v1.81.1 added a nullable Balance.coinMetadata field to GraphQL, so a balance query can return the coin’s metadata (decimals, symbol) with the amount. Use it to format USDC (6 decimals) instead of hard-coding. The Till subscription still reads balanceChanges, whose nodes carry coinType, so look metadata up once per coin type.
 SHOW / DO
 Trace paymentsFrom in src/lib/till.ts: SUCCESS, normalize owner, sum signed changes per normalized coin type with BigInt, retain only positive net credits. The writer groups receipts by digest and coin. Illustrative USDC case: 1000000 base units with six decimals means 1 USDC, after confirming metadata. An accepted-USDC-only rule is a further application requirement; the generic parser currently accepts all coins.
 ASK THE ROOM
@@ -1303,7 +1303,7 @@
             <a:r>
               <a:rPr lang="en-US" dirty="0"/>
               <a:t>EXPLAIN
-The request sends the GraphQL document and variables as JSON. The response stays open and sends SSE frames over POST /graphql/subscriptions. Native EventSource cannot send this POST body; websocket clients use a different protocol. Fetch exposes a readable stream.
+The request sends the GraphQL document and variables as JSON. The response stays open and sends SSE frames over POST /graphql/subscriptions. Native EventSource cannot send this POST body; websocket clients use a different protocol. Fetch exposes a readable stream. NEW SINCE BASECAMP: the official Data Access page still says GraphQL does not support subscriptions and points to gRPC for streaming. That is out of date: we receive GraphQL subscriptions over SSE on testnet and mainnet. Agents, the Basecamp theme, are exactly the clients that should consume these streams instead of polling. For backends, SuiGrpcClient also offers checkpoint subscriptions.
 SHOW / DO
 Open src/lib/sse.ts. The shown fetch is a real excerpt, reformatted. Continue into the parser: chunks can split an SSE frame, blank lines end frames, comments can be keepalives, and errors can arrive inside HTTP 200. onNext is awaited before advancing. Seven existing tests include framing and error cases.
 ASK THE ROOM
@@ -1402,7 +1402,7 @@
             <a:r>
               <a:rPr lang="en-US" dirty="0"/>
               <a:t>EXPLAIN
-A, B, C and D are illustrative teaching labels, not real digests or cursor encodings. Save A and cursor cA. Disconnect while B and C finalize. Reconnect with after cA. The service delivers B and C, then D live. With no cursor yet, a saved opening checkpoint supplies the first boundary through filter.afterCheckpoint, which is exclusive.
+A, B, C and D are illustrative teaching labels, not real digests or cursor encodings. Save A and cursor cA. Disconnect while B and C finalize. Reconnect with after cA. The service delivers B and C, then D live. With no cursor yet, a saved opening checkpoint supplies the first boundary through filter.afterCheckpoint, which is exclusive. NEW SINCE BASECAMP: testnet-v1.82.1 fixed subscription resumes: with after or afterCheckpoint the service no longer re-sends checkpoints at or below the resume point when a replica lags (PR 28162). Keep deduplicating by digest anyway: providers and mainnet may run older versions. The same release adds an optional x-sui-consistent-read-checkpoint header on kv-rpc so a gRPC read can wait for a checkpoint, useful for read-your-own-write after a payment (PR 27981).
 SHOW / DO
 Chain progress continues while the listener is offline. Use Pause feed for the controlled demo. Save the opening checkpoint before the first stream and first payment. Never decode or invent cursors. Scope state to network, shop and query. Within a checkpoint, transactions follow their position; events follow transaction position then event position.
 ASK THE ROOM
@@ -1501,7 +1501,7 @@
             <a:r>
               <a:rPr lang="en-US" dirty="0"/>
               <a:t>EXPLAIN
-Use the verified test-SUI fallback explicitly. The event target remains USDC. A funded USDC run, physical wallet approval and audible chime are not yet verified. This runbook does not claim those checks passed. Every student has a separate payer and shop.
+Use the verified test-SUI fallback explicitly. The event target remains USDC. A funded USDC run, physical wallet approval and audible chime are not yet verified. This runbook does not claim those checks passed. Every student has a separate payer and shop. NEW SINCE BASECAMP: from v1.82 the CLI command sui client faucet supports testnet as well as devnet, using the faucet proof-of-work API (PR 28213). Students with the CLI can fund their payer that way if the in-app faucet is slow. Also new in v1.81: sui client ptb accepts withdrawal(amount) inputs for address balances (PR 27351).
 SHOW / DO
 1. Clone the repo; use Node 24, pnpm install and pnpm dev, or open the live app. Copy your shop. Request test SUI. Enable sound with a click.
 2. Open till and send 0.01 SUI. Match digest, receipt and red/green balance movement; payer pays gas. Check the chime audibly.
@@ -3140,8 +3140,8 @@
         </p:nvSpPr>
         <p:spPr>
           <a:xfrm>
-            <a:off x="685800" y="5779008"/>
-            <a:ext cx="10820400" cy="420624"/>
+            <a:off x="685800" y="5596128"/>
+            <a:ext cx="10817352" cy="566928"/>
           </a:xfrm>
           <a:prstGeom prst="rect">
             <a:avLst/>
@@ -3167,34 +3167,73 @@
         </p:nvSpPr>
         <p:spPr>
           <a:xfrm>
-            <a:off x="832104" y="5833872"/>
-            <a:ext cx="10527792" cy="310896"/>
-          </a:xfrm>
-          <a:prstGeom prst="rect">
-            <a:avLst/>
-          </a:prstGeom>
-          <a:noFill/>
-          <a:ln/>
-        </p:spPr>
-        <p:txBody>
-          <a:bodyPr wrap="square" lIns="0" tIns="0" rIns="0" bIns="0" rtlCol="0" anchor="ctr"/>
-          <a:lstStyle/>
-          <a:p>
-            <a:pPr indent="0" marL="0">
-              <a:buNone/>
-            </a:pPr>
-            <a:r>
-              <a:rPr lang="en-US" sz="1500" dirty="0">
+            <a:off x="832104" y="5678424"/>
+            <a:ext cx="10524744" cy="182880"/>
+          </a:xfrm>
+          <a:prstGeom prst="rect">
+            <a:avLst/>
+          </a:prstGeom>
+          <a:noFill/>
+          <a:ln/>
+        </p:spPr>
+        <p:txBody>
+          <a:bodyPr wrap="square" lIns="0" tIns="0" rIns="0" bIns="0" rtlCol="0" anchor="ctr"/>
+          <a:lstStyle/>
+          <a:p>
+            <a:pPr indent="0" marL="0">
+              <a:buNone/>
+            </a:pPr>
+            <a:r>
+              <a:rPr lang="en-US" sz="900" dirty="0">
                 <a:solidFill>
                   <a:srgbClr val="2338FF"/>
                 </a:solidFill>
-                <a:latin typeface="DM Sans" pitchFamily="34" charset="0"/>
-                <a:ea typeface="DM Sans" pitchFamily="34" charset="-122"/>
-                <a:cs typeface="DM Sans" pitchFamily="34" charset="-120"/>
-              </a:rPr>
-              <a:t>Check: result shape + total balance + errors + pagination. Obtain fresh API cursors.</a:t>
-            </a:r>
-            <a:endParaRPr lang="en-US" sz="1500" dirty="0"/>
+                <a:latin typeface="JetBrains Mono" pitchFamily="34" charset="0"/>
+                <a:ea typeface="JetBrains Mono" pitchFamily="34" charset="-122"/>
+                <a:cs typeface="JetBrains Mono" pitchFamily="34" charset="-120"/>
+              </a:rPr>
+              <a:t>WHY IT MATTERS NOW</a:t>
+            </a:r>
+            <a:endParaRPr lang="en-US" sz="900" dirty="0"/>
+          </a:p>
+        </p:txBody>
+      </p:sp>
+      <p:sp>
+        <p:nvSpPr>
+          <p:cNvPr id="15" name="Text 12"/>
+          <p:cNvSpPr/>
+          <p:nvPr/>
+        </p:nvSpPr>
+        <p:spPr>
+          <a:xfrm>
+            <a:off x="832104" y="5861304"/>
+            <a:ext cx="10524744" cy="237744"/>
+          </a:xfrm>
+          <a:prstGeom prst="rect">
+            <a:avLst/>
+          </a:prstGeom>
+          <a:noFill/>
+          <a:ln/>
+        </p:spPr>
+        <p:txBody>
+          <a:bodyPr wrap="square" lIns="0" tIns="0" rIns="0" bIns="0" rtlCol="0" anchor="t"/>
+          <a:lstStyle/>
+          <a:p>
+            <a:pPr indent="0" marL="0">
+              <a:buNone/>
+            </a:pPr>
+            <a:r>
+              <a:rPr lang="en-US" sz="1250" dirty="0">
+                <a:solidFill>
+                  <a:srgbClr val="131725"/>
+                </a:solidFill>
+                <a:latin typeface="DM Sans" pitchFamily="34" charset="0"/>
+                <a:ea typeface="DM Sans" pitchFamily="34" charset="-122"/>
+                <a:cs typeface="DM Sans" pitchFamily="34" charset="-120"/>
+              </a:rPr>
+              <a:t>v1.82 removed JSON-RPC from full nodes, and legacy @mysten/dapp-kit is JSON-RPC only. Move to @mysten/dapp-kit-react + SuiGrpcClient.</a:t>
+            </a:r>
+            <a:endParaRPr lang="en-US" sz="1250" dirty="0"/>
           </a:p>
         </p:txBody>
       </p:sp>
@@ -3745,6 +3784,111 @@
         </p:nvSpPr>
         <p:spPr>
           <a:xfrm>
+            <a:off x="685800" y="4553712"/>
+            <a:ext cx="10817352" cy="548640"/>
+          </a:xfrm>
+          <a:prstGeom prst="rect">
+            <a:avLst/>
+          </a:prstGeom>
+          <a:solidFill>
+            <a:srgbClr val="1A2350"/>
+          </a:solidFill>
+          <a:ln w="12700">
+            <a:solidFill>
+              <a:srgbClr val="1A2350">
+                <a:alpha val="0"/>
+              </a:srgbClr>
+            </a:solidFill>
+            <a:prstDash val="solid"/>
+          </a:ln>
+        </p:spPr>
+      </p:sp>
+      <p:sp>
+        <p:nvSpPr>
+          <p:cNvPr id="17" name="Text 14"/>
+          <p:cNvSpPr/>
+          <p:nvPr/>
+        </p:nvSpPr>
+        <p:spPr>
+          <a:xfrm>
+            <a:off x="832104" y="4636008"/>
+            <a:ext cx="10524744" cy="182880"/>
+          </a:xfrm>
+          <a:prstGeom prst="rect">
+            <a:avLst/>
+          </a:prstGeom>
+          <a:noFill/>
+          <a:ln/>
+        </p:spPr>
+        <p:txBody>
+          <a:bodyPr wrap="square" lIns="0" tIns="0" rIns="0" bIns="0" rtlCol="0" anchor="ctr"/>
+          <a:lstStyle/>
+          <a:p>
+            <a:pPr indent="0" marL="0">
+              <a:buNone/>
+            </a:pPr>
+            <a:r>
+              <a:rPr lang="en-US" sz="900" dirty="0">
+                <a:solidFill>
+                  <a:srgbClr val="A3B2FF"/>
+                </a:solidFill>
+                <a:latin typeface="JetBrains Mono" pitchFamily="34" charset="0"/>
+                <a:ea typeface="JetBrains Mono" pitchFamily="34" charset="-122"/>
+                <a:cs typeface="JetBrains Mono" pitchFamily="34" charset="-120"/>
+              </a:rPr>
+              <a:t>BASECAMP TOOLS FOR THIS</a:t>
+            </a:r>
+            <a:endParaRPr lang="en-US" sz="900" dirty="0"/>
+          </a:p>
+        </p:txBody>
+      </p:sp>
+      <p:sp>
+        <p:nvSpPr>
+          <p:cNvPr id="18" name="Text 15"/>
+          <p:cNvSpPr/>
+          <p:nvPr/>
+        </p:nvSpPr>
+        <p:spPr>
+          <a:xfrm>
+            <a:off x="832104" y="4818888"/>
+            <a:ext cx="10524744" cy="219456"/>
+          </a:xfrm>
+          <a:prstGeom prst="rect">
+            <a:avLst/>
+          </a:prstGeom>
+          <a:noFill/>
+          <a:ln/>
+        </p:spPr>
+        <p:txBody>
+          <a:bodyPr wrap="square" lIns="0" tIns="0" rIns="0" bIns="0" rtlCol="0" anchor="t"/>
+          <a:lstStyle/>
+          <a:p>
+            <a:pPr indent="0" marL="0">
+              <a:buNone/>
+            </a:pPr>
+            <a:r>
+              <a:rPr lang="en-US" sz="1250" dirty="0">
+                <a:solidFill>
+                  <a:srgbClr val="FFFFFF"/>
+                </a:solidFill>
+                <a:latin typeface="DM Sans" pitchFamily="34" charset="0"/>
+                <a:ea typeface="DM Sans" pitchFamily="34" charset="-122"/>
+                <a:cs typeface="DM Sans" pitchFamily="34" charset="-120"/>
+              </a:rPr>
+              <a:t>Sui skills + Sui docs MCP (sui.mcp.kapa.ai) help your AI agent do the migration. Sui Evals: skills reportedly add ~35 points.</a:t>
+            </a:r>
+            <a:endParaRPr lang="en-US" sz="1250" dirty="0"/>
+          </a:p>
+        </p:txBody>
+      </p:sp>
+      <p:sp>
+        <p:nvSpPr>
+          <p:cNvPr id="19" name="Shape 16"/>
+          <p:cNvSpPr/>
+          <p:nvPr/>
+        </p:nvSpPr>
+        <p:spPr>
+          <a:xfrm>
             <a:off x="685800" y="5184648"/>
             <a:ext cx="10817352" cy="630936"/>
           </a:xfrm>
@@ -3766,7 +3910,7 @@
       </p:sp>
       <p:sp>
         <p:nvSpPr>
-          <p:cNvPr id="17" name="Text 14"/>
+          <p:cNvPr id="20" name="Text 17"/>
           <p:cNvSpPr/>
           <p:nvPr/>
         </p:nvSpPr>
@@ -3805,7 +3949,7 @@
       </p:sp>
       <p:sp>
         <p:nvSpPr>
-          <p:cNvPr id="18" name="Text 15">
+          <p:cNvPr id="21" name="Text 18">
             <a:hlinkClick r:id="rId1" tooltip=""/>
           </p:cNvPr>
           <p:cNvSpPr/>
@@ -3853,7 +3997,7 @@
       </p:sp>
       <p:sp>
         <p:nvSpPr>
-          <p:cNvPr id="19" name="Text 16">
+          <p:cNvPr id="22" name="Text 19">
             <a:hlinkClick r:id="rId2" tooltip=""/>
           </p:cNvPr>
           <p:cNvSpPr/>
@@ -7581,46 +7725,112 @@
       </p:sp>
       <p:sp>
         <p:nvSpPr>
-          <p:cNvPr id="7" name="Text 4"/>
-          <p:cNvSpPr/>
-          <p:nvPr/>
-        </p:nvSpPr>
-        <p:spPr>
-          <a:xfrm>
-            <a:off x="685800" y="1947672"/>
-            <a:ext cx="10789920" cy="411480"/>
-          </a:xfrm>
-          <a:prstGeom prst="rect">
-            <a:avLst/>
-          </a:prstGeom>
-          <a:noFill/>
-          <a:ln/>
-        </p:spPr>
-        <p:txBody>
-          <a:bodyPr wrap="square" lIns="0" tIns="0" rIns="0" bIns="0" rtlCol="0" anchor="ctr"/>
-          <a:lstStyle/>
-          <a:p>
-            <a:pPr indent="0" marL="0">
-              <a:buNone/>
-            </a:pPr>
-            <a:r>
-              <a:rPr lang="en-US" sz="2300" dirty="0">
-                <a:solidFill>
-                  <a:srgbClr val="65708B"/>
-                </a:solidFill>
-                <a:latin typeface="DM Sans" pitchFamily="34" charset="0"/>
-                <a:ea typeface="DM Sans" pitchFamily="34" charset="-122"/>
-                <a:cs typeface="DM Sans" pitchFamily="34" charset="-120"/>
-              </a:rPr>
-              <a:t>Start with what the screen or worker needs to do.</a:t>
-            </a:r>
-            <a:endParaRPr lang="en-US" sz="2300" dirty="0"/>
-          </a:p>
-        </p:txBody>
-      </p:sp>
-      <p:sp>
-        <p:nvSpPr>
-          <p:cNvPr id="8" name="Shape 5"/>
+          <p:cNvPr id="7" name="Shape 4"/>
+          <p:cNvSpPr/>
+          <p:nvPr/>
+        </p:nvSpPr>
+        <p:spPr>
+          <a:xfrm>
+            <a:off x="685800" y="1920240"/>
+            <a:ext cx="10817352" cy="566928"/>
+          </a:xfrm>
+          <a:prstGeom prst="rect">
+            <a:avLst/>
+          </a:prstGeom>
+          <a:solidFill>
+            <a:srgbClr val="E8ECFF"/>
+          </a:solidFill>
+          <a:ln w="12700">
+            <a:solidFill>
+              <a:srgbClr val="E8ECFF">
+                <a:alpha val="0"/>
+              </a:srgbClr>
+            </a:solidFill>
+            <a:prstDash val="solid"/>
+          </a:ln>
+        </p:spPr>
+      </p:sp>
+      <p:sp>
+        <p:nvSpPr>
+          <p:cNvPr id="8" name="Text 5"/>
+          <p:cNvSpPr/>
+          <p:nvPr/>
+        </p:nvSpPr>
+        <p:spPr>
+          <a:xfrm>
+            <a:off x="832104" y="2002536"/>
+            <a:ext cx="10524744" cy="182880"/>
+          </a:xfrm>
+          <a:prstGeom prst="rect">
+            <a:avLst/>
+          </a:prstGeom>
+          <a:noFill/>
+          <a:ln/>
+        </p:spPr>
+        <p:txBody>
+          <a:bodyPr wrap="square" lIns="0" tIns="0" rIns="0" bIns="0" rtlCol="0" anchor="ctr"/>
+          <a:lstStyle/>
+          <a:p>
+            <a:pPr indent="0" marL="0">
+              <a:buNone/>
+            </a:pPr>
+            <a:r>
+              <a:rPr lang="en-US" sz="900" dirty="0">
+                <a:solidFill>
+                  <a:srgbClr val="2338FF"/>
+                </a:solidFill>
+                <a:latin typeface="JetBrains Mono" pitchFamily="34" charset="0"/>
+                <a:ea typeface="JetBrains Mono" pitchFamily="34" charset="-122"/>
+                <a:cs typeface="JetBrains Mono" pitchFamily="34" charset="-120"/>
+              </a:rPr>
+              <a:t>NEW SINCE BASECAMP</a:t>
+            </a:r>
+            <a:endParaRPr lang="en-US" sz="900" dirty="0"/>
+          </a:p>
+        </p:txBody>
+      </p:sp>
+      <p:sp>
+        <p:nvSpPr>
+          <p:cNvPr id="9" name="Text 6"/>
+          <p:cNvSpPr/>
+          <p:nvPr/>
+        </p:nvSpPr>
+        <p:spPr>
+          <a:xfrm>
+            <a:off x="832104" y="2185416"/>
+            <a:ext cx="10524744" cy="237744"/>
+          </a:xfrm>
+          <a:prstGeom prst="rect">
+            <a:avLst/>
+          </a:prstGeom>
+          <a:noFill/>
+          <a:ln/>
+        </p:spPr>
+        <p:txBody>
+          <a:bodyPr wrap="square" lIns="0" tIns="0" rIns="0" bIns="0" rtlCol="0" anchor="t"/>
+          <a:lstStyle/>
+          <a:p>
+            <a:pPr indent="0" marL="0">
+              <a:buNone/>
+            </a:pPr>
+            <a:r>
+              <a:rPr lang="en-US" sz="1250" dirty="0">
+                <a:solidFill>
+                  <a:srgbClr val="131725"/>
+                </a:solidFill>
+                <a:latin typeface="DM Sans" pitchFamily="34" charset="0"/>
+                <a:ea typeface="DM Sans" pitchFamily="34" charset="-122"/>
+                <a:cs typeface="DM Sans" pitchFamily="34" charset="-120"/>
+              </a:rPr>
+              <a:t>v1.82 removes JSON-RPC from full nodes (testnet 13 Oct).  GraphQL v1.81 (mainnet 7 Oct): multiGetDynamicFields · Balance.coinMetadata.</a:t>
+            </a:r>
+            <a:endParaRPr lang="en-US" sz="1250" dirty="0"/>
+          </a:p>
+        </p:txBody>
+      </p:sp>
+      <p:sp>
+        <p:nvSpPr>
+          <p:cNvPr id="10" name="Shape 7"/>
           <p:cNvSpPr/>
           <p:nvPr/>
         </p:nvSpPr>
@@ -7647,7 +7857,7 @@
       </p:sp>
       <p:sp>
         <p:nvSpPr>
-          <p:cNvPr id="9" name="Text 6"/>
+          <p:cNvPr id="11" name="Text 8"/>
           <p:cNvSpPr/>
           <p:nvPr/>
         </p:nvSpPr>
@@ -7686,7 +7896,7 @@
       </p:sp>
       <p:sp>
         <p:nvSpPr>
-          <p:cNvPr id="10" name="Text 7"/>
+          <p:cNvPr id="12" name="Text 9"/>
           <p:cNvSpPr/>
           <p:nvPr/>
         </p:nvSpPr>
@@ -7725,7 +7935,7 @@
       </p:sp>
       <p:sp>
         <p:nvSpPr>
-          <p:cNvPr id="11" name="Text 8"/>
+          <p:cNvPr id="13" name="Text 10"/>
           <p:cNvSpPr/>
           <p:nvPr/>
         </p:nvSpPr>
@@ -7764,7 +7974,7 @@
       </p:sp>
       <p:sp>
         <p:nvSpPr>
-          <p:cNvPr id="12" name="Shape 9"/>
+          <p:cNvPr id="14" name="Shape 11"/>
           <p:cNvSpPr/>
           <p:nvPr/>
         </p:nvSpPr>
@@ -7791,7 +8001,7 @@
       </p:sp>
       <p:sp>
         <p:nvSpPr>
-          <p:cNvPr id="13" name="Text 10"/>
+          <p:cNvPr id="15" name="Text 12"/>
           <p:cNvSpPr/>
           <p:nvPr/>
         </p:nvSpPr>
@@ -7830,7 +8040,7 @@
       </p:sp>
       <p:sp>
         <p:nvSpPr>
-          <p:cNvPr id="14" name="Text 11"/>
+          <p:cNvPr id="16" name="Text 13"/>
           <p:cNvSpPr/>
           <p:nvPr/>
         </p:nvSpPr>
@@ -7869,7 +8079,7 @@
       </p:sp>
       <p:sp>
         <p:nvSpPr>
-          <p:cNvPr id="15" name="Text 12"/>
+          <p:cNvPr id="17" name="Text 14"/>
           <p:cNvSpPr/>
           <p:nvPr/>
         </p:nvSpPr>
@@ -7908,7 +8118,7 @@
       </p:sp>
       <p:sp>
         <p:nvSpPr>
-          <p:cNvPr id="16" name="Shape 13"/>
+          <p:cNvPr id="18" name="Shape 15"/>
           <p:cNvSpPr/>
           <p:nvPr/>
         </p:nvSpPr>
@@ -7935,7 +8145,7 @@
       </p:sp>
       <p:sp>
         <p:nvSpPr>
-          <p:cNvPr id="17" name="Text 14"/>
+          <p:cNvPr id="19" name="Text 16"/>
           <p:cNvSpPr/>
           <p:nvPr/>
         </p:nvSpPr>
@@ -7974,7 +8184,7 @@
       </p:sp>
       <p:sp>
         <p:nvSpPr>
-          <p:cNvPr id="18" name="Text 15"/>
+          <p:cNvPr id="20" name="Text 17"/>
           <p:cNvSpPr/>
           <p:nvPr/>
         </p:nvSpPr>
@@ -8013,7 +8223,7 @@
       </p:sp>
       <p:sp>
         <p:nvSpPr>
-          <p:cNvPr id="19" name="Text 16"/>
+          <p:cNvPr id="21" name="Text 18"/>
           <p:cNvSpPr/>
           <p:nvPr/>
         </p:nvSpPr>
@@ -8052,7 +8262,7 @@
       </p:sp>
       <p:sp>
         <p:nvSpPr>
-          <p:cNvPr id="20" name="Shape 17"/>
+          <p:cNvPr id="22" name="Shape 19"/>
           <p:cNvSpPr/>
           <p:nvPr/>
         </p:nvSpPr>
@@ -8079,7 +8289,7 @@
       </p:sp>
       <p:sp>
         <p:nvSpPr>
-          <p:cNvPr id="21" name="Text 18"/>
+          <p:cNvPr id="23" name="Text 20"/>
           <p:cNvSpPr/>
           <p:nvPr/>
         </p:nvSpPr>
@@ -8118,7 +8328,7 @@
       </p:sp>
       <p:sp>
         <p:nvSpPr>
-          <p:cNvPr id="22" name="Text 19"/>
+          <p:cNvPr id="24" name="Text 21"/>
           <p:cNvSpPr/>
           <p:nvPr/>
         </p:nvSpPr>
@@ -8157,7 +8367,7 @@
       </p:sp>
       <p:sp>
         <p:nvSpPr>
-          <p:cNvPr id="23" name="Text 20"/>
+          <p:cNvPr id="25" name="Text 22"/>
           <p:cNvSpPr/>
           <p:nvPr/>
         </p:nvSpPr>
@@ -8196,7 +8406,7 @@
       </p:sp>
       <p:sp>
         <p:nvSpPr>
-          <p:cNvPr id="24" name="Shape 21"/>
+          <p:cNvPr id="26" name="Shape 23"/>
           <p:cNvSpPr/>
           <p:nvPr/>
         </p:nvSpPr>
@@ -8223,7 +8433,7 @@
       </p:sp>
       <p:sp>
         <p:nvSpPr>
-          <p:cNvPr id="25" name="Text 22"/>
+          <p:cNvPr id="27" name="Text 24"/>
           <p:cNvSpPr/>
           <p:nvPr/>
         </p:nvSpPr>
@@ -8254,7 +8464,7 @@
                 <a:ea typeface="DM Sans" pitchFamily="34" charset="-122"/>
                 <a:cs typeface="DM Sans" pitchFamily="34" charset="-120"/>
               </a:rPr>
-              <a:t>July: Foundation mainnet shutoff   →   September: GraphQL subscriptions   →   Migrate each call</a:t>
+              <a:t>July: JSON-RPC off  →  21 Sep: subscriptions  →  7 Oct: v1.81 mainnet  →  13 Oct: JSON-RPC code removed (testnet)</a:t>
             </a:r>
             <a:endParaRPr lang="en-US" sz="1500" dirty="0"/>
           </a:p>
@@ -8760,7 +8970,7 @@
         </p:nvSpPr>
         <p:spPr>
           <a:xfrm>
-            <a:off x="8074152" y="2258568"/>
+            <a:off x="8074152" y="2103120"/>
             <a:ext cx="3410712" cy="219456"/>
           </a:xfrm>
           <a:prstGeom prst="rect">
@@ -8799,7 +9009,7 @@
         </p:nvSpPr>
         <p:spPr>
           <a:xfrm>
-            <a:off x="8074152" y="2551176"/>
+            <a:off x="8074152" y="2395728"/>
             <a:ext cx="3410712" cy="457200"/>
           </a:xfrm>
           <a:prstGeom prst="rect">
@@ -8838,7 +9048,7 @@
         </p:nvSpPr>
         <p:spPr>
           <a:xfrm>
-            <a:off x="8074152" y="3118104"/>
+            <a:off x="8074152" y="2834640"/>
             <a:ext cx="3410712" cy="219456"/>
           </a:xfrm>
           <a:prstGeom prst="rect">
@@ -8877,7 +9087,7 @@
         </p:nvSpPr>
         <p:spPr>
           <a:xfrm>
-            <a:off x="8074152" y="3410712"/>
+            <a:off x="8074152" y="3127248"/>
             <a:ext cx="3410712" cy="457200"/>
           </a:xfrm>
           <a:prstGeom prst="rect">
@@ -8916,7 +9126,7 @@
         </p:nvSpPr>
         <p:spPr>
           <a:xfrm>
-            <a:off x="8074152" y="3977640"/>
+            <a:off x="8074152" y="3566160"/>
             <a:ext cx="3410712" cy="219456"/>
           </a:xfrm>
           <a:prstGeom prst="rect">
@@ -8955,7 +9165,7 @@
         </p:nvSpPr>
         <p:spPr>
           <a:xfrm>
-            <a:off x="8074152" y="4270248"/>
+            <a:off x="8074152" y="3858768"/>
             <a:ext cx="3410712" cy="457200"/>
           </a:xfrm>
           <a:prstGeom prst="rect">
@@ -8994,7 +9204,7 @@
         </p:nvSpPr>
         <p:spPr>
           <a:xfrm>
-            <a:off x="8074152" y="4837176"/>
+            <a:off x="8074152" y="4297680"/>
             <a:ext cx="3410712" cy="219456"/>
           </a:xfrm>
           <a:prstGeom prst="rect">
@@ -9033,7 +9243,7 @@
         </p:nvSpPr>
         <p:spPr>
           <a:xfrm>
-            <a:off x="8074152" y="5129784"/>
+            <a:off x="8074152" y="4590288"/>
             <a:ext cx="3410712" cy="457200"/>
           </a:xfrm>
           <a:prstGeom prst="rect">
@@ -9072,7 +9282,7 @@
         </p:nvSpPr>
         <p:spPr>
           <a:xfrm>
-            <a:off x="8074152" y="5742432"/>
+            <a:off x="8074152" y="5029200"/>
             <a:ext cx="3410712" cy="521208"/>
           </a:xfrm>
           <a:prstGeom prst="rect">
@@ -9089,7 +9299,7 @@
               <a:buNone/>
             </a:pPr>
             <a:r>
-              <a:rPr lang="en-US" sz="1600" dirty="0">
+              <a:rPr lang="en-US" sz="1500" dirty="0">
                 <a:solidFill>
                   <a:srgbClr val="078256"/>
                 </a:solidFill>
@@ -9099,14 +9309,14 @@
               </a:rPr>
               <a:t>SUCCESS + positive net credit</a:t>
             </a:r>
-            <a:endParaRPr lang="en-US" sz="1600" dirty="0"/>
-          </a:p>
-          <a:p>
-            <a:pPr indent="0" marL="0">
-              <a:buNone/>
-            </a:pPr>
-            <a:r>
-              <a:rPr lang="en-US" sz="1600" dirty="0">
+            <a:endParaRPr lang="en-US" sz="1500" dirty="0"/>
+          </a:p>
+          <a:p>
+            <a:pPr indent="0" marL="0">
+              <a:buNone/>
+            </a:pPr>
+            <a:r>
+              <a:rPr lang="en-US" sz="1500" dirty="0">
                 <a:solidFill>
                   <a:srgbClr val="078256"/>
                 </a:solidFill>
@@ -9116,7 +9326,112 @@
               </a:rPr>
               <a:t>→ receipt → render + chime</a:t>
             </a:r>
-            <a:endParaRPr lang="en-US" sz="1600" dirty="0"/>
+            <a:endParaRPr lang="en-US" sz="1500" dirty="0"/>
+          </a:p>
+        </p:txBody>
+      </p:sp>
+      <p:sp>
+        <p:nvSpPr>
+          <p:cNvPr id="18" name="Shape 15"/>
+          <p:cNvSpPr/>
+          <p:nvPr/>
+        </p:nvSpPr>
+        <p:spPr>
+          <a:xfrm>
+            <a:off x="8074152" y="5577840"/>
+            <a:ext cx="3410712" cy="713232"/>
+          </a:xfrm>
+          <a:prstGeom prst="rect">
+            <a:avLst/>
+          </a:prstGeom>
+          <a:solidFill>
+            <a:srgbClr val="E8ECFF"/>
+          </a:solidFill>
+          <a:ln w="12700">
+            <a:solidFill>
+              <a:srgbClr val="E8ECFF">
+                <a:alpha val="0"/>
+              </a:srgbClr>
+            </a:solidFill>
+            <a:prstDash val="solid"/>
+          </a:ln>
+        </p:spPr>
+      </p:sp>
+      <p:sp>
+        <p:nvSpPr>
+          <p:cNvPr id="19" name="Text 16"/>
+          <p:cNvSpPr/>
+          <p:nvPr/>
+        </p:nvSpPr>
+        <p:spPr>
+          <a:xfrm>
+            <a:off x="8220456" y="5660136"/>
+            <a:ext cx="3118104" cy="182880"/>
+          </a:xfrm>
+          <a:prstGeom prst="rect">
+            <a:avLst/>
+          </a:prstGeom>
+          <a:noFill/>
+          <a:ln/>
+        </p:spPr>
+        <p:txBody>
+          <a:bodyPr wrap="square" lIns="0" tIns="0" rIns="0" bIns="0" rtlCol="0" anchor="ctr"/>
+          <a:lstStyle/>
+          <a:p>
+            <a:pPr indent="0" marL="0">
+              <a:buNone/>
+            </a:pPr>
+            <a:r>
+              <a:rPr lang="en-US" sz="900" dirty="0">
+                <a:solidFill>
+                  <a:srgbClr val="2338FF"/>
+                </a:solidFill>
+                <a:latin typeface="JetBrains Mono" pitchFamily="34" charset="0"/>
+                <a:ea typeface="JetBrains Mono" pitchFamily="34" charset="-122"/>
+                <a:cs typeface="JetBrains Mono" pitchFamily="34" charset="-120"/>
+              </a:rPr>
+              <a:t>NEW / v1.81 MAINNET 7 OCT</a:t>
+            </a:r>
+            <a:endParaRPr lang="en-US" sz="900" dirty="0"/>
+          </a:p>
+        </p:txBody>
+      </p:sp>
+      <p:sp>
+        <p:nvSpPr>
+          <p:cNvPr id="20" name="Text 17"/>
+          <p:cNvSpPr/>
+          <p:nvPr/>
+        </p:nvSpPr>
+        <p:spPr>
+          <a:xfrm>
+            <a:off x="8220456" y="5843016"/>
+            <a:ext cx="3118104" cy="384048"/>
+          </a:xfrm>
+          <a:prstGeom prst="rect">
+            <a:avLst/>
+          </a:prstGeom>
+          <a:noFill/>
+          <a:ln/>
+        </p:spPr>
+        <p:txBody>
+          <a:bodyPr wrap="square" lIns="0" tIns="0" rIns="0" bIns="0" rtlCol="0" anchor="t"/>
+          <a:lstStyle/>
+          <a:p>
+            <a:pPr indent="0" marL="0">
+              <a:buNone/>
+            </a:pPr>
+            <a:r>
+              <a:rPr lang="en-US" sz="1250" dirty="0">
+                <a:solidFill>
+                  <a:srgbClr val="131725"/>
+                </a:solidFill>
+                <a:latin typeface="DM Sans" pitchFamily="34" charset="0"/>
+                <a:ea typeface="DM Sans" pitchFamily="34" charset="-122"/>
+                <a:cs typeface="DM Sans" pitchFamily="34" charset="-120"/>
+              </a:rPr>
+              <a:t>Balance.coinMetadata: a balance can bring its coin decimals (USDC = 6).</a:t>
+            </a:r>
+            <a:endParaRPr lang="en-US" sz="1250" dirty="0"/>
           </a:p>
         </p:txBody>
       </p:sp>
@@ -9613,7 +9928,7 @@
         </p:nvSpPr>
         <p:spPr>
           <a:xfrm>
-            <a:off x="7699248" y="3712464"/>
+            <a:off x="7699248" y="3566160"/>
             <a:ext cx="3474720" cy="228600"/>
           </a:xfrm>
           <a:prstGeom prst="rect">
@@ -9652,8 +9967,8 @@
         </p:nvSpPr>
         <p:spPr>
           <a:xfrm>
-            <a:off x="7699248" y="4096512"/>
-            <a:ext cx="3749040" cy="822960"/>
+            <a:off x="7699248" y="3886200"/>
+            <a:ext cx="3749040" cy="777240"/>
           </a:xfrm>
           <a:prstGeom prst="rect">
             <a:avLst/>
@@ -9708,8 +10023,8 @@
         </p:nvSpPr>
         <p:spPr>
           <a:xfrm>
-            <a:off x="685800" y="5623560"/>
-            <a:ext cx="10820400" cy="420624"/>
+            <a:off x="7699248" y="4754880"/>
+            <a:ext cx="3794760" cy="731520"/>
           </a:xfrm>
           <a:prstGeom prst="rect">
             <a:avLst/>
@@ -9735,6 +10050,111 @@
         </p:nvSpPr>
         <p:spPr>
           <a:xfrm>
+            <a:off x="7845552" y="4837176"/>
+            <a:ext cx="3502152" cy="182880"/>
+          </a:xfrm>
+          <a:prstGeom prst="rect">
+            <a:avLst/>
+          </a:prstGeom>
+          <a:noFill/>
+          <a:ln/>
+        </p:spPr>
+        <p:txBody>
+          <a:bodyPr wrap="square" lIns="0" tIns="0" rIns="0" bIns="0" rtlCol="0" anchor="ctr"/>
+          <a:lstStyle/>
+          <a:p>
+            <a:pPr indent="0" marL="0">
+              <a:buNone/>
+            </a:pPr>
+            <a:r>
+              <a:rPr lang="en-US" sz="900" dirty="0">
+                <a:solidFill>
+                  <a:srgbClr val="2338FF"/>
+                </a:solidFill>
+                <a:latin typeface="JetBrains Mono" pitchFamily="34" charset="0"/>
+                <a:ea typeface="JetBrains Mono" pitchFamily="34" charset="-122"/>
+                <a:cs typeface="JetBrains Mono" pitchFamily="34" charset="-120"/>
+              </a:rPr>
+              <a:t>DOCS LAG THE CHAIN</a:t>
+            </a:r>
+            <a:endParaRPr lang="en-US" sz="900" dirty="0"/>
+          </a:p>
+        </p:txBody>
+      </p:sp>
+      <p:sp>
+        <p:nvSpPr>
+          <p:cNvPr id="15" name="Text 12"/>
+          <p:cNvSpPr/>
+          <p:nvPr/>
+        </p:nvSpPr>
+        <p:spPr>
+          <a:xfrm>
+            <a:off x="7845552" y="5020056"/>
+            <a:ext cx="3502152" cy="402336"/>
+          </a:xfrm>
+          <a:prstGeom prst="rect">
+            <a:avLst/>
+          </a:prstGeom>
+          <a:noFill/>
+          <a:ln/>
+        </p:spPr>
+        <p:txBody>
+          <a:bodyPr wrap="square" lIns="0" tIns="0" rIns="0" bIns="0" rtlCol="0" anchor="t"/>
+          <a:lstStyle/>
+          <a:p>
+            <a:pPr indent="0" marL="0">
+              <a:buNone/>
+            </a:pPr>
+            <a:r>
+              <a:rPr lang="en-US" sz="1250" dirty="0">
+                <a:solidFill>
+                  <a:srgbClr val="131725"/>
+                </a:solidFill>
+                <a:latin typeface="DM Sans" pitchFamily="34" charset="0"/>
+                <a:ea typeface="DM Sans" pitchFamily="34" charset="-122"/>
+                <a:cs typeface="DM Sans" pitchFamily="34" charset="-120"/>
+              </a:rPr>
+              <a:t>Docs still say GraphQL has no subscriptions. They are live on mainnet: trust deliveries.</a:t>
+            </a:r>
+            <a:endParaRPr lang="en-US" sz="1250" dirty="0"/>
+          </a:p>
+        </p:txBody>
+      </p:sp>
+      <p:sp>
+        <p:nvSpPr>
+          <p:cNvPr id="16" name="Shape 13"/>
+          <p:cNvSpPr/>
+          <p:nvPr/>
+        </p:nvSpPr>
+        <p:spPr>
+          <a:xfrm>
+            <a:off x="685800" y="5623560"/>
+            <a:ext cx="10820400" cy="420624"/>
+          </a:xfrm>
+          <a:prstGeom prst="rect">
+            <a:avLst/>
+          </a:prstGeom>
+          <a:solidFill>
+            <a:srgbClr val="E8ECFF"/>
+          </a:solidFill>
+          <a:ln w="12700">
+            <a:solidFill>
+              <a:srgbClr val="E8ECFF">
+                <a:alpha val="0"/>
+              </a:srgbClr>
+            </a:solidFill>
+            <a:prstDash val="solid"/>
+          </a:ln>
+        </p:spPr>
+      </p:sp>
+      <p:sp>
+        <p:nvSpPr>
+          <p:cNvPr id="17" name="Text 14"/>
+          <p:cNvSpPr/>
+          <p:nvPr/>
+        </p:nvSpPr>
+        <p:spPr>
+          <a:xfrm>
             <a:off x="832104" y="5678424"/>
             <a:ext cx="10527792" cy="310896"/>
           </a:xfrm>
@@ -9768,7 +10188,7 @@
       </p:sp>
       <p:sp>
         <p:nvSpPr>
-          <p:cNvPr id="15" name="Text 12"/>
+          <p:cNvPr id="18" name="Text 15"/>
           <p:cNvSpPr/>
           <p:nvPr/>
         </p:nvSpPr>
@@ -10721,24 +11141,24 @@
         </p:nvSpPr>
         <p:spPr>
           <a:xfrm>
-            <a:off x="685800" y="5120640"/>
-            <a:ext cx="10789920" cy="384048"/>
-          </a:xfrm>
-          <a:prstGeom prst="rect">
-            <a:avLst/>
-          </a:prstGeom>
-          <a:noFill/>
-          <a:ln/>
-        </p:spPr>
-        <p:txBody>
-          <a:bodyPr wrap="square" lIns="0" tIns="0" rIns="0" bIns="0" rtlCol="0" anchor="ctr"/>
-          <a:lstStyle/>
-          <a:p>
-            <a:pPr indent="0" marL="0">
-              <a:buNone/>
-            </a:pPr>
-            <a:r>
-              <a:rPr lang="en-US" sz="2000" dirty="0">
+            <a:off x="685800" y="4846320"/>
+            <a:ext cx="10789920" cy="329184"/>
+          </a:xfrm>
+          <a:prstGeom prst="rect">
+            <a:avLst/>
+          </a:prstGeom>
+          <a:noFill/>
+          <a:ln/>
+        </p:spPr>
+        <p:txBody>
+          <a:bodyPr wrap="square" lIns="0" tIns="0" rIns="0" bIns="0" rtlCol="0" anchor="ctr"/>
+          <a:lstStyle/>
+          <a:p>
+            <a:pPr indent="0" marL="0">
+              <a:buNone/>
+            </a:pPr>
+            <a:r>
+              <a:rPr lang="en-US" sz="1800" dirty="0">
                 <a:solidFill>
                   <a:srgbClr val="131725"/>
                 </a:solidFill>
@@ -10748,7 +11168,7 @@
               </a:rPr>
               <a:t>No cursor yet? Save the opening checkpoint, then use filter.afterCheckpoint.</a:t>
             </a:r>
-            <a:endParaRPr lang="en-US" sz="2000" dirty="0"/>
+            <a:endParaRPr lang="en-US" sz="1800" dirty="0"/>
           </a:p>
         </p:txBody>
       </p:sp>
@@ -10760,8 +11180,8 @@
         </p:nvSpPr>
         <p:spPr>
           <a:xfrm>
-            <a:off x="685800" y="5733288"/>
-            <a:ext cx="10820400" cy="420624"/>
+            <a:off x="685800" y="5266944"/>
+            <a:ext cx="10817352" cy="548640"/>
           </a:xfrm>
           <a:prstGeom prst="rect">
             <a:avLst/>
@@ -10787,7 +11207,112 @@
         </p:nvSpPr>
         <p:spPr>
           <a:xfrm>
-            <a:off x="832104" y="5788152"/>
+            <a:off x="832104" y="5349240"/>
+            <a:ext cx="10524744" cy="182880"/>
+          </a:xfrm>
+          <a:prstGeom prst="rect">
+            <a:avLst/>
+          </a:prstGeom>
+          <a:noFill/>
+          <a:ln/>
+        </p:spPr>
+        <p:txBody>
+          <a:bodyPr wrap="square" lIns="0" tIns="0" rIns="0" bIns="0" rtlCol="0" anchor="ctr"/>
+          <a:lstStyle/>
+          <a:p>
+            <a:pPr indent="0" marL="0">
+              <a:buNone/>
+            </a:pPr>
+            <a:r>
+              <a:rPr lang="en-US" sz="900" dirty="0">
+                <a:solidFill>
+                  <a:srgbClr val="2338FF"/>
+                </a:solidFill>
+                <a:latin typeface="JetBrains Mono" pitchFamily="34" charset="0"/>
+                <a:ea typeface="JetBrains Mono" pitchFamily="34" charset="-122"/>
+                <a:cs typeface="JetBrains Mono" pitchFamily="34" charset="-120"/>
+              </a:rPr>
+              <a:t>NEW / v1.82.1 TESTNET 13 OCT</a:t>
+            </a:r>
+            <a:endParaRPr lang="en-US" sz="900" dirty="0"/>
+          </a:p>
+        </p:txBody>
+      </p:sp>
+      <p:sp>
+        <p:nvSpPr>
+          <p:cNvPr id="30" name="Text 27"/>
+          <p:cNvSpPr/>
+          <p:nvPr/>
+        </p:nvSpPr>
+        <p:spPr>
+          <a:xfrm>
+            <a:off x="832104" y="5532120"/>
+            <a:ext cx="10524744" cy="219456"/>
+          </a:xfrm>
+          <a:prstGeom prst="rect">
+            <a:avLst/>
+          </a:prstGeom>
+          <a:noFill/>
+          <a:ln/>
+        </p:spPr>
+        <p:txBody>
+          <a:bodyPr wrap="square" lIns="0" tIns="0" rIns="0" bIns="0" rtlCol="0" anchor="t"/>
+          <a:lstStyle/>
+          <a:p>
+            <a:pPr indent="0" marL="0">
+              <a:buNone/>
+            </a:pPr>
+            <a:r>
+              <a:rPr lang="en-US" sz="1250" dirty="0">
+                <a:solidFill>
+                  <a:srgbClr val="131725"/>
+                </a:solidFill>
+                <a:latin typeface="DM Sans" pitchFamily="34" charset="0"/>
+                <a:ea typeface="DM Sans" pitchFamily="34" charset="-122"/>
+                <a:cs typeface="DM Sans" pitchFamily="34" charset="-120"/>
+              </a:rPr>
+              <a:t>Resuming with after / afterCheckpoint no longer replays checkpoints at or below the resume point (PR 28162).</a:t>
+            </a:r>
+            <a:endParaRPr lang="en-US" sz="1250" dirty="0"/>
+          </a:p>
+        </p:txBody>
+      </p:sp>
+      <p:sp>
+        <p:nvSpPr>
+          <p:cNvPr id="31" name="Shape 28"/>
+          <p:cNvSpPr/>
+          <p:nvPr/>
+        </p:nvSpPr>
+        <p:spPr>
+          <a:xfrm>
+            <a:off x="685800" y="5897880"/>
+            <a:ext cx="10820400" cy="420624"/>
+          </a:xfrm>
+          <a:prstGeom prst="rect">
+            <a:avLst/>
+          </a:prstGeom>
+          <a:solidFill>
+            <a:srgbClr val="E8ECFF"/>
+          </a:solidFill>
+          <a:ln w="12700">
+            <a:solidFill>
+              <a:srgbClr val="E8ECFF">
+                <a:alpha val="0"/>
+              </a:srgbClr>
+            </a:solidFill>
+            <a:prstDash val="solid"/>
+          </a:ln>
+        </p:spPr>
+      </p:sp>
+      <p:sp>
+        <p:nvSpPr>
+          <p:cNvPr id="32" name="Text 29"/>
+          <p:cNvSpPr/>
+          <p:nvPr/>
+        </p:nvSpPr>
+        <p:spPr>
+          <a:xfrm>
+            <a:off x="832104" y="5952744"/>
             <a:ext cx="10527792" cy="310896"/>
           </a:xfrm>
           <a:prstGeom prst="rect">
@@ -11879,7 +12404,7 @@
         <p:spPr>
           <a:xfrm>
             <a:off x="685800" y="5806440"/>
-            <a:ext cx="10789920" cy="219456"/>
+            <a:ext cx="5394960" cy="219456"/>
           </a:xfrm>
           <a:prstGeom prst="rect">
             <a:avLst/>
@@ -11959,49 +12484,106 @@
       </p:sp>
       <p:sp>
         <p:nvSpPr>
-          <p:cNvPr id="33" name="Text 30">
-            <a:hlinkClick r:id="rId2" tooltip=""/>
-          </p:cNvPr>
-          <p:cNvSpPr/>
-          <p:nvPr/>
-        </p:nvSpPr>
-        <p:spPr>
-          <a:xfrm>
-            <a:off x="5577840" y="6190488"/>
-            <a:ext cx="5916168" cy="228600"/>
-          </a:xfrm>
-          <a:prstGeom prst="rect">
-            <a:avLst/>
-          </a:prstGeom>
-          <a:noFill/>
-          <a:ln/>
-        </p:spPr>
-        <p:txBody>
-          <a:bodyPr wrap="square" lIns="0" tIns="0" rIns="0" bIns="0" rtlCol="0" anchor="ctr"/>
-          <a:lstStyle/>
-          <a:p>
-            <a:pPr indent="0" marL="0">
-              <a:buNone/>
-            </a:pPr>
-            <a:r>
-              <a:rPr lang="en-US" sz="1300" u="sng" dirty="0">
+          <p:cNvPr id="33" name="Shape 30"/>
+          <p:cNvSpPr/>
+          <p:nvPr/>
+        </p:nvSpPr>
+        <p:spPr>
+          <a:xfrm>
+            <a:off x="6263640" y="5742432"/>
+            <a:ext cx="5239512" cy="512064"/>
+          </a:xfrm>
+          <a:prstGeom prst="rect">
+            <a:avLst/>
+          </a:prstGeom>
+          <a:solidFill>
+            <a:srgbClr val="E8ECFF"/>
+          </a:solidFill>
+          <a:ln w="12700">
+            <a:solidFill>
+              <a:srgbClr val="E8ECFF">
+                <a:alpha val="0"/>
+              </a:srgbClr>
+            </a:solidFill>
+            <a:prstDash val="solid"/>
+          </a:ln>
+        </p:spPr>
+      </p:sp>
+      <p:sp>
+        <p:nvSpPr>
+          <p:cNvPr id="34" name="Text 31"/>
+          <p:cNvSpPr/>
+          <p:nvPr/>
+        </p:nvSpPr>
+        <p:spPr>
+          <a:xfrm>
+            <a:off x="6409944" y="5824728"/>
+            <a:ext cx="4946904" cy="182880"/>
+          </a:xfrm>
+          <a:prstGeom prst="rect">
+            <a:avLst/>
+          </a:prstGeom>
+          <a:noFill/>
+          <a:ln/>
+        </p:spPr>
+        <p:txBody>
+          <a:bodyPr wrap="square" lIns="0" tIns="0" rIns="0" bIns="0" rtlCol="0" anchor="ctr"/>
+          <a:lstStyle/>
+          <a:p>
+            <a:pPr indent="0" marL="0">
+              <a:buNone/>
+            </a:pPr>
+            <a:r>
+              <a:rPr lang="en-US" sz="900" dirty="0">
                 <a:solidFill>
                   <a:srgbClr val="2338FF"/>
                 </a:solidFill>
-                <a:latin typeface="DM Sans" pitchFamily="34" charset="0"/>
-                <a:ea typeface="DM Sans" pitchFamily="34" charset="-122"/>
-                <a:cs typeface="DM Sans" pitchFamily="34" charset="-120"/>
-                <a:hlinkClick r:id="rId2" invalidUrl="" action="" tgtFrame="" tooltip="" history="1" highlightClick="0" endSnd="0">
-                  <a:extLst>
-                    <a:ext uri="{A12FA001-AC4F-418D-AE19-62706E023703}">
-                      <ahyp:hlinkClr xmlns:ahyp="http://schemas.microsoft.com/office/drawing/2018/hyperlinkcolor" val="tx"/>
-                    </a:ext>
-                  </a:extLst>
-                </a:hlinkClick>
-              </a:rPr>
-              <a:t>Repo: github.com/Nuel-osas/day3-till</a:t>
-            </a:r>
-            <a:endParaRPr lang="en-US" sz="1300" dirty="0"/>
+                <a:latin typeface="JetBrains Mono" pitchFamily="34" charset="0"/>
+                <a:ea typeface="JetBrains Mono" pitchFamily="34" charset="-122"/>
+                <a:cs typeface="JetBrains Mono" pitchFamily="34" charset="-120"/>
+              </a:rPr>
+              <a:t>NEW / v1.82 CLI</a:t>
+            </a:r>
+            <a:endParaRPr lang="en-US" sz="900" dirty="0"/>
+          </a:p>
+        </p:txBody>
+      </p:sp>
+      <p:sp>
+        <p:nvSpPr>
+          <p:cNvPr id="35" name="Text 32"/>
+          <p:cNvSpPr/>
+          <p:nvPr/>
+        </p:nvSpPr>
+        <p:spPr>
+          <a:xfrm>
+            <a:off x="6409944" y="6007608"/>
+            <a:ext cx="4946904" cy="182880"/>
+          </a:xfrm>
+          <a:prstGeom prst="rect">
+            <a:avLst/>
+          </a:prstGeom>
+          <a:noFill/>
+          <a:ln/>
+        </p:spPr>
+        <p:txBody>
+          <a:bodyPr wrap="square" lIns="0" tIns="0" rIns="0" bIns="0" rtlCol="0" anchor="t"/>
+          <a:lstStyle/>
+          <a:p>
+            <a:pPr indent="0" marL="0">
+              <a:buNone/>
+            </a:pPr>
+            <a:r>
+              <a:rPr lang="en-US" sz="1250" dirty="0">
+                <a:solidFill>
+                  <a:srgbClr val="131725"/>
+                </a:solidFill>
+                <a:latin typeface="DM Sans" pitchFamily="34" charset="0"/>
+                <a:ea typeface="DM Sans" pitchFamily="34" charset="-122"/>
+                <a:cs typeface="DM Sans" pitchFamily="34" charset="-120"/>
+              </a:rPr>
+              <a:t>sui client faucet now works on testnet (proof-of-work).</a:t>
+            </a:r>
+            <a:endParaRPr lang="en-US" sz="1250" dirty="0"/>
           </a:p>
         </p:txBody>
       </p:sp>
